--- a/docs/sample.pptx
+++ b/docs/sample.pptx
@@ -3462,7 +3462,7 @@
               </a:defRPr>
             </a:pPr>
             <a:r>
-              <a:t>[PROJECT TITLE]     |     [TEAM NAME / TEAM ID]</a:t>
+              <a:t>VINDEX: AI GRIEVANCE REDRESSAL PRIORITIZATION SYSTEM     |     [TEAM NAME / TEAM ID]</a:t>
             </a:r>
           </a:p>
         </p:txBody>
@@ -5153,7 +5153,7 @@
               </a:defRPr>
             </a:pPr>
             <a:r>
-              <a:t>•  Project Title: [Enter title]</a:t>
+              <a:t>•  Project Title: Vindex, an AI Grievance Redressal Prioritization System (multilingual, local-AI complaint triage)</a:t>
             </a:r>
           </a:p>
           <a:p>
@@ -5169,7 +5169,7 @@
               </a:defRPr>
             </a:pPr>
             <a:r>
-              <a:t>•  Team Name / Team ID: [Enter details]</a:t>
+              <a:t>•  Team Name / Team ID: [Enter team name and ID]</a:t>
             </a:r>
           </a:p>
           <a:p>
@@ -5185,7 +5185,7 @@
               </a:defRPr>
             </a:pPr>
             <a:r>
-              <a:t>•  Problem Statement ID and Title: [Enter details]</a:t>
+              <a:t>•  Problem Statement ID and Title: [PS ID], AI Grievance Redressal Prioritization System</a:t>
             </a:r>
           </a:p>
           <a:p>
@@ -5201,21 +5201,7 @@
               </a:defRPr>
             </a:pPr>
             <a:r>
-              <a:t>•  Team </a:t>
-            </a:r>
-            <a:r>
-              <a:rPr lang="en-US"/>
-              <a:t>Leader</a:t>
-            </a:r>
-            <a:r>
-              <a:t>: [Name — Register Number; </a:t>
-            </a:r>
-            <a:r>
-              <a:rPr lang="en-US"/>
-              <a:t>Dept,Year,Section</a:t>
-            </a:r>
-            <a:r>
-              <a:t>]</a:t>
+              <a:t>•  Team Leader: [Name, Register Number; Dept, Year, Section]</a:t>
             </a:r>
           </a:p>
           <a:p>
@@ -5231,7 +5217,7 @@
               </a:defRPr>
             </a:pPr>
             <a:r>
-              <a:t>•  Project Repository / Demo Link: [URL or Not Available]</a:t>
+              <a:t>•  Project Repository / Demo Link: github.com/Balavigneshcse/AI_Grievance_Redressal_Prioritization_System; demo runs locally on the team laptop (not hosted)</a:t>
             </a:r>
           </a:p>
         </p:txBody>

--- a/docs/sample.pptx
+++ b/docs/sample.pptx
@@ -7245,7 +7245,7 @@
                           </a:solidFill>
                           <a:latin typeface="Aptos"/>
                         </a:rPr>
-                        <a:t>Critical, low-confidence, disagreeing and duplicate cases reviewed; reason mandatory; never auto-closed</a:t>
+                        <a:t>District admin reviews Critical, low-confidence, disagreeing or duplicate cases; reason mandatory; no auto-close</a:t>
                       </a:r>
                     </a:p>
                   </a:txBody>
@@ -7333,7 +7333,7 @@
                           </a:solidFill>
                           <a:latin typeface="Aptos"/>
                         </a:rPr>
-                        <a:t>Tracking + email</a:t>
+                        <a:t>Tracking, reply + email</a:t>
                       </a:r>
                     </a:p>
                   </a:txBody>
@@ -7376,7 +7376,7 @@
                           </a:solidFill>
                           <a:latin typeface="Aptos"/>
                         </a:rPr>
-                        <a:t>Tracking ID at once; acknowledgement, routed, under-review and resolved emails in the citizen's language</a:t>
+                        <a:t>Tracking ID at once; status emails to citizen, department and district; citizen replies with photo or video</a:t>
                       </a:r>
                     </a:p>
                   </a:txBody>
@@ -7618,14 +7618,14 @@
                 </a:solidFill>
                 <a:latin typeface="Aptos"/>
               </a:rPr>
-              <a:t> - any language, phone-first, tracking by ID</a:t>
+              <a:t> - any language, phone-first, track and reply</a:t>
             </a:r>
           </a:p>
         </p:txBody>
       </p:sp>
       <p:pic>
         <p:nvPicPr>
-          <p:cNvPr id="18" name="Picture 17" descr="image36.png"/>
+          <p:cNvPr id="18" name="Picture 17" descr="image12.png"/>
           <p:cNvPicPr>
             <a:picLocks noChangeAspect="1"/>
           </p:cNvPicPr>
@@ -7639,8 +7639,8 @@
         </p:blipFill>
         <p:spPr>
           <a:xfrm>
-            <a:off x="8183879" y="2706624"/>
-            <a:ext cx="182880" cy="182880"/>
+            <a:off x="8195309" y="2706624"/>
+            <a:ext cx="160020" cy="182880"/>
           </a:xfrm>
           <a:prstGeom prst="rect">
             <a:avLst/>
@@ -7677,7 +7677,7 @@
                 </a:solidFill>
                 <a:latin typeface="Aptos"/>
               </a:rPr>
-              <a:t>Grievance officers</a:t>
+              <a:t>Department admins</a:t>
             </a:r>
             <a:r>
               <a:rPr sz="850" b="0" i="0">
@@ -7686,14 +7686,14 @@
                 </a:solidFill>
                 <a:latin typeface="Aptos"/>
               </a:rPr>
-              <a:t> - prioritised queue, one-click reassign</a:t>
+              <a:t> - only their department's cases, with due times</a:t>
             </a:r>
           </a:p>
         </p:txBody>
       </p:sp>
       <p:pic>
         <p:nvPicPr>
-          <p:cNvPr id="20" name="Picture 19" descr="image12.png"/>
+          <p:cNvPr id="20" name="Picture 19" descr="image36.png"/>
           <p:cNvPicPr>
             <a:picLocks noChangeAspect="1"/>
           </p:cNvPicPr>
@@ -7707,8 +7707,8 @@
         </p:blipFill>
         <p:spPr>
           <a:xfrm>
-            <a:off x="8195309" y="2953512"/>
-            <a:ext cx="160020" cy="182880"/>
+            <a:off x="8183879" y="2953512"/>
+            <a:ext cx="182880" cy="182880"/>
           </a:xfrm>
           <a:prstGeom prst="rect">
             <a:avLst/>
@@ -7745,7 +7745,7 @@
                 </a:solidFill>
                 <a:latin typeface="Aptos"/>
               </a:rPr>
-              <a:t>Department resolvers</a:t>
+              <a:t>District admins</a:t>
             </a:r>
             <a:r>
               <a:rPr sz="850" b="0" i="0">
@@ -7754,7 +7754,7 @@
                 </a:solidFill>
                 <a:latin typeface="Aptos"/>
               </a:rPr>
-              <a:t> - only relevant, complete cases</a:t>
+              <a:t> - review queue, add department admins</a:t>
             </a:r>
           </a:p>
         </p:txBody>
@@ -7813,7 +7813,7 @@
                 </a:solidFill>
                 <a:latin typeface="Aptos"/>
               </a:rPr>
-              <a:t>Administrators</a:t>
+              <a:t>Super admin</a:t>
             </a:r>
             <a:r>
               <a:rPr sz="850" b="0" i="0">
@@ -7822,7 +7822,7 @@
                 </a:solidFill>
                 <a:latin typeface="Aptos"/>
               </a:rPr>
-              <a:t> - rules and dashboard, no redeploy</a:t>
+              <a:t> - all districts, rules, metrics, staff</a:t>
             </a:r>
           </a:p>
         </p:txBody>
@@ -9530,7 +9530,7 @@
         <p:spPr>
           <a:xfrm>
             <a:off x="9162288" y="5916168"/>
-            <a:ext cx="822960" cy="256032"/>
+            <a:ext cx="768096" cy="256032"/>
           </a:xfrm>
           <a:prstGeom prst="roundRect">
             <a:avLst>
@@ -9562,7 +9562,7 @@
         <p:spPr>
           <a:xfrm>
             <a:off x="9162288" y="5916168"/>
-            <a:ext cx="822960" cy="256032"/>
+            <a:ext cx="768096" cy="256032"/>
           </a:xfrm>
           <a:prstGeom prst="rect">
             <a:avLst/>
@@ -9583,7 +9583,7 @@
                 </a:solidFill>
                 <a:latin typeface="Aptos"/>
               </a:rPr>
-              <a:t>Audit trail</a:t>
+              <a:t>Reply loop</a:t>
             </a:r>
           </a:p>
         </p:txBody>
@@ -9596,8 +9596,8 @@
         </p:nvSpPr>
         <p:spPr>
           <a:xfrm>
-            <a:off x="10058400" y="5916168"/>
-            <a:ext cx="932688" cy="256032"/>
+            <a:off x="10003536" y="5916168"/>
+            <a:ext cx="987552" cy="256032"/>
           </a:xfrm>
           <a:prstGeom prst="roundRect">
             <a:avLst>
@@ -9628,8 +9628,8 @@
         </p:nvSpPr>
         <p:spPr>
           <a:xfrm>
-            <a:off x="10058400" y="5916168"/>
-            <a:ext cx="932688" cy="256032"/>
+            <a:off x="10003536" y="5916168"/>
+            <a:ext cx="987552" cy="256032"/>
           </a:xfrm>
           <a:prstGeom prst="rect">
             <a:avLst/>
@@ -9650,7 +9650,7 @@
                 </a:solidFill>
                 <a:latin typeface="Aptos"/>
               </a:rPr>
-              <a:t>No auto-close</a:t>
+              <a:t>SLA escalation</a:t>
             </a:r>
           </a:p>
         </p:txBody>
@@ -9664,7 +9664,7 @@
         <p:spPr>
           <a:xfrm>
             <a:off x="11064240" y="5916168"/>
-            <a:ext cx="768096" cy="256032"/>
+            <a:ext cx="932688" cy="256032"/>
           </a:xfrm>
           <a:prstGeom prst="roundRect">
             <a:avLst>
@@ -9696,7 +9696,7 @@
         <p:spPr>
           <a:xfrm>
             <a:off x="11064240" y="5916168"/>
-            <a:ext cx="768096" cy="256032"/>
+            <a:ext cx="932688" cy="256032"/>
           </a:xfrm>
           <a:prstGeom prst="rect">
             <a:avLst/>
@@ -9717,7 +9717,7 @@
                 </a:solidFill>
                 <a:latin typeface="Aptos"/>
               </a:rPr>
-              <a:t>PII masked</a:t>
+              <a:t>No auto-close</a:t>
             </a:r>
           </a:p>
         </p:txBody>
@@ -11367,7 +11367,7 @@
                 </a:solidFill>
                 <a:latin typeface="Aptos"/>
               </a:rPr>
-              <a:t>PII masked before the model; the phone number is visible to the officer, never to other citizens</a:t>
+              <a:t>PII masked before the model; name and Aadhaar last 4 stored for the office only</a:t>
             </a:r>
           </a:p>
           <a:p>
@@ -11412,7 +11412,7 @@
                 </a:solidFill>
                 <a:latin typeface="Aptos"/>
               </a:rPr>
-              <a:t>Accountability: </a:t>
+              <a:t>Scope: </a:t>
             </a:r>
             <a:r>
               <a:rPr sz="850" b="0" i="0">
@@ -11421,7 +11421,7 @@
                 </a:solidFill>
                 <a:latin typeface="Aptos"/>
               </a:rPr>
-              <a:t>a reason is mandatory on every officer action; nothing is ever auto-closed</a:t>
+              <a:t>super admin → district admins → department admins; each sees only its district and department</a:t>
             </a:r>
           </a:p>
         </p:txBody>
@@ -11653,7 +11653,7 @@
                 </a:solidFill>
                 <a:latin typeface="Aptos"/>
               </a:rPr>
-              <a:t>a failed send is logged and retried by hand; the complaint is already stored</a:t>
+              <a:t>an outbox thread with one persistent connection delivers every mail, three attempts, reason logged</a:t>
             </a:r>
           </a:p>
           <a:p>
@@ -11671,7 +11671,7 @@
                 </a:solidFill>
                 <a:latin typeface="Aptos"/>
               </a:rPr>
-              <a:t>Learning: </a:t>
+              <a:t>Overdue: </a:t>
             </a:r>
             <a:r>
               <a:rPr sz="850" b="0" i="0">
@@ -11680,7 +11680,7 @@
                 </a:solidFill>
                 <a:latin typeface="Aptos"/>
               </a:rPr>
-              <a:t>officer corrections become ground truth; accuracy per language and formality on the dashboard</a:t>
+              <a:t>due times from the office SLA; a breach is escalated to the district admin by email, once</a:t>
             </a:r>
           </a:p>
           <a:p>
@@ -11707,7 +11707,7 @@
                 </a:solidFill>
                 <a:latin typeface="Aptos"/>
               </a:rPr>
-              <a:t>tracking ID in under 1 s; analysis 15-20 s in the background on a 4 GB laptop GPU</a:t>
+              <a:t>tracking ID in under 1 s; analysis 12-20 s in the background on a 4 GB laptop GPU</a:t>
             </a:r>
           </a:p>
         </p:txBody>
@@ -12500,7 +12500,7 @@
                 </a:solidFill>
                 <a:latin typeface="Aptos"/>
               </a:rPr>
-              <a:t>files and tracks in any language</a:t>
+              <a:t>files, tracks and replies in any language</a:t>
             </a:r>
           </a:p>
         </p:txBody>
@@ -12593,7 +12593,7 @@
                 </a:solidFill>
                 <a:latin typeface="Aptos"/>
               </a:rPr>
-              <a:t>Grievance officer</a:t>
+              <a:t>Department admin</a:t>
             </a:r>
           </a:p>
           <a:p>
@@ -12605,7 +12605,7 @@
                 </a:solidFill>
                 <a:latin typeface="Aptos"/>
               </a:rPr>
-              <a:t>review queue, reassign, merge</a:t>
+              <a:t>only its department and district</a:t>
             </a:r>
           </a:p>
         </p:txBody>
@@ -12698,7 +12698,7 @@
                 </a:solidFill>
                 <a:latin typeface="Aptos"/>
               </a:rPr>
-              <a:t>Admin and auditor</a:t>
+              <a:t>District + super admin</a:t>
             </a:r>
           </a:p>
           <a:p>
@@ -12710,7 +12710,7 @@
                 </a:solidFill>
                 <a:latin typeface="Aptos"/>
               </a:rPr>
-              <a:t>rules, dashboard, audit trail</a:t>
+              <a:t>review queue, staff, rules, metrics</a:t>
             </a:r>
           </a:p>
         </p:txBody>
@@ -12848,7 +12848,7 @@
                 </a:solidFill>
                 <a:latin typeface="Aptos"/>
               </a:rPr>
-              <a:t>New complaint: camera, GPS</a:t>
+              <a:t>New complaint: photo, video, GPS</a:t>
             </a:r>
           </a:p>
         </p:txBody>
@@ -12917,7 +12917,7 @@
                 </a:solidFill>
                 <a:latin typeface="Aptos"/>
               </a:rPr>
-              <a:t>Track: evidence + timeline</a:t>
+              <a:t>Track: evidence, reply, timeline</a:t>
             </a:r>
           </a:p>
         </p:txBody>
@@ -12986,7 +12986,7 @@
                 </a:solidFill>
                 <a:latin typeface="Aptos"/>
               </a:rPr>
-              <a:t>Officer queue + workspace</a:t>
+              <a:t>Queue: review / active / resolved</a:t>
             </a:r>
           </a:p>
         </p:txBody>
@@ -13055,7 +13055,7 @@
                 </a:solidFill>
                 <a:latin typeface="Aptos"/>
               </a:rPr>
-              <a:t>Rules editor + dashboard</a:t>
+              <a:t>Admin: staff, rules, metrics</a:t>
             </a:r>
           </a:p>
         </p:txBody>
@@ -13136,7 +13136,7 @@
                 </a:solidFill>
                 <a:latin typeface="Aptos"/>
               </a:rPr>
-              <a:t>JWT sessions | role checks | OTP + argon2</a:t>
+              <a:t>JWT sessions | role scoping | OTP + argon2</a:t>
             </a:r>
           </a:p>
         </p:txBody>
@@ -13205,7 +13205,7 @@
                 </a:solidFill>
                 <a:latin typeface="Aptos"/>
               </a:rPr>
-              <a:t>Intake service</a:t>
+              <a:t>Intake and reply</a:t>
             </a:r>
           </a:p>
           <a:p>
@@ -13367,7 +13367,7 @@
                 </a:solidFill>
                 <a:latin typeface="Aptos"/>
               </a:rPr>
-              <a:t>Rules and decision</a:t>
+              <a:t>Rules, decision, SLA watch</a:t>
             </a:r>
           </a:p>
           <a:p>
@@ -13379,7 +13379,7 @@
                 </a:solidFill>
                 <a:latin typeface="Aptos"/>
               </a:rPr>
-              <a:t>YAML rules | second opinion | office + SLA</a:t>
+              <a:t>YAML rules | second opinion | office + due time | overdue</a:t>
             </a:r>
           </a:p>
         </p:txBody>
@@ -13448,7 +13448,7 @@
                 </a:solidFill>
                 <a:latin typeface="Aptos"/>
               </a:rPr>
-              <a:t>Review and notifier</a:t>
+              <a:t>Review and outbox</a:t>
             </a:r>
           </a:p>
           <a:p>
@@ -13460,7 +13460,7 @@
                 </a:solidFill>
                 <a:latin typeface="Aptos"/>
               </a:rPr>
-              <a:t>decisions, overrides | status emails</a:t>
+              <a:t>decisions, overrides | citizen, department, district emails</a:t>
             </a:r>
           </a:p>
         </p:txBody>
@@ -14486,7 +14486,7 @@
                 </a:solidFill>
                 <a:latin typeface="Aptos"/>
               </a:rPr>
-              <a:t>Email failure: </a:t>
+              <a:t>Email: </a:t>
             </a:r>
             <a:r>
               <a:rPr sz="850" b="0" i="0">
@@ -14495,7 +14495,7 @@
                 </a:solidFill>
                 <a:latin typeface="Aptos"/>
               </a:rPr>
-              <a:t>logged, never blocks a request</a:t>
+              <a:t>outbox thread, retries, never blocks a request; overdue cases escalate to the district admin</a:t>
             </a:r>
           </a:p>
           <a:p>
@@ -16005,7 +16005,7 @@
                 </a:solidFill>
                 <a:latin typeface="Aptos"/>
               </a:rPr>
-              <a:t>docker compose up </a:t>
+              <a:t>scripts/start.ps1 </a:t>
             </a:r>
             <a:r>
               <a:rPr sz="950" b="0" i="0">
@@ -16014,7 +16014,7 @@
                 </a:solidFill>
                 <a:latin typeface="Aptos"/>
               </a:rPr>
-              <a:t>+ two commands; 15-20 s per complaint; model and SMTP swapped by env var</a:t>
+              <a:t>starts Postgres, Mailpit, API and app; -Https serves phones on the LAN; 12-20 s per complaint</a:t>
             </a:r>
           </a:p>
           <a:p>
@@ -19960,7 +19960,7 @@
                 </a:solidFill>
                 <a:latin typeface="Aptos"/>
               </a:rPr>
-              <a:t>760 Tamil Nadu offices with SLA due times; duplicates linked by pgvector</a:t>
+              <a:t>760 Tamil Nadu offices with SLA due times; overdue cases escalate to the district admin</a:t>
             </a:r>
           </a:p>
         </p:txBody>
@@ -20582,7 +20582,7 @@
                 </a:solidFill>
                 <a:latin typeface="Aptos"/>
               </a:rPr>
-              <a:t>Department offices</a:t>
+              <a:t>Department admins</a:t>
             </a:r>
           </a:p>
           <a:p>
@@ -20594,7 +20594,7 @@
                 </a:solidFill>
                 <a:latin typeface="Aptos"/>
               </a:rPr>
-              <a:t>only relevant, de-duplicated, complete complaints, each with a due time</a:t>
+              <a:t>only their own, de-duplicated complaints with due times; citizen replies reach them directly</a:t>
             </a:r>
           </a:p>
         </p:txBody>
@@ -20719,7 +20719,7 @@
                 </a:solidFill>
                 <a:latin typeface="Aptos"/>
               </a:rPr>
-              <a:t>Admins and auditors</a:t>
+              <a:t>District and super admins</a:t>
             </a:r>
           </a:p>
           <a:p>
@@ -20731,7 +20731,7 @@
                 </a:solidFill>
                 <a:latin typeface="Aptos"/>
               </a:rPr>
-              <a:t>rules without redeploy; per-language accuracy; full audit trail, nothing auto-closed</a:t>
+              <a:t>review queue, staff accounts, rules, metrics; full audit trail, nothing auto-closed</a:t>
             </a:r>
           </a:p>
         </p:txBody>
@@ -21648,7 +21648,7 @@
                 </a:solidFill>
                 <a:latin typeface="Aptos"/>
               </a:rPr>
-              <a:t>61 API checks, 5 languages, photo with GPS EXIF, duplicates, officer flow, 27 emails</a:t>
+              <a:t>90+ API checks: 5 languages, photos, duplicates, roles, replies, overdue escalation, mails</a:t>
             </a:r>
           </a:p>
           <a:p>

--- a/docs/sample.pptx
+++ b/docs/sample.pptx
@@ -15755,7 +15755,7 @@
                 </a:solidFill>
                 <a:latin typeface="Aptos"/>
               </a:rPr>
-              <a:t>trained on 460 locally generated complaints; YAML rules; script-based language hints</a:t>
+              <a:t>trained on 940 locally generated complaints (85% department held-out); YAML rules; language hints</a:t>
             </a:r>
           </a:p>
           <a:p>
@@ -16300,7 +16300,7 @@
                 </a:solidFill>
                 <a:latin typeface="Aptos"/>
               </a:rPr>
-              <a:t>Mailpit for demo email, Gmail SMTP optional, 61-check end-to-end test suite</a:t>
+              <a:t>Mailpit for demo email, Gmail SMTP optional, 91-check end-to-end test suite</a:t>
             </a:r>
           </a:p>
         </p:txBody>

--- a/docs/sample.pptx
+++ b/docs/sample.pptx
@@ -9530,7 +9530,7 @@
         <p:spPr>
           <a:xfrm>
             <a:off x="9162288" y="5916168"/>
-            <a:ext cx="768096" cy="256032"/>
+            <a:ext cx="987552" cy="256032"/>
           </a:xfrm>
           <a:prstGeom prst="roundRect">
             <a:avLst>
@@ -9562,7 +9562,7 @@
         <p:spPr>
           <a:xfrm>
             <a:off x="9162288" y="5916168"/>
-            <a:ext cx="768096" cy="256032"/>
+            <a:ext cx="987552" cy="256032"/>
           </a:xfrm>
           <a:prstGeom prst="rect">
             <a:avLst/>
@@ -9583,7 +9583,7 @@
                 </a:solidFill>
                 <a:latin typeface="Aptos"/>
               </a:rPr>
-              <a:t>Reply loop</a:t>
+              <a:t>Reply + rating</a:t>
             </a:r>
           </a:p>
         </p:txBody>
@@ -9596,8 +9596,8 @@
         </p:nvSpPr>
         <p:spPr>
           <a:xfrm>
-            <a:off x="10003536" y="5916168"/>
-            <a:ext cx="987552" cy="256032"/>
+            <a:off x="10222992" y="5916168"/>
+            <a:ext cx="557784" cy="256032"/>
           </a:xfrm>
           <a:prstGeom prst="roundRect">
             <a:avLst>
@@ -9628,8 +9628,8 @@
         </p:nvSpPr>
         <p:spPr>
           <a:xfrm>
-            <a:off x="10003536" y="5916168"/>
-            <a:ext cx="987552" cy="256032"/>
+            <a:off x="10222992" y="5916168"/>
+            <a:ext cx="557784" cy="256032"/>
           </a:xfrm>
           <a:prstGeom prst="rect">
             <a:avLst/>
@@ -9650,7 +9650,7 @@
                 </a:solidFill>
                 <a:latin typeface="Aptos"/>
               </a:rPr>
-              <a:t>SLA escalation</a:t>
+              <a:t>Me-too</a:t>
             </a:r>
           </a:p>
         </p:txBody>
@@ -9663,8 +9663,8 @@
         </p:nvSpPr>
         <p:spPr>
           <a:xfrm>
-            <a:off x="11064240" y="5916168"/>
-            <a:ext cx="932688" cy="256032"/>
+            <a:off x="10853928" y="5916168"/>
+            <a:ext cx="768096" cy="256032"/>
           </a:xfrm>
           <a:prstGeom prst="roundRect">
             <a:avLst>
@@ -9695,8 +9695,8 @@
         </p:nvSpPr>
         <p:spPr>
           <a:xfrm>
-            <a:off x="11064240" y="5916168"/>
-            <a:ext cx="932688" cy="256032"/>
+            <a:off x="10853928" y="5916168"/>
+            <a:ext cx="768096" cy="256032"/>
           </a:xfrm>
           <a:prstGeom prst="rect">
             <a:avLst/>
@@ -9717,7 +9717,7 @@
                 </a:solidFill>
                 <a:latin typeface="Aptos"/>
               </a:rPr>
-              <a:t>No auto-close</a:t>
+              <a:t>SLA alerts</a:t>
             </a:r>
           </a:p>
         </p:txBody>
@@ -16300,7 +16300,7 @@
                 </a:solidFill>
                 <a:latin typeface="Aptos"/>
               </a:rPr>
-              <a:t>Mailpit for demo email, Gmail SMTP optional, 91-check end-to-end test suite</a:t>
+              <a:t>Mailpit for demo email, Gmail SMTP optional, 114-check end-to-end test suite</a:t>
             </a:r>
           </a:p>
         </p:txBody>
@@ -20320,7 +20320,7 @@
                 </a:solidFill>
                 <a:latin typeface="Aptos"/>
               </a:rPr>
-              <a:t>file in Tamil, Hindi, English or a mix; tracking ID instantly; email at every step</a:t>
+              <a:t>file in any language; track, reply, rate or reopen; support a neighbour's complaint instead of duplicating it</a:t>
             </a:r>
           </a:p>
         </p:txBody>
@@ -20731,7 +20731,7 @@
                 </a:solidFill>
                 <a:latin typeface="Aptos"/>
               </a:rPr>
-              <a:t>review queue, staff accounts, rules, metrics; full audit trail, nothing auto-closed</a:t>
+              <a:t>review queue, district map, staff accounts, rules, metrics; full audit trail, nothing auto-closed</a:t>
             </a:r>
           </a:p>
         </p:txBody>
@@ -21648,7 +21648,7 @@
                 </a:solidFill>
                 <a:latin typeface="Aptos"/>
               </a:rPr>
-              <a:t>90+ API checks: 5 languages, photos, duplicates, roles, replies, overdue escalation, mails</a:t>
+              <a:t>114 API checks: 5 languages, photos, duplicates, roles, replies, ratings, me-too, escalation, mails</a:t>
             </a:r>
           </a:p>
           <a:p>

--- a/docs/sample.pptx
+++ b/docs/sample.pptx
@@ -15755,7 +15755,7 @@
                 </a:solidFill>
                 <a:latin typeface="Aptos"/>
               </a:rPr>
-              <a:t>trained on 940 locally generated complaints (85% department held-out); YAML rules; language hints</a:t>
+              <a:t>trained on 1,169 locally generated complaints (88% department held-out); YAML rules; language hints</a:t>
             </a:r>
           </a:p>
           <a:p>

--- a/docs/sample.pptx
+++ b/docs/sample.pptx
@@ -4,17 +4,20 @@
   <p:sldMasterIdLst>
     <p:sldMasterId id="2147483648" r:id="rId1"/>
   </p:sldMasterIdLst>
+  <p:notesMasterIdLst>
+    <p:notesMasterId r:id="rId10"/>
+  </p:notesMasterIdLst>
   <p:sldIdLst>
-    <p:sldId id="257" r:id="rId3"/>
-    <p:sldId id="258" r:id="rId4"/>
-    <p:sldId id="259" r:id="rId5"/>
-    <p:sldId id="260" r:id="rId6"/>
-    <p:sldId id="261" r:id="rId7"/>
-    <p:sldId id="264" r:id="rId8"/>
-    <p:sldId id="266" r:id="rId9"/>
-    <p:sldId id="268" r:id="rId10"/>
+    <p:sldId id="257" r:id="rId2"/>
+    <p:sldId id="258" r:id="rId3"/>
+    <p:sldId id="259" r:id="rId4"/>
+    <p:sldId id="260" r:id="rId5"/>
+    <p:sldId id="261" r:id="rId6"/>
+    <p:sldId id="264" r:id="rId7"/>
+    <p:sldId id="266" r:id="rId8"/>
+    <p:sldId id="268" r:id="rId9"/>
   </p:sldIdLst>
-  <p:sldSz cx="12191365" cy="6858000" type="screen4x3"/>
+  <p:sldSz cx="12192000" cy="6858000"/>
   <p:notesSz cx="6858000" cy="9144000"/>
   <p:defaultTextStyle>
     <a:defPPr>
@@ -130,6 +133,440 @@
 </p:presentation>
 </file>
 
+<file path=ppt/notesMasters/notesMaster1.xml><?xml version="1.0" encoding="utf-8"?>
+<p:notesMaster xmlns:a="http://schemas.openxmlformats.org/drawingml/2006/main" xmlns:r="http://schemas.openxmlformats.org/officeDocument/2006/relationships" xmlns:p="http://schemas.openxmlformats.org/presentationml/2006/main">
+  <p:cSld>
+    <p:bg>
+      <p:bgRef idx="1001">
+        <a:schemeClr val="bg1"/>
+      </p:bgRef>
+    </p:bg>
+    <p:spTree>
+      <p:nvGrpSpPr>
+        <p:cNvPr id="1" name=""/>
+        <p:cNvGrpSpPr/>
+        <p:nvPr/>
+      </p:nvGrpSpPr>
+      <p:grpSpPr>
+        <a:xfrm>
+          <a:off x="0" y="0"/>
+          <a:ext cx="0" cy="0"/>
+          <a:chOff x="0" y="0"/>
+          <a:chExt cx="0" cy="0"/>
+        </a:xfrm>
+      </p:grpSpPr>
+      <p:sp>
+        <p:nvSpPr>
+          <p:cNvPr id="2" name="Header Placeholder 1"/>
+          <p:cNvSpPr>
+            <a:spLocks noGrp="1"/>
+          </p:cNvSpPr>
+          <p:nvPr>
+            <p:ph type="hdr" sz="quarter"/>
+          </p:nvPr>
+        </p:nvSpPr>
+        <p:spPr>
+          <a:xfrm>
+            <a:off x="0" y="0"/>
+            <a:ext cx="2971800" cy="458788"/>
+          </a:xfrm>
+          <a:prstGeom prst="rect">
+            <a:avLst/>
+          </a:prstGeom>
+        </p:spPr>
+        <p:txBody>
+          <a:bodyPr vert="horz" lIns="91440" tIns="45720" rIns="91440" bIns="45720" rtlCol="0"/>
+          <a:lstStyle>
+            <a:lvl1pPr algn="l">
+              <a:defRPr sz="1200"/>
+            </a:lvl1pPr>
+          </a:lstStyle>
+          <a:p>
+            <a:endParaRPr lang="en-IN"/>
+          </a:p>
+        </p:txBody>
+      </p:sp>
+      <p:sp>
+        <p:nvSpPr>
+          <p:cNvPr id="3" name="Date Placeholder 2"/>
+          <p:cNvSpPr>
+            <a:spLocks noGrp="1"/>
+          </p:cNvSpPr>
+          <p:nvPr>
+            <p:ph type="dt" idx="1"/>
+          </p:nvPr>
+        </p:nvSpPr>
+        <p:spPr>
+          <a:xfrm>
+            <a:off x="3884613" y="0"/>
+            <a:ext cx="2971800" cy="458788"/>
+          </a:xfrm>
+          <a:prstGeom prst="rect">
+            <a:avLst/>
+          </a:prstGeom>
+        </p:spPr>
+        <p:txBody>
+          <a:bodyPr vert="horz" lIns="91440" tIns="45720" rIns="91440" bIns="45720" rtlCol="0"/>
+          <a:lstStyle>
+            <a:lvl1pPr algn="r">
+              <a:defRPr sz="1200"/>
+            </a:lvl1pPr>
+          </a:lstStyle>
+          <a:p>
+            <a:fld id="{69FB07C6-A93D-46DA-9D7F-739B768EBA76}" type="datetimeFigureOut">
+              <a:rPr lang="en-IN" smtClean="0"/>
+              <a:t>16-10-2026</a:t>
+            </a:fld>
+            <a:endParaRPr lang="en-IN"/>
+          </a:p>
+        </p:txBody>
+      </p:sp>
+      <p:sp>
+        <p:nvSpPr>
+          <p:cNvPr id="4" name="Slide Image Placeholder 3"/>
+          <p:cNvSpPr>
+            <a:spLocks noGrp="1" noRot="1" noChangeAspect="1"/>
+          </p:cNvSpPr>
+          <p:nvPr>
+            <p:ph type="sldImg" idx="2"/>
+          </p:nvPr>
+        </p:nvSpPr>
+        <p:spPr>
+          <a:xfrm>
+            <a:off x="685800" y="1143000"/>
+            <a:ext cx="5486400" cy="3086100"/>
+          </a:xfrm>
+          <a:prstGeom prst="rect">
+            <a:avLst/>
+          </a:prstGeom>
+          <a:noFill/>
+          <a:ln w="12700">
+            <a:solidFill>
+              <a:prstClr val="black"/>
+            </a:solidFill>
+          </a:ln>
+        </p:spPr>
+        <p:txBody>
+          <a:bodyPr vert="horz" lIns="91440" tIns="45720" rIns="91440" bIns="45720" rtlCol="0" anchor="ctr"/>
+          <a:lstStyle/>
+          <a:p>
+            <a:endParaRPr lang="en-IN"/>
+          </a:p>
+        </p:txBody>
+      </p:sp>
+      <p:sp>
+        <p:nvSpPr>
+          <p:cNvPr id="5" name="Notes Placeholder 4"/>
+          <p:cNvSpPr>
+            <a:spLocks noGrp="1"/>
+          </p:cNvSpPr>
+          <p:nvPr>
+            <p:ph type="body" sz="quarter" idx="3"/>
+          </p:nvPr>
+        </p:nvSpPr>
+        <p:spPr>
+          <a:xfrm>
+            <a:off x="685800" y="4400550"/>
+            <a:ext cx="5486400" cy="3600450"/>
+          </a:xfrm>
+          <a:prstGeom prst="rect">
+            <a:avLst/>
+          </a:prstGeom>
+        </p:spPr>
+        <p:txBody>
+          <a:bodyPr vert="horz" lIns="91440" tIns="45720" rIns="91440" bIns="45720" rtlCol="0"/>
+          <a:lstStyle/>
+          <a:p>
+            <a:pPr lvl="0"/>
+            <a:r>
+              <a:rPr lang="en-US"/>
+              <a:t>Click to edit Master text styles</a:t>
+            </a:r>
+          </a:p>
+          <a:p>
+            <a:pPr lvl="1"/>
+            <a:r>
+              <a:rPr lang="en-US"/>
+              <a:t>Second level</a:t>
+            </a:r>
+          </a:p>
+          <a:p>
+            <a:pPr lvl="2"/>
+            <a:r>
+              <a:rPr lang="en-US"/>
+              <a:t>Third level</a:t>
+            </a:r>
+          </a:p>
+          <a:p>
+            <a:pPr lvl="3"/>
+            <a:r>
+              <a:rPr lang="en-US"/>
+              <a:t>Fourth level</a:t>
+            </a:r>
+          </a:p>
+          <a:p>
+            <a:pPr lvl="4"/>
+            <a:r>
+              <a:rPr lang="en-US"/>
+              <a:t>Fifth level</a:t>
+            </a:r>
+            <a:endParaRPr lang="en-IN"/>
+          </a:p>
+        </p:txBody>
+      </p:sp>
+      <p:sp>
+        <p:nvSpPr>
+          <p:cNvPr id="6" name="Footer Placeholder 5"/>
+          <p:cNvSpPr>
+            <a:spLocks noGrp="1"/>
+          </p:cNvSpPr>
+          <p:nvPr>
+            <p:ph type="ftr" sz="quarter" idx="4"/>
+          </p:nvPr>
+        </p:nvSpPr>
+        <p:spPr>
+          <a:xfrm>
+            <a:off x="0" y="8685213"/>
+            <a:ext cx="2971800" cy="458787"/>
+          </a:xfrm>
+          <a:prstGeom prst="rect">
+            <a:avLst/>
+          </a:prstGeom>
+        </p:spPr>
+        <p:txBody>
+          <a:bodyPr vert="horz" lIns="91440" tIns="45720" rIns="91440" bIns="45720" rtlCol="0" anchor="b"/>
+          <a:lstStyle>
+            <a:lvl1pPr algn="l">
+              <a:defRPr sz="1200"/>
+            </a:lvl1pPr>
+          </a:lstStyle>
+          <a:p>
+            <a:endParaRPr lang="en-IN"/>
+          </a:p>
+        </p:txBody>
+      </p:sp>
+      <p:sp>
+        <p:nvSpPr>
+          <p:cNvPr id="7" name="Slide Number Placeholder 6"/>
+          <p:cNvSpPr>
+            <a:spLocks noGrp="1"/>
+          </p:cNvSpPr>
+          <p:nvPr>
+            <p:ph type="sldNum" sz="quarter" idx="5"/>
+          </p:nvPr>
+        </p:nvSpPr>
+        <p:spPr>
+          <a:xfrm>
+            <a:off x="3884613" y="8685213"/>
+            <a:ext cx="2971800" cy="458787"/>
+          </a:xfrm>
+          <a:prstGeom prst="rect">
+            <a:avLst/>
+          </a:prstGeom>
+        </p:spPr>
+        <p:txBody>
+          <a:bodyPr vert="horz" lIns="91440" tIns="45720" rIns="91440" bIns="45720" rtlCol="0" anchor="b"/>
+          <a:lstStyle>
+            <a:lvl1pPr algn="r">
+              <a:defRPr sz="1200"/>
+            </a:lvl1pPr>
+          </a:lstStyle>
+          <a:p>
+            <a:fld id="{CCBF9B27-228D-4693-AA8A-E174CBCD4F00}" type="slidenum">
+              <a:rPr lang="en-IN" smtClean="0"/>
+              <a:t>‹#›</a:t>
+            </a:fld>
+            <a:endParaRPr lang="en-IN"/>
+          </a:p>
+        </p:txBody>
+      </p:sp>
+    </p:spTree>
+    <p:extLst>
+      <p:ext uri="{BB962C8B-B14F-4D97-AF65-F5344CB8AC3E}">
+        <p14:creationId xmlns:p14="http://schemas.microsoft.com/office/powerpoint/2010/main" val="1557159173"/>
+      </p:ext>
+    </p:extLst>
+  </p:cSld>
+  <p:clrMap bg1="lt1" tx1="dk1" bg2="lt2" tx2="dk2" accent1="accent1" accent2="accent2" accent3="accent3" accent4="accent4" accent5="accent5" accent6="accent6" hlink="hlink" folHlink="folHlink"/>
+  <p:notesStyle>
+    <a:lvl1pPr marL="0" algn="l" defTabSz="914400" rtl="0" eaLnBrk="1" latinLnBrk="0" hangingPunct="1">
+      <a:defRPr sz="1200" kern="1200">
+        <a:solidFill>
+          <a:schemeClr val="tx1"/>
+        </a:solidFill>
+        <a:latin typeface="+mn-lt"/>
+        <a:ea typeface="+mn-ea"/>
+        <a:cs typeface="+mn-cs"/>
+      </a:defRPr>
+    </a:lvl1pPr>
+    <a:lvl2pPr marL="457200" algn="l" defTabSz="914400" rtl="0" eaLnBrk="1" latinLnBrk="0" hangingPunct="1">
+      <a:defRPr sz="1200" kern="1200">
+        <a:solidFill>
+          <a:schemeClr val="tx1"/>
+        </a:solidFill>
+        <a:latin typeface="+mn-lt"/>
+        <a:ea typeface="+mn-ea"/>
+        <a:cs typeface="+mn-cs"/>
+      </a:defRPr>
+    </a:lvl2pPr>
+    <a:lvl3pPr marL="914400" algn="l" defTabSz="914400" rtl="0" eaLnBrk="1" latinLnBrk="0" hangingPunct="1">
+      <a:defRPr sz="1200" kern="1200">
+        <a:solidFill>
+          <a:schemeClr val="tx1"/>
+        </a:solidFill>
+        <a:latin typeface="+mn-lt"/>
+        <a:ea typeface="+mn-ea"/>
+        <a:cs typeface="+mn-cs"/>
+      </a:defRPr>
+    </a:lvl3pPr>
+    <a:lvl4pPr marL="1371600" algn="l" defTabSz="914400" rtl="0" eaLnBrk="1" latinLnBrk="0" hangingPunct="1">
+      <a:defRPr sz="1200" kern="1200">
+        <a:solidFill>
+          <a:schemeClr val="tx1"/>
+        </a:solidFill>
+        <a:latin typeface="+mn-lt"/>
+        <a:ea typeface="+mn-ea"/>
+        <a:cs typeface="+mn-cs"/>
+      </a:defRPr>
+    </a:lvl4pPr>
+    <a:lvl5pPr marL="1828800" algn="l" defTabSz="914400" rtl="0" eaLnBrk="1" latinLnBrk="0" hangingPunct="1">
+      <a:defRPr sz="1200" kern="1200">
+        <a:solidFill>
+          <a:schemeClr val="tx1"/>
+        </a:solidFill>
+        <a:latin typeface="+mn-lt"/>
+        <a:ea typeface="+mn-ea"/>
+        <a:cs typeface="+mn-cs"/>
+      </a:defRPr>
+    </a:lvl5pPr>
+    <a:lvl6pPr marL="2286000" algn="l" defTabSz="914400" rtl="0" eaLnBrk="1" latinLnBrk="0" hangingPunct="1">
+      <a:defRPr sz="1200" kern="1200">
+        <a:solidFill>
+          <a:schemeClr val="tx1"/>
+        </a:solidFill>
+        <a:latin typeface="+mn-lt"/>
+        <a:ea typeface="+mn-ea"/>
+        <a:cs typeface="+mn-cs"/>
+      </a:defRPr>
+    </a:lvl6pPr>
+    <a:lvl7pPr marL="2743200" algn="l" defTabSz="914400" rtl="0" eaLnBrk="1" latinLnBrk="0" hangingPunct="1">
+      <a:defRPr sz="1200" kern="1200">
+        <a:solidFill>
+          <a:schemeClr val="tx1"/>
+        </a:solidFill>
+        <a:latin typeface="+mn-lt"/>
+        <a:ea typeface="+mn-ea"/>
+        <a:cs typeface="+mn-cs"/>
+      </a:defRPr>
+    </a:lvl7pPr>
+    <a:lvl8pPr marL="3200400" algn="l" defTabSz="914400" rtl="0" eaLnBrk="1" latinLnBrk="0" hangingPunct="1">
+      <a:defRPr sz="1200" kern="1200">
+        <a:solidFill>
+          <a:schemeClr val="tx1"/>
+        </a:solidFill>
+        <a:latin typeface="+mn-lt"/>
+        <a:ea typeface="+mn-ea"/>
+        <a:cs typeface="+mn-cs"/>
+      </a:defRPr>
+    </a:lvl8pPr>
+    <a:lvl9pPr marL="3657600" algn="l" defTabSz="914400" rtl="0" eaLnBrk="1" latinLnBrk="0" hangingPunct="1">
+      <a:defRPr sz="1200" kern="1200">
+        <a:solidFill>
+          <a:schemeClr val="tx1"/>
+        </a:solidFill>
+        <a:latin typeface="+mn-lt"/>
+        <a:ea typeface="+mn-ea"/>
+        <a:cs typeface="+mn-cs"/>
+      </a:defRPr>
+    </a:lvl9pPr>
+  </p:notesStyle>
+</p:notesMaster>
+</file>
+
+<file path=ppt/notesSlides/notesSlide1.xml><?xml version="1.0" encoding="utf-8"?>
+<p:notes xmlns:a="http://schemas.openxmlformats.org/drawingml/2006/main" xmlns:r="http://schemas.openxmlformats.org/officeDocument/2006/relationships" xmlns:p="http://schemas.openxmlformats.org/presentationml/2006/main">
+  <p:cSld>
+    <p:spTree>
+      <p:nvGrpSpPr>
+        <p:cNvPr id="1" name=""/>
+        <p:cNvGrpSpPr/>
+        <p:nvPr/>
+      </p:nvGrpSpPr>
+      <p:grpSpPr>
+        <a:xfrm>
+          <a:off x="0" y="0"/>
+          <a:ext cx="0" cy="0"/>
+          <a:chOff x="0" y="0"/>
+          <a:chExt cx="0" cy="0"/>
+        </a:xfrm>
+      </p:grpSpPr>
+      <p:sp>
+        <p:nvSpPr>
+          <p:cNvPr id="2" name="Slide Image Placeholder 1"/>
+          <p:cNvSpPr>
+            <a:spLocks noGrp="1" noRot="1" noChangeAspect="1"/>
+          </p:cNvSpPr>
+          <p:nvPr>
+            <p:ph type="sldImg"/>
+          </p:nvPr>
+        </p:nvSpPr>
+        <p:spPr/>
+      </p:sp>
+      <p:sp>
+        <p:nvSpPr>
+          <p:cNvPr id="3" name="Notes Placeholder 2"/>
+          <p:cNvSpPr>
+            <a:spLocks noGrp="1"/>
+          </p:cNvSpPr>
+          <p:nvPr>
+            <p:ph type="body" idx="1"/>
+          </p:nvPr>
+        </p:nvSpPr>
+        <p:spPr/>
+        <p:txBody>
+          <a:bodyPr/>
+          <a:lstStyle/>
+          <a:p>
+            <a:endParaRPr lang="en-IN" dirty="0"/>
+          </a:p>
+        </p:txBody>
+      </p:sp>
+      <p:sp>
+        <p:nvSpPr>
+          <p:cNvPr id="4" name="Slide Number Placeholder 3"/>
+          <p:cNvSpPr>
+            <a:spLocks noGrp="1"/>
+          </p:cNvSpPr>
+          <p:nvPr>
+            <p:ph type="sldNum" sz="quarter" idx="5"/>
+          </p:nvPr>
+        </p:nvSpPr>
+        <p:spPr/>
+        <p:txBody>
+          <a:bodyPr/>
+          <a:lstStyle/>
+          <a:p>
+            <a:fld id="{CCBF9B27-228D-4693-AA8A-E174CBCD4F00}" type="slidenum">
+              <a:rPr lang="en-IN" smtClean="0"/>
+              <a:t>6</a:t>
+            </a:fld>
+            <a:endParaRPr lang="en-IN"/>
+          </a:p>
+        </p:txBody>
+      </p:sp>
+    </p:spTree>
+    <p:extLst>
+      <p:ext uri="{BB962C8B-B14F-4D97-AF65-F5344CB8AC3E}">
+        <p14:creationId xmlns:p14="http://schemas.microsoft.com/office/powerpoint/2010/main" val="1896412329"/>
+      </p:ext>
+    </p:extLst>
+  </p:cSld>
+  <p:clrMapOvr>
+    <a:masterClrMapping/>
+  </p:clrMapOvr>
+</p:notes>
+</file>
+
 <file path=ppt/slideLayouts/slideLayout1.xml><?xml version="1.0" encoding="utf-8"?>
 <p:sldLayout xmlns:a="http://schemas.openxmlformats.org/drawingml/2006/main" xmlns:r="http://schemas.openxmlformats.org/officeDocument/2006/relationships" xmlns:p="http://schemas.openxmlformats.org/presentationml/2006/main" type="title" preserve="1">
   <p:cSld name="Title Slide">
@@ -168,10 +605,9 @@
           <a:lstStyle/>
           <a:p>
             <a:r>
-              <a:rPr lang="en-US" smtClean="0"/>
+              <a:rPr lang="en-US"/>
               <a:t>Click to edit Master title style</a:t>
             </a:r>
-            <a:endParaRPr lang="en-US"/>
           </a:p>
         </p:txBody>
       </p:sp>
@@ -287,10 +723,9 @@
           </a:lstStyle>
           <a:p>
             <a:r>
-              <a:rPr lang="en-US" smtClean="0"/>
+              <a:rPr lang="en-US"/>
               <a:t>Click to edit Master subtitle style</a:t>
             </a:r>
-            <a:endParaRPr lang="en-US"/>
           </a:p>
         </p:txBody>
       </p:sp>
@@ -311,6 +746,7 @@
           <a:p>
             <a:fld id="{5BCAD085-E8A6-8845-BD4E-CB4CCA059FC4}" type="datetimeFigureOut">
               <a:rPr lang="en-US" smtClean="0"/>
+              <a:t>2026-10-16</a:t>
             </a:fld>
             <a:endParaRPr lang="en-US"/>
           </a:p>
@@ -352,6 +788,7 @@
           <a:p>
             <a:fld id="{C1FF6DA9-008F-8B48-92A6-B652298478BF}" type="slidenum">
               <a:rPr lang="en-US" smtClean="0"/>
+              <a:t>‹#›</a:t>
             </a:fld>
             <a:endParaRPr lang="en-US"/>
           </a:p>
@@ -398,10 +835,9 @@
           <a:lstStyle/>
           <a:p>
             <a:r>
-              <a:rPr lang="en-US" smtClean="0"/>
+              <a:rPr lang="en-US"/>
               <a:t>Click to edit Master title style</a:t>
             </a:r>
-            <a:endParaRPr lang="en-US"/>
           </a:p>
         </p:txBody>
       </p:sp>
@@ -422,42 +858,37 @@
           <a:p>
             <a:pPr lvl="0"/>
             <a:r>
-              <a:rPr lang="en-US" smtClean="0"/>
+              <a:rPr lang="en-US"/>
               <a:t>Click to edit Master text styles</a:t>
             </a:r>
-            <a:endParaRPr lang="en-US" smtClean="0"/>
           </a:p>
           <a:p>
             <a:pPr lvl="1"/>
             <a:r>
-              <a:rPr lang="en-US" smtClean="0"/>
+              <a:rPr lang="en-US"/>
               <a:t>Second level</a:t>
             </a:r>
-            <a:endParaRPr lang="en-US" smtClean="0"/>
           </a:p>
           <a:p>
             <a:pPr lvl="2"/>
             <a:r>
-              <a:rPr lang="en-US" smtClean="0"/>
+              <a:rPr lang="en-US"/>
               <a:t>Third level</a:t>
             </a:r>
-            <a:endParaRPr lang="en-US" smtClean="0"/>
           </a:p>
           <a:p>
             <a:pPr lvl="3"/>
             <a:r>
-              <a:rPr lang="en-US" smtClean="0"/>
+              <a:rPr lang="en-US"/>
               <a:t>Fourth level</a:t>
             </a:r>
-            <a:endParaRPr lang="en-US" smtClean="0"/>
           </a:p>
           <a:p>
             <a:pPr lvl="4"/>
             <a:r>
-              <a:rPr lang="en-US" smtClean="0"/>
+              <a:rPr lang="en-US"/>
               <a:t>Fifth level</a:t>
             </a:r>
-            <a:endParaRPr lang="en-US"/>
           </a:p>
         </p:txBody>
       </p:sp>
@@ -478,6 +909,7 @@
           <a:p>
             <a:fld id="{5BCAD085-E8A6-8845-BD4E-CB4CCA059FC4}" type="datetimeFigureOut">
               <a:rPr lang="en-US" smtClean="0"/>
+              <a:t>2026-10-16</a:t>
             </a:fld>
             <a:endParaRPr lang="en-US"/>
           </a:p>
@@ -519,6 +951,7 @@
           <a:p>
             <a:fld id="{C1FF6DA9-008F-8B48-92A6-B652298478BF}" type="slidenum">
               <a:rPr lang="en-US" smtClean="0"/>
+              <a:t>‹#›</a:t>
             </a:fld>
             <a:endParaRPr lang="en-US"/>
           </a:p>
@@ -570,10 +1003,9 @@
           <a:lstStyle/>
           <a:p>
             <a:r>
-              <a:rPr lang="en-US" smtClean="0"/>
+              <a:rPr lang="en-US"/>
               <a:t>Click to edit Master title style</a:t>
             </a:r>
-            <a:endParaRPr lang="en-US"/>
           </a:p>
         </p:txBody>
       </p:sp>
@@ -599,42 +1031,37 @@
           <a:p>
             <a:pPr lvl="0"/>
             <a:r>
-              <a:rPr lang="en-US" smtClean="0"/>
+              <a:rPr lang="en-US"/>
               <a:t>Click to edit Master text styles</a:t>
             </a:r>
-            <a:endParaRPr lang="en-US" smtClean="0"/>
           </a:p>
           <a:p>
             <a:pPr lvl="1"/>
             <a:r>
-              <a:rPr lang="en-US" smtClean="0"/>
+              <a:rPr lang="en-US"/>
               <a:t>Second level</a:t>
             </a:r>
-            <a:endParaRPr lang="en-US" smtClean="0"/>
           </a:p>
           <a:p>
             <a:pPr lvl="2"/>
             <a:r>
-              <a:rPr lang="en-US" smtClean="0"/>
+              <a:rPr lang="en-US"/>
               <a:t>Third level</a:t>
             </a:r>
-            <a:endParaRPr lang="en-US" smtClean="0"/>
           </a:p>
           <a:p>
             <a:pPr lvl="3"/>
             <a:r>
-              <a:rPr lang="en-US" smtClean="0"/>
+              <a:rPr lang="en-US"/>
               <a:t>Fourth level</a:t>
             </a:r>
-            <a:endParaRPr lang="en-US" smtClean="0"/>
           </a:p>
           <a:p>
             <a:pPr lvl="4"/>
             <a:r>
-              <a:rPr lang="en-US" smtClean="0"/>
+              <a:rPr lang="en-US"/>
               <a:t>Fifth level</a:t>
             </a:r>
-            <a:endParaRPr lang="en-US"/>
           </a:p>
         </p:txBody>
       </p:sp>
@@ -655,6 +1082,7 @@
           <a:p>
             <a:fld id="{5BCAD085-E8A6-8845-BD4E-CB4CCA059FC4}" type="datetimeFigureOut">
               <a:rPr lang="en-US" smtClean="0"/>
+              <a:t>2026-10-16</a:t>
             </a:fld>
             <a:endParaRPr lang="en-US"/>
           </a:p>
@@ -696,6 +1124,7 @@
           <a:p>
             <a:fld id="{C1FF6DA9-008F-8B48-92A6-B652298478BF}" type="slidenum">
               <a:rPr lang="en-US" smtClean="0"/>
+              <a:t>‹#›</a:t>
             </a:fld>
             <a:endParaRPr lang="en-US"/>
           </a:p>
@@ -742,10 +1171,9 @@
           <a:lstStyle/>
           <a:p>
             <a:r>
-              <a:rPr lang="en-US" smtClean="0"/>
+              <a:rPr lang="en-US"/>
               <a:t>Click to edit Master title style</a:t>
             </a:r>
-            <a:endParaRPr lang="en-US"/>
           </a:p>
         </p:txBody>
       </p:sp>
@@ -766,42 +1194,37 @@
           <a:p>
             <a:pPr lvl="0"/>
             <a:r>
-              <a:rPr lang="en-US" smtClean="0"/>
+              <a:rPr lang="en-US"/>
               <a:t>Click to edit Master text styles</a:t>
             </a:r>
-            <a:endParaRPr lang="en-US" smtClean="0"/>
           </a:p>
           <a:p>
             <a:pPr lvl="1"/>
             <a:r>
-              <a:rPr lang="en-US" smtClean="0"/>
+              <a:rPr lang="en-US"/>
               <a:t>Second level</a:t>
             </a:r>
-            <a:endParaRPr lang="en-US" smtClean="0"/>
           </a:p>
           <a:p>
             <a:pPr lvl="2"/>
             <a:r>
-              <a:rPr lang="en-US" smtClean="0"/>
+              <a:rPr lang="en-US"/>
               <a:t>Third level</a:t>
             </a:r>
-            <a:endParaRPr lang="en-US" smtClean="0"/>
           </a:p>
           <a:p>
             <a:pPr lvl="3"/>
             <a:r>
-              <a:rPr lang="en-US" smtClean="0"/>
+              <a:rPr lang="en-US"/>
               <a:t>Fourth level</a:t>
             </a:r>
-            <a:endParaRPr lang="en-US" smtClean="0"/>
           </a:p>
           <a:p>
             <a:pPr lvl="4"/>
             <a:r>
-              <a:rPr lang="en-US" smtClean="0"/>
+              <a:rPr lang="en-US"/>
               <a:t>Fifth level</a:t>
             </a:r>
-            <a:endParaRPr lang="en-US"/>
           </a:p>
         </p:txBody>
       </p:sp>
@@ -822,6 +1245,7 @@
           <a:p>
             <a:fld id="{5BCAD085-E8A6-8845-BD4E-CB4CCA059FC4}" type="datetimeFigureOut">
               <a:rPr lang="en-US" smtClean="0"/>
+              <a:t>2026-10-16</a:t>
             </a:fld>
             <a:endParaRPr lang="en-US"/>
           </a:p>
@@ -863,6 +1287,7 @@
           <a:p>
             <a:fld id="{C1FF6DA9-008F-8B48-92A6-B652298478BF}" type="slidenum">
               <a:rPr lang="en-US" smtClean="0"/>
+              <a:t>‹#›</a:t>
             </a:fld>
             <a:endParaRPr lang="en-US"/>
           </a:p>
@@ -918,10 +1343,9 @@
           </a:lstStyle>
           <a:p>
             <a:r>
-              <a:rPr lang="en-US" smtClean="0"/>
+              <a:rPr lang="en-US"/>
               <a:t>Click to edit Master title style</a:t>
             </a:r>
-            <a:endParaRPr lang="en-US"/>
           </a:p>
         </p:txBody>
       </p:sp>
@@ -1038,10 +1462,9 @@
           <a:p>
             <a:pPr lvl="0"/>
             <a:r>
-              <a:rPr lang="en-US" smtClean="0"/>
+              <a:rPr lang="en-US"/>
               <a:t>Click to edit Master text styles</a:t>
             </a:r>
-            <a:endParaRPr lang="en-US" smtClean="0"/>
           </a:p>
         </p:txBody>
       </p:sp>
@@ -1062,6 +1485,7 @@
           <a:p>
             <a:fld id="{5BCAD085-E8A6-8845-BD4E-CB4CCA059FC4}" type="datetimeFigureOut">
               <a:rPr lang="en-US" smtClean="0"/>
+              <a:t>2026-10-16</a:t>
             </a:fld>
             <a:endParaRPr lang="en-US"/>
           </a:p>
@@ -1103,6 +1527,7 @@
           <a:p>
             <a:fld id="{C1FF6DA9-008F-8B48-92A6-B652298478BF}" type="slidenum">
               <a:rPr lang="en-US" smtClean="0"/>
+              <a:t>‹#›</a:t>
             </a:fld>
             <a:endParaRPr lang="en-US"/>
           </a:p>
@@ -1149,10 +1574,9 @@
           <a:lstStyle/>
           <a:p>
             <a:r>
-              <a:rPr lang="en-US" smtClean="0"/>
+              <a:rPr lang="en-US"/>
               <a:t>Click to edit Master title style</a:t>
             </a:r>
-            <a:endParaRPr lang="en-US"/>
           </a:p>
         </p:txBody>
       </p:sp>
@@ -1206,42 +1630,37 @@
           <a:p>
             <a:pPr lvl="0"/>
             <a:r>
-              <a:rPr lang="en-US" smtClean="0"/>
+              <a:rPr lang="en-US"/>
               <a:t>Click to edit Master text styles</a:t>
             </a:r>
-            <a:endParaRPr lang="en-US" smtClean="0"/>
           </a:p>
           <a:p>
             <a:pPr lvl="1"/>
             <a:r>
-              <a:rPr lang="en-US" smtClean="0"/>
+              <a:rPr lang="en-US"/>
               <a:t>Second level</a:t>
             </a:r>
-            <a:endParaRPr lang="en-US" smtClean="0"/>
           </a:p>
           <a:p>
             <a:pPr lvl="2"/>
             <a:r>
-              <a:rPr lang="en-US" smtClean="0"/>
+              <a:rPr lang="en-US"/>
               <a:t>Third level</a:t>
             </a:r>
-            <a:endParaRPr lang="en-US" smtClean="0"/>
           </a:p>
           <a:p>
             <a:pPr lvl="3"/>
             <a:r>
-              <a:rPr lang="en-US" smtClean="0"/>
+              <a:rPr lang="en-US"/>
               <a:t>Fourth level</a:t>
             </a:r>
-            <a:endParaRPr lang="en-US" smtClean="0"/>
           </a:p>
           <a:p>
             <a:pPr lvl="4"/>
             <a:r>
-              <a:rPr lang="en-US" smtClean="0"/>
+              <a:rPr lang="en-US"/>
               <a:t>Fifth level</a:t>
             </a:r>
-            <a:endParaRPr lang="en-US"/>
           </a:p>
         </p:txBody>
       </p:sp>
@@ -1295,42 +1714,37 @@
           <a:p>
             <a:pPr lvl="0"/>
             <a:r>
-              <a:rPr lang="en-US" smtClean="0"/>
+              <a:rPr lang="en-US"/>
               <a:t>Click to edit Master text styles</a:t>
             </a:r>
-            <a:endParaRPr lang="en-US" smtClean="0"/>
           </a:p>
           <a:p>
             <a:pPr lvl="1"/>
             <a:r>
-              <a:rPr lang="en-US" smtClean="0"/>
+              <a:rPr lang="en-US"/>
               <a:t>Second level</a:t>
             </a:r>
-            <a:endParaRPr lang="en-US" smtClean="0"/>
           </a:p>
           <a:p>
             <a:pPr lvl="2"/>
             <a:r>
-              <a:rPr lang="en-US" smtClean="0"/>
+              <a:rPr lang="en-US"/>
               <a:t>Third level</a:t>
             </a:r>
-            <a:endParaRPr lang="en-US" smtClean="0"/>
           </a:p>
           <a:p>
             <a:pPr lvl="3"/>
             <a:r>
-              <a:rPr lang="en-US" smtClean="0"/>
+              <a:rPr lang="en-US"/>
               <a:t>Fourth level</a:t>
             </a:r>
-            <a:endParaRPr lang="en-US" smtClean="0"/>
           </a:p>
           <a:p>
             <a:pPr lvl="4"/>
             <a:r>
-              <a:rPr lang="en-US" smtClean="0"/>
+              <a:rPr lang="en-US"/>
               <a:t>Fifth level</a:t>
             </a:r>
-            <a:endParaRPr lang="en-US"/>
           </a:p>
         </p:txBody>
       </p:sp>
@@ -1351,6 +1765,7 @@
           <a:p>
             <a:fld id="{5BCAD085-E8A6-8845-BD4E-CB4CCA059FC4}" type="datetimeFigureOut">
               <a:rPr lang="en-US" smtClean="0"/>
+              <a:t>2026-10-16</a:t>
             </a:fld>
             <a:endParaRPr lang="en-US"/>
           </a:p>
@@ -1392,6 +1807,7 @@
           <a:p>
             <a:fld id="{C1FF6DA9-008F-8B48-92A6-B652298478BF}" type="slidenum">
               <a:rPr lang="en-US" smtClean="0"/>
+              <a:t>‹#›</a:t>
             </a:fld>
             <a:endParaRPr lang="en-US"/>
           </a:p>
@@ -1442,10 +1858,9 @@
           </a:lstStyle>
           <a:p>
             <a:r>
-              <a:rPr lang="en-US" smtClean="0"/>
+              <a:rPr lang="en-US"/>
               <a:t>Click to edit Master title style</a:t>
             </a:r>
-            <a:endParaRPr lang="en-US"/>
           </a:p>
         </p:txBody>
       </p:sp>
@@ -1508,10 +1923,9 @@
           <a:p>
             <a:pPr lvl="0"/>
             <a:r>
-              <a:rPr lang="en-US" smtClean="0"/>
+              <a:rPr lang="en-US"/>
               <a:t>Click to edit Master text styles</a:t>
             </a:r>
-            <a:endParaRPr lang="en-US" smtClean="0"/>
           </a:p>
         </p:txBody>
       </p:sp>
@@ -1565,42 +1979,37 @@
           <a:p>
             <a:pPr lvl="0"/>
             <a:r>
-              <a:rPr lang="en-US" smtClean="0"/>
+              <a:rPr lang="en-US"/>
               <a:t>Click to edit Master text styles</a:t>
             </a:r>
-            <a:endParaRPr lang="en-US" smtClean="0"/>
           </a:p>
           <a:p>
             <a:pPr lvl="1"/>
             <a:r>
-              <a:rPr lang="en-US" smtClean="0"/>
+              <a:rPr lang="en-US"/>
               <a:t>Second level</a:t>
             </a:r>
-            <a:endParaRPr lang="en-US" smtClean="0"/>
           </a:p>
           <a:p>
             <a:pPr lvl="2"/>
             <a:r>
-              <a:rPr lang="en-US" smtClean="0"/>
+              <a:rPr lang="en-US"/>
               <a:t>Third level</a:t>
             </a:r>
-            <a:endParaRPr lang="en-US" smtClean="0"/>
           </a:p>
           <a:p>
             <a:pPr lvl="3"/>
             <a:r>
-              <a:rPr lang="en-US" smtClean="0"/>
+              <a:rPr lang="en-US"/>
               <a:t>Fourth level</a:t>
             </a:r>
-            <a:endParaRPr lang="en-US" smtClean="0"/>
           </a:p>
           <a:p>
             <a:pPr lvl="4"/>
             <a:r>
-              <a:rPr lang="en-US" smtClean="0"/>
+              <a:rPr lang="en-US"/>
               <a:t>Fifth level</a:t>
             </a:r>
-            <a:endParaRPr lang="en-US"/>
           </a:p>
         </p:txBody>
       </p:sp>
@@ -1663,10 +2072,9 @@
           <a:p>
             <a:pPr lvl="0"/>
             <a:r>
-              <a:rPr lang="en-US" smtClean="0"/>
+              <a:rPr lang="en-US"/>
               <a:t>Click to edit Master text styles</a:t>
             </a:r>
-            <a:endParaRPr lang="en-US" smtClean="0"/>
           </a:p>
         </p:txBody>
       </p:sp>
@@ -1720,42 +2128,37 @@
           <a:p>
             <a:pPr lvl="0"/>
             <a:r>
-              <a:rPr lang="en-US" smtClean="0"/>
+              <a:rPr lang="en-US"/>
               <a:t>Click to edit Master text styles</a:t>
             </a:r>
-            <a:endParaRPr lang="en-US" smtClean="0"/>
           </a:p>
           <a:p>
             <a:pPr lvl="1"/>
             <a:r>
-              <a:rPr lang="en-US" smtClean="0"/>
+              <a:rPr lang="en-US"/>
               <a:t>Second level</a:t>
             </a:r>
-            <a:endParaRPr lang="en-US" smtClean="0"/>
           </a:p>
           <a:p>
             <a:pPr lvl="2"/>
             <a:r>
-              <a:rPr lang="en-US" smtClean="0"/>
+              <a:rPr lang="en-US"/>
               <a:t>Third level</a:t>
             </a:r>
-            <a:endParaRPr lang="en-US" smtClean="0"/>
           </a:p>
           <a:p>
             <a:pPr lvl="3"/>
             <a:r>
-              <a:rPr lang="en-US" smtClean="0"/>
+              <a:rPr lang="en-US"/>
               <a:t>Fourth level</a:t>
             </a:r>
-            <a:endParaRPr lang="en-US" smtClean="0"/>
           </a:p>
           <a:p>
             <a:pPr lvl="4"/>
             <a:r>
-              <a:rPr lang="en-US" smtClean="0"/>
+              <a:rPr lang="en-US"/>
               <a:t>Fifth level</a:t>
             </a:r>
-            <a:endParaRPr lang="en-US"/>
           </a:p>
         </p:txBody>
       </p:sp>
@@ -1776,6 +2179,7 @@
           <a:p>
             <a:fld id="{5BCAD085-E8A6-8845-BD4E-CB4CCA059FC4}" type="datetimeFigureOut">
               <a:rPr lang="en-US" smtClean="0"/>
+              <a:t>2026-10-16</a:t>
             </a:fld>
             <a:endParaRPr lang="en-US"/>
           </a:p>
@@ -1817,6 +2221,7 @@
           <a:p>
             <a:fld id="{C1FF6DA9-008F-8B48-92A6-B652298478BF}" type="slidenum">
               <a:rPr lang="en-US" smtClean="0"/>
+              <a:t>‹#›</a:t>
             </a:fld>
             <a:endParaRPr lang="en-US"/>
           </a:p>
@@ -1863,10 +2268,9 @@
           <a:lstStyle/>
           <a:p>
             <a:r>
-              <a:rPr lang="en-US" smtClean="0"/>
+              <a:rPr lang="en-US"/>
               <a:t>Click to edit Master title style</a:t>
             </a:r>
-            <a:endParaRPr lang="en-US"/>
           </a:p>
         </p:txBody>
       </p:sp>
@@ -1887,6 +2291,7 @@
           <a:p>
             <a:fld id="{5BCAD085-E8A6-8845-BD4E-CB4CCA059FC4}" type="datetimeFigureOut">
               <a:rPr lang="en-US" smtClean="0"/>
+              <a:t>2026-10-16</a:t>
             </a:fld>
             <a:endParaRPr lang="en-US"/>
           </a:p>
@@ -1928,6 +2333,7 @@
           <a:p>
             <a:fld id="{C1FF6DA9-008F-8B48-92A6-B652298478BF}" type="slidenum">
               <a:rPr lang="en-US" smtClean="0"/>
+              <a:t>‹#›</a:t>
             </a:fld>
             <a:endParaRPr lang="en-US"/>
           </a:p>
@@ -1975,6 +2381,7 @@
           <a:p>
             <a:fld id="{5BCAD085-E8A6-8845-BD4E-CB4CCA059FC4}" type="datetimeFigureOut">
               <a:rPr lang="en-US" smtClean="0"/>
+              <a:t>2026-10-16</a:t>
             </a:fld>
             <a:endParaRPr lang="en-US"/>
           </a:p>
@@ -2016,6 +2423,7 @@
           <a:p>
             <a:fld id="{C1FF6DA9-008F-8B48-92A6-B652298478BF}" type="slidenum">
               <a:rPr lang="en-US" smtClean="0"/>
+              <a:t>‹#›</a:t>
             </a:fld>
             <a:endParaRPr lang="en-US"/>
           </a:p>
@@ -2071,10 +2479,9 @@
           </a:lstStyle>
           <a:p>
             <a:r>
-              <a:rPr lang="en-US" smtClean="0"/>
+              <a:rPr lang="en-US"/>
               <a:t>Click to edit Master title style</a:t>
             </a:r>
-            <a:endParaRPr lang="en-US"/>
           </a:p>
         </p:txBody>
       </p:sp>
@@ -2128,42 +2535,37 @@
           <a:p>
             <a:pPr lvl="0"/>
             <a:r>
-              <a:rPr lang="en-US" smtClean="0"/>
+              <a:rPr lang="en-US"/>
               <a:t>Click to edit Master text styles</a:t>
             </a:r>
-            <a:endParaRPr lang="en-US" smtClean="0"/>
           </a:p>
           <a:p>
             <a:pPr lvl="1"/>
             <a:r>
-              <a:rPr lang="en-US" smtClean="0"/>
+              <a:rPr lang="en-US"/>
               <a:t>Second level</a:t>
             </a:r>
-            <a:endParaRPr lang="en-US" smtClean="0"/>
           </a:p>
           <a:p>
             <a:pPr lvl="2"/>
             <a:r>
-              <a:rPr lang="en-US" smtClean="0"/>
+              <a:rPr lang="en-US"/>
               <a:t>Third level</a:t>
             </a:r>
-            <a:endParaRPr lang="en-US" smtClean="0"/>
           </a:p>
           <a:p>
             <a:pPr lvl="3"/>
             <a:r>
-              <a:rPr lang="en-US" smtClean="0"/>
+              <a:rPr lang="en-US"/>
               <a:t>Fourth level</a:t>
             </a:r>
-            <a:endParaRPr lang="en-US" smtClean="0"/>
           </a:p>
           <a:p>
             <a:pPr lvl="4"/>
             <a:r>
-              <a:rPr lang="en-US" smtClean="0"/>
+              <a:rPr lang="en-US"/>
               <a:t>Fifth level</a:t>
             </a:r>
-            <a:endParaRPr lang="en-US"/>
           </a:p>
         </p:txBody>
       </p:sp>
@@ -2226,10 +2628,9 @@
           <a:p>
             <a:pPr lvl="0"/>
             <a:r>
-              <a:rPr lang="en-US" smtClean="0"/>
+              <a:rPr lang="en-US"/>
               <a:t>Click to edit Master text styles</a:t>
             </a:r>
-            <a:endParaRPr lang="en-US" smtClean="0"/>
           </a:p>
         </p:txBody>
       </p:sp>
@@ -2250,6 +2651,7 @@
           <a:p>
             <a:fld id="{5BCAD085-E8A6-8845-BD4E-CB4CCA059FC4}" type="datetimeFigureOut">
               <a:rPr lang="en-US" smtClean="0"/>
+              <a:t>2026-10-16</a:t>
             </a:fld>
             <a:endParaRPr lang="en-US"/>
           </a:p>
@@ -2291,6 +2693,7 @@
           <a:p>
             <a:fld id="{C1FF6DA9-008F-8B48-92A6-B652298478BF}" type="slidenum">
               <a:rPr lang="en-US" smtClean="0"/>
+              <a:t>‹#›</a:t>
             </a:fld>
             <a:endParaRPr lang="en-US"/>
           </a:p>
@@ -2346,10 +2749,9 @@
           </a:lstStyle>
           <a:p>
             <a:r>
-              <a:rPr lang="en-US" smtClean="0"/>
+              <a:rPr lang="en-US"/>
               <a:t>Click to edit Master title style</a:t>
             </a:r>
-            <a:endParaRPr lang="en-US"/>
           </a:p>
         </p:txBody>
       </p:sp>
@@ -2473,10 +2875,9 @@
           <a:p>
             <a:pPr lvl="0"/>
             <a:r>
-              <a:rPr lang="en-US" smtClean="0"/>
+              <a:rPr lang="en-US"/>
               <a:t>Click to edit Master text styles</a:t>
             </a:r>
-            <a:endParaRPr lang="en-US" smtClean="0"/>
           </a:p>
         </p:txBody>
       </p:sp>
@@ -2497,6 +2898,7 @@
           <a:p>
             <a:fld id="{5BCAD085-E8A6-8845-BD4E-CB4CCA059FC4}" type="datetimeFigureOut">
               <a:rPr lang="en-US" smtClean="0"/>
+              <a:t>2026-10-16</a:t>
             </a:fld>
             <a:endParaRPr lang="en-US"/>
           </a:p>
@@ -2538,6 +2940,7 @@
           <a:p>
             <a:fld id="{C1FF6DA9-008F-8B48-92A6-B652298478BF}" type="slidenum">
               <a:rPr lang="en-US" smtClean="0"/>
+              <a:t>‹#›</a:t>
             </a:fld>
             <a:endParaRPr lang="en-US"/>
           </a:p>
@@ -2599,10 +3002,9 @@
           <a:lstStyle/>
           <a:p>
             <a:r>
-              <a:rPr lang="en-US" smtClean="0"/>
+              <a:rPr lang="en-US"/>
               <a:t>Click to edit Master title style</a:t>
             </a:r>
-            <a:endParaRPr lang="en-US"/>
           </a:p>
         </p:txBody>
       </p:sp>
@@ -2633,42 +3035,37 @@
           <a:p>
             <a:pPr lvl="0"/>
             <a:r>
-              <a:rPr lang="en-US" smtClean="0"/>
+              <a:rPr lang="en-US"/>
               <a:t>Click to edit Master text styles</a:t>
             </a:r>
-            <a:endParaRPr lang="en-US" smtClean="0"/>
           </a:p>
           <a:p>
             <a:pPr lvl="1"/>
             <a:r>
-              <a:rPr lang="en-US" smtClean="0"/>
+              <a:rPr lang="en-US"/>
               <a:t>Second level</a:t>
             </a:r>
-            <a:endParaRPr lang="en-US" smtClean="0"/>
           </a:p>
           <a:p>
             <a:pPr lvl="2"/>
             <a:r>
-              <a:rPr lang="en-US" smtClean="0"/>
+              <a:rPr lang="en-US"/>
               <a:t>Third level</a:t>
             </a:r>
-            <a:endParaRPr lang="en-US" smtClean="0"/>
           </a:p>
           <a:p>
             <a:pPr lvl="3"/>
             <a:r>
-              <a:rPr lang="en-US" smtClean="0"/>
+              <a:rPr lang="en-US"/>
               <a:t>Fourth level</a:t>
             </a:r>
-            <a:endParaRPr lang="en-US" smtClean="0"/>
           </a:p>
           <a:p>
             <a:pPr lvl="4"/>
             <a:r>
-              <a:rPr lang="en-US" smtClean="0"/>
+              <a:rPr lang="en-US"/>
               <a:t>Fifth level</a:t>
             </a:r>
-            <a:endParaRPr lang="en-US"/>
           </a:p>
         </p:txBody>
       </p:sp>
@@ -2707,6 +3104,7 @@
           <a:p>
             <a:fld id="{5BCAD085-E8A6-8845-BD4E-CB4CCA059FC4}" type="datetimeFigureOut">
               <a:rPr lang="en-US" smtClean="0"/>
+              <a:t>2026-10-16</a:t>
             </a:fld>
             <a:endParaRPr lang="en-US"/>
           </a:p>
@@ -2784,6 +3182,7 @@
           <a:p>
             <a:fld id="{C1FF6DA9-008F-8B48-92A6-B652298478BF}" type="slidenum">
               <a:rPr lang="en-US" smtClean="0"/>
+              <a:t>‹#›</a:t>
             </a:fld>
             <a:endParaRPr lang="en-US"/>
           </a:p>
@@ -3075,7 +3474,14 @@
         <p:cNvGrpSpPr/>
         <p:nvPr/>
       </p:nvGrpSpPr>
-      <p:grpSpPr/>
+      <p:grpSpPr>
+        <a:xfrm>
+          <a:off x="0" y="0"/>
+          <a:ext cx="0" cy="0"/>
+          <a:chOff x="0" y="0"/>
+          <a:chExt cx="0" cy="0"/>
+        </a:xfrm>
+      </p:grpSpPr>
       <p:sp>
         <p:nvSpPr>
           <p:cNvPr id="2" name="Rectangle 1"/>
@@ -3118,6 +3524,7 @@
           <a:lstStyle/>
           <a:p>
             <a:pPr algn="ctr"/>
+            <a:endParaRPr/>
           </a:p>
         </p:txBody>
       </p:sp>
@@ -3195,51 +3602,6 @@
       </p:sp>
       <p:sp>
         <p:nvSpPr>
-          <p:cNvPr id="5" name="Rectangle 4"/>
-          <p:cNvSpPr/>
-          <p:nvPr/>
-        </p:nvSpPr>
-        <p:spPr>
-          <a:xfrm>
-            <a:off x="411480" y="1170432"/>
-            <a:ext cx="1051560" cy="54864"/>
-          </a:xfrm>
-          <a:prstGeom prst="rect">
-            <a:avLst/>
-          </a:prstGeom>
-          <a:solidFill>
-            <a:srgbClr val="FFBE2D"/>
-          </a:solidFill>
-          <a:ln>
-            <a:solidFill>
-              <a:srgbClr val="FFBE2D"/>
-            </a:solidFill>
-          </a:ln>
-        </p:spPr>
-        <p:style>
-          <a:lnRef idx="1">
-            <a:schemeClr val="accent1"/>
-          </a:lnRef>
-          <a:fillRef idx="3">
-            <a:schemeClr val="accent1"/>
-          </a:fillRef>
-          <a:effectRef idx="2">
-            <a:schemeClr val="accent1"/>
-          </a:effectRef>
-          <a:fontRef idx="minor">
-            <a:schemeClr val="lt1"/>
-          </a:fontRef>
-        </p:style>
-        <p:txBody>
-          <a:bodyPr rtlCol="0" anchor="ctr"/>
-          <a:lstStyle/>
-          <a:p>
-            <a:pPr algn="ctr"/>
-          </a:p>
-        </p:txBody>
-      </p:sp>
-      <p:sp>
-        <p:nvSpPr>
           <p:cNvPr id="6" name="TextBox 5"/>
           <p:cNvSpPr txBox="1"/>
           <p:nvPr/>
@@ -3282,8 +3644,8 @@
         </p:nvSpPr>
         <p:spPr>
           <a:xfrm>
-            <a:off x="777240" y="1550035"/>
-            <a:ext cx="10698480" cy="2135505"/>
+            <a:off x="510540" y="1550035"/>
+            <a:ext cx="11422380" cy="2549525"/>
           </a:xfrm>
           <a:prstGeom prst="rect">
             <a:avLst/>
@@ -3308,8 +3670,19 @@
               </a:defRPr>
             </a:pPr>
             <a:r>
-              <a:t>•  Project Title: [Enter title]</a:t>
-            </a:r>
+              <a:rPr dirty="0"/>
+              <a:t>•  Project Title: </a:t>
+            </a:r>
+            <a:r>
+              <a:rPr lang="en-IN" b="1" dirty="0">
+                <a:solidFill>
+                  <a:srgbClr val="140C12"/>
+                </a:solidFill>
+                <a:latin typeface="Aptos"/>
+              </a:rPr>
+              <a:t>AI Grievance Redressal Prioritization System</a:t>
+            </a:r>
+            <a:endParaRPr dirty="0"/>
           </a:p>
           <a:p>
             <a:pPr>
@@ -3324,8 +3697,14 @@
               </a:defRPr>
             </a:pPr>
             <a:r>
-              <a:t>•  Team Name / Team ID: [Enter details]</a:t>
-            </a:r>
+              <a:rPr dirty="0"/>
+              <a:t>•  Team Name / Team ID: </a:t>
+            </a:r>
+            <a:r>
+              <a:rPr lang="en-US" b="1" dirty="0"/>
+              <a:t>Logic Makers / SY15</a:t>
+            </a:r>
+            <a:endParaRPr b="1" dirty="0"/>
           </a:p>
           <a:p>
             <a:pPr>
@@ -3340,8 +3719,19 @@
               </a:defRPr>
             </a:pPr>
             <a:r>
-              <a:t>•  Problem Statement ID and Title: [Enter details]</a:t>
-            </a:r>
+              <a:rPr dirty="0"/>
+              <a:t>•  Problem Statement ID and Title: </a:t>
+            </a:r>
+            <a:r>
+              <a:rPr lang="en-IN" b="1" dirty="0">
+                <a:solidFill>
+                  <a:srgbClr val="140C12"/>
+                </a:solidFill>
+                <a:latin typeface="Aptos"/>
+              </a:rPr>
+              <a:t>PS-020: AI Grievance Redressal Prioritization System</a:t>
+            </a:r>
+            <a:endParaRPr lang="en-US" dirty="0"/>
           </a:p>
           <a:p>
             <a:pPr>
@@ -3356,22 +3746,18 @@
               </a:defRPr>
             </a:pPr>
             <a:r>
-              <a:t>•  Team </a:t>
-            </a:r>
-            <a:r>
-              <a:rPr lang="en-US"/>
-              <a:t>Leader</a:t>
-            </a:r>
-            <a:r>
-              <a:t>: [Name — Register Number; </a:t>
-            </a:r>
-            <a:r>
-              <a:rPr lang="en-US"/>
-              <a:t>Dept,Year,Section</a:t>
-            </a:r>
-            <a:r>
-              <a:t>]</a:t>
-            </a:r>
+              <a:rPr lang="en-US" dirty="0"/>
+              <a:t>•  Team Leader: </a:t>
+            </a:r>
+            <a:r>
+              <a:rPr lang="en-US" b="1" dirty="0"/>
+              <a:t>BALAVIGNESH K,922524104016,III-CSE-A</a:t>
+            </a:r>
+            <a:r>
+              <a:rPr lang="en-IN" b="1" dirty="0"/>
+              <a:t> </a:t>
+            </a:r>
+            <a:endParaRPr lang="en-US" b="1" dirty="0"/>
           </a:p>
           <a:p>
             <a:pPr>
@@ -3386,8 +3772,33 @@
               </a:defRPr>
             </a:pPr>
             <a:r>
-              <a:t>•  Project Repository / Demo Link: [URL or Not Available]</a:t>
-            </a:r>
+              <a:rPr dirty="0"/>
+              <a:t>•  Project Repository</a:t>
+            </a:r>
+            <a:r>
+              <a:rPr lang="en-IN" dirty="0"/>
+              <a:t> / Demo Link:</a:t>
+            </a:r>
+          </a:p>
+          <a:p>
+            <a:pPr>
+              <a:spcAft>
+                <a:spcPts val="1200"/>
+              </a:spcAft>
+              <a:defRPr sz="1800">
+                <a:solidFill>
+                  <a:srgbClr val="140C12"/>
+                </a:solidFill>
+                <a:latin typeface="Aptos"/>
+              </a:defRPr>
+            </a:pPr>
+            <a:r>
+              <a:rPr lang="en-US" dirty="0">
+                <a:hlinkClick r:id="rId2"/>
+              </a:rPr>
+              <a:t>https://github.com/Balavigneshcse/AI_Grievance_Redressal_Prioritization_System</a:t>
+            </a:r>
+            <a:endParaRPr lang="en-US" dirty="0"/>
           </a:p>
         </p:txBody>
       </p:sp>
@@ -3416,7 +3827,14 @@
         <p:cNvGrpSpPr/>
         <p:nvPr/>
       </p:nvGrpSpPr>
-      <p:grpSpPr/>
+      <p:grpSpPr>
+        <a:xfrm>
+          <a:off x="0" y="0"/>
+          <a:ext cx="0" cy="0"/>
+          <a:chOff x="0" y="0"/>
+          <a:chExt cx="0" cy="0"/>
+        </a:xfrm>
+      </p:grpSpPr>
       <p:sp>
         <p:nvSpPr>
           <p:cNvPr id="2" name="Rectangle 1"/>
@@ -3459,6 +3877,7 @@
           <a:lstStyle/>
           <a:p>
             <a:pPr algn="ctr"/>
+            <a:endParaRPr/>
           </a:p>
         </p:txBody>
       </p:sp>
@@ -3531,51 +3950,6 @@
             <a:r>
               <a:t>PROBLEM STATEMENT</a:t>
             </a:r>
-          </a:p>
-        </p:txBody>
-      </p:sp>
-      <p:sp>
-        <p:nvSpPr>
-          <p:cNvPr id="5" name="Rectangle 4"/>
-          <p:cNvSpPr/>
-          <p:nvPr/>
-        </p:nvSpPr>
-        <p:spPr>
-          <a:xfrm>
-            <a:off x="411480" y="1170432"/>
-            <a:ext cx="1051560" cy="54864"/>
-          </a:xfrm>
-          <a:prstGeom prst="rect">
-            <a:avLst/>
-          </a:prstGeom>
-          <a:solidFill>
-            <a:srgbClr val="FFBE2D"/>
-          </a:solidFill>
-          <a:ln>
-            <a:solidFill>
-              <a:srgbClr val="FFBE2D"/>
-            </a:solidFill>
-          </a:ln>
-        </p:spPr>
-        <p:style>
-          <a:lnRef idx="1">
-            <a:schemeClr val="accent1"/>
-          </a:lnRef>
-          <a:fillRef idx="3">
-            <a:schemeClr val="accent1"/>
-          </a:fillRef>
-          <a:effectRef idx="2">
-            <a:schemeClr val="accent1"/>
-          </a:effectRef>
-          <a:fontRef idx="minor">
-            <a:schemeClr val="lt1"/>
-          </a:fontRef>
-        </p:style>
-        <p:txBody>
-          <a:bodyPr rtlCol="0" anchor="ctr"/>
-          <a:lstStyle/>
-          <a:p>
-            <a:pPr algn="ctr"/>
           </a:p>
         </p:txBody>
       </p:sp>
@@ -3632,7 +4006,7 @@
             </a:avLst>
           </a:prstGeom>
           <a:solidFill>
-            <a:srgbClr val="1E3A8A"/>
+            <a:srgbClr val="9B1C24"/>
           </a:solidFill>
           <a:ln>
             <a:noFill/>
@@ -3723,11 +4097,11 @@
             </a:avLst>
           </a:prstGeom>
           <a:solidFill>
-            <a:srgbClr val="F4F8FC"/>
+            <a:srgbClr val="F3EDE3"/>
           </a:solidFill>
           <a:ln w="9525">
             <a:solidFill>
-              <a:srgbClr val="BDD7EE"/>
+              <a:srgbClr val="E3DBCF"/>
             </a:solidFill>
           </a:ln>
           <a:effectLst/>
@@ -3757,7 +4131,7 @@
             </a:avLst>
           </a:prstGeom>
           <a:solidFill>
-            <a:srgbClr val="0070C0"/>
+            <a:srgbClr val="E0262D"/>
           </a:solidFill>
           <a:ln>
             <a:noFill/>
@@ -3798,7 +4172,7 @@
             <a:r>
               <a:rPr sz="1000" b="1" i="0">
                 <a:solidFill>
-                  <a:srgbClr val="1F497D"/>
+                  <a:srgbClr val="3A3335"/>
                 </a:solidFill>
                 <a:latin typeface="Aptos"/>
               </a:rPr>
@@ -3833,7 +4207,7 @@
             </a:avLst>
           </a:prstGeom>
           <a:solidFill>
-            <a:srgbClr val="1F497D"/>
+            <a:srgbClr val="3A3335"/>
           </a:solidFill>
           <a:ln>
             <a:noFill/>
@@ -4009,7 +4383,7 @@
             </a:avLst>
           </a:prstGeom>
           <a:solidFill>
-            <a:srgbClr val="1E3A8A"/>
+            <a:srgbClr val="9B1C24"/>
           </a:solidFill>
           <a:ln>
             <a:noFill/>
@@ -4104,7 +4478,7 @@
           </a:solidFill>
           <a:ln w="9525">
             <a:solidFill>
-              <a:srgbClr val="E2E8F0"/>
+              <a:srgbClr val="E3DBCF"/>
             </a:solidFill>
           </a:ln>
           <a:effectLst/>
@@ -4134,7 +4508,7 @@
             </a:avLst>
           </a:prstGeom>
           <a:solidFill>
-            <a:srgbClr val="0284C7"/>
+            <a:srgbClr val="B7791F"/>
           </a:solidFill>
           <a:ln>
             <a:noFill/>
@@ -4199,7 +4573,7 @@
             <a:r>
               <a:rPr sz="950" b="1" i="0">
                 <a:solidFill>
-                  <a:srgbClr val="1E3A8A"/>
+                  <a:srgbClr val="9B1C24"/>
                 </a:solidFill>
                 <a:latin typeface="Aptos"/>
               </a:rPr>
@@ -4211,7 +4585,7 @@
             <a:r>
               <a:rPr sz="850" b="0" i="0">
                 <a:solidFill>
-                  <a:srgbClr val="475569"/>
+                  <a:srgbClr val="5A5555"/>
                 </a:solidFill>
                 <a:latin typeface="Aptos"/>
               </a:rPr>
@@ -4241,7 +4615,7 @@
           </a:solidFill>
           <a:ln w="9525">
             <a:solidFill>
-              <a:srgbClr val="E2E8F0"/>
+              <a:srgbClr val="E3DBCF"/>
             </a:solidFill>
           </a:ln>
           <a:effectLst/>
@@ -4271,7 +4645,7 @@
             </a:avLst>
           </a:prstGeom>
           <a:solidFill>
-            <a:srgbClr val="0284C7"/>
+            <a:srgbClr val="B7791F"/>
           </a:solidFill>
           <a:ln>
             <a:noFill/>
@@ -4336,7 +4710,7 @@
             <a:r>
               <a:rPr sz="950" b="1" i="0">
                 <a:solidFill>
-                  <a:srgbClr val="1E3A8A"/>
+                  <a:srgbClr val="9B1C24"/>
                 </a:solidFill>
                 <a:latin typeface="Aptos"/>
               </a:rPr>
@@ -4348,7 +4722,7 @@
             <a:r>
               <a:rPr sz="850" b="0" i="0">
                 <a:solidFill>
-                  <a:srgbClr val="475569"/>
+                  <a:srgbClr val="5A5555"/>
                 </a:solidFill>
                 <a:latin typeface="Aptos"/>
               </a:rPr>
@@ -4378,7 +4752,7 @@
           </a:solidFill>
           <a:ln w="9525">
             <a:solidFill>
-              <a:srgbClr val="E2E8F0"/>
+              <a:srgbClr val="E3DBCF"/>
             </a:solidFill>
           </a:ln>
           <a:effectLst/>
@@ -4408,7 +4782,7 @@
             </a:avLst>
           </a:prstGeom>
           <a:solidFill>
-            <a:srgbClr val="0284C7"/>
+            <a:srgbClr val="B7791F"/>
           </a:solidFill>
           <a:ln>
             <a:noFill/>
@@ -4425,7 +4799,7 @@
       </p:sp>
       <p:pic>
         <p:nvPicPr>
-          <p:cNvPr id="28" name="Picture 27" descr="image12.png"/>
+          <p:cNvPr id="28" name="Picture 27" descr="image12_3A3335.png"/>
           <p:cNvPicPr>
             <a:picLocks noChangeAspect="1"/>
           </p:cNvPicPr>
@@ -4473,7 +4847,7 @@
             <a:r>
               <a:rPr sz="950" b="1" i="0">
                 <a:solidFill>
-                  <a:srgbClr val="1E3A8A"/>
+                  <a:srgbClr val="9B1C24"/>
                 </a:solidFill>
                 <a:latin typeface="Aptos"/>
               </a:rPr>
@@ -4485,7 +4859,7 @@
             <a:r>
               <a:rPr sz="850" b="0" i="0">
                 <a:solidFill>
-                  <a:srgbClr val="475569"/>
+                  <a:srgbClr val="5A5555"/>
                 </a:solidFill>
                 <a:latin typeface="Aptos"/>
               </a:rPr>
@@ -4511,11 +4885,11 @@
             </a:avLst>
           </a:prstGeom>
           <a:solidFill>
-            <a:srgbClr val="FEF2F2"/>
+            <a:srgbClr val="FBE9E9"/>
           </a:solidFill>
           <a:ln w="9525">
             <a:solidFill>
-              <a:srgbClr val="FCA5A5"/>
+              <a:srgbClr val="F2B8B5"/>
             </a:solidFill>
           </a:ln>
           <a:effectLst/>
@@ -4543,7 +4917,7 @@
             <a:avLst/>
           </a:prstGeom>
           <a:solidFill>
-            <a:srgbClr val="DC2626"/>
+            <a:srgbClr val="E0262D"/>
           </a:solidFill>
           <a:ln>
             <a:noFill/>
@@ -4654,11 +5028,11 @@
             </a:avLst>
           </a:prstGeom>
           <a:solidFill>
-            <a:srgbClr val="FEF2F2"/>
+            <a:srgbClr val="FBE9E9"/>
           </a:solidFill>
           <a:ln w="9525">
             <a:solidFill>
-              <a:srgbClr val="FCA5A5"/>
+              <a:srgbClr val="F2B8B5"/>
             </a:solidFill>
           </a:ln>
           <a:effectLst/>
@@ -4686,7 +5060,7 @@
             <a:avLst/>
           </a:prstGeom>
           <a:solidFill>
-            <a:srgbClr val="DC2626"/>
+            <a:srgbClr val="E0262D"/>
           </a:solidFill>
           <a:ln>
             <a:noFill/>
@@ -4797,11 +5171,11 @@
             </a:avLst>
           </a:prstGeom>
           <a:solidFill>
-            <a:srgbClr val="FEF2F2"/>
+            <a:srgbClr val="FBE9E9"/>
           </a:solidFill>
           <a:ln w="9525">
             <a:solidFill>
-              <a:srgbClr val="FCA5A5"/>
+              <a:srgbClr val="F2B8B5"/>
             </a:solidFill>
           </a:ln>
           <a:effectLst/>
@@ -4829,7 +5203,7 @@
             <a:avLst/>
           </a:prstGeom>
           <a:solidFill>
-            <a:srgbClr val="DC2626"/>
+            <a:srgbClr val="E0262D"/>
           </a:solidFill>
           <a:ln>
             <a:noFill/>
@@ -4940,11 +5314,11 @@
             </a:avLst>
           </a:prstGeom>
           <a:solidFill>
-            <a:srgbClr val="FEF2F2"/>
+            <a:srgbClr val="FBE9E9"/>
           </a:solidFill>
           <a:ln w="9525">
             <a:solidFill>
-              <a:srgbClr val="FCA5A5"/>
+              <a:srgbClr val="F2B8B5"/>
             </a:solidFill>
           </a:ln>
           <a:effectLst/>
@@ -4972,7 +5346,7 @@
             <a:avLst/>
           </a:prstGeom>
           <a:solidFill>
-            <a:srgbClr val="DC2626"/>
+            <a:srgbClr val="E0262D"/>
           </a:solidFill>
           <a:ln>
             <a:noFill/>
@@ -5083,11 +5457,11 @@
             </a:avLst>
           </a:prstGeom>
           <a:solidFill>
-            <a:srgbClr val="FEF2F2"/>
+            <a:srgbClr val="FBE9E9"/>
           </a:solidFill>
           <a:ln w="9525">
             <a:solidFill>
-              <a:srgbClr val="FCA5A5"/>
+              <a:srgbClr val="F2B8B5"/>
             </a:solidFill>
           </a:ln>
           <a:effectLst/>
@@ -5115,7 +5489,7 @@
             <a:avLst/>
           </a:prstGeom>
           <a:solidFill>
-            <a:srgbClr val="DC2626"/>
+            <a:srgbClr val="E0262D"/>
           </a:solidFill>
           <a:ln>
             <a:noFill/>
@@ -5226,7 +5600,7 @@
             </a:avLst>
           </a:prstGeom>
           <a:solidFill>
-            <a:srgbClr val="1E3A8A"/>
+            <a:srgbClr val="9B1C24"/>
           </a:solidFill>
           <a:ln>
             <a:noFill/>
@@ -5321,7 +5695,7 @@
           </a:solidFill>
           <a:ln w="9525">
             <a:solidFill>
-              <a:srgbClr val="E2E8F0"/>
+              <a:srgbClr val="E3DBCF"/>
             </a:solidFill>
           </a:ln>
           <a:effectLst/>
@@ -5349,7 +5723,7 @@
             <a:avLst/>
           </a:prstGeom>
           <a:solidFill>
-            <a:srgbClr val="2563EB"/>
+            <a:srgbClr val="9B1C24"/>
           </a:solidFill>
           <a:ln>
             <a:noFill/>
@@ -5390,7 +5764,7 @@
             <a:r>
               <a:rPr sz="2000" b="1" i="0">
                 <a:solidFill>
-                  <a:srgbClr val="2563EB"/>
+                  <a:srgbClr val="9B1C24"/>
                 </a:solidFill>
                 <a:latin typeface="Aptos"/>
               </a:rPr>
@@ -5455,7 +5829,7 @@
           </a:solidFill>
           <a:ln w="9525">
             <a:solidFill>
-              <a:srgbClr val="E2E8F0"/>
+              <a:srgbClr val="E3DBCF"/>
             </a:solidFill>
           </a:ln>
           <a:effectLst/>
@@ -5483,7 +5857,7 @@
             <a:avLst/>
           </a:prstGeom>
           <a:solidFill>
-            <a:srgbClr val="0D9488"/>
+            <a:srgbClr val="B7791F"/>
           </a:solidFill>
           <a:ln>
             <a:noFill/>
@@ -5524,7 +5898,7 @@
             <a:r>
               <a:rPr sz="2000" b="1" i="0">
                 <a:solidFill>
-                  <a:srgbClr val="0D9488"/>
+                  <a:srgbClr val="B7791F"/>
                 </a:solidFill>
                 <a:latin typeface="Aptos"/>
               </a:rPr>
@@ -5589,7 +5963,7 @@
           </a:solidFill>
           <a:ln w="9525">
             <a:solidFill>
-              <a:srgbClr val="E2E8F0"/>
+              <a:srgbClr val="E3DBCF"/>
             </a:solidFill>
           </a:ln>
           <a:effectLst/>
@@ -5617,7 +5991,7 @@
             <a:avLst/>
           </a:prstGeom>
           <a:solidFill>
-            <a:srgbClr val="16A34A"/>
+            <a:srgbClr val="B7791F"/>
           </a:solidFill>
           <a:ln>
             <a:noFill/>
@@ -5658,7 +6032,7 @@
             <a:r>
               <a:rPr sz="2000" b="1" i="0">
                 <a:solidFill>
-                  <a:srgbClr val="16A34A"/>
+                  <a:srgbClr val="B7791F"/>
                 </a:solidFill>
                 <a:latin typeface="Aptos"/>
               </a:rPr>
@@ -5723,7 +6097,7 @@
           </a:solidFill>
           <a:ln w="9525">
             <a:solidFill>
-              <a:srgbClr val="E2E8F0"/>
+              <a:srgbClr val="E3DBCF"/>
             </a:solidFill>
           </a:ln>
           <a:effectLst/>
@@ -5751,7 +6125,7 @@
             <a:avLst/>
           </a:prstGeom>
           <a:solidFill>
-            <a:srgbClr val="16A34A"/>
+            <a:srgbClr val="B7791F"/>
           </a:solidFill>
           <a:ln>
             <a:noFill/>
@@ -5792,7 +6166,7 @@
             <a:r>
               <a:rPr sz="2000" b="1" i="0">
                 <a:solidFill>
-                  <a:srgbClr val="16A34A"/>
+                  <a:srgbClr val="B7791F"/>
                 </a:solidFill>
                 <a:latin typeface="Aptos"/>
               </a:rPr>
@@ -5857,7 +6231,7 @@
           </a:solidFill>
           <a:ln w="9525">
             <a:solidFill>
-              <a:srgbClr val="E2E8F0"/>
+              <a:srgbClr val="E3DBCF"/>
             </a:solidFill>
           </a:ln>
           <a:effectLst/>
@@ -5885,7 +6259,7 @@
             <a:avLst/>
           </a:prstGeom>
           <a:solidFill>
-            <a:srgbClr val="7E22CE"/>
+            <a:srgbClr val="3A3335"/>
           </a:solidFill>
           <a:ln>
             <a:noFill/>
@@ -5926,7 +6300,7 @@
             <a:r>
               <a:rPr sz="2000" b="1" i="0">
                 <a:solidFill>
-                  <a:srgbClr val="7E22CE"/>
+                  <a:srgbClr val="3A3335"/>
                 </a:solidFill>
                 <a:latin typeface="Aptos"/>
               </a:rPr>
@@ -5991,7 +6365,7 @@
           </a:solidFill>
           <a:ln w="9525">
             <a:solidFill>
-              <a:srgbClr val="E2E8F0"/>
+              <a:srgbClr val="E3DBCF"/>
             </a:solidFill>
           </a:ln>
           <a:effectLst/>
@@ -6019,7 +6393,7 @@
             <a:avLst/>
           </a:prstGeom>
           <a:solidFill>
-            <a:srgbClr val="DC2626"/>
+            <a:srgbClr val="E0262D"/>
           </a:solidFill>
           <a:ln>
             <a:noFill/>
@@ -6060,7 +6434,7 @@
             <a:r>
               <a:rPr sz="2000" b="1" i="0">
                 <a:solidFill>
-                  <a:srgbClr val="DC2626"/>
+                  <a:srgbClr val="E0262D"/>
                 </a:solidFill>
                 <a:latin typeface="Aptos"/>
               </a:rPr>
@@ -6129,7 +6503,14 @@
         <p:cNvGrpSpPr/>
         <p:nvPr/>
       </p:nvGrpSpPr>
-      <p:grpSpPr/>
+      <p:grpSpPr>
+        <a:xfrm>
+          <a:off x="0" y="0"/>
+          <a:ext cx="0" cy="0"/>
+          <a:chOff x="0" y="0"/>
+          <a:chExt cx="0" cy="0"/>
+        </a:xfrm>
+      </p:grpSpPr>
       <p:sp>
         <p:nvSpPr>
           <p:cNvPr id="2" name="Rectangle 1"/>
@@ -6172,6 +6553,7 @@
           <a:lstStyle/>
           <a:p>
             <a:pPr algn="ctr"/>
+            <a:endParaRPr/>
           </a:p>
         </p:txBody>
       </p:sp>
@@ -6244,51 +6626,6 @@
             <a:r>
               <a:t>PROPOSED SOLUTION</a:t>
             </a:r>
-          </a:p>
-        </p:txBody>
-      </p:sp>
-      <p:sp>
-        <p:nvSpPr>
-          <p:cNvPr id="5" name="Rectangle 4"/>
-          <p:cNvSpPr/>
-          <p:nvPr/>
-        </p:nvSpPr>
-        <p:spPr>
-          <a:xfrm>
-            <a:off x="411480" y="1170432"/>
-            <a:ext cx="1051560" cy="54864"/>
-          </a:xfrm>
-          <a:prstGeom prst="rect">
-            <a:avLst/>
-          </a:prstGeom>
-          <a:solidFill>
-            <a:srgbClr val="FFBE2D"/>
-          </a:solidFill>
-          <a:ln>
-            <a:solidFill>
-              <a:srgbClr val="FFBE2D"/>
-            </a:solidFill>
-          </a:ln>
-        </p:spPr>
-        <p:style>
-          <a:lnRef idx="1">
-            <a:schemeClr val="accent1"/>
-          </a:lnRef>
-          <a:fillRef idx="3">
-            <a:schemeClr val="accent1"/>
-          </a:fillRef>
-          <a:effectRef idx="2">
-            <a:schemeClr val="accent1"/>
-          </a:effectRef>
-          <a:fontRef idx="minor">
-            <a:schemeClr val="lt1"/>
-          </a:fontRef>
-        </p:style>
-        <p:txBody>
-          <a:bodyPr rtlCol="0" anchor="ctr"/>
-          <a:lstStyle/>
-          <a:p>
-            <a:pPr algn="ctr"/>
           </a:p>
         </p:txBody>
       </p:sp>
@@ -6345,11 +6682,11 @@
             </a:avLst>
           </a:prstGeom>
           <a:solidFill>
-            <a:srgbClr val="F4F8FC"/>
+            <a:srgbClr val="F3EDE3"/>
           </a:solidFill>
           <a:ln w="9525">
             <a:solidFill>
-              <a:srgbClr val="BDD7EE"/>
+              <a:srgbClr val="E3DBCF"/>
             </a:solidFill>
           </a:ln>
           <a:effectLst/>
@@ -6379,7 +6716,7 @@
             </a:avLst>
           </a:prstGeom>
           <a:solidFill>
-            <a:srgbClr val="0070C0"/>
+            <a:srgbClr val="E0262D"/>
           </a:solidFill>
           <a:ln>
             <a:noFill/>
@@ -6409,7 +6746,7 @@
             <a:avLst/>
           </a:prstGeom>
           <a:solidFill>
-            <a:srgbClr val="0070C0"/>
+            <a:srgbClr val="E0262D"/>
           </a:solidFill>
           <a:ln>
             <a:noFill/>
@@ -6474,7 +6811,7 @@
             <a:r>
               <a:rPr sz="1150" b="1" i="0">
                 <a:solidFill>
-                  <a:srgbClr val="1F497D"/>
+                  <a:srgbClr val="3A3335"/>
                 </a:solidFill>
                 <a:latin typeface="Aptos"/>
               </a:rPr>
@@ -6492,7 +6829,7 @@
             <a:r>
               <a:rPr sz="1150" b="1" i="0">
                 <a:solidFill>
-                  <a:srgbClr val="0070C0"/>
+                  <a:srgbClr val="E0262D"/>
                 </a:solidFill>
                 <a:latin typeface="Aptos"/>
               </a:rPr>
@@ -6554,26 +6891,26 @@
                   <a:tcPr marL="64008" marR="64008" marT="27432" marB="27432" anchor="ctr">
                     <a:lnL w="6350">
                       <a:solidFill>
-                        <a:srgbClr val="BDD7EE"/>
+                        <a:srgbClr val="E3DBCF"/>
                       </a:solidFill>
                     </a:lnL>
                     <a:lnR w="6350">
                       <a:solidFill>
-                        <a:srgbClr val="BDD7EE"/>
+                        <a:srgbClr val="E3DBCF"/>
                       </a:solidFill>
                     </a:lnR>
                     <a:lnT w="6350">
                       <a:solidFill>
-                        <a:srgbClr val="BDD7EE"/>
+                        <a:srgbClr val="E3DBCF"/>
                       </a:solidFill>
                     </a:lnT>
                     <a:lnB w="6350">
                       <a:solidFill>
-                        <a:srgbClr val="BDD7EE"/>
+                        <a:srgbClr val="E3DBCF"/>
                       </a:solidFill>
                     </a:lnB>
                     <a:solidFill>
-                      <a:srgbClr val="0070C0"/>
+                      <a:srgbClr val="E0262D"/>
                     </a:solidFill>
                   </a:tcPr>
                 </a:tc>
@@ -6597,26 +6934,26 @@
                   <a:tcPr marL="64008" marR="64008" marT="27432" marB="27432" anchor="ctr">
                     <a:lnL w="6350">
                       <a:solidFill>
-                        <a:srgbClr val="BDD7EE"/>
+                        <a:srgbClr val="E3DBCF"/>
                       </a:solidFill>
                     </a:lnL>
                     <a:lnR w="6350">
                       <a:solidFill>
-                        <a:srgbClr val="BDD7EE"/>
+                        <a:srgbClr val="E3DBCF"/>
                       </a:solidFill>
                     </a:lnR>
                     <a:lnT w="6350">
                       <a:solidFill>
-                        <a:srgbClr val="BDD7EE"/>
+                        <a:srgbClr val="E3DBCF"/>
                       </a:solidFill>
                     </a:lnT>
                     <a:lnB w="6350">
                       <a:solidFill>
-                        <a:srgbClr val="BDD7EE"/>
+                        <a:srgbClr val="E3DBCF"/>
                       </a:solidFill>
                     </a:lnB>
                     <a:solidFill>
-                      <a:srgbClr val="0070C0"/>
+                      <a:srgbClr val="E0262D"/>
                     </a:solidFill>
                   </a:tcPr>
                 </a:tc>
@@ -6640,26 +6977,26 @@
                   <a:tcPr marL="64008" marR="64008" marT="27432" marB="27432" anchor="ctr">
                     <a:lnL w="6350">
                       <a:solidFill>
-                        <a:srgbClr val="BDD7EE"/>
+                        <a:srgbClr val="E3DBCF"/>
                       </a:solidFill>
                     </a:lnL>
                     <a:lnR w="6350">
                       <a:solidFill>
-                        <a:srgbClr val="BDD7EE"/>
+                        <a:srgbClr val="E3DBCF"/>
                       </a:solidFill>
                     </a:lnR>
                     <a:lnT w="6350">
                       <a:solidFill>
-                        <a:srgbClr val="BDD7EE"/>
+                        <a:srgbClr val="E3DBCF"/>
                       </a:solidFill>
                     </a:lnT>
                     <a:lnB w="6350">
                       <a:solidFill>
-                        <a:srgbClr val="BDD7EE"/>
+                        <a:srgbClr val="E3DBCF"/>
                       </a:solidFill>
                     </a:lnB>
                     <a:solidFill>
-                      <a:srgbClr val="0070C0"/>
+                      <a:srgbClr val="E0262D"/>
                     </a:solidFill>
                   </a:tcPr>
                 </a:tc>
@@ -6674,7 +7011,7 @@
                       <a:r>
                         <a:rPr sz="900" b="1" i="0">
                           <a:solidFill>
-                            <a:srgbClr val="1F497D"/>
+                            <a:srgbClr val="3A3335"/>
                           </a:solidFill>
                           <a:latin typeface="Aptos"/>
                         </a:rPr>
@@ -6685,22 +7022,22 @@
                   <a:tcPr marL="64008" marR="64008" marT="27432" marB="27432" anchor="ctr">
                     <a:lnL w="6350">
                       <a:solidFill>
-                        <a:srgbClr val="BDD7EE"/>
+                        <a:srgbClr val="E3DBCF"/>
                       </a:solidFill>
                     </a:lnL>
                     <a:lnR w="6350">
                       <a:solidFill>
-                        <a:srgbClr val="BDD7EE"/>
+                        <a:srgbClr val="E3DBCF"/>
                       </a:solidFill>
                     </a:lnR>
                     <a:lnT w="6350">
                       <a:solidFill>
-                        <a:srgbClr val="BDD7EE"/>
+                        <a:srgbClr val="E3DBCF"/>
                       </a:solidFill>
                     </a:lnT>
                     <a:lnB w="6350">
                       <a:solidFill>
-                        <a:srgbClr val="BDD7EE"/>
+                        <a:srgbClr val="E3DBCF"/>
                       </a:solidFill>
                     </a:lnB>
                     <a:solidFill>
@@ -6728,22 +7065,22 @@
                   <a:tcPr marL="64008" marR="64008" marT="27432" marB="27432" anchor="ctr">
                     <a:lnL w="6350">
                       <a:solidFill>
-                        <a:srgbClr val="BDD7EE"/>
+                        <a:srgbClr val="E3DBCF"/>
                       </a:solidFill>
                     </a:lnL>
                     <a:lnR w="6350">
                       <a:solidFill>
-                        <a:srgbClr val="BDD7EE"/>
+                        <a:srgbClr val="E3DBCF"/>
                       </a:solidFill>
                     </a:lnR>
                     <a:lnT w="6350">
                       <a:solidFill>
-                        <a:srgbClr val="BDD7EE"/>
+                        <a:srgbClr val="E3DBCF"/>
                       </a:solidFill>
                     </a:lnT>
                     <a:lnB w="6350">
                       <a:solidFill>
-                        <a:srgbClr val="BDD7EE"/>
+                        <a:srgbClr val="E3DBCF"/>
                       </a:solidFill>
                     </a:lnB>
                     <a:solidFill>
@@ -6771,22 +7108,22 @@
                   <a:tcPr marL="64008" marR="64008" marT="27432" marB="27432" anchor="ctr">
                     <a:lnL w="6350">
                       <a:solidFill>
-                        <a:srgbClr val="BDD7EE"/>
+                        <a:srgbClr val="E3DBCF"/>
                       </a:solidFill>
                     </a:lnL>
                     <a:lnR w="6350">
                       <a:solidFill>
-                        <a:srgbClr val="BDD7EE"/>
+                        <a:srgbClr val="E3DBCF"/>
                       </a:solidFill>
                     </a:lnR>
                     <a:lnT w="6350">
                       <a:solidFill>
-                        <a:srgbClr val="BDD7EE"/>
+                        <a:srgbClr val="E3DBCF"/>
                       </a:solidFill>
                     </a:lnT>
                     <a:lnB w="6350">
                       <a:solidFill>
-                        <a:srgbClr val="BDD7EE"/>
+                        <a:srgbClr val="E3DBCF"/>
                       </a:solidFill>
                     </a:lnB>
                     <a:solidFill>
@@ -6805,7 +7142,7 @@
                       <a:r>
                         <a:rPr sz="900" b="1" i="0">
                           <a:solidFill>
-                            <a:srgbClr val="1F497D"/>
+                            <a:srgbClr val="3A3335"/>
                           </a:solidFill>
                           <a:latin typeface="Aptos"/>
                         </a:rPr>
@@ -6816,26 +7153,26 @@
                   <a:tcPr marL="64008" marR="64008" marT="27432" marB="27432" anchor="ctr">
                     <a:lnL w="6350">
                       <a:solidFill>
-                        <a:srgbClr val="BDD7EE"/>
+                        <a:srgbClr val="E3DBCF"/>
                       </a:solidFill>
                     </a:lnL>
                     <a:lnR w="6350">
                       <a:solidFill>
-                        <a:srgbClr val="BDD7EE"/>
+                        <a:srgbClr val="E3DBCF"/>
                       </a:solidFill>
                     </a:lnR>
                     <a:lnT w="6350">
                       <a:solidFill>
-                        <a:srgbClr val="BDD7EE"/>
+                        <a:srgbClr val="E3DBCF"/>
                       </a:solidFill>
                     </a:lnT>
                     <a:lnB w="6350">
                       <a:solidFill>
-                        <a:srgbClr val="BDD7EE"/>
+                        <a:srgbClr val="E3DBCF"/>
                       </a:solidFill>
                     </a:lnB>
                     <a:solidFill>
-                      <a:srgbClr val="F4F8FC"/>
+                      <a:srgbClr val="F3EDE3"/>
                     </a:solidFill>
                   </a:tcPr>
                 </a:tc>
@@ -6859,26 +7196,26 @@
                   <a:tcPr marL="64008" marR="64008" marT="27432" marB="27432" anchor="ctr">
                     <a:lnL w="6350">
                       <a:solidFill>
-                        <a:srgbClr val="BDD7EE"/>
+                        <a:srgbClr val="E3DBCF"/>
                       </a:solidFill>
                     </a:lnL>
                     <a:lnR w="6350">
                       <a:solidFill>
-                        <a:srgbClr val="BDD7EE"/>
+                        <a:srgbClr val="E3DBCF"/>
                       </a:solidFill>
                     </a:lnR>
                     <a:lnT w="6350">
                       <a:solidFill>
-                        <a:srgbClr val="BDD7EE"/>
+                        <a:srgbClr val="E3DBCF"/>
                       </a:solidFill>
                     </a:lnT>
                     <a:lnB w="6350">
                       <a:solidFill>
-                        <a:srgbClr val="BDD7EE"/>
+                        <a:srgbClr val="E3DBCF"/>
                       </a:solidFill>
                     </a:lnB>
                     <a:solidFill>
-                      <a:srgbClr val="F4F8FC"/>
+                      <a:srgbClr val="F3EDE3"/>
                     </a:solidFill>
                   </a:tcPr>
                 </a:tc>
@@ -6902,26 +7239,26 @@
                   <a:tcPr marL="64008" marR="64008" marT="27432" marB="27432" anchor="ctr">
                     <a:lnL w="6350">
                       <a:solidFill>
-                        <a:srgbClr val="BDD7EE"/>
+                        <a:srgbClr val="E3DBCF"/>
                       </a:solidFill>
                     </a:lnL>
                     <a:lnR w="6350">
                       <a:solidFill>
-                        <a:srgbClr val="BDD7EE"/>
+                        <a:srgbClr val="E3DBCF"/>
                       </a:solidFill>
                     </a:lnR>
                     <a:lnT w="6350">
                       <a:solidFill>
-                        <a:srgbClr val="BDD7EE"/>
+                        <a:srgbClr val="E3DBCF"/>
                       </a:solidFill>
                     </a:lnT>
                     <a:lnB w="6350">
                       <a:solidFill>
-                        <a:srgbClr val="BDD7EE"/>
+                        <a:srgbClr val="E3DBCF"/>
                       </a:solidFill>
                     </a:lnB>
                     <a:solidFill>
-                      <a:srgbClr val="F4F8FC"/>
+                      <a:srgbClr val="F3EDE3"/>
                     </a:solidFill>
                   </a:tcPr>
                 </a:tc>
@@ -6936,7 +7273,7 @@
                       <a:r>
                         <a:rPr sz="900" b="1" i="0">
                           <a:solidFill>
-                            <a:srgbClr val="1F497D"/>
+                            <a:srgbClr val="3A3335"/>
                           </a:solidFill>
                           <a:latin typeface="Aptos"/>
                         </a:rPr>
@@ -6947,22 +7284,22 @@
                   <a:tcPr marL="64008" marR="64008" marT="27432" marB="27432" anchor="ctr">
                     <a:lnL w="6350">
                       <a:solidFill>
-                        <a:srgbClr val="BDD7EE"/>
+                        <a:srgbClr val="E3DBCF"/>
                       </a:solidFill>
                     </a:lnL>
                     <a:lnR w="6350">
                       <a:solidFill>
-                        <a:srgbClr val="BDD7EE"/>
+                        <a:srgbClr val="E3DBCF"/>
                       </a:solidFill>
                     </a:lnR>
                     <a:lnT w="6350">
                       <a:solidFill>
-                        <a:srgbClr val="BDD7EE"/>
+                        <a:srgbClr val="E3DBCF"/>
                       </a:solidFill>
                     </a:lnT>
                     <a:lnB w="6350">
                       <a:solidFill>
-                        <a:srgbClr val="BDD7EE"/>
+                        <a:srgbClr val="E3DBCF"/>
                       </a:solidFill>
                     </a:lnB>
                     <a:solidFill>
@@ -6990,22 +7327,22 @@
                   <a:tcPr marL="64008" marR="64008" marT="27432" marB="27432" anchor="ctr">
                     <a:lnL w="6350">
                       <a:solidFill>
-                        <a:srgbClr val="BDD7EE"/>
+                        <a:srgbClr val="E3DBCF"/>
                       </a:solidFill>
                     </a:lnL>
                     <a:lnR w="6350">
                       <a:solidFill>
-                        <a:srgbClr val="BDD7EE"/>
+                        <a:srgbClr val="E3DBCF"/>
                       </a:solidFill>
                     </a:lnR>
                     <a:lnT w="6350">
                       <a:solidFill>
-                        <a:srgbClr val="BDD7EE"/>
+                        <a:srgbClr val="E3DBCF"/>
                       </a:solidFill>
                     </a:lnT>
                     <a:lnB w="6350">
                       <a:solidFill>
-                        <a:srgbClr val="BDD7EE"/>
+                        <a:srgbClr val="E3DBCF"/>
                       </a:solidFill>
                     </a:lnB>
                     <a:solidFill>
@@ -7033,22 +7370,22 @@
                   <a:tcPr marL="64008" marR="64008" marT="27432" marB="27432" anchor="ctr">
                     <a:lnL w="6350">
                       <a:solidFill>
-                        <a:srgbClr val="BDD7EE"/>
+                        <a:srgbClr val="E3DBCF"/>
                       </a:solidFill>
                     </a:lnL>
                     <a:lnR w="6350">
                       <a:solidFill>
-                        <a:srgbClr val="BDD7EE"/>
+                        <a:srgbClr val="E3DBCF"/>
                       </a:solidFill>
                     </a:lnR>
                     <a:lnT w="6350">
                       <a:solidFill>
-                        <a:srgbClr val="BDD7EE"/>
+                        <a:srgbClr val="E3DBCF"/>
                       </a:solidFill>
                     </a:lnT>
                     <a:lnB w="6350">
                       <a:solidFill>
-                        <a:srgbClr val="BDD7EE"/>
+                        <a:srgbClr val="E3DBCF"/>
                       </a:solidFill>
                     </a:lnB>
                     <a:solidFill>
@@ -7067,7 +7404,7 @@
                       <a:r>
                         <a:rPr sz="900" b="1" i="0">
                           <a:solidFill>
-                            <a:srgbClr val="1F497D"/>
+                            <a:srgbClr val="3A3335"/>
                           </a:solidFill>
                           <a:latin typeface="Aptos"/>
                         </a:rPr>
@@ -7078,26 +7415,26 @@
                   <a:tcPr marL="64008" marR="64008" marT="27432" marB="27432" anchor="ctr">
                     <a:lnL w="6350">
                       <a:solidFill>
-                        <a:srgbClr val="BDD7EE"/>
+                        <a:srgbClr val="E3DBCF"/>
                       </a:solidFill>
                     </a:lnL>
                     <a:lnR w="6350">
                       <a:solidFill>
-                        <a:srgbClr val="BDD7EE"/>
+                        <a:srgbClr val="E3DBCF"/>
                       </a:solidFill>
                     </a:lnR>
                     <a:lnT w="6350">
                       <a:solidFill>
-                        <a:srgbClr val="BDD7EE"/>
+                        <a:srgbClr val="E3DBCF"/>
                       </a:solidFill>
                     </a:lnT>
                     <a:lnB w="6350">
                       <a:solidFill>
-                        <a:srgbClr val="BDD7EE"/>
+                        <a:srgbClr val="E3DBCF"/>
                       </a:solidFill>
                     </a:lnB>
                     <a:solidFill>
-                      <a:srgbClr val="F4F8FC"/>
+                      <a:srgbClr val="F3EDE3"/>
                     </a:solidFill>
                   </a:tcPr>
                 </a:tc>
@@ -7121,26 +7458,26 @@
                   <a:tcPr marL="64008" marR="64008" marT="27432" marB="27432" anchor="ctr">
                     <a:lnL w="6350">
                       <a:solidFill>
-                        <a:srgbClr val="BDD7EE"/>
+                        <a:srgbClr val="E3DBCF"/>
                       </a:solidFill>
                     </a:lnL>
                     <a:lnR w="6350">
                       <a:solidFill>
-                        <a:srgbClr val="BDD7EE"/>
+                        <a:srgbClr val="E3DBCF"/>
                       </a:solidFill>
                     </a:lnR>
                     <a:lnT w="6350">
                       <a:solidFill>
-                        <a:srgbClr val="BDD7EE"/>
+                        <a:srgbClr val="E3DBCF"/>
                       </a:solidFill>
                     </a:lnT>
                     <a:lnB w="6350">
                       <a:solidFill>
-                        <a:srgbClr val="BDD7EE"/>
+                        <a:srgbClr val="E3DBCF"/>
                       </a:solidFill>
                     </a:lnB>
                     <a:solidFill>
-                      <a:srgbClr val="F4F8FC"/>
+                      <a:srgbClr val="F3EDE3"/>
                     </a:solidFill>
                   </a:tcPr>
                 </a:tc>
@@ -7164,26 +7501,26 @@
                   <a:tcPr marL="64008" marR="64008" marT="27432" marB="27432" anchor="ctr">
                     <a:lnL w="6350">
                       <a:solidFill>
-                        <a:srgbClr val="BDD7EE"/>
+                        <a:srgbClr val="E3DBCF"/>
                       </a:solidFill>
                     </a:lnL>
                     <a:lnR w="6350">
                       <a:solidFill>
-                        <a:srgbClr val="BDD7EE"/>
+                        <a:srgbClr val="E3DBCF"/>
                       </a:solidFill>
                     </a:lnR>
                     <a:lnT w="6350">
                       <a:solidFill>
-                        <a:srgbClr val="BDD7EE"/>
+                        <a:srgbClr val="E3DBCF"/>
                       </a:solidFill>
                     </a:lnT>
                     <a:lnB w="6350">
                       <a:solidFill>
-                        <a:srgbClr val="BDD7EE"/>
+                        <a:srgbClr val="E3DBCF"/>
                       </a:solidFill>
                     </a:lnB>
                     <a:solidFill>
-                      <a:srgbClr val="F4F8FC"/>
+                      <a:srgbClr val="F3EDE3"/>
                     </a:solidFill>
                   </a:tcPr>
                 </a:tc>
@@ -7198,7 +7535,7 @@
                       <a:r>
                         <a:rPr sz="900" b="1" i="0">
                           <a:solidFill>
-                            <a:srgbClr val="1F497D"/>
+                            <a:srgbClr val="3A3335"/>
                           </a:solidFill>
                           <a:latin typeface="Aptos"/>
                         </a:rPr>
@@ -7209,22 +7546,22 @@
                   <a:tcPr marL="64008" marR="64008" marT="27432" marB="27432" anchor="ctr">
                     <a:lnL w="6350">
                       <a:solidFill>
-                        <a:srgbClr val="BDD7EE"/>
+                        <a:srgbClr val="E3DBCF"/>
                       </a:solidFill>
                     </a:lnL>
                     <a:lnR w="6350">
                       <a:solidFill>
-                        <a:srgbClr val="BDD7EE"/>
+                        <a:srgbClr val="E3DBCF"/>
                       </a:solidFill>
                     </a:lnR>
                     <a:lnT w="6350">
                       <a:solidFill>
-                        <a:srgbClr val="BDD7EE"/>
+                        <a:srgbClr val="E3DBCF"/>
                       </a:solidFill>
                     </a:lnT>
                     <a:lnB w="6350">
                       <a:solidFill>
-                        <a:srgbClr val="BDD7EE"/>
+                        <a:srgbClr val="E3DBCF"/>
                       </a:solidFill>
                     </a:lnB>
                     <a:solidFill>
@@ -7252,22 +7589,22 @@
                   <a:tcPr marL="64008" marR="64008" marT="27432" marB="27432" anchor="ctr">
                     <a:lnL w="6350">
                       <a:solidFill>
-                        <a:srgbClr val="BDD7EE"/>
+                        <a:srgbClr val="E3DBCF"/>
                       </a:solidFill>
                     </a:lnL>
                     <a:lnR w="6350">
                       <a:solidFill>
-                        <a:srgbClr val="BDD7EE"/>
+                        <a:srgbClr val="E3DBCF"/>
                       </a:solidFill>
                     </a:lnR>
                     <a:lnT w="6350">
                       <a:solidFill>
-                        <a:srgbClr val="BDD7EE"/>
+                        <a:srgbClr val="E3DBCF"/>
                       </a:solidFill>
                     </a:lnT>
                     <a:lnB w="6350">
                       <a:solidFill>
-                        <a:srgbClr val="BDD7EE"/>
+                        <a:srgbClr val="E3DBCF"/>
                       </a:solidFill>
                     </a:lnB>
                     <a:solidFill>
@@ -7295,22 +7632,22 @@
                   <a:tcPr marL="64008" marR="64008" marT="27432" marB="27432" anchor="ctr">
                     <a:lnL w="6350">
                       <a:solidFill>
-                        <a:srgbClr val="BDD7EE"/>
+                        <a:srgbClr val="E3DBCF"/>
                       </a:solidFill>
                     </a:lnL>
                     <a:lnR w="6350">
                       <a:solidFill>
-                        <a:srgbClr val="BDD7EE"/>
+                        <a:srgbClr val="E3DBCF"/>
                       </a:solidFill>
                     </a:lnR>
                     <a:lnT w="6350">
                       <a:solidFill>
-                        <a:srgbClr val="BDD7EE"/>
+                        <a:srgbClr val="E3DBCF"/>
                       </a:solidFill>
                     </a:lnT>
                     <a:lnB w="6350">
                       <a:solidFill>
-                        <a:srgbClr val="BDD7EE"/>
+                        <a:srgbClr val="E3DBCF"/>
                       </a:solidFill>
                     </a:lnB>
                     <a:solidFill>
@@ -7329,7 +7666,7 @@
                       <a:r>
                         <a:rPr sz="900" b="1" i="0">
                           <a:solidFill>
-                            <a:srgbClr val="1F497D"/>
+                            <a:srgbClr val="3A3335"/>
                           </a:solidFill>
                           <a:latin typeface="Aptos"/>
                         </a:rPr>
@@ -7340,26 +7677,26 @@
                   <a:tcPr marL="64008" marR="64008" marT="27432" marB="27432" anchor="ctr">
                     <a:lnL w="6350">
                       <a:solidFill>
-                        <a:srgbClr val="BDD7EE"/>
+                        <a:srgbClr val="E3DBCF"/>
                       </a:solidFill>
                     </a:lnL>
                     <a:lnR w="6350">
                       <a:solidFill>
-                        <a:srgbClr val="BDD7EE"/>
+                        <a:srgbClr val="E3DBCF"/>
                       </a:solidFill>
                     </a:lnR>
                     <a:lnT w="6350">
                       <a:solidFill>
-                        <a:srgbClr val="BDD7EE"/>
+                        <a:srgbClr val="E3DBCF"/>
                       </a:solidFill>
                     </a:lnT>
                     <a:lnB w="6350">
                       <a:solidFill>
-                        <a:srgbClr val="BDD7EE"/>
+                        <a:srgbClr val="E3DBCF"/>
                       </a:solidFill>
                     </a:lnB>
                     <a:solidFill>
-                      <a:srgbClr val="F4F8FC"/>
+                      <a:srgbClr val="F3EDE3"/>
                     </a:solidFill>
                   </a:tcPr>
                 </a:tc>
@@ -7383,26 +7720,26 @@
                   <a:tcPr marL="64008" marR="64008" marT="27432" marB="27432" anchor="ctr">
                     <a:lnL w="6350">
                       <a:solidFill>
-                        <a:srgbClr val="BDD7EE"/>
+                        <a:srgbClr val="E3DBCF"/>
                       </a:solidFill>
                     </a:lnL>
                     <a:lnR w="6350">
                       <a:solidFill>
-                        <a:srgbClr val="BDD7EE"/>
+                        <a:srgbClr val="E3DBCF"/>
                       </a:solidFill>
                     </a:lnR>
                     <a:lnT w="6350">
                       <a:solidFill>
-                        <a:srgbClr val="BDD7EE"/>
+                        <a:srgbClr val="E3DBCF"/>
                       </a:solidFill>
                     </a:lnT>
                     <a:lnB w="6350">
                       <a:solidFill>
-                        <a:srgbClr val="BDD7EE"/>
+                        <a:srgbClr val="E3DBCF"/>
                       </a:solidFill>
                     </a:lnB>
                     <a:solidFill>
-                      <a:srgbClr val="F4F8FC"/>
+                      <a:srgbClr val="F3EDE3"/>
                     </a:solidFill>
                   </a:tcPr>
                 </a:tc>
@@ -7426,26 +7763,26 @@
                   <a:tcPr marL="64008" marR="64008" marT="27432" marB="27432" anchor="ctr">
                     <a:lnL w="6350">
                       <a:solidFill>
-                        <a:srgbClr val="BDD7EE"/>
+                        <a:srgbClr val="E3DBCF"/>
                       </a:solidFill>
                     </a:lnL>
                     <a:lnR w="6350">
                       <a:solidFill>
-                        <a:srgbClr val="BDD7EE"/>
+                        <a:srgbClr val="E3DBCF"/>
                       </a:solidFill>
                     </a:lnR>
                     <a:lnT w="6350">
                       <a:solidFill>
-                        <a:srgbClr val="BDD7EE"/>
+                        <a:srgbClr val="E3DBCF"/>
                       </a:solidFill>
                     </a:lnT>
                     <a:lnB w="6350">
                       <a:solidFill>
-                        <a:srgbClr val="BDD7EE"/>
+                        <a:srgbClr val="E3DBCF"/>
                       </a:solidFill>
                     </a:lnB>
                     <a:solidFill>
-                      <a:srgbClr val="F4F8FC"/>
+                      <a:srgbClr val="F3EDE3"/>
                     </a:solidFill>
                   </a:tcPr>
                 </a:tc>
@@ -7471,7 +7808,7 @@
             </a:avLst>
           </a:prstGeom>
           <a:solidFill>
-            <a:srgbClr val="1E3A8A"/>
+            <a:srgbClr val="9B1C24"/>
           </a:solidFill>
           <a:ln>
             <a:noFill/>
@@ -7542,7 +7879,7 @@
           </a:solidFill>
           <a:ln w="9525">
             <a:solidFill>
-              <a:srgbClr val="E2E8F0"/>
+              <a:srgbClr val="E3DBCF"/>
             </a:solidFill>
           </a:ln>
           <a:effectLst/>
@@ -7605,7 +7942,7 @@
             <a:r>
               <a:rPr sz="850" b="1" i="0">
                 <a:solidFill>
-                  <a:srgbClr val="1E3A8A"/>
+                  <a:srgbClr val="9B1C24"/>
                 </a:solidFill>
                 <a:latin typeface="Aptos"/>
               </a:rPr>
@@ -7625,7 +7962,7 @@
       </p:sp>
       <p:pic>
         <p:nvPicPr>
-          <p:cNvPr id="18" name="Picture 17" descr="image12.png"/>
+          <p:cNvPr id="18" name="Picture 17" descr="image12_3A3335.png"/>
           <p:cNvPicPr>
             <a:picLocks noChangeAspect="1"/>
           </p:cNvPicPr>
@@ -7673,7 +8010,7 @@
             <a:r>
               <a:rPr sz="850" b="1" i="0">
                 <a:solidFill>
-                  <a:srgbClr val="1E3A8A"/>
+                  <a:srgbClr val="9B1C24"/>
                 </a:solidFill>
                 <a:latin typeface="Aptos"/>
               </a:rPr>
@@ -7741,7 +8078,7 @@
             <a:r>
               <a:rPr sz="850" b="1" i="0">
                 <a:solidFill>
-                  <a:srgbClr val="1E3A8A"/>
+                  <a:srgbClr val="9B1C24"/>
                 </a:solidFill>
                 <a:latin typeface="Aptos"/>
               </a:rPr>
@@ -7761,7 +8098,7 @@
       </p:sp>
       <p:pic>
         <p:nvPicPr>
-          <p:cNvPr id="22" name="Picture 21" descr="image15.png"/>
+          <p:cNvPr id="22" name="Picture 21" descr="image15_5A5555.png"/>
           <p:cNvPicPr>
             <a:picLocks noChangeAspect="1"/>
           </p:cNvPicPr>
@@ -7809,7 +8146,7 @@
             <a:r>
               <a:rPr sz="850" b="1" i="0">
                 <a:solidFill>
-                  <a:srgbClr val="1E3A8A"/>
+                  <a:srgbClr val="9B1C24"/>
                 </a:solidFill>
                 <a:latin typeface="Aptos"/>
               </a:rPr>
@@ -7877,7 +8214,7 @@
             <a:r>
               <a:rPr sz="850" b="1" i="0">
                 <a:solidFill>
-                  <a:srgbClr val="1E3A8A"/>
+                  <a:srgbClr val="9B1C24"/>
                 </a:solidFill>
                 <a:latin typeface="Aptos"/>
               </a:rPr>
@@ -7912,7 +8249,7 @@
             </a:avLst>
           </a:prstGeom>
           <a:solidFill>
-            <a:srgbClr val="0284C7"/>
+            <a:srgbClr val="B7791F"/>
           </a:solidFill>
           <a:ln>
             <a:noFill/>
@@ -7983,7 +8320,7 @@
           </a:solidFill>
           <a:ln w="9525">
             <a:solidFill>
-              <a:srgbClr val="E2E8F0"/>
+              <a:srgbClr val="E3DBCF"/>
             </a:solidFill>
           </a:ln>
           <a:effectLst/>
@@ -8022,7 +8359,7 @@
             <a:r>
               <a:rPr sz="850" b="1" i="0">
                 <a:solidFill>
-                  <a:srgbClr val="16A34A"/>
+                  <a:srgbClr val="B7791F"/>
                 </a:solidFill>
                 <a:latin typeface="Aptos"/>
               </a:rPr>
@@ -8031,7 +8368,7 @@
             <a:r>
               <a:rPr sz="850" b="1" i="0">
                 <a:solidFill>
-                  <a:srgbClr val="1E3A8A"/>
+                  <a:srgbClr val="9B1C24"/>
                 </a:solidFill>
                 <a:latin typeface="Aptos"/>
               </a:rPr>
@@ -8075,7 +8412,7 @@
             <a:r>
               <a:rPr sz="850" b="1" i="0">
                 <a:solidFill>
-                  <a:srgbClr val="16A34A"/>
+                  <a:srgbClr val="B7791F"/>
                 </a:solidFill>
                 <a:latin typeface="Aptos"/>
               </a:rPr>
@@ -8084,7 +8421,7 @@
             <a:r>
               <a:rPr sz="850" b="1" i="0">
                 <a:solidFill>
-                  <a:srgbClr val="1E3A8A"/>
+                  <a:srgbClr val="9B1C24"/>
                 </a:solidFill>
                 <a:latin typeface="Aptos"/>
               </a:rPr>
@@ -8128,7 +8465,7 @@
             <a:r>
               <a:rPr sz="850" b="1" i="0">
                 <a:solidFill>
-                  <a:srgbClr val="16A34A"/>
+                  <a:srgbClr val="B7791F"/>
                 </a:solidFill>
                 <a:latin typeface="Aptos"/>
               </a:rPr>
@@ -8137,7 +8474,7 @@
             <a:r>
               <a:rPr sz="850" b="1" i="0">
                 <a:solidFill>
-                  <a:srgbClr val="1E3A8A"/>
+                  <a:srgbClr val="9B1C24"/>
                 </a:solidFill>
                 <a:latin typeface="Aptos"/>
               </a:rPr>
@@ -8181,7 +8518,7 @@
             <a:r>
               <a:rPr sz="850" b="1" i="0">
                 <a:solidFill>
-                  <a:srgbClr val="16A34A"/>
+                  <a:srgbClr val="B7791F"/>
                 </a:solidFill>
                 <a:latin typeface="Aptos"/>
               </a:rPr>
@@ -8190,7 +8527,7 @@
             <a:r>
               <a:rPr sz="850" b="1" i="0">
                 <a:solidFill>
-                  <a:srgbClr val="1E3A8A"/>
+                  <a:srgbClr val="9B1C24"/>
                 </a:solidFill>
                 <a:latin typeface="Aptos"/>
               </a:rPr>
@@ -8229,7 +8566,7 @@
           </a:solidFill>
           <a:ln w="12700">
             <a:solidFill>
-              <a:srgbClr val="1F497D"/>
+              <a:srgbClr val="3A3335"/>
             </a:solidFill>
           </a:ln>
           <a:effectLst/>
@@ -8268,7 +8605,7 @@
             <a:r>
               <a:rPr sz="950" b="1" i="0">
                 <a:solidFill>
-                  <a:srgbClr val="1F497D"/>
+                  <a:srgbClr val="3A3335"/>
                 </a:solidFill>
                 <a:latin typeface="Aptos"/>
               </a:rPr>
@@ -8294,7 +8631,7 @@
             </a:avLst>
           </a:prstGeom>
           <a:solidFill>
-            <a:srgbClr val="2563EB"/>
+            <a:srgbClr val="9B1C24"/>
           </a:solidFill>
           <a:ln>
             <a:noFill/>
@@ -8361,7 +8698,7 @@
             </a:avLst>
           </a:prstGeom>
           <a:solidFill>
-            <a:srgbClr val="7E22CE"/>
+            <a:srgbClr val="3A3335"/>
           </a:solidFill>
           <a:ln>
             <a:noFill/>
@@ -8428,7 +8765,7 @@
             </a:avLst>
           </a:prstGeom>
           <a:solidFill>
-            <a:srgbClr val="0D9488"/>
+            <a:srgbClr val="B7791F"/>
           </a:solidFill>
           <a:ln>
             <a:noFill/>
@@ -8495,7 +8832,7 @@
             </a:avLst>
           </a:prstGeom>
           <a:solidFill>
-            <a:srgbClr val="C55A11"/>
+            <a:srgbClr val="E0262D"/>
           </a:solidFill>
           <a:ln>
             <a:noFill/>
@@ -8562,7 +8899,7 @@
             </a:avLst>
           </a:prstGeom>
           <a:solidFill>
-            <a:srgbClr val="16A34A"/>
+            <a:srgbClr val="7A5C2E"/>
           </a:solidFill>
           <a:ln>
             <a:noFill/>
@@ -8638,7 +8975,7 @@
             <a:r>
               <a:rPr sz="950" b="1" i="0">
                 <a:solidFill>
-                  <a:srgbClr val="1F497D"/>
+                  <a:srgbClr val="3A3335"/>
                 </a:solidFill>
                 <a:latin typeface="Aptos"/>
               </a:rPr>
@@ -8664,7 +9001,7 @@
             </a:avLst>
           </a:prstGeom>
           <a:solidFill>
-            <a:srgbClr val="1F497D"/>
+            <a:srgbClr val="3A3335"/>
           </a:solidFill>
           <a:ln>
             <a:noFill/>
@@ -8731,7 +9068,7 @@
             </a:avLst>
           </a:prstGeom>
           <a:solidFill>
-            <a:srgbClr val="1F497D"/>
+            <a:srgbClr val="3A3335"/>
           </a:solidFill>
           <a:ln>
             <a:noFill/>
@@ -8798,7 +9135,7 @@
             </a:avLst>
           </a:prstGeom>
           <a:solidFill>
-            <a:srgbClr val="1F497D"/>
+            <a:srgbClr val="3A3335"/>
           </a:solidFill>
           <a:ln>
             <a:noFill/>
@@ -8865,7 +9202,7 @@
             </a:avLst>
           </a:prstGeom>
           <a:solidFill>
-            <a:srgbClr val="1F497D"/>
+            <a:srgbClr val="3A3335"/>
           </a:solidFill>
           <a:ln>
             <a:noFill/>
@@ -8932,7 +9269,7 @@
             </a:avLst>
           </a:prstGeom>
           <a:solidFill>
-            <a:srgbClr val="1F497D"/>
+            <a:srgbClr val="3A3335"/>
           </a:solidFill>
           <a:ln>
             <a:noFill/>
@@ -9008,7 +9345,7 @@
             <a:r>
               <a:rPr sz="950" b="1" i="0">
                 <a:solidFill>
-                  <a:srgbClr val="1F497D"/>
+                  <a:srgbClr val="3A3335"/>
                 </a:solidFill>
                 <a:latin typeface="Aptos"/>
               </a:rPr>
@@ -9034,7 +9371,7 @@
             </a:avLst>
           </a:prstGeom>
           <a:solidFill>
-            <a:srgbClr val="0284C7"/>
+            <a:srgbClr val="B7791F"/>
           </a:solidFill>
           <a:ln>
             <a:noFill/>
@@ -9101,7 +9438,7 @@
             </a:avLst>
           </a:prstGeom>
           <a:solidFill>
-            <a:srgbClr val="0284C7"/>
+            <a:srgbClr val="B7791F"/>
           </a:solidFill>
           <a:ln>
             <a:noFill/>
@@ -9168,7 +9505,7 @@
             </a:avLst>
           </a:prstGeom>
           <a:solidFill>
-            <a:srgbClr val="0284C7"/>
+            <a:srgbClr val="B7791F"/>
           </a:solidFill>
           <a:ln>
             <a:noFill/>
@@ -9235,7 +9572,7 @@
             </a:avLst>
           </a:prstGeom>
           <a:solidFill>
-            <a:srgbClr val="0284C7"/>
+            <a:srgbClr val="B7791F"/>
           </a:solidFill>
           <a:ln>
             <a:noFill/>
@@ -9302,7 +9639,7 @@
             </a:avLst>
           </a:prstGeom>
           <a:solidFill>
-            <a:srgbClr val="0284C7"/>
+            <a:srgbClr val="B7791F"/>
           </a:solidFill>
           <a:ln>
             <a:noFill/>
@@ -9378,7 +9715,7 @@
             <a:r>
               <a:rPr sz="950" b="1" i="0">
                 <a:solidFill>
-                  <a:srgbClr val="1F497D"/>
+                  <a:srgbClr val="3A3335"/>
                 </a:solidFill>
                 <a:latin typeface="Aptos"/>
               </a:rPr>
@@ -9404,7 +9741,7 @@
             </a:avLst>
           </a:prstGeom>
           <a:solidFill>
-            <a:srgbClr val="00796B"/>
+            <a:srgbClr val="7A5C2E"/>
           </a:solidFill>
           <a:ln>
             <a:noFill/>
@@ -9471,7 +9808,7 @@
             </a:avLst>
           </a:prstGeom>
           <a:solidFill>
-            <a:srgbClr val="00796B"/>
+            <a:srgbClr val="7A5C2E"/>
           </a:solidFill>
           <a:ln>
             <a:noFill/>
@@ -9538,7 +9875,7 @@
             </a:avLst>
           </a:prstGeom>
           <a:solidFill>
-            <a:srgbClr val="00796B"/>
+            <a:srgbClr val="7A5C2E"/>
           </a:solidFill>
           <a:ln>
             <a:noFill/>
@@ -9605,7 +9942,7 @@
             </a:avLst>
           </a:prstGeom>
           <a:solidFill>
-            <a:srgbClr val="00796B"/>
+            <a:srgbClr val="7A5C2E"/>
           </a:solidFill>
           <a:ln>
             <a:noFill/>
@@ -9672,7 +10009,7 @@
             </a:avLst>
           </a:prstGeom>
           <a:solidFill>
-            <a:srgbClr val="00796B"/>
+            <a:srgbClr val="7A5C2E"/>
           </a:solidFill>
           <a:ln>
             <a:noFill/>
@@ -9747,7 +10084,14 @@
         <p:cNvGrpSpPr/>
         <p:nvPr/>
       </p:nvGrpSpPr>
-      <p:grpSpPr/>
+      <p:grpSpPr>
+        <a:xfrm>
+          <a:off x="0" y="0"/>
+          <a:ext cx="0" cy="0"/>
+          <a:chOff x="0" y="0"/>
+          <a:chExt cx="0" cy="0"/>
+        </a:xfrm>
+      </p:grpSpPr>
       <p:sp>
         <p:nvSpPr>
           <p:cNvPr id="2" name="Rectangle 1"/>
@@ -9790,6 +10134,7 @@
           <a:lstStyle/>
           <a:p>
             <a:pPr algn="ctr"/>
+            <a:endParaRPr/>
           </a:p>
         </p:txBody>
       </p:sp>
@@ -9867,51 +10212,6 @@
       </p:sp>
       <p:sp>
         <p:nvSpPr>
-          <p:cNvPr id="5" name="Rectangle 4"/>
-          <p:cNvSpPr/>
-          <p:nvPr/>
-        </p:nvSpPr>
-        <p:spPr>
-          <a:xfrm>
-            <a:off x="411480" y="1170432"/>
-            <a:ext cx="1051560" cy="54864"/>
-          </a:xfrm>
-          <a:prstGeom prst="rect">
-            <a:avLst/>
-          </a:prstGeom>
-          <a:solidFill>
-            <a:srgbClr val="FFBE2D"/>
-          </a:solidFill>
-          <a:ln>
-            <a:solidFill>
-              <a:srgbClr val="FFBE2D"/>
-            </a:solidFill>
-          </a:ln>
-        </p:spPr>
-        <p:style>
-          <a:lnRef idx="1">
-            <a:schemeClr val="accent1"/>
-          </a:lnRef>
-          <a:fillRef idx="3">
-            <a:schemeClr val="accent1"/>
-          </a:fillRef>
-          <a:effectRef idx="2">
-            <a:schemeClr val="accent1"/>
-          </a:effectRef>
-          <a:fontRef idx="minor">
-            <a:schemeClr val="lt1"/>
-          </a:fontRef>
-        </p:style>
-        <p:txBody>
-          <a:bodyPr rtlCol="0" anchor="ctr"/>
-          <a:lstStyle/>
-          <a:p>
-            <a:pPr algn="ctr"/>
-          </a:p>
-        </p:txBody>
-      </p:sp>
-      <p:sp>
-        <p:nvSpPr>
           <p:cNvPr id="6" name="TextBox 5"/>
           <p:cNvSpPr txBox="1"/>
           <p:nvPr/>
@@ -9972,7 +10272,7 @@
             <a:r>
               <a:rPr sz="1050" b="1" i="0">
                 <a:solidFill>
-                  <a:srgbClr val="0070C0"/>
+                  <a:srgbClr val="E0262D"/>
                 </a:solidFill>
                 <a:latin typeface="Aptos"/>
               </a:rPr>
@@ -9981,7 +10281,7 @@
             <a:r>
               <a:rPr sz="1050" b="1" i="0">
                 <a:solidFill>
-                  <a:srgbClr val="0070C0"/>
+                  <a:srgbClr val="E0262D"/>
                 </a:solidFill>
                 <a:latin typeface="Aptos"/>
               </a:rPr>
@@ -10011,7 +10311,7 @@
           </a:solidFill>
           <a:ln w="12700">
             <a:solidFill>
-              <a:srgbClr val="1F497D"/>
+              <a:srgbClr val="3A3335"/>
             </a:solidFill>
           </a:ln>
           <a:effectLst/>
@@ -10041,11 +10341,11 @@
             </a:avLst>
           </a:prstGeom>
           <a:solidFill>
-            <a:srgbClr val="1F497D"/>
+            <a:srgbClr val="3A3335"/>
           </a:solidFill>
           <a:ln w="12700">
             <a:solidFill>
-              <a:srgbClr val="1F497D"/>
+              <a:srgbClr val="3A3335"/>
             </a:solidFill>
           </a:ln>
           <a:effectLst/>
@@ -10110,11 +10410,11 @@
             </a:avLst>
           </a:prstGeom>
           <a:solidFill>
-            <a:srgbClr val="EAF2FA"/>
+            <a:srgbClr val="F3EDE3"/>
           </a:solidFill>
           <a:ln w="12700">
             <a:solidFill>
-              <a:srgbClr val="0070C0"/>
+              <a:srgbClr val="E0262D"/>
             </a:solidFill>
           </a:ln>
           <a:effectLst/>
@@ -10179,11 +10479,11 @@
             </a:avLst>
           </a:prstGeom>
           <a:solidFill>
-            <a:srgbClr val="EAF2FA"/>
+            <a:srgbClr val="F3EDE3"/>
           </a:solidFill>
           <a:ln w="12700">
             <a:solidFill>
-              <a:srgbClr val="0070C0"/>
+              <a:srgbClr val="E0262D"/>
             </a:solidFill>
           </a:ln>
           <a:effectLst/>
@@ -10248,11 +10548,11 @@
             </a:avLst>
           </a:prstGeom>
           <a:solidFill>
-            <a:srgbClr val="FFF2CC"/>
+            <a:srgbClr val="FFF4D6"/>
           </a:solidFill>
           <a:ln w="12700">
             <a:solidFill>
-              <a:srgbClr val="C55A11"/>
+              <a:srgbClr val="9B1C24"/>
             </a:solidFill>
           </a:ln>
           <a:effectLst/>
@@ -10316,7 +10616,7 @@
           </a:prstGeom>
           <a:ln w="15875">
             <a:solidFill>
-              <a:srgbClr val="1F497D"/>
+              <a:srgbClr val="3A3335"/>
             </a:solidFill>
             <a:tailEnd type="triangle" w="med" len="med"/>
           </a:ln>
@@ -10338,7 +10638,7 @@
           </a:prstGeom>
           <a:ln w="15875">
             <a:solidFill>
-              <a:srgbClr val="1F497D"/>
+              <a:srgbClr val="3A3335"/>
             </a:solidFill>
             <a:tailEnd type="triangle" w="med" len="med"/>
           </a:ln>
@@ -10360,7 +10660,7 @@
           </a:prstGeom>
           <a:ln w="15875">
             <a:solidFill>
-              <a:srgbClr val="1F497D"/>
+              <a:srgbClr val="3A3335"/>
             </a:solidFill>
             <a:tailEnd type="triangle" w="med" len="med"/>
           </a:ln>
@@ -10382,7 +10682,7 @@
           </a:prstGeom>
           <a:ln w="15875">
             <a:solidFill>
-              <a:srgbClr val="1F497D"/>
+              <a:srgbClr val="3A3335"/>
             </a:solidFill>
             <a:tailEnd type="triangle" w="med" len="med"/>
           </a:ln>
@@ -10405,11 +10705,11 @@
             </a:avLst>
           </a:prstGeom>
           <a:solidFill>
-            <a:srgbClr val="FFF2CC"/>
+            <a:srgbClr val="FFF4D6"/>
           </a:solidFill>
           <a:ln w="12700">
             <a:solidFill>
-              <a:srgbClr val="C55A11"/>
+              <a:srgbClr val="9B1C24"/>
             </a:solidFill>
           </a:ln>
           <a:effectLst/>
@@ -10474,11 +10774,11 @@
             </a:avLst>
           </a:prstGeom>
           <a:solidFill>
-            <a:srgbClr val="EAF2FA"/>
+            <a:srgbClr val="F3EDE3"/>
           </a:solidFill>
           <a:ln w="12700">
             <a:solidFill>
-              <a:srgbClr val="0070C0"/>
+              <a:srgbClr val="E0262D"/>
             </a:solidFill>
           </a:ln>
           <a:effectLst/>
@@ -10542,7 +10842,7 @@
           </a:prstGeom>
           <a:ln w="15875">
             <a:solidFill>
-              <a:srgbClr val="1F497D"/>
+              <a:srgbClr val="3A3335"/>
             </a:solidFill>
             <a:tailEnd type="triangle" w="med" len="med"/>
           </a:ln>
@@ -10563,11 +10863,11 @@
             <a:avLst/>
           </a:prstGeom>
           <a:solidFill>
-            <a:srgbClr val="FFF2CC"/>
+            <a:srgbClr val="FFF4D6"/>
           </a:solidFill>
           <a:ln w="12700">
             <a:solidFill>
-              <a:srgbClr val="C55A11"/>
+              <a:srgbClr val="9B1C24"/>
             </a:solidFill>
           </a:ln>
           <a:effectLst/>
@@ -10631,7 +10931,7 @@
           </a:prstGeom>
           <a:ln w="15875">
             <a:solidFill>
-              <a:srgbClr val="1F497D"/>
+              <a:srgbClr val="3A3335"/>
             </a:solidFill>
             <a:tailEnd type="triangle" w="med" len="med"/>
           </a:ln>
@@ -10654,11 +10954,11 @@
             </a:avLst>
           </a:prstGeom>
           <a:solidFill>
-            <a:srgbClr val="E8F5E9"/>
+            <a:srgbClr val="F6EFE0"/>
           </a:solidFill>
           <a:ln w="12700">
             <a:solidFill>
-              <a:srgbClr val="2E7D32"/>
+              <a:srgbClr val="B7791F"/>
             </a:solidFill>
           </a:ln>
           <a:effectLst/>
@@ -10722,7 +11022,7 @@
           </a:prstGeom>
           <a:ln w="15875">
             <a:solidFill>
-              <a:srgbClr val="2E7D32"/>
+              <a:srgbClr val="B7791F"/>
             </a:solidFill>
             <a:tailEnd type="triangle" w="med" len="med"/>
           </a:ln>
@@ -10754,7 +11054,7 @@
             <a:r>
               <a:rPr sz="850" b="1" i="0">
                 <a:solidFill>
-                  <a:srgbClr val="2E7D32"/>
+                  <a:srgbClr val="B7791F"/>
                 </a:solidFill>
                 <a:latin typeface="Aptos"/>
               </a:rPr>
@@ -10779,7 +11079,7 @@
           </a:prstGeom>
           <a:ln w="15875">
             <a:solidFill>
-              <a:srgbClr val="C00000"/>
+              <a:srgbClr val="9B1C24"/>
             </a:solidFill>
             <a:tailEnd type="triangle" w="med" len="med"/>
           </a:ln>
@@ -10811,7 +11111,7 @@
             <a:r>
               <a:rPr sz="850" b="1" i="0">
                 <a:solidFill>
-                  <a:srgbClr val="C00000"/>
+                  <a:srgbClr val="9B1C24"/>
                 </a:solidFill>
                 <a:latin typeface="Aptos"/>
               </a:rPr>
@@ -10837,11 +11137,11 @@
             </a:avLst>
           </a:prstGeom>
           <a:solidFill>
-            <a:srgbClr val="FDECEA"/>
+            <a:srgbClr val="FBE9E9"/>
           </a:solidFill>
           <a:ln w="12700">
             <a:solidFill>
-              <a:srgbClr val="C00000"/>
+              <a:srgbClr val="9B1C24"/>
             </a:solidFill>
           </a:ln>
           <a:effectLst/>
@@ -10906,11 +11206,11 @@
             </a:avLst>
           </a:prstGeom>
           <a:solidFill>
-            <a:srgbClr val="1F497D"/>
+            <a:srgbClr val="3A3335"/>
           </a:solidFill>
           <a:ln w="12700">
             <a:solidFill>
-              <a:srgbClr val="1F497D"/>
+              <a:srgbClr val="3A3335"/>
             </a:solidFill>
           </a:ln>
           <a:effectLst/>
@@ -10974,7 +11274,7 @@
           </a:prstGeom>
           <a:ln w="15875">
             <a:solidFill>
-              <a:srgbClr val="1F497D"/>
+              <a:srgbClr val="3A3335"/>
             </a:solidFill>
             <a:tailEnd type="triangle" w="med" len="med"/>
           </a:ln>
@@ -10996,7 +11296,7 @@
           </a:prstGeom>
           <a:ln w="15875">
             <a:solidFill>
-              <a:srgbClr val="1F497D"/>
+              <a:srgbClr val="3A3335"/>
             </a:solidFill>
             <a:tailEnd type="triangle" w="med" len="med"/>
           </a:ln>
@@ -11023,7 +11323,7 @@
           </a:solidFill>
           <a:ln w="12700">
             <a:solidFill>
-              <a:srgbClr val="BDD7EE"/>
+              <a:srgbClr val="E3DBCF"/>
             </a:solidFill>
           </a:ln>
           <a:effectLst/>
@@ -11062,7 +11362,7 @@
             <a:r>
               <a:rPr sz="900" b="0" i="0">
                 <a:solidFill>
-                  <a:srgbClr val="595959"/>
+                  <a:srgbClr val="5A5555"/>
                 </a:solidFill>
                 <a:latin typeface="Aptos"/>
               </a:rPr>
@@ -11092,7 +11392,7 @@
           </a:solidFill>
           <a:ln w="12700">
             <a:solidFill>
-              <a:srgbClr val="BDD7EE"/>
+              <a:srgbClr val="E3DBCF"/>
             </a:solidFill>
           </a:ln>
           <a:effectLst/>
@@ -11131,7 +11431,7 @@
             <a:r>
               <a:rPr sz="900" b="0" i="0">
                 <a:solidFill>
-                  <a:srgbClr val="595959"/>
+                  <a:srgbClr val="5A5555"/>
                 </a:solidFill>
                 <a:latin typeface="Aptos"/>
               </a:rPr>
@@ -11157,11 +11457,11 @@
             </a:avLst>
           </a:prstGeom>
           <a:solidFill>
-            <a:srgbClr val="EAF2FA"/>
+            <a:srgbClr val="F3EDE3"/>
           </a:solidFill>
           <a:ln w="12700">
             <a:solidFill>
-              <a:srgbClr val="1F497D"/>
+              <a:srgbClr val="3A3335"/>
             </a:solidFill>
           </a:ln>
           <a:effectLst/>
@@ -11191,7 +11491,7 @@
             </a:avLst>
           </a:prstGeom>
           <a:solidFill>
-            <a:srgbClr val="1F497D"/>
+            <a:srgbClr val="3A3335"/>
           </a:solidFill>
           <a:ln>
             <a:noFill/>
@@ -11221,7 +11521,7 @@
             <a:avLst/>
           </a:prstGeom>
           <a:solidFill>
-            <a:srgbClr val="1F497D"/>
+            <a:srgbClr val="3A3335"/>
           </a:solidFill>
           <a:ln>
             <a:noFill/>
@@ -11367,7 +11667,7 @@
                 </a:solidFill>
                 <a:latin typeface="Aptos"/>
               </a:rPr>
-              <a:t>PII masked before the model; name and Aadhaar last 4 stored for the office only</a:t>
+              <a:t>PII masked before the model; name and Aadhaar last 4 taken once at sign-up, for the office only</a:t>
             </a:r>
           </a:p>
           <a:p>
@@ -11443,11 +11743,11 @@
             </a:avLst>
           </a:prstGeom>
           <a:solidFill>
-            <a:srgbClr val="FFF2CC"/>
+            <a:srgbClr val="FFF4D6"/>
           </a:solidFill>
           <a:ln w="12700">
             <a:solidFill>
-              <a:srgbClr val="C55A11"/>
+              <a:srgbClr val="9B1C24"/>
             </a:solidFill>
           </a:ln>
           <a:effectLst/>
@@ -11477,7 +11777,7 @@
             </a:avLst>
           </a:prstGeom>
           <a:solidFill>
-            <a:srgbClr val="C55A11"/>
+            <a:srgbClr val="9B1C24"/>
           </a:solidFill>
           <a:ln>
             <a:noFill/>
@@ -11507,7 +11807,7 @@
             <a:avLst/>
           </a:prstGeom>
           <a:solidFill>
-            <a:srgbClr val="C55A11"/>
+            <a:srgbClr val="9B1C24"/>
           </a:solidFill>
           <a:ln>
             <a:noFill/>
@@ -11737,7 +12037,14 @@
         <p:cNvGrpSpPr/>
         <p:nvPr/>
       </p:nvGrpSpPr>
-      <p:grpSpPr/>
+      <p:grpSpPr>
+        <a:xfrm>
+          <a:off x="0" y="0"/>
+          <a:ext cx="0" cy="0"/>
+          <a:chOff x="0" y="0"/>
+          <a:chExt cx="0" cy="0"/>
+        </a:xfrm>
+      </p:grpSpPr>
       <p:sp>
         <p:nvSpPr>
           <p:cNvPr id="2" name="Rectangle 1"/>
@@ -11780,6 +12087,7 @@
           <a:lstStyle/>
           <a:p>
             <a:pPr algn="ctr"/>
+            <a:endParaRPr/>
           </a:p>
         </p:txBody>
       </p:sp>
@@ -11857,51 +12165,6 @@
       </p:sp>
       <p:sp>
         <p:nvSpPr>
-          <p:cNvPr id="5" name="Rectangle 4"/>
-          <p:cNvSpPr/>
-          <p:nvPr/>
-        </p:nvSpPr>
-        <p:spPr>
-          <a:xfrm>
-            <a:off x="411480" y="1170432"/>
-            <a:ext cx="1051560" cy="54864"/>
-          </a:xfrm>
-          <a:prstGeom prst="rect">
-            <a:avLst/>
-          </a:prstGeom>
-          <a:solidFill>
-            <a:srgbClr val="FFBE2D"/>
-          </a:solidFill>
-          <a:ln>
-            <a:solidFill>
-              <a:srgbClr val="FFBE2D"/>
-            </a:solidFill>
-          </a:ln>
-        </p:spPr>
-        <p:style>
-          <a:lnRef idx="1">
-            <a:schemeClr val="accent1"/>
-          </a:lnRef>
-          <a:fillRef idx="3">
-            <a:schemeClr val="accent1"/>
-          </a:fillRef>
-          <a:effectRef idx="2">
-            <a:schemeClr val="accent1"/>
-          </a:effectRef>
-          <a:fontRef idx="minor">
-            <a:schemeClr val="lt1"/>
-          </a:fontRef>
-        </p:style>
-        <p:txBody>
-          <a:bodyPr rtlCol="0" anchor="ctr"/>
-          <a:lstStyle/>
-          <a:p>
-            <a:pPr algn="ctr"/>
-          </a:p>
-        </p:txBody>
-      </p:sp>
-      <p:sp>
-        <p:nvSpPr>
           <p:cNvPr id="6" name="TextBox 5"/>
           <p:cNvSpPr txBox="1"/>
           <p:nvPr/>
@@ -11962,7 +12225,7 @@
             <a:r>
               <a:rPr sz="1050" b="1" i="0">
                 <a:solidFill>
-                  <a:srgbClr val="0070C0"/>
+                  <a:srgbClr val="E0262D"/>
                 </a:solidFill>
                 <a:latin typeface="Aptos"/>
               </a:rPr>
@@ -11971,7 +12234,7 @@
             <a:r>
               <a:rPr sz="1050" b="1" i="0">
                 <a:solidFill>
-                  <a:srgbClr val="0070C0"/>
+                  <a:srgbClr val="E0262D"/>
                 </a:solidFill>
                 <a:latin typeface="Aptos"/>
               </a:rPr>
@@ -11997,11 +12260,11 @@
             </a:avLst>
           </a:prstGeom>
           <a:solidFill>
-            <a:srgbClr val="F2F2F2"/>
+            <a:srgbClr val="FFFFFF"/>
           </a:solidFill>
           <a:ln w="12700">
             <a:solidFill>
-              <a:srgbClr val="7F7F7F"/>
+              <a:srgbClr val="8A8380"/>
             </a:solidFill>
           </a:ln>
           <a:effectLst/>
@@ -12076,7 +12339,7 @@
             <a:r>
               <a:rPr sz="850" b="0" i="0">
                 <a:solidFill>
-                  <a:srgbClr val="475569"/>
+                  <a:srgbClr val="5A5555"/>
                 </a:solidFill>
                 <a:latin typeface="Aptos"/>
               </a:rPr>
@@ -12102,11 +12365,11 @@
             </a:avLst>
           </a:prstGeom>
           <a:solidFill>
-            <a:srgbClr val="E8F4FD"/>
+            <a:srgbClr val="FBE9E9"/>
           </a:solidFill>
           <a:ln w="12700">
             <a:solidFill>
-              <a:srgbClr val="0070C0"/>
+              <a:srgbClr val="E0262D"/>
             </a:solidFill>
           </a:ln>
           <a:effectLst/>
@@ -12121,7 +12384,7 @@
       </p:sp>
       <p:pic>
         <p:nvPicPr>
-          <p:cNvPr id="12" name="Picture 11" descr="image14.png"/>
+          <p:cNvPr id="12" name="Picture 11" descr="image14_E0262D.png"/>
           <p:cNvPicPr>
             <a:picLocks noChangeAspect="1"/>
           </p:cNvPicPr>
@@ -12181,7 +12444,7 @@
             <a:r>
               <a:rPr sz="850" b="0" i="0">
                 <a:solidFill>
-                  <a:srgbClr val="475569"/>
+                  <a:srgbClr val="5A5555"/>
                 </a:solidFill>
                 <a:latin typeface="Aptos"/>
               </a:rPr>
@@ -12207,11 +12470,11 @@
             </a:avLst>
           </a:prstGeom>
           <a:solidFill>
-            <a:srgbClr val="EEF0FA"/>
+            <a:srgbClr val="F3EDE3"/>
           </a:solidFill>
           <a:ln w="12700">
             <a:solidFill>
-              <a:srgbClr val="6B4C9A"/>
+              <a:srgbClr val="5A5555"/>
             </a:solidFill>
           </a:ln>
           <a:effectLst/>
@@ -12226,7 +12489,7 @@
       </p:sp>
       <p:pic>
         <p:nvPicPr>
-          <p:cNvPr id="15" name="Picture 14" descr="image15.png"/>
+          <p:cNvPr id="15" name="Picture 14" descr="image15_5A5555.png"/>
           <p:cNvPicPr>
             <a:picLocks noChangeAspect="1"/>
           </p:cNvPicPr>
@@ -12286,7 +12549,7 @@
             <a:r>
               <a:rPr sz="850" b="0" i="0">
                 <a:solidFill>
-                  <a:srgbClr val="475569"/>
+                  <a:srgbClr val="5A5555"/>
                 </a:solidFill>
                 <a:latin typeface="Aptos"/>
               </a:rPr>
@@ -12312,11 +12575,11 @@
             </a:avLst>
           </a:prstGeom>
           <a:solidFill>
-            <a:srgbClr val="E6F4F1"/>
+            <a:srgbClr val="FFF4D6"/>
           </a:solidFill>
           <a:ln w="12700">
             <a:solidFill>
-              <a:srgbClr val="00796B"/>
+              <a:srgbClr val="7A5C2E"/>
             </a:solidFill>
           </a:ln>
           <a:effectLst/>
@@ -12331,7 +12594,7 @@
       </p:sp>
       <p:pic>
         <p:nvPicPr>
-          <p:cNvPr id="18" name="Picture 17" descr="image16.png"/>
+          <p:cNvPr id="18" name="Picture 17" descr="image16_7A5C2E.png"/>
           <p:cNvPicPr>
             <a:picLocks noChangeAspect="1"/>
           </p:cNvPicPr>
@@ -12391,7 +12654,7 @@
             <a:r>
               <a:rPr sz="850" b="0" i="0">
                 <a:solidFill>
-                  <a:srgbClr val="475569"/>
+                  <a:srgbClr val="5A5555"/>
                 </a:solidFill>
                 <a:latin typeface="Aptos"/>
               </a:rPr>
@@ -12421,7 +12684,7 @@
           </a:solidFill>
           <a:ln w="12700">
             <a:solidFill>
-              <a:srgbClr val="7F7F7F"/>
+              <a:srgbClr val="8A8380"/>
             </a:solidFill>
           </a:ln>
           <a:effectLst/>
@@ -12436,7 +12699,7 @@
       </p:sp>
       <p:pic>
         <p:nvPicPr>
-          <p:cNvPr id="21" name="Picture 20" descr="image11.png"/>
+          <p:cNvPr id="21" name="Picture 20" descr="image11_3A3335.png"/>
           <p:cNvPicPr>
             <a:picLocks noChangeAspect="1"/>
           </p:cNvPicPr>
@@ -12526,7 +12789,7 @@
           </a:solidFill>
           <a:ln w="12700">
             <a:solidFill>
-              <a:srgbClr val="7F7F7F"/>
+              <a:srgbClr val="8A8380"/>
             </a:solidFill>
           </a:ln>
           <a:effectLst/>
@@ -12541,7 +12804,7 @@
       </p:sp>
       <p:pic>
         <p:nvPicPr>
-          <p:cNvPr id="24" name="Picture 23" descr="image12.png"/>
+          <p:cNvPr id="24" name="Picture 23" descr="image12_3A3335.png"/>
           <p:cNvPicPr>
             <a:picLocks noChangeAspect="1"/>
           </p:cNvPicPr>
@@ -12631,7 +12894,7 @@
           </a:solidFill>
           <a:ln w="12700">
             <a:solidFill>
-              <a:srgbClr val="7F7F7F"/>
+              <a:srgbClr val="8A8380"/>
             </a:solidFill>
           </a:ln>
           <a:effectLst/>
@@ -12646,7 +12909,7 @@
       </p:sp>
       <p:pic>
         <p:nvPicPr>
-          <p:cNvPr id="27" name="Picture 26" descr="image13.png"/>
+          <p:cNvPr id="27" name="Picture 26" descr="image13_3A3335.png"/>
           <p:cNvPicPr>
             <a:picLocks noChangeAspect="1"/>
           </p:cNvPicPr>
@@ -12736,7 +12999,7 @@
           </a:solidFill>
           <a:ln w="12700">
             <a:solidFill>
-              <a:srgbClr val="0070C0"/>
+              <a:srgbClr val="E0262D"/>
             </a:solidFill>
           </a:ln>
           <a:effectLst/>
@@ -12805,7 +13068,7 @@
           </a:solidFill>
           <a:ln w="12700">
             <a:solidFill>
-              <a:srgbClr val="0070C0"/>
+              <a:srgbClr val="E0262D"/>
             </a:solidFill>
           </a:ln>
           <a:effectLst/>
@@ -12874,7 +13137,7 @@
           </a:solidFill>
           <a:ln w="12700">
             <a:solidFill>
-              <a:srgbClr val="0070C0"/>
+              <a:srgbClr val="E0262D"/>
             </a:solidFill>
           </a:ln>
           <a:effectLst/>
@@ -12943,7 +13206,7 @@
           </a:solidFill>
           <a:ln w="12700">
             <a:solidFill>
-              <a:srgbClr val="0070C0"/>
+              <a:srgbClr val="E0262D"/>
             </a:solidFill>
           </a:ln>
           <a:effectLst/>
@@ -13012,7 +13275,7 @@
           </a:solidFill>
           <a:ln w="12700">
             <a:solidFill>
-              <a:srgbClr val="0070C0"/>
+              <a:srgbClr val="E0262D"/>
             </a:solidFill>
           </a:ln>
           <a:effectLst/>
@@ -13081,7 +13344,7 @@
           </a:solidFill>
           <a:ln w="12700">
             <a:solidFill>
-              <a:srgbClr val="6B4C9A"/>
+              <a:srgbClr val="5A5555"/>
             </a:solidFill>
           </a:ln>
           <a:effectLst/>
@@ -13162,7 +13425,7 @@
           </a:solidFill>
           <a:ln w="12700">
             <a:solidFill>
-              <a:srgbClr val="6B4C9A"/>
+              <a:srgbClr val="5A5555"/>
             </a:solidFill>
           </a:ln>
           <a:effectLst/>
@@ -13243,7 +13506,7 @@
           </a:solidFill>
           <a:ln w="12700">
             <a:solidFill>
-              <a:srgbClr val="6B4C9A"/>
+              <a:srgbClr val="5A5555"/>
             </a:solidFill>
           </a:ln>
           <a:effectLst/>
@@ -13324,7 +13587,7 @@
           </a:solidFill>
           <a:ln w="12700">
             <a:solidFill>
-              <a:srgbClr val="6B4C9A"/>
+              <a:srgbClr val="5A5555"/>
             </a:solidFill>
           </a:ln>
           <a:effectLst/>
@@ -13405,7 +13668,7 @@
           </a:solidFill>
           <a:ln w="12700">
             <a:solidFill>
-              <a:srgbClr val="6B4C9A"/>
+              <a:srgbClr val="5A5555"/>
             </a:solidFill>
           </a:ln>
           <a:effectLst/>
@@ -13486,7 +13749,7 @@
           </a:solidFill>
           <a:ln w="12700">
             <a:solidFill>
-              <a:srgbClr val="00796B"/>
+              <a:srgbClr val="7A5C2E"/>
             </a:solidFill>
           </a:ln>
           <a:effectLst/>
@@ -13567,7 +13830,7 @@
           </a:solidFill>
           <a:ln w="12700">
             <a:solidFill>
-              <a:srgbClr val="00796B"/>
+              <a:srgbClr val="7A5C2E"/>
             </a:solidFill>
           </a:ln>
           <a:effectLst/>
@@ -13648,7 +13911,7 @@
           </a:solidFill>
           <a:ln w="12700">
             <a:solidFill>
-              <a:srgbClr val="00796B"/>
+              <a:srgbClr val="7A5C2E"/>
             </a:solidFill>
           </a:ln>
           <a:effectLst/>
@@ -13729,7 +13992,7 @@
           </a:solidFill>
           <a:ln w="12700">
             <a:solidFill>
-              <a:srgbClr val="00796B"/>
+              <a:srgbClr val="7A5C2E"/>
             </a:solidFill>
           </a:ln>
           <a:effectLst/>
@@ -13805,7 +14068,7 @@
           </a:prstGeom>
           <a:ln w="12700">
             <a:solidFill>
-              <a:srgbClr val="1F497D"/>
+              <a:srgbClr val="3A3335"/>
             </a:solidFill>
             <a:headEnd type="triangle" w="med" len="med"/>
             <a:tailEnd type="triangle" w="med" len="med"/>
@@ -13828,7 +14091,7 @@
           </a:prstGeom>
           <a:ln w="12700">
             <a:solidFill>
-              <a:srgbClr val="1F497D"/>
+              <a:srgbClr val="3A3335"/>
             </a:solidFill>
             <a:headEnd type="triangle" w="med" len="med"/>
             <a:tailEnd type="triangle" w="med" len="med"/>
@@ -13851,7 +14114,7 @@
           </a:prstGeom>
           <a:ln w="12700">
             <a:solidFill>
-              <a:srgbClr val="1F497D"/>
+              <a:srgbClr val="3A3335"/>
             </a:solidFill>
             <a:headEnd type="triangle" w="med" len="med"/>
             <a:tailEnd type="triangle" w="med" len="med"/>
@@ -13874,7 +14137,7 @@
           </a:prstGeom>
           <a:ln w="12700">
             <a:solidFill>
-              <a:srgbClr val="1F497D"/>
+              <a:srgbClr val="3A3335"/>
             </a:solidFill>
             <a:headEnd type="triangle" w="med" len="med"/>
             <a:tailEnd type="triangle" w="med" len="med"/>
@@ -13897,7 +14160,7 @@
           </a:prstGeom>
           <a:ln w="12700">
             <a:solidFill>
-              <a:srgbClr val="1F497D"/>
+              <a:srgbClr val="3A3335"/>
             </a:solidFill>
             <a:headEnd type="triangle" w="med" len="med"/>
             <a:tailEnd type="triangle" w="med" len="med"/>
@@ -13920,7 +14183,7 @@
           </a:prstGeom>
           <a:ln w="12700">
             <a:solidFill>
-              <a:srgbClr val="1F497D"/>
+              <a:srgbClr val="3A3335"/>
             </a:solidFill>
             <a:headEnd type="triangle" w="med" len="med"/>
             <a:tailEnd type="triangle" w="med" len="med"/>
@@ -13943,7 +14206,7 @@
           </a:prstGeom>
           <a:ln w="12700">
             <a:solidFill>
-              <a:srgbClr val="1F497D"/>
+              <a:srgbClr val="3A3335"/>
             </a:solidFill>
             <a:headEnd type="triangle" w="med" len="med"/>
             <a:tailEnd type="triangle" w="med" len="med"/>
@@ -13966,7 +14229,7 @@
           </a:prstGeom>
           <a:ln w="12700">
             <a:solidFill>
-              <a:srgbClr val="1F497D"/>
+              <a:srgbClr val="3A3335"/>
             </a:solidFill>
             <a:headEnd type="triangle" w="med" len="med"/>
             <a:tailEnd type="triangle" w="med" len="med"/>
@@ -13989,7 +14252,7 @@
           </a:prstGeom>
           <a:ln w="12700">
             <a:solidFill>
-              <a:srgbClr val="1F497D"/>
+              <a:srgbClr val="3A3335"/>
             </a:solidFill>
             <a:headEnd type="triangle" w="med" len="med"/>
             <a:tailEnd type="triangle" w="med" len="med"/>
@@ -14012,7 +14275,7 @@
           </a:prstGeom>
           <a:ln w="12700">
             <a:solidFill>
-              <a:srgbClr val="1F497D"/>
+              <a:srgbClr val="3A3335"/>
             </a:solidFill>
             <a:headEnd type="triangle" w="med" len="med"/>
             <a:tailEnd type="triangle" w="med" len="med"/>
@@ -14036,11 +14299,11 @@
             </a:avLst>
           </a:prstGeom>
           <a:solidFill>
-            <a:srgbClr val="EAF2FA"/>
+            <a:srgbClr val="F3EDE3"/>
           </a:solidFill>
           <a:ln w="12700">
             <a:solidFill>
-              <a:srgbClr val="1F497D"/>
+              <a:srgbClr val="3A3335"/>
             </a:solidFill>
           </a:ln>
           <a:effectLst/>
@@ -14070,7 +14333,7 @@
             </a:avLst>
           </a:prstGeom>
           <a:solidFill>
-            <a:srgbClr val="1F497D"/>
+            <a:srgbClr val="3A3335"/>
           </a:solidFill>
           <a:ln>
             <a:noFill/>
@@ -14100,7 +14363,7 @@
             <a:avLst/>
           </a:prstGeom>
           <a:solidFill>
-            <a:srgbClr val="1F497D"/>
+            <a:srgbClr val="3A3335"/>
           </a:solidFill>
           <a:ln>
             <a:noFill/>
@@ -14204,7 +14467,7 @@
             <a:r>
               <a:rPr sz="850" b="1" i="0">
                 <a:solidFill>
-                  <a:srgbClr val="1F497D"/>
+                  <a:srgbClr val="3A3335"/>
                 </a:solidFill>
                 <a:latin typeface="Aptos"/>
               </a:rPr>
@@ -14229,7 +14492,7 @@
             <a:r>
               <a:rPr sz="850" b="1" i="0">
                 <a:solidFill>
-                  <a:srgbClr val="1F497D"/>
+                  <a:srgbClr val="3A3335"/>
                 </a:solidFill>
                 <a:latin typeface="Aptos"/>
               </a:rPr>
@@ -14250,7 +14513,7 @@
             <a:r>
               <a:rPr sz="850" b="1" i="0">
                 <a:solidFill>
-                  <a:srgbClr val="1F497D"/>
+                  <a:srgbClr val="3A3335"/>
                 </a:solidFill>
                 <a:latin typeface="Aptos"/>
               </a:rPr>
@@ -14285,11 +14548,11 @@
             </a:avLst>
           </a:prstGeom>
           <a:solidFill>
-            <a:srgbClr val="FFF2CC"/>
+            <a:srgbClr val="FFF4D6"/>
           </a:solidFill>
           <a:ln w="12700">
             <a:solidFill>
-              <a:srgbClr val="C55A11"/>
+              <a:srgbClr val="9B1C24"/>
             </a:solidFill>
           </a:ln>
           <a:effectLst/>
@@ -14319,7 +14582,7 @@
             </a:avLst>
           </a:prstGeom>
           <a:solidFill>
-            <a:srgbClr val="C55A11"/>
+            <a:srgbClr val="9B1C24"/>
           </a:solidFill>
           <a:ln>
             <a:noFill/>
@@ -14349,7 +14612,7 @@
             <a:avLst/>
           </a:prstGeom>
           <a:solidFill>
-            <a:srgbClr val="C55A11"/>
+            <a:srgbClr val="9B1C24"/>
           </a:solidFill>
           <a:ln>
             <a:noFill/>
@@ -14552,7 +14815,14 @@
         <p:cNvGrpSpPr/>
         <p:nvPr/>
       </p:nvGrpSpPr>
-      <p:grpSpPr/>
+      <p:grpSpPr>
+        <a:xfrm>
+          <a:off x="0" y="0"/>
+          <a:ext cx="0" cy="0"/>
+          <a:chOff x="0" y="0"/>
+          <a:chExt cx="0" cy="0"/>
+        </a:xfrm>
+      </p:grpSpPr>
       <p:sp>
         <p:nvSpPr>
           <p:cNvPr id="2" name="Rectangle 1"/>
@@ -14595,6 +14865,7 @@
           <a:lstStyle/>
           <a:p>
             <a:pPr algn="ctr"/>
+            <a:endParaRPr/>
           </a:p>
         </p:txBody>
       </p:sp>
@@ -14667,51 +14938,6 @@
             <a:r>
               <a:t>TECHNOLOGY STACK</a:t>
             </a:r>
-          </a:p>
-        </p:txBody>
-      </p:sp>
-      <p:sp>
-        <p:nvSpPr>
-          <p:cNvPr id="5" name="Rectangle 4"/>
-          <p:cNvSpPr/>
-          <p:nvPr/>
-        </p:nvSpPr>
-        <p:spPr>
-          <a:xfrm>
-            <a:off x="411480" y="1170432"/>
-            <a:ext cx="1051560" cy="54864"/>
-          </a:xfrm>
-          <a:prstGeom prst="rect">
-            <a:avLst/>
-          </a:prstGeom>
-          <a:solidFill>
-            <a:srgbClr val="FFBE2D"/>
-          </a:solidFill>
-          <a:ln>
-            <a:solidFill>
-              <a:srgbClr val="FFBE2D"/>
-            </a:solidFill>
-          </a:ln>
-        </p:spPr>
-        <p:style>
-          <a:lnRef idx="1">
-            <a:schemeClr val="accent1"/>
-          </a:lnRef>
-          <a:fillRef idx="3">
-            <a:schemeClr val="accent1"/>
-          </a:fillRef>
-          <a:effectRef idx="2">
-            <a:schemeClr val="accent1"/>
-          </a:effectRef>
-          <a:fontRef idx="minor">
-            <a:schemeClr val="lt1"/>
-          </a:fontRef>
-        </p:style>
-        <p:txBody>
-          <a:bodyPr rtlCol="0" anchor="ctr"/>
-          <a:lstStyle/>
-          <a:p>
-            <a:pPr algn="ctr"/>
           </a:p>
         </p:txBody>
       </p:sp>
@@ -14768,11 +14994,11 @@
             </a:avLst>
           </a:prstGeom>
           <a:solidFill>
-            <a:srgbClr val="EFF6FF"/>
+            <a:srgbClr val="FBE9E9"/>
           </a:solidFill>
           <a:ln w="12700">
             <a:solidFill>
-              <a:srgbClr val="2563EB"/>
+              <a:srgbClr val="9B1C24"/>
             </a:solidFill>
           </a:ln>
           <a:effectLst/>
@@ -14802,7 +15028,7 @@
             </a:avLst>
           </a:prstGeom>
           <a:solidFill>
-            <a:srgbClr val="2563EB"/>
+            <a:srgbClr val="9B1C24"/>
           </a:solidFill>
           <a:ln>
             <a:noFill/>
@@ -14832,7 +15058,7 @@
             <a:avLst/>
           </a:prstGeom>
           <a:solidFill>
-            <a:srgbClr val="2563EB"/>
+            <a:srgbClr val="9B1C24"/>
           </a:solidFill>
           <a:ln>
             <a:noFill/>
@@ -14849,14 +15075,14 @@
       </p:sp>
       <p:pic>
         <p:nvPicPr>
-          <p:cNvPr id="10" name="Picture 9" descr="image14.png"/>
+          <p:cNvPr id="10" name="Picture 9" descr="image14_E0262D.png"/>
           <p:cNvPicPr>
             <a:picLocks noChangeAspect="1"/>
           </p:cNvPicPr>
           <p:nvPr/>
         </p:nvPicPr>
         <p:blipFill>
-          <a:blip r:embed="rId2"/>
+          <a:blip r:embed="rId3"/>
           <a:stretch>
             <a:fillRect/>
           </a:stretch>
@@ -14938,7 +15164,7 @@
             <a:r>
               <a:rPr sz="950" b="1" i="0">
                 <a:solidFill>
-                  <a:srgbClr val="2563EB"/>
+                  <a:srgbClr val="9B1C24"/>
                 </a:solidFill>
                 <a:latin typeface="Aptos"/>
               </a:rPr>
@@ -14965,7 +15191,7 @@
             <a:r>
               <a:rPr sz="950" b="1" i="0">
                 <a:solidFill>
-                  <a:srgbClr val="2563EB"/>
+                  <a:srgbClr val="9B1C24"/>
                 </a:solidFill>
                 <a:latin typeface="Aptos"/>
               </a:rPr>
@@ -14992,7 +15218,7 @@
             <a:r>
               <a:rPr sz="950" b="1" i="0">
                 <a:solidFill>
-                  <a:srgbClr val="2563EB"/>
+                  <a:srgbClr val="9B1C24"/>
                 </a:solidFill>
                 <a:latin typeface="Aptos"/>
               </a:rPr>
@@ -15027,11 +15253,11 @@
             </a:avLst>
           </a:prstGeom>
           <a:solidFill>
-            <a:srgbClr val="F3E8FF"/>
+            <a:srgbClr val="F3EDE3"/>
           </a:solidFill>
           <a:ln w="12700">
             <a:solidFill>
-              <a:srgbClr val="7E22CE"/>
+              <a:srgbClr val="3A3335"/>
             </a:solidFill>
           </a:ln>
           <a:effectLst/>
@@ -15061,7 +15287,7 @@
             </a:avLst>
           </a:prstGeom>
           <a:solidFill>
-            <a:srgbClr val="7E22CE"/>
+            <a:srgbClr val="3A3335"/>
           </a:solidFill>
           <a:ln>
             <a:noFill/>
@@ -15091,7 +15317,7 @@
             <a:avLst/>
           </a:prstGeom>
           <a:solidFill>
-            <a:srgbClr val="7E22CE"/>
+            <a:srgbClr val="3A3335"/>
           </a:solidFill>
           <a:ln>
             <a:noFill/>
@@ -15108,14 +15334,14 @@
       </p:sp>
       <p:pic>
         <p:nvPicPr>
-          <p:cNvPr id="16" name="Picture 15" descr="image15.png"/>
+          <p:cNvPr id="16" name="Picture 15" descr="image15_5A5555.png"/>
           <p:cNvPicPr>
             <a:picLocks noChangeAspect="1"/>
           </p:cNvPicPr>
           <p:nvPr/>
         </p:nvPicPr>
         <p:blipFill>
-          <a:blip r:embed="rId3"/>
+          <a:blip r:embed="rId4"/>
           <a:stretch>
             <a:fillRect/>
           </a:stretch>
@@ -15197,7 +15423,7 @@
             <a:r>
               <a:rPr sz="950" b="1" i="0">
                 <a:solidFill>
-                  <a:srgbClr val="7E22CE"/>
+                  <a:srgbClr val="3A3335"/>
                 </a:solidFill>
                 <a:latin typeface="Aptos"/>
               </a:rPr>
@@ -15224,7 +15450,7 @@
             <a:r>
               <a:rPr sz="950" b="1" i="0">
                 <a:solidFill>
-                  <a:srgbClr val="7E22CE"/>
+                  <a:srgbClr val="3A3335"/>
                 </a:solidFill>
                 <a:latin typeface="Aptos"/>
               </a:rPr>
@@ -15251,7 +15477,7 @@
             <a:r>
               <a:rPr sz="950" b="1" i="0">
                 <a:solidFill>
-                  <a:srgbClr val="7E22CE"/>
+                  <a:srgbClr val="3A3335"/>
                 </a:solidFill>
                 <a:latin typeface="Aptos"/>
               </a:rPr>
@@ -15286,11 +15512,11 @@
             </a:avLst>
           </a:prstGeom>
           <a:solidFill>
-            <a:srgbClr val="ECFDF5"/>
+            <a:srgbClr val="FFF4D6"/>
           </a:solidFill>
           <a:ln w="12700">
             <a:solidFill>
-              <a:srgbClr val="0D9488"/>
+              <a:srgbClr val="B7791F"/>
             </a:solidFill>
           </a:ln>
           <a:effectLst/>
@@ -15320,7 +15546,7 @@
             </a:avLst>
           </a:prstGeom>
           <a:solidFill>
-            <a:srgbClr val="0D9488"/>
+            <a:srgbClr val="B7791F"/>
           </a:solidFill>
           <a:ln>
             <a:noFill/>
@@ -15350,7 +15576,7 @@
             <a:avLst/>
           </a:prstGeom>
           <a:solidFill>
-            <a:srgbClr val="0D9488"/>
+            <a:srgbClr val="B7791F"/>
           </a:solidFill>
           <a:ln>
             <a:noFill/>
@@ -15367,14 +15593,14 @@
       </p:sp>
       <p:pic>
         <p:nvPicPr>
-          <p:cNvPr id="22" name="Picture 21" descr="image16.png"/>
+          <p:cNvPr id="22" name="Picture 21" descr="image16_7A5C2E.png"/>
           <p:cNvPicPr>
             <a:picLocks noChangeAspect="1"/>
           </p:cNvPicPr>
           <p:nvPr/>
         </p:nvPicPr>
         <p:blipFill>
-          <a:blip r:embed="rId4"/>
+          <a:blip r:embed="rId5"/>
           <a:stretch>
             <a:fillRect/>
           </a:stretch>
@@ -15456,7 +15682,7 @@
             <a:r>
               <a:rPr sz="950" b="1" i="0">
                 <a:solidFill>
-                  <a:srgbClr val="0D9488"/>
+                  <a:srgbClr val="B7791F"/>
                 </a:solidFill>
                 <a:latin typeface="Aptos"/>
               </a:rPr>
@@ -15483,7 +15709,7 @@
             <a:r>
               <a:rPr sz="950" b="1" i="0">
                 <a:solidFill>
-                  <a:srgbClr val="0D9488"/>
+                  <a:srgbClr val="B7791F"/>
                 </a:solidFill>
                 <a:latin typeface="Aptos"/>
               </a:rPr>
@@ -15510,7 +15736,7 @@
             <a:r>
               <a:rPr sz="950" b="1" i="0">
                 <a:solidFill>
-                  <a:srgbClr val="0D9488"/>
+                  <a:srgbClr val="B7791F"/>
                 </a:solidFill>
                 <a:latin typeface="Aptos"/>
               </a:rPr>
@@ -15545,11 +15771,11 @@
             </a:avLst>
           </a:prstGeom>
           <a:solidFill>
-            <a:srgbClr val="FFF2CC"/>
+            <a:srgbClr val="FBE9E9"/>
           </a:solidFill>
           <a:ln w="12700">
             <a:solidFill>
-              <a:srgbClr val="C55A11"/>
+              <a:srgbClr val="9B1C24"/>
             </a:solidFill>
           </a:ln>
           <a:effectLst/>
@@ -15579,7 +15805,7 @@
             </a:avLst>
           </a:prstGeom>
           <a:solidFill>
-            <a:srgbClr val="C55A11"/>
+            <a:srgbClr val="9B1C24"/>
           </a:solidFill>
           <a:ln>
             <a:noFill/>
@@ -15609,7 +15835,7 @@
             <a:avLst/>
           </a:prstGeom>
           <a:solidFill>
-            <a:srgbClr val="C55A11"/>
+            <a:srgbClr val="9B1C24"/>
           </a:solidFill>
           <a:ln>
             <a:noFill/>
@@ -15633,7 +15859,7 @@
           <p:nvPr/>
         </p:nvPicPr>
         <p:blipFill>
-          <a:blip r:embed="rId5"/>
+          <a:blip r:embed="rId6"/>
           <a:stretch>
             <a:fillRect/>
           </a:stretch>
@@ -15715,7 +15941,7 @@
             <a:r>
               <a:rPr sz="950" b="1" i="0">
                 <a:solidFill>
-                  <a:srgbClr val="C55A11"/>
+                  <a:srgbClr val="9B1C24"/>
                 </a:solidFill>
                 <a:latin typeface="Aptos"/>
               </a:rPr>
@@ -15742,7 +15968,7 @@
             <a:r>
               <a:rPr sz="950" b="1" i="0">
                 <a:solidFill>
-                  <a:srgbClr val="C55A11"/>
+                  <a:srgbClr val="9B1C24"/>
                 </a:solidFill>
                 <a:latin typeface="Aptos"/>
               </a:rPr>
@@ -15755,7 +15981,7 @@
                 </a:solidFill>
                 <a:latin typeface="Aptos"/>
               </a:rPr>
-              <a:t>trained on 1,169 locally generated complaints (88% department held-out); YAML rules; language hints</a:t>
+              <a:t>trained on 1,644 locally generated complaints (85% department held-out); YAML rules; language hints</a:t>
             </a:r>
           </a:p>
           <a:p>
@@ -15769,7 +15995,7 @@
             <a:r>
               <a:rPr sz="950" b="1" i="0">
                 <a:solidFill>
-                  <a:srgbClr val="C55A11"/>
+                  <a:srgbClr val="9B1C24"/>
                 </a:solidFill>
                 <a:latin typeface="Aptos"/>
               </a:rPr>
@@ -15804,11 +16030,11 @@
             </a:avLst>
           </a:prstGeom>
           <a:solidFill>
-            <a:srgbClr val="E8F5E9"/>
+            <a:srgbClr val="F6EFE0"/>
           </a:solidFill>
           <a:ln w="12700">
             <a:solidFill>
-              <a:srgbClr val="2E7D32"/>
+              <a:srgbClr val="7A5C2E"/>
             </a:solidFill>
           </a:ln>
           <a:effectLst/>
@@ -15838,7 +16064,7 @@
             </a:avLst>
           </a:prstGeom>
           <a:solidFill>
-            <a:srgbClr val="2E7D32"/>
+            <a:srgbClr val="7A5C2E"/>
           </a:solidFill>
           <a:ln>
             <a:noFill/>
@@ -15868,7 +16094,7 @@
             <a:avLst/>
           </a:prstGeom>
           <a:solidFill>
-            <a:srgbClr val="2E7D32"/>
+            <a:srgbClr val="7A5C2E"/>
           </a:solidFill>
           <a:ln>
             <a:noFill/>
@@ -15892,7 +16118,7 @@
           <p:nvPr/>
         </p:nvPicPr>
         <p:blipFill>
-          <a:blip r:embed="rId6"/>
+          <a:blip r:embed="rId7"/>
           <a:stretch>
             <a:fillRect/>
           </a:stretch>
@@ -15974,7 +16200,7 @@
             <a:r>
               <a:rPr sz="950" b="1" i="0">
                 <a:solidFill>
-                  <a:srgbClr val="2E7D32"/>
+                  <a:srgbClr val="7A5C2E"/>
                 </a:solidFill>
                 <a:latin typeface="Aptos"/>
               </a:rPr>
@@ -16001,7 +16227,7 @@
             <a:r>
               <a:rPr sz="950" b="1" i="0">
                 <a:solidFill>
-                  <a:srgbClr val="2E7D32"/>
+                  <a:srgbClr val="7A5C2E"/>
                 </a:solidFill>
                 <a:latin typeface="Aptos"/>
               </a:rPr>
@@ -16028,7 +16254,7 @@
             <a:r>
               <a:rPr sz="950" b="1" i="0">
                 <a:solidFill>
-                  <a:srgbClr val="2E7D32"/>
+                  <a:srgbClr val="7A5C2E"/>
                 </a:solidFill>
                 <a:latin typeface="Aptos"/>
               </a:rPr>
@@ -16063,11 +16289,11 @@
             </a:avLst>
           </a:prstGeom>
           <a:solidFill>
-            <a:srgbClr val="EAF2FA"/>
+            <a:srgbClr val="F3EDE3"/>
           </a:solidFill>
           <a:ln w="12700">
             <a:solidFill>
-              <a:srgbClr val="1F497D"/>
+              <a:srgbClr val="5A5555"/>
             </a:solidFill>
           </a:ln>
           <a:effectLst/>
@@ -16097,7 +16323,7 @@
             </a:avLst>
           </a:prstGeom>
           <a:solidFill>
-            <a:srgbClr val="1F497D"/>
+            <a:srgbClr val="5A5555"/>
           </a:solidFill>
           <a:ln>
             <a:noFill/>
@@ -16127,7 +16353,7 @@
             <a:avLst/>
           </a:prstGeom>
           <a:solidFill>
-            <a:srgbClr val="1F497D"/>
+            <a:srgbClr val="5A5555"/>
           </a:solidFill>
           <a:ln>
             <a:noFill/>
@@ -16145,6 +16371,734 @@
       <p:pic>
         <p:nvPicPr>
           <p:cNvPr id="40" name="Picture 39" descr="image24.png"/>
+          <p:cNvPicPr>
+            <a:picLocks noChangeAspect="1"/>
+          </p:cNvPicPr>
+          <p:nvPr/>
+        </p:nvPicPr>
+        <p:blipFill>
+          <a:blip r:embed="rId8"/>
+          <a:stretch>
+            <a:fillRect/>
+          </a:stretch>
+        </p:blipFill>
+        <p:spPr>
+          <a:xfrm>
+            <a:off x="8220456" y="3477577"/>
+            <a:ext cx="219456" cy="195453"/>
+          </a:xfrm>
+          <a:prstGeom prst="rect">
+            <a:avLst/>
+          </a:prstGeom>
+        </p:spPr>
+      </p:pic>
+      <p:sp>
+        <p:nvSpPr>
+          <p:cNvPr id="41" name="TextBox 40"/>
+          <p:cNvSpPr txBox="1"/>
+          <p:nvPr/>
+        </p:nvSpPr>
+        <p:spPr>
+          <a:xfrm>
+            <a:off x="8549640" y="3401568"/>
+            <a:ext cx="3108960" cy="347472"/>
+          </a:xfrm>
+          <a:prstGeom prst="rect">
+            <a:avLst/>
+          </a:prstGeom>
+          <a:noFill/>
+        </p:spPr>
+        <p:txBody>
+          <a:bodyPr wrap="square" lIns="18288" tIns="0" rIns="18288" bIns="0" anchor="ctr">
+            <a:noAutofit/>
+          </a:bodyPr>
+          <a:lstStyle/>
+          <a:p>
+            <a:pPr algn="l"/>
+            <a:r>
+              <a:rPr sz="1050" b="1" i="0">
+                <a:solidFill>
+                  <a:srgbClr val="FFFFFF"/>
+                </a:solidFill>
+                <a:latin typeface="Aptos"/>
+              </a:rPr>
+              <a:t>External APIs / datasets / tools</a:t>
+            </a:r>
+          </a:p>
+        </p:txBody>
+      </p:sp>
+      <p:sp>
+        <p:nvSpPr>
+          <p:cNvPr id="42" name="TextBox 41"/>
+          <p:cNvSpPr txBox="1"/>
+          <p:nvPr/>
+        </p:nvSpPr>
+        <p:spPr>
+          <a:xfrm>
+            <a:off x="8202167" y="3803904"/>
+            <a:ext cx="3438144" cy="1481328"/>
+          </a:xfrm>
+          <a:prstGeom prst="rect">
+            <a:avLst/>
+          </a:prstGeom>
+          <a:noFill/>
+        </p:spPr>
+        <p:txBody>
+          <a:bodyPr wrap="square" lIns="54864" tIns="27432" rIns="54864" bIns="27432" anchor="t">
+            <a:noAutofit/>
+          </a:bodyPr>
+          <a:lstStyle/>
+          <a:p>
+            <a:pPr algn="l" marL="146304" indent="-146304">
+              <a:spcAft>
+                <a:spcPts val="300"/>
+              </a:spcAft>
+              <a:buFont typeface="Arial"/>
+              <a:buChar char="•"/>
+            </a:pPr>
+            <a:r>
+              <a:rPr sz="950" b="1" i="0">
+                <a:solidFill>
+                  <a:srgbClr val="5A5555"/>
+                </a:solidFill>
+                <a:latin typeface="Aptos"/>
+              </a:rPr>
+              <a:t>No external API at runtime. </a:t>
+            </a:r>
+            <a:r>
+              <a:rPr sz="950" b="0" i="0">
+                <a:solidFill>
+                  <a:srgbClr val="140C12"/>
+                </a:solidFill>
+                <a:latin typeface="Aptos"/>
+              </a:rPr>
+              <a:t>Reference data: Tamil Nadu district-office mapping (38 districts, 760 offices)</a:t>
+            </a:r>
+          </a:p>
+          <a:p>
+            <a:pPr algn="l" marL="146304" indent="-146304">
+              <a:spcAft>
+                <a:spcPts val="300"/>
+              </a:spcAft>
+              <a:buFont typeface="Arial"/>
+              <a:buChar char="•"/>
+            </a:pPr>
+            <a:r>
+              <a:rPr sz="950" b="1" i="0">
+                <a:solidFill>
+                  <a:srgbClr val="5A5555"/>
+                </a:solidFill>
+                <a:latin typeface="Aptos"/>
+              </a:rPr>
+              <a:t>Datasets: </a:t>
+            </a:r>
+            <a:r>
+              <a:rPr sz="950" b="0" i="0">
+                <a:solidFill>
+                  <a:srgbClr val="140C12"/>
+                </a:solidFill>
+                <a:latin typeface="Aptos"/>
+              </a:rPr>
+              <a:t>NYC 311 sample, COMI-LINGUA (Hinglish), DravidianCodeMix (Tanglish)</a:t>
+            </a:r>
+          </a:p>
+          <a:p>
+            <a:pPr algn="l" marL="146304" indent="-146304">
+              <a:spcAft>
+                <a:spcPts val="300"/>
+              </a:spcAft>
+              <a:buFont typeface="Arial"/>
+              <a:buChar char="•"/>
+            </a:pPr>
+            <a:r>
+              <a:rPr sz="950" b="1" i="0">
+                <a:solidFill>
+                  <a:srgbClr val="5A5555"/>
+                </a:solidFill>
+                <a:latin typeface="Aptos"/>
+              </a:rPr>
+              <a:t>Tools: </a:t>
+            </a:r>
+            <a:r>
+              <a:rPr sz="950" b="0" i="0">
+                <a:solidFill>
+                  <a:srgbClr val="140C12"/>
+                </a:solidFill>
+                <a:latin typeface="Aptos"/>
+              </a:rPr>
+              <a:t>Mailpit for demo email, Gmail SMTP optional, 118-check end-to-end test suite</a:t>
+            </a:r>
+          </a:p>
+        </p:txBody>
+      </p:sp>
+      <p:sp>
+        <p:nvSpPr>
+          <p:cNvPr id="43" name="Rounded Rectangle 42"/>
+          <p:cNvSpPr/>
+          <p:nvPr/>
+        </p:nvSpPr>
+        <p:spPr>
+          <a:xfrm>
+            <a:off x="411480" y="5440680"/>
+            <a:ext cx="11338560" cy="914400"/>
+          </a:xfrm>
+          <a:prstGeom prst="roundRect">
+            <a:avLst>
+              <a:gd name="adj" fmla="val 12000"/>
+            </a:avLst>
+          </a:prstGeom>
+          <a:solidFill>
+            <a:srgbClr val="FFFFFF"/>
+          </a:solidFill>
+          <a:ln w="12700">
+            <a:solidFill>
+              <a:srgbClr val="3A3335"/>
+            </a:solidFill>
+          </a:ln>
+          <a:effectLst/>
+        </p:spPr>
+        <p:txBody>
+          <a:bodyPr rtlCol="0" anchor="ctr"/>
+          <a:lstStyle/>
+          <a:p>
+            <a:pPr algn="ctr"/>
+          </a:p>
+        </p:txBody>
+      </p:sp>
+      <p:pic>
+        <p:nvPicPr>
+          <p:cNvPr id="44" name="Picture 43" descr="image17_3A3335.png"/>
+          <p:cNvPicPr>
+            <a:picLocks noChangeAspect="1"/>
+          </p:cNvPicPr>
+          <p:nvPr/>
+        </p:nvPicPr>
+        <p:blipFill>
+          <a:blip r:embed="rId9"/>
+          <a:stretch>
+            <a:fillRect/>
+          </a:stretch>
+        </p:blipFill>
+        <p:spPr>
+          <a:xfrm>
+            <a:off x="868680" y="5535656"/>
+            <a:ext cx="310896" cy="248959"/>
+          </a:xfrm>
+          <a:prstGeom prst="rect">
+            <a:avLst/>
+          </a:prstGeom>
+        </p:spPr>
+      </p:pic>
+      <p:sp>
+        <p:nvSpPr>
+          <p:cNvPr id="45" name="TextBox 44"/>
+          <p:cNvSpPr txBox="1"/>
+          <p:nvPr/>
+        </p:nvSpPr>
+        <p:spPr>
+          <a:xfrm>
+            <a:off x="502920" y="5833872"/>
+            <a:ext cx="1097280" cy="457200"/>
+          </a:xfrm>
+          <a:prstGeom prst="rect">
+            <a:avLst/>
+          </a:prstGeom>
+          <a:noFill/>
+        </p:spPr>
+        <p:txBody>
+          <a:bodyPr wrap="square" lIns="0" tIns="0" rIns="0" bIns="0" anchor="t">
+            <a:noAutofit/>
+          </a:bodyPr>
+          <a:lstStyle/>
+          <a:p>
+            <a:pPr algn="ctr"/>
+            <a:r>
+              <a:rPr sz="950" b="1" i="0">
+                <a:solidFill>
+                  <a:srgbClr val="3A3335"/>
+                </a:solidFill>
+                <a:latin typeface="Aptos"/>
+              </a:rPr>
+              <a:t>Technologies used</a:t>
+            </a:r>
+          </a:p>
+        </p:txBody>
+      </p:sp>
+      <p:pic>
+        <p:nvPicPr>
+          <p:cNvPr id="46" name="Picture 45" descr="image30.jpeg"/>
+          <p:cNvPicPr>
+            <a:picLocks noChangeAspect="1"/>
+          </p:cNvPicPr>
+          <p:nvPr/>
+        </p:nvPicPr>
+        <p:blipFill>
+          <a:blip r:embed="rId10"/>
+          <a:stretch>
+            <a:fillRect/>
+          </a:stretch>
+        </p:blipFill>
+        <p:spPr>
+          <a:xfrm>
+            <a:off x="2113788" y="5541054"/>
+            <a:ext cx="420624" cy="366179"/>
+          </a:xfrm>
+          <a:prstGeom prst="rect">
+            <a:avLst/>
+          </a:prstGeom>
+        </p:spPr>
+      </p:pic>
+      <p:sp>
+        <p:nvSpPr>
+          <p:cNvPr id="47" name="TextBox 46"/>
+          <p:cNvSpPr txBox="1"/>
+          <p:nvPr/>
+        </p:nvSpPr>
+        <p:spPr>
+          <a:xfrm>
+            <a:off x="1920240" y="5971032"/>
+            <a:ext cx="807720" cy="274320"/>
+          </a:xfrm>
+          <a:prstGeom prst="rect">
+            <a:avLst/>
+          </a:prstGeom>
+          <a:noFill/>
+        </p:spPr>
+        <p:txBody>
+          <a:bodyPr wrap="square" lIns="0" tIns="0" rIns="0" bIns="0" anchor="t">
+            <a:noAutofit/>
+          </a:bodyPr>
+          <a:lstStyle/>
+          <a:p>
+            <a:pPr algn="ctr"/>
+            <a:r>
+              <a:rPr sz="800" b="0" i="0">
+                <a:solidFill>
+                  <a:srgbClr val="140C12"/>
+                </a:solidFill>
+                <a:latin typeface="Aptos"/>
+              </a:rPr>
+              <a:t>React</a:t>
+            </a:r>
+          </a:p>
+        </p:txBody>
+      </p:sp>
+      <p:pic>
+        <p:nvPicPr>
+          <p:cNvPr id="48" name="Picture 47" descr="image18.png"/>
+          <p:cNvPicPr>
+            <a:picLocks noChangeAspect="1"/>
+          </p:cNvPicPr>
+          <p:nvPr/>
+        </p:nvPicPr>
+        <p:blipFill>
+          <a:blip r:embed="rId11"/>
+          <a:stretch>
+            <a:fillRect/>
+          </a:stretch>
+        </p:blipFill>
+        <p:spPr>
+          <a:xfrm>
+            <a:off x="2921508" y="5513832"/>
+            <a:ext cx="420624" cy="420624"/>
+          </a:xfrm>
+          <a:prstGeom prst="rect">
+            <a:avLst/>
+          </a:prstGeom>
+        </p:spPr>
+      </p:pic>
+      <p:sp>
+        <p:nvSpPr>
+          <p:cNvPr id="49" name="TextBox 48"/>
+          <p:cNvSpPr txBox="1"/>
+          <p:nvPr/>
+        </p:nvSpPr>
+        <p:spPr>
+          <a:xfrm>
+            <a:off x="2727960" y="5971032"/>
+            <a:ext cx="807720" cy="274320"/>
+          </a:xfrm>
+          <a:prstGeom prst="rect">
+            <a:avLst/>
+          </a:prstGeom>
+          <a:noFill/>
+        </p:spPr>
+        <p:txBody>
+          <a:bodyPr wrap="square" lIns="0" tIns="0" rIns="0" bIns="0" anchor="t">
+            <a:noAutofit/>
+          </a:bodyPr>
+          <a:lstStyle/>
+          <a:p>
+            <a:pPr algn="ctr"/>
+            <a:r>
+              <a:rPr sz="800" b="0" i="0">
+                <a:solidFill>
+                  <a:srgbClr val="140C12"/>
+                </a:solidFill>
+                <a:latin typeface="Aptos"/>
+              </a:rPr>
+              <a:t>TypeScript</a:t>
+            </a:r>
+          </a:p>
+        </p:txBody>
+      </p:sp>
+      <p:pic>
+        <p:nvPicPr>
+          <p:cNvPr id="50" name="Picture 49" descr="badge_tw_5A5555.png"/>
+          <p:cNvPicPr>
+            <a:picLocks noChangeAspect="1"/>
+          </p:cNvPicPr>
+          <p:nvPr/>
+        </p:nvPicPr>
+        <p:blipFill>
+          <a:blip r:embed="rId12"/>
+          <a:stretch>
+            <a:fillRect/>
+          </a:stretch>
+        </p:blipFill>
+        <p:spPr>
+          <a:xfrm>
+            <a:off x="3729228" y="5513832"/>
+            <a:ext cx="420624" cy="420624"/>
+          </a:xfrm>
+          <a:prstGeom prst="rect">
+            <a:avLst/>
+          </a:prstGeom>
+        </p:spPr>
+      </p:pic>
+      <p:sp>
+        <p:nvSpPr>
+          <p:cNvPr id="51" name="TextBox 50"/>
+          <p:cNvSpPr txBox="1"/>
+          <p:nvPr/>
+        </p:nvSpPr>
+        <p:spPr>
+          <a:xfrm>
+            <a:off x="3535680" y="5971032"/>
+            <a:ext cx="807720" cy="274320"/>
+          </a:xfrm>
+          <a:prstGeom prst="rect">
+            <a:avLst/>
+          </a:prstGeom>
+          <a:noFill/>
+        </p:spPr>
+        <p:txBody>
+          <a:bodyPr wrap="square" lIns="0" tIns="0" rIns="0" bIns="0" anchor="t">
+            <a:noAutofit/>
+          </a:bodyPr>
+          <a:lstStyle/>
+          <a:p>
+            <a:pPr algn="ctr"/>
+            <a:r>
+              <a:rPr sz="800" b="0" i="0">
+                <a:solidFill>
+                  <a:srgbClr val="140C12"/>
+                </a:solidFill>
+                <a:latin typeface="Aptos"/>
+              </a:rPr>
+              <a:t>Tailwind</a:t>
+            </a:r>
+          </a:p>
+        </p:txBody>
+      </p:sp>
+      <p:pic>
+        <p:nvPicPr>
+          <p:cNvPr id="52" name="Picture 51" descr="badge_ui_3A3335.png"/>
+          <p:cNvPicPr>
+            <a:picLocks noChangeAspect="1"/>
+          </p:cNvPicPr>
+          <p:nvPr/>
+        </p:nvPicPr>
+        <p:blipFill>
+          <a:blip r:embed="rId13"/>
+          <a:stretch>
+            <a:fillRect/>
+          </a:stretch>
+        </p:blipFill>
+        <p:spPr>
+          <a:xfrm>
+            <a:off x="4536947" y="5513832"/>
+            <a:ext cx="420624" cy="420624"/>
+          </a:xfrm>
+          <a:prstGeom prst="rect">
+            <a:avLst/>
+          </a:prstGeom>
+        </p:spPr>
+      </p:pic>
+      <p:sp>
+        <p:nvSpPr>
+          <p:cNvPr id="53" name="TextBox 52"/>
+          <p:cNvSpPr txBox="1"/>
+          <p:nvPr/>
+        </p:nvSpPr>
+        <p:spPr>
+          <a:xfrm>
+            <a:off x="4343400" y="5971032"/>
+            <a:ext cx="807720" cy="274320"/>
+          </a:xfrm>
+          <a:prstGeom prst="rect">
+            <a:avLst/>
+          </a:prstGeom>
+          <a:noFill/>
+        </p:spPr>
+        <p:txBody>
+          <a:bodyPr wrap="square" lIns="0" tIns="0" rIns="0" bIns="0" anchor="t">
+            <a:noAutofit/>
+          </a:bodyPr>
+          <a:lstStyle/>
+          <a:p>
+            <a:pPr algn="ctr"/>
+            <a:r>
+              <a:rPr sz="800" b="0" i="0">
+                <a:solidFill>
+                  <a:srgbClr val="140C12"/>
+                </a:solidFill>
+                <a:latin typeface="Aptos"/>
+              </a:rPr>
+              <a:t>shadcn/ui</a:t>
+            </a:r>
+          </a:p>
+        </p:txBody>
+      </p:sp>
+      <p:pic>
+        <p:nvPicPr>
+          <p:cNvPr id="54" name="Picture 53" descr="image31.png"/>
+          <p:cNvPicPr>
+            <a:picLocks noChangeAspect="1"/>
+          </p:cNvPicPr>
+          <p:nvPr/>
+        </p:nvPicPr>
+        <p:blipFill>
+          <a:blip r:embed="rId14"/>
+          <a:stretch>
+            <a:fillRect/>
+          </a:stretch>
+        </p:blipFill>
+        <p:spPr>
+          <a:xfrm>
+            <a:off x="5344667" y="5513832"/>
+            <a:ext cx="420624" cy="420624"/>
+          </a:xfrm>
+          <a:prstGeom prst="rect">
+            <a:avLst/>
+          </a:prstGeom>
+        </p:spPr>
+      </p:pic>
+      <p:sp>
+        <p:nvSpPr>
+          <p:cNvPr id="55" name="TextBox 54"/>
+          <p:cNvSpPr txBox="1"/>
+          <p:nvPr/>
+        </p:nvSpPr>
+        <p:spPr>
+          <a:xfrm>
+            <a:off x="5151120" y="5971032"/>
+            <a:ext cx="807720" cy="274320"/>
+          </a:xfrm>
+          <a:prstGeom prst="rect">
+            <a:avLst/>
+          </a:prstGeom>
+          <a:noFill/>
+        </p:spPr>
+        <p:txBody>
+          <a:bodyPr wrap="square" lIns="0" tIns="0" rIns="0" bIns="0" anchor="t">
+            <a:noAutofit/>
+          </a:bodyPr>
+          <a:lstStyle/>
+          <a:p>
+            <a:pPr algn="ctr"/>
+            <a:r>
+              <a:rPr sz="800" b="0" i="0">
+                <a:solidFill>
+                  <a:srgbClr val="140C12"/>
+                </a:solidFill>
+                <a:latin typeface="Aptos"/>
+              </a:rPr>
+              <a:t>Python</a:t>
+            </a:r>
+          </a:p>
+        </p:txBody>
+      </p:sp>
+      <p:pic>
+        <p:nvPicPr>
+          <p:cNvPr id="56" name="Picture 55" descr="image19.png"/>
+          <p:cNvPicPr>
+            <a:picLocks noChangeAspect="1"/>
+          </p:cNvPicPr>
+          <p:nvPr/>
+        </p:nvPicPr>
+        <p:blipFill>
+          <a:blip r:embed="rId15"/>
+          <a:stretch>
+            <a:fillRect/>
+          </a:stretch>
+        </p:blipFill>
+        <p:spPr>
+          <a:xfrm>
+            <a:off x="6152387" y="5513832"/>
+            <a:ext cx="420624" cy="420624"/>
+          </a:xfrm>
+          <a:prstGeom prst="rect">
+            <a:avLst/>
+          </a:prstGeom>
+        </p:spPr>
+      </p:pic>
+      <p:sp>
+        <p:nvSpPr>
+          <p:cNvPr id="57" name="TextBox 56"/>
+          <p:cNvSpPr txBox="1"/>
+          <p:nvPr/>
+        </p:nvSpPr>
+        <p:spPr>
+          <a:xfrm>
+            <a:off x="5958839" y="5971032"/>
+            <a:ext cx="807720" cy="274320"/>
+          </a:xfrm>
+          <a:prstGeom prst="rect">
+            <a:avLst/>
+          </a:prstGeom>
+          <a:noFill/>
+        </p:spPr>
+        <p:txBody>
+          <a:bodyPr wrap="square" lIns="0" tIns="0" rIns="0" bIns="0" anchor="t">
+            <a:noAutofit/>
+          </a:bodyPr>
+          <a:lstStyle/>
+          <a:p>
+            <a:pPr algn="ctr"/>
+            <a:r>
+              <a:rPr sz="800" b="0" i="0">
+                <a:solidFill>
+                  <a:srgbClr val="140C12"/>
+                </a:solidFill>
+                <a:latin typeface="Aptos"/>
+              </a:rPr>
+              <a:t>FastAPI</a:t>
+            </a:r>
+          </a:p>
+        </p:txBody>
+      </p:sp>
+      <p:pic>
+        <p:nvPicPr>
+          <p:cNvPr id="58" name="Picture 57" descr="image32.png"/>
+          <p:cNvPicPr>
+            <a:picLocks noChangeAspect="1"/>
+          </p:cNvPicPr>
+          <p:nvPr/>
+        </p:nvPicPr>
+        <p:blipFill>
+          <a:blip r:embed="rId16"/>
+          <a:stretch>
+            <a:fillRect/>
+          </a:stretch>
+        </p:blipFill>
+        <p:spPr>
+          <a:xfrm>
+            <a:off x="6966330" y="5513832"/>
+            <a:ext cx="408179" cy="420624"/>
+          </a:xfrm>
+          <a:prstGeom prst="rect">
+            <a:avLst/>
+          </a:prstGeom>
+        </p:spPr>
+      </p:pic>
+      <p:sp>
+        <p:nvSpPr>
+          <p:cNvPr id="59" name="TextBox 58"/>
+          <p:cNvSpPr txBox="1"/>
+          <p:nvPr/>
+        </p:nvSpPr>
+        <p:spPr>
+          <a:xfrm>
+            <a:off x="6766560" y="5971032"/>
+            <a:ext cx="807720" cy="274320"/>
+          </a:xfrm>
+          <a:prstGeom prst="rect">
+            <a:avLst/>
+          </a:prstGeom>
+          <a:noFill/>
+        </p:spPr>
+        <p:txBody>
+          <a:bodyPr wrap="square" lIns="0" tIns="0" rIns="0" bIns="0" anchor="t">
+            <a:noAutofit/>
+          </a:bodyPr>
+          <a:lstStyle/>
+          <a:p>
+            <a:pPr algn="ctr"/>
+            <a:r>
+              <a:rPr sz="800" b="0" i="0">
+                <a:solidFill>
+                  <a:srgbClr val="140C12"/>
+                </a:solidFill>
+                <a:latin typeface="Aptos"/>
+              </a:rPr>
+              <a:t>PostgreSQL</a:t>
+            </a:r>
+          </a:p>
+        </p:txBody>
+      </p:sp>
+      <p:pic>
+        <p:nvPicPr>
+          <p:cNvPr id="60" name="Picture 59" descr="badge_pg_7A5C2E.png"/>
+          <p:cNvPicPr>
+            <a:picLocks noChangeAspect="1"/>
+          </p:cNvPicPr>
+          <p:nvPr/>
+        </p:nvPicPr>
+        <p:blipFill>
+          <a:blip r:embed="rId17"/>
+          <a:stretch>
+            <a:fillRect/>
+          </a:stretch>
+        </p:blipFill>
+        <p:spPr>
+          <a:xfrm>
+            <a:off x="7767827" y="5513832"/>
+            <a:ext cx="420624" cy="420624"/>
+          </a:xfrm>
+          <a:prstGeom prst="rect">
+            <a:avLst/>
+          </a:prstGeom>
+        </p:spPr>
+      </p:pic>
+      <p:sp>
+        <p:nvSpPr>
+          <p:cNvPr id="61" name="TextBox 60"/>
+          <p:cNvSpPr txBox="1"/>
+          <p:nvPr/>
+        </p:nvSpPr>
+        <p:spPr>
+          <a:xfrm>
+            <a:off x="7574280" y="5971032"/>
+            <a:ext cx="807720" cy="274320"/>
+          </a:xfrm>
+          <a:prstGeom prst="rect">
+            <a:avLst/>
+          </a:prstGeom>
+          <a:noFill/>
+        </p:spPr>
+        <p:txBody>
+          <a:bodyPr wrap="square" lIns="0" tIns="0" rIns="0" bIns="0" anchor="t">
+            <a:noAutofit/>
+          </a:bodyPr>
+          <a:lstStyle/>
+          <a:p>
+            <a:pPr algn="ctr"/>
+            <a:r>
+              <a:rPr sz="800" b="0" i="0">
+                <a:solidFill>
+                  <a:srgbClr val="140C12"/>
+                </a:solidFill>
+                <a:latin typeface="Aptos"/>
+              </a:rPr>
+              <a:t>pgvector</a:t>
+            </a:r>
+          </a:p>
+        </p:txBody>
+      </p:sp>
+      <p:pic>
+        <p:nvPicPr>
+          <p:cNvPr id="62" name="Picture 61" descr="image21.png"/>
           <p:cNvPicPr>
             <a:picLocks noChangeAspect="1"/>
           </p:cNvPicPr>
@@ -16158,8 +17112,8 @@
         </p:blipFill>
         <p:spPr>
           <a:xfrm>
-            <a:off x="8220456" y="3477577"/>
-            <a:ext cx="219456" cy="195453"/>
+            <a:off x="8575547" y="5513832"/>
+            <a:ext cx="420624" cy="420624"/>
           </a:xfrm>
           <a:prstGeom prst="rect">
             <a:avLst/>
@@ -16168,211 +17122,14 @@
       </p:pic>
       <p:sp>
         <p:nvSpPr>
-          <p:cNvPr id="41" name="TextBox 40"/>
+          <p:cNvPr id="63" name="TextBox 62"/>
           <p:cNvSpPr txBox="1"/>
           <p:nvPr/>
         </p:nvSpPr>
         <p:spPr>
           <a:xfrm>
-            <a:off x="8549640" y="3401568"/>
-            <a:ext cx="3108960" cy="347472"/>
-          </a:xfrm>
-          <a:prstGeom prst="rect">
-            <a:avLst/>
-          </a:prstGeom>
-          <a:noFill/>
-        </p:spPr>
-        <p:txBody>
-          <a:bodyPr wrap="square" lIns="18288" tIns="0" rIns="18288" bIns="0" anchor="ctr">
-            <a:noAutofit/>
-          </a:bodyPr>
-          <a:lstStyle/>
-          <a:p>
-            <a:pPr algn="l"/>
-            <a:r>
-              <a:rPr sz="1050" b="1" i="0">
-                <a:solidFill>
-                  <a:srgbClr val="FFFFFF"/>
-                </a:solidFill>
-                <a:latin typeface="Aptos"/>
-              </a:rPr>
-              <a:t>External APIs / datasets / tools</a:t>
-            </a:r>
-          </a:p>
-        </p:txBody>
-      </p:sp>
-      <p:sp>
-        <p:nvSpPr>
-          <p:cNvPr id="42" name="TextBox 41"/>
-          <p:cNvSpPr txBox="1"/>
-          <p:nvPr/>
-        </p:nvSpPr>
-        <p:spPr>
-          <a:xfrm>
-            <a:off x="8202167" y="3803904"/>
-            <a:ext cx="3438144" cy="1481328"/>
-          </a:xfrm>
-          <a:prstGeom prst="rect">
-            <a:avLst/>
-          </a:prstGeom>
-          <a:noFill/>
-        </p:spPr>
-        <p:txBody>
-          <a:bodyPr wrap="square" lIns="54864" tIns="27432" rIns="54864" bIns="27432" anchor="t">
-            <a:noAutofit/>
-          </a:bodyPr>
-          <a:lstStyle/>
-          <a:p>
-            <a:pPr algn="l" marL="146304" indent="-146304">
-              <a:spcAft>
-                <a:spcPts val="300"/>
-              </a:spcAft>
-              <a:buFont typeface="Arial"/>
-              <a:buChar char="•"/>
-            </a:pPr>
-            <a:r>
-              <a:rPr sz="950" b="1" i="0">
-                <a:solidFill>
-                  <a:srgbClr val="1F497D"/>
-                </a:solidFill>
-                <a:latin typeface="Aptos"/>
-              </a:rPr>
-              <a:t>No external API at runtime. </a:t>
-            </a:r>
-            <a:r>
-              <a:rPr sz="950" b="0" i="0">
-                <a:solidFill>
-                  <a:srgbClr val="140C12"/>
-                </a:solidFill>
-                <a:latin typeface="Aptos"/>
-              </a:rPr>
-              <a:t>Reference data: Tamil Nadu district-office mapping (38 districts, 760 offices)</a:t>
-            </a:r>
-          </a:p>
-          <a:p>
-            <a:pPr algn="l" marL="146304" indent="-146304">
-              <a:spcAft>
-                <a:spcPts val="300"/>
-              </a:spcAft>
-              <a:buFont typeface="Arial"/>
-              <a:buChar char="•"/>
-            </a:pPr>
-            <a:r>
-              <a:rPr sz="950" b="1" i="0">
-                <a:solidFill>
-                  <a:srgbClr val="1F497D"/>
-                </a:solidFill>
-                <a:latin typeface="Aptos"/>
-              </a:rPr>
-              <a:t>Datasets: </a:t>
-            </a:r>
-            <a:r>
-              <a:rPr sz="950" b="0" i="0">
-                <a:solidFill>
-                  <a:srgbClr val="140C12"/>
-                </a:solidFill>
-                <a:latin typeface="Aptos"/>
-              </a:rPr>
-              <a:t>NYC 311 sample, COMI-LINGUA (Hinglish), DravidianCodeMix (Tanglish)</a:t>
-            </a:r>
-          </a:p>
-          <a:p>
-            <a:pPr algn="l" marL="146304" indent="-146304">
-              <a:spcAft>
-                <a:spcPts val="300"/>
-              </a:spcAft>
-              <a:buFont typeface="Arial"/>
-              <a:buChar char="•"/>
-            </a:pPr>
-            <a:r>
-              <a:rPr sz="950" b="1" i="0">
-                <a:solidFill>
-                  <a:srgbClr val="1F497D"/>
-                </a:solidFill>
-                <a:latin typeface="Aptos"/>
-              </a:rPr>
-              <a:t>Tools: </a:t>
-            </a:r>
-            <a:r>
-              <a:rPr sz="950" b="0" i="0">
-                <a:solidFill>
-                  <a:srgbClr val="140C12"/>
-                </a:solidFill>
-                <a:latin typeface="Aptos"/>
-              </a:rPr>
-              <a:t>Mailpit for demo email, Gmail SMTP optional, 114-check end-to-end test suite</a:t>
-            </a:r>
-          </a:p>
-        </p:txBody>
-      </p:sp>
-      <p:sp>
-        <p:nvSpPr>
-          <p:cNvPr id="43" name="Rounded Rectangle 42"/>
-          <p:cNvSpPr/>
-          <p:nvPr/>
-        </p:nvSpPr>
-        <p:spPr>
-          <a:xfrm>
-            <a:off x="411480" y="5440680"/>
-            <a:ext cx="11338560" cy="914400"/>
-          </a:xfrm>
-          <a:prstGeom prst="roundRect">
-            <a:avLst>
-              <a:gd name="adj" fmla="val 12000"/>
-            </a:avLst>
-          </a:prstGeom>
-          <a:solidFill>
-            <a:srgbClr val="FFFFFF"/>
-          </a:solidFill>
-          <a:ln w="12700">
-            <a:solidFill>
-              <a:srgbClr val="1F497D"/>
-            </a:solidFill>
-          </a:ln>
-          <a:effectLst/>
-        </p:spPr>
-        <p:txBody>
-          <a:bodyPr rtlCol="0" anchor="ctr"/>
-          <a:lstStyle/>
-          <a:p>
-            <a:pPr algn="ctr"/>
-          </a:p>
-        </p:txBody>
-      </p:sp>
-      <p:pic>
-        <p:nvPicPr>
-          <p:cNvPr id="44" name="Picture 43" descr="image17.png"/>
-          <p:cNvPicPr>
-            <a:picLocks noChangeAspect="1"/>
-          </p:cNvPicPr>
-          <p:nvPr/>
-        </p:nvPicPr>
-        <p:blipFill>
-          <a:blip r:embed="rId8"/>
-          <a:stretch>
-            <a:fillRect/>
-          </a:stretch>
-        </p:blipFill>
-        <p:spPr>
-          <a:xfrm>
-            <a:off x="868680" y="5535656"/>
-            <a:ext cx="310896" cy="248959"/>
-          </a:xfrm>
-          <a:prstGeom prst="rect">
-            <a:avLst/>
-          </a:prstGeom>
-        </p:spPr>
-      </p:pic>
-      <p:sp>
-        <p:nvSpPr>
-          <p:cNvPr id="45" name="TextBox 44"/>
-          <p:cNvSpPr txBox="1"/>
-          <p:nvPr/>
-        </p:nvSpPr>
-        <p:spPr>
-          <a:xfrm>
-            <a:off x="502920" y="5833872"/>
-            <a:ext cx="1097280" cy="457200"/>
+            <a:off x="8381999" y="5971032"/>
+            <a:ext cx="807720" cy="274320"/>
           </a:xfrm>
           <a:prstGeom prst="rect">
             <a:avLst/>
@@ -16387,537 +17144,6 @@
           <a:p>
             <a:pPr algn="ctr"/>
             <a:r>
-              <a:rPr sz="950" b="1" i="0">
-                <a:solidFill>
-                  <a:srgbClr val="1F497D"/>
-                </a:solidFill>
-                <a:latin typeface="Aptos"/>
-              </a:rPr>
-              <a:t>Technologies used</a:t>
-            </a:r>
-          </a:p>
-        </p:txBody>
-      </p:sp>
-      <p:pic>
-        <p:nvPicPr>
-          <p:cNvPr id="46" name="Picture 45" descr="image30.jpeg"/>
-          <p:cNvPicPr>
-            <a:picLocks noChangeAspect="1"/>
-          </p:cNvPicPr>
-          <p:nvPr/>
-        </p:nvPicPr>
-        <p:blipFill>
-          <a:blip r:embed="rId9"/>
-          <a:stretch>
-            <a:fillRect/>
-          </a:stretch>
-        </p:blipFill>
-        <p:spPr>
-          <a:xfrm>
-            <a:off x="2113788" y="5541054"/>
-            <a:ext cx="420624" cy="366179"/>
-          </a:xfrm>
-          <a:prstGeom prst="rect">
-            <a:avLst/>
-          </a:prstGeom>
-        </p:spPr>
-      </p:pic>
-      <p:sp>
-        <p:nvSpPr>
-          <p:cNvPr id="47" name="TextBox 46"/>
-          <p:cNvSpPr txBox="1"/>
-          <p:nvPr/>
-        </p:nvSpPr>
-        <p:spPr>
-          <a:xfrm>
-            <a:off x="1920240" y="5971032"/>
-            <a:ext cx="807720" cy="274320"/>
-          </a:xfrm>
-          <a:prstGeom prst="rect">
-            <a:avLst/>
-          </a:prstGeom>
-          <a:noFill/>
-        </p:spPr>
-        <p:txBody>
-          <a:bodyPr wrap="square" lIns="0" tIns="0" rIns="0" bIns="0" anchor="t">
-            <a:noAutofit/>
-          </a:bodyPr>
-          <a:lstStyle/>
-          <a:p>
-            <a:pPr algn="ctr"/>
-            <a:r>
-              <a:rPr sz="800" b="0" i="0">
-                <a:solidFill>
-                  <a:srgbClr val="140C12"/>
-                </a:solidFill>
-                <a:latin typeface="Aptos"/>
-              </a:rPr>
-              <a:t>React</a:t>
-            </a:r>
-          </a:p>
-        </p:txBody>
-      </p:sp>
-      <p:pic>
-        <p:nvPicPr>
-          <p:cNvPr id="48" name="Picture 47" descr="image18.png"/>
-          <p:cNvPicPr>
-            <a:picLocks noChangeAspect="1"/>
-          </p:cNvPicPr>
-          <p:nvPr/>
-        </p:nvPicPr>
-        <p:blipFill>
-          <a:blip r:embed="rId10"/>
-          <a:stretch>
-            <a:fillRect/>
-          </a:stretch>
-        </p:blipFill>
-        <p:spPr>
-          <a:xfrm>
-            <a:off x="2921508" y="5513832"/>
-            <a:ext cx="420624" cy="420624"/>
-          </a:xfrm>
-          <a:prstGeom prst="rect">
-            <a:avLst/>
-          </a:prstGeom>
-        </p:spPr>
-      </p:pic>
-      <p:sp>
-        <p:nvSpPr>
-          <p:cNvPr id="49" name="TextBox 48"/>
-          <p:cNvSpPr txBox="1"/>
-          <p:nvPr/>
-        </p:nvSpPr>
-        <p:spPr>
-          <a:xfrm>
-            <a:off x="2727960" y="5971032"/>
-            <a:ext cx="807720" cy="274320"/>
-          </a:xfrm>
-          <a:prstGeom prst="rect">
-            <a:avLst/>
-          </a:prstGeom>
-          <a:noFill/>
-        </p:spPr>
-        <p:txBody>
-          <a:bodyPr wrap="square" lIns="0" tIns="0" rIns="0" bIns="0" anchor="t">
-            <a:noAutofit/>
-          </a:bodyPr>
-          <a:lstStyle/>
-          <a:p>
-            <a:pPr algn="ctr"/>
-            <a:r>
-              <a:rPr sz="800" b="0" i="0">
-                <a:solidFill>
-                  <a:srgbClr val="140C12"/>
-                </a:solidFill>
-                <a:latin typeface="Aptos"/>
-              </a:rPr>
-              <a:t>TypeScript</a:t>
-            </a:r>
-          </a:p>
-        </p:txBody>
-      </p:sp>
-      <p:pic>
-        <p:nvPicPr>
-          <p:cNvPr id="50" name="Picture 49" descr="badge_tw.png"/>
-          <p:cNvPicPr>
-            <a:picLocks noChangeAspect="1"/>
-          </p:cNvPicPr>
-          <p:nvPr/>
-        </p:nvPicPr>
-        <p:blipFill>
-          <a:blip r:embed="rId11"/>
-          <a:stretch>
-            <a:fillRect/>
-          </a:stretch>
-        </p:blipFill>
-        <p:spPr>
-          <a:xfrm>
-            <a:off x="3729228" y="5513832"/>
-            <a:ext cx="420624" cy="420624"/>
-          </a:xfrm>
-          <a:prstGeom prst="rect">
-            <a:avLst/>
-          </a:prstGeom>
-        </p:spPr>
-      </p:pic>
-      <p:sp>
-        <p:nvSpPr>
-          <p:cNvPr id="51" name="TextBox 50"/>
-          <p:cNvSpPr txBox="1"/>
-          <p:nvPr/>
-        </p:nvSpPr>
-        <p:spPr>
-          <a:xfrm>
-            <a:off x="3535680" y="5971032"/>
-            <a:ext cx="807720" cy="274320"/>
-          </a:xfrm>
-          <a:prstGeom prst="rect">
-            <a:avLst/>
-          </a:prstGeom>
-          <a:noFill/>
-        </p:spPr>
-        <p:txBody>
-          <a:bodyPr wrap="square" lIns="0" tIns="0" rIns="0" bIns="0" anchor="t">
-            <a:noAutofit/>
-          </a:bodyPr>
-          <a:lstStyle/>
-          <a:p>
-            <a:pPr algn="ctr"/>
-            <a:r>
-              <a:rPr sz="800" b="0" i="0">
-                <a:solidFill>
-                  <a:srgbClr val="140C12"/>
-                </a:solidFill>
-                <a:latin typeface="Aptos"/>
-              </a:rPr>
-              <a:t>Tailwind</a:t>
-            </a:r>
-          </a:p>
-        </p:txBody>
-      </p:sp>
-      <p:pic>
-        <p:nvPicPr>
-          <p:cNvPr id="52" name="Picture 51" descr="badge_ui.png"/>
-          <p:cNvPicPr>
-            <a:picLocks noChangeAspect="1"/>
-          </p:cNvPicPr>
-          <p:nvPr/>
-        </p:nvPicPr>
-        <p:blipFill>
-          <a:blip r:embed="rId12"/>
-          <a:stretch>
-            <a:fillRect/>
-          </a:stretch>
-        </p:blipFill>
-        <p:spPr>
-          <a:xfrm>
-            <a:off x="4536947" y="5513832"/>
-            <a:ext cx="420624" cy="420624"/>
-          </a:xfrm>
-          <a:prstGeom prst="rect">
-            <a:avLst/>
-          </a:prstGeom>
-        </p:spPr>
-      </p:pic>
-      <p:sp>
-        <p:nvSpPr>
-          <p:cNvPr id="53" name="TextBox 52"/>
-          <p:cNvSpPr txBox="1"/>
-          <p:nvPr/>
-        </p:nvSpPr>
-        <p:spPr>
-          <a:xfrm>
-            <a:off x="4343400" y="5971032"/>
-            <a:ext cx="807720" cy="274320"/>
-          </a:xfrm>
-          <a:prstGeom prst="rect">
-            <a:avLst/>
-          </a:prstGeom>
-          <a:noFill/>
-        </p:spPr>
-        <p:txBody>
-          <a:bodyPr wrap="square" lIns="0" tIns="0" rIns="0" bIns="0" anchor="t">
-            <a:noAutofit/>
-          </a:bodyPr>
-          <a:lstStyle/>
-          <a:p>
-            <a:pPr algn="ctr"/>
-            <a:r>
-              <a:rPr sz="800" b="0" i="0">
-                <a:solidFill>
-                  <a:srgbClr val="140C12"/>
-                </a:solidFill>
-                <a:latin typeface="Aptos"/>
-              </a:rPr>
-              <a:t>shadcn/ui</a:t>
-            </a:r>
-          </a:p>
-        </p:txBody>
-      </p:sp>
-      <p:pic>
-        <p:nvPicPr>
-          <p:cNvPr id="54" name="Picture 53" descr="image31.png"/>
-          <p:cNvPicPr>
-            <a:picLocks noChangeAspect="1"/>
-          </p:cNvPicPr>
-          <p:nvPr/>
-        </p:nvPicPr>
-        <p:blipFill>
-          <a:blip r:embed="rId13"/>
-          <a:stretch>
-            <a:fillRect/>
-          </a:stretch>
-        </p:blipFill>
-        <p:spPr>
-          <a:xfrm>
-            <a:off x="5344667" y="5513832"/>
-            <a:ext cx="420624" cy="420624"/>
-          </a:xfrm>
-          <a:prstGeom prst="rect">
-            <a:avLst/>
-          </a:prstGeom>
-        </p:spPr>
-      </p:pic>
-      <p:sp>
-        <p:nvSpPr>
-          <p:cNvPr id="55" name="TextBox 54"/>
-          <p:cNvSpPr txBox="1"/>
-          <p:nvPr/>
-        </p:nvSpPr>
-        <p:spPr>
-          <a:xfrm>
-            <a:off x="5151120" y="5971032"/>
-            <a:ext cx="807720" cy="274320"/>
-          </a:xfrm>
-          <a:prstGeom prst="rect">
-            <a:avLst/>
-          </a:prstGeom>
-          <a:noFill/>
-        </p:spPr>
-        <p:txBody>
-          <a:bodyPr wrap="square" lIns="0" tIns="0" rIns="0" bIns="0" anchor="t">
-            <a:noAutofit/>
-          </a:bodyPr>
-          <a:lstStyle/>
-          <a:p>
-            <a:pPr algn="ctr"/>
-            <a:r>
-              <a:rPr sz="800" b="0" i="0">
-                <a:solidFill>
-                  <a:srgbClr val="140C12"/>
-                </a:solidFill>
-                <a:latin typeface="Aptos"/>
-              </a:rPr>
-              <a:t>Python</a:t>
-            </a:r>
-          </a:p>
-        </p:txBody>
-      </p:sp>
-      <p:pic>
-        <p:nvPicPr>
-          <p:cNvPr id="56" name="Picture 55" descr="image19.png"/>
-          <p:cNvPicPr>
-            <a:picLocks noChangeAspect="1"/>
-          </p:cNvPicPr>
-          <p:nvPr/>
-        </p:nvPicPr>
-        <p:blipFill>
-          <a:blip r:embed="rId14"/>
-          <a:stretch>
-            <a:fillRect/>
-          </a:stretch>
-        </p:blipFill>
-        <p:spPr>
-          <a:xfrm>
-            <a:off x="6152387" y="5513832"/>
-            <a:ext cx="420624" cy="420624"/>
-          </a:xfrm>
-          <a:prstGeom prst="rect">
-            <a:avLst/>
-          </a:prstGeom>
-        </p:spPr>
-      </p:pic>
-      <p:sp>
-        <p:nvSpPr>
-          <p:cNvPr id="57" name="TextBox 56"/>
-          <p:cNvSpPr txBox="1"/>
-          <p:nvPr/>
-        </p:nvSpPr>
-        <p:spPr>
-          <a:xfrm>
-            <a:off x="5958839" y="5971032"/>
-            <a:ext cx="807720" cy="274320"/>
-          </a:xfrm>
-          <a:prstGeom prst="rect">
-            <a:avLst/>
-          </a:prstGeom>
-          <a:noFill/>
-        </p:spPr>
-        <p:txBody>
-          <a:bodyPr wrap="square" lIns="0" tIns="0" rIns="0" bIns="0" anchor="t">
-            <a:noAutofit/>
-          </a:bodyPr>
-          <a:lstStyle/>
-          <a:p>
-            <a:pPr algn="ctr"/>
-            <a:r>
-              <a:rPr sz="800" b="0" i="0">
-                <a:solidFill>
-                  <a:srgbClr val="140C12"/>
-                </a:solidFill>
-                <a:latin typeface="Aptos"/>
-              </a:rPr>
-              <a:t>FastAPI</a:t>
-            </a:r>
-          </a:p>
-        </p:txBody>
-      </p:sp>
-      <p:pic>
-        <p:nvPicPr>
-          <p:cNvPr id="58" name="Picture 57" descr="image32.png"/>
-          <p:cNvPicPr>
-            <a:picLocks noChangeAspect="1"/>
-          </p:cNvPicPr>
-          <p:nvPr/>
-        </p:nvPicPr>
-        <p:blipFill>
-          <a:blip r:embed="rId15"/>
-          <a:stretch>
-            <a:fillRect/>
-          </a:stretch>
-        </p:blipFill>
-        <p:spPr>
-          <a:xfrm>
-            <a:off x="6966330" y="5513832"/>
-            <a:ext cx="408179" cy="420624"/>
-          </a:xfrm>
-          <a:prstGeom prst="rect">
-            <a:avLst/>
-          </a:prstGeom>
-        </p:spPr>
-      </p:pic>
-      <p:sp>
-        <p:nvSpPr>
-          <p:cNvPr id="59" name="TextBox 58"/>
-          <p:cNvSpPr txBox="1"/>
-          <p:nvPr/>
-        </p:nvSpPr>
-        <p:spPr>
-          <a:xfrm>
-            <a:off x="6766560" y="5971032"/>
-            <a:ext cx="807720" cy="274320"/>
-          </a:xfrm>
-          <a:prstGeom prst="rect">
-            <a:avLst/>
-          </a:prstGeom>
-          <a:noFill/>
-        </p:spPr>
-        <p:txBody>
-          <a:bodyPr wrap="square" lIns="0" tIns="0" rIns="0" bIns="0" anchor="t">
-            <a:noAutofit/>
-          </a:bodyPr>
-          <a:lstStyle/>
-          <a:p>
-            <a:pPr algn="ctr"/>
-            <a:r>
-              <a:rPr sz="800" b="0" i="0">
-                <a:solidFill>
-                  <a:srgbClr val="140C12"/>
-                </a:solidFill>
-                <a:latin typeface="Aptos"/>
-              </a:rPr>
-              <a:t>PostgreSQL</a:t>
-            </a:r>
-          </a:p>
-        </p:txBody>
-      </p:sp>
-      <p:pic>
-        <p:nvPicPr>
-          <p:cNvPr id="60" name="Picture 59" descr="badge_pg.png"/>
-          <p:cNvPicPr>
-            <a:picLocks noChangeAspect="1"/>
-          </p:cNvPicPr>
-          <p:nvPr/>
-        </p:nvPicPr>
-        <p:blipFill>
-          <a:blip r:embed="rId16"/>
-          <a:stretch>
-            <a:fillRect/>
-          </a:stretch>
-        </p:blipFill>
-        <p:spPr>
-          <a:xfrm>
-            <a:off x="7767827" y="5513832"/>
-            <a:ext cx="420624" cy="420624"/>
-          </a:xfrm>
-          <a:prstGeom prst="rect">
-            <a:avLst/>
-          </a:prstGeom>
-        </p:spPr>
-      </p:pic>
-      <p:sp>
-        <p:nvSpPr>
-          <p:cNvPr id="61" name="TextBox 60"/>
-          <p:cNvSpPr txBox="1"/>
-          <p:nvPr/>
-        </p:nvSpPr>
-        <p:spPr>
-          <a:xfrm>
-            <a:off x="7574280" y="5971032"/>
-            <a:ext cx="807720" cy="274320"/>
-          </a:xfrm>
-          <a:prstGeom prst="rect">
-            <a:avLst/>
-          </a:prstGeom>
-          <a:noFill/>
-        </p:spPr>
-        <p:txBody>
-          <a:bodyPr wrap="square" lIns="0" tIns="0" rIns="0" bIns="0" anchor="t">
-            <a:noAutofit/>
-          </a:bodyPr>
-          <a:lstStyle/>
-          <a:p>
-            <a:pPr algn="ctr"/>
-            <a:r>
-              <a:rPr sz="800" b="0" i="0">
-                <a:solidFill>
-                  <a:srgbClr val="140C12"/>
-                </a:solidFill>
-                <a:latin typeface="Aptos"/>
-              </a:rPr>
-              <a:t>pgvector</a:t>
-            </a:r>
-          </a:p>
-        </p:txBody>
-      </p:sp>
-      <p:pic>
-        <p:nvPicPr>
-          <p:cNvPr id="62" name="Picture 61" descr="image21.png"/>
-          <p:cNvPicPr>
-            <a:picLocks noChangeAspect="1"/>
-          </p:cNvPicPr>
-          <p:nvPr/>
-        </p:nvPicPr>
-        <p:blipFill>
-          <a:blip r:embed="rId6"/>
-          <a:stretch>
-            <a:fillRect/>
-          </a:stretch>
-        </p:blipFill>
-        <p:spPr>
-          <a:xfrm>
-            <a:off x="8575547" y="5513832"/>
-            <a:ext cx="420624" cy="420624"/>
-          </a:xfrm>
-          <a:prstGeom prst="rect">
-            <a:avLst/>
-          </a:prstGeom>
-        </p:spPr>
-      </p:pic>
-      <p:sp>
-        <p:nvSpPr>
-          <p:cNvPr id="63" name="TextBox 62"/>
-          <p:cNvSpPr txBox="1"/>
-          <p:nvPr/>
-        </p:nvSpPr>
-        <p:spPr>
-          <a:xfrm>
-            <a:off x="8381999" y="5971032"/>
-            <a:ext cx="807720" cy="274320"/>
-          </a:xfrm>
-          <a:prstGeom prst="rect">
-            <a:avLst/>
-          </a:prstGeom>
-          <a:noFill/>
-        </p:spPr>
-        <p:txBody>
-          <a:bodyPr wrap="square" lIns="0" tIns="0" rIns="0" bIns="0" anchor="t">
-            <a:noAutofit/>
-          </a:bodyPr>
-          <a:lstStyle/>
-          <a:p>
-            <a:pPr algn="ctr"/>
-            <a:r>
               <a:rPr sz="800" b="0" i="0">
                 <a:solidFill>
                   <a:srgbClr val="140C12"/>
@@ -16932,65 +17158,6 @@
       <p:pic>
         <p:nvPicPr>
           <p:cNvPr id="64" name="Picture 63" descr="image22.png"/>
-          <p:cNvPicPr>
-            <a:picLocks noChangeAspect="1"/>
-          </p:cNvPicPr>
-          <p:nvPr/>
-        </p:nvPicPr>
-        <p:blipFill>
-          <a:blip r:embed="rId17"/>
-          <a:stretch>
-            <a:fillRect/>
-          </a:stretch>
-        </p:blipFill>
-        <p:spPr>
-          <a:xfrm>
-            <a:off x="9383267" y="5513832"/>
-            <a:ext cx="420624" cy="420624"/>
-          </a:xfrm>
-          <a:prstGeom prst="rect">
-            <a:avLst/>
-          </a:prstGeom>
-        </p:spPr>
-      </p:pic>
-      <p:sp>
-        <p:nvSpPr>
-          <p:cNvPr id="65" name="TextBox 64"/>
-          <p:cNvSpPr txBox="1"/>
-          <p:nvPr/>
-        </p:nvSpPr>
-        <p:spPr>
-          <a:xfrm>
-            <a:off x="9189719" y="5971032"/>
-            <a:ext cx="807720" cy="274320"/>
-          </a:xfrm>
-          <a:prstGeom prst="rect">
-            <a:avLst/>
-          </a:prstGeom>
-          <a:noFill/>
-        </p:spPr>
-        <p:txBody>
-          <a:bodyPr wrap="square" lIns="0" tIns="0" rIns="0" bIns="0" anchor="t">
-            <a:noAutofit/>
-          </a:bodyPr>
-          <a:lstStyle/>
-          <a:p>
-            <a:pPr algn="ctr"/>
-            <a:r>
-              <a:rPr sz="800" b="0" i="0">
-                <a:solidFill>
-                  <a:srgbClr val="140C12"/>
-                </a:solidFill>
-                <a:latin typeface="Aptos"/>
-              </a:rPr>
-              <a:t>Ollama</a:t>
-            </a:r>
-          </a:p>
-        </p:txBody>
-      </p:sp>
-      <p:pic>
-        <p:nvPicPr>
-          <p:cNvPr id="66" name="Picture 65" descr="badge_G3.png"/>
           <p:cNvPicPr>
             <a:picLocks noChangeAspect="1"/>
           </p:cNvPicPr>
@@ -17004,7 +17171,7 @@
         </p:blipFill>
         <p:spPr>
           <a:xfrm>
-            <a:off x="10190987" y="5513832"/>
+            <a:off x="9383267" y="5513832"/>
             <a:ext cx="420624" cy="420624"/>
           </a:xfrm>
           <a:prstGeom prst="rect">
@@ -17014,13 +17181,13 @@
       </p:pic>
       <p:sp>
         <p:nvSpPr>
-          <p:cNvPr id="67" name="TextBox 66"/>
+          <p:cNvPr id="65" name="TextBox 64"/>
           <p:cNvSpPr txBox="1"/>
           <p:nvPr/>
         </p:nvSpPr>
         <p:spPr>
           <a:xfrm>
-            <a:off x="9997439" y="5971032"/>
+            <a:off x="9189719" y="5971032"/>
             <a:ext cx="807720" cy="274320"/>
           </a:xfrm>
           <a:prstGeom prst="rect">
@@ -17042,14 +17209,14 @@
                 </a:solidFill>
                 <a:latin typeface="Aptos"/>
               </a:rPr>
-              <a:t>Gemma 3</a:t>
+              <a:t>Ollama</a:t>
             </a:r>
           </a:p>
         </p:txBody>
       </p:sp>
       <p:pic>
         <p:nvPicPr>
-          <p:cNvPr id="68" name="Picture 67" descr="badge_bge.png"/>
+          <p:cNvPr id="66" name="Picture 65" descr="badge_G3_9B1C24.png"/>
           <p:cNvPicPr>
             <a:picLocks noChangeAspect="1"/>
           </p:cNvPicPr>
@@ -17057,6 +17224,65 @@
         </p:nvPicPr>
         <p:blipFill>
           <a:blip r:embed="rId19"/>
+          <a:stretch>
+            <a:fillRect/>
+          </a:stretch>
+        </p:blipFill>
+        <p:spPr>
+          <a:xfrm>
+            <a:off x="10190987" y="5513832"/>
+            <a:ext cx="420624" cy="420624"/>
+          </a:xfrm>
+          <a:prstGeom prst="rect">
+            <a:avLst/>
+          </a:prstGeom>
+        </p:spPr>
+      </p:pic>
+      <p:sp>
+        <p:nvSpPr>
+          <p:cNvPr id="67" name="TextBox 66"/>
+          <p:cNvSpPr txBox="1"/>
+          <p:nvPr/>
+        </p:nvSpPr>
+        <p:spPr>
+          <a:xfrm>
+            <a:off x="9997439" y="5971032"/>
+            <a:ext cx="807720" cy="274320"/>
+          </a:xfrm>
+          <a:prstGeom prst="rect">
+            <a:avLst/>
+          </a:prstGeom>
+          <a:noFill/>
+        </p:spPr>
+        <p:txBody>
+          <a:bodyPr wrap="square" lIns="0" tIns="0" rIns="0" bIns="0" anchor="t">
+            <a:noAutofit/>
+          </a:bodyPr>
+          <a:lstStyle/>
+          <a:p>
+            <a:pPr algn="ctr"/>
+            <a:r>
+              <a:rPr sz="800" b="0" i="0">
+                <a:solidFill>
+                  <a:srgbClr val="140C12"/>
+                </a:solidFill>
+                <a:latin typeface="Aptos"/>
+              </a:rPr>
+              <a:t>Gemma 3</a:t>
+            </a:r>
+          </a:p>
+        </p:txBody>
+      </p:sp>
+      <p:pic>
+        <p:nvPicPr>
+          <p:cNvPr id="68" name="Picture 67" descr="badge_bge_B7791F.png"/>
+          <p:cNvPicPr>
+            <a:picLocks noChangeAspect="1"/>
+          </p:cNvPicPr>
+          <p:nvPr/>
+        </p:nvPicPr>
+        <p:blipFill>
+          <a:blip r:embed="rId20"/>
           <a:stretch>
             <a:fillRect/>
           </a:stretch>
@@ -17131,7 +17357,14 @@
         <p:cNvGrpSpPr/>
         <p:nvPr/>
       </p:nvGrpSpPr>
-      <p:grpSpPr/>
+      <p:grpSpPr>
+        <a:xfrm>
+          <a:off x="0" y="0"/>
+          <a:ext cx="0" cy="0"/>
+          <a:chOff x="0" y="0"/>
+          <a:chExt cx="0" cy="0"/>
+        </a:xfrm>
+      </p:grpSpPr>
       <p:sp>
         <p:nvSpPr>
           <p:cNvPr id="2" name="Rectangle 1"/>
@@ -17174,6 +17407,7 @@
           <a:lstStyle/>
           <a:p>
             <a:pPr algn="ctr"/>
+            <a:endParaRPr/>
           </a:p>
         </p:txBody>
       </p:sp>
@@ -17251,51 +17485,6 @@
       </p:sp>
       <p:sp>
         <p:nvSpPr>
-          <p:cNvPr id="5" name="Rectangle 4"/>
-          <p:cNvSpPr/>
-          <p:nvPr/>
-        </p:nvSpPr>
-        <p:spPr>
-          <a:xfrm>
-            <a:off x="411480" y="1170432"/>
-            <a:ext cx="1051560" cy="54864"/>
-          </a:xfrm>
-          <a:prstGeom prst="rect">
-            <a:avLst/>
-          </a:prstGeom>
-          <a:solidFill>
-            <a:srgbClr val="FFBE2D"/>
-          </a:solidFill>
-          <a:ln>
-            <a:solidFill>
-              <a:srgbClr val="FFBE2D"/>
-            </a:solidFill>
-          </a:ln>
-        </p:spPr>
-        <p:style>
-          <a:lnRef idx="1">
-            <a:schemeClr val="accent1"/>
-          </a:lnRef>
-          <a:fillRef idx="3">
-            <a:schemeClr val="accent1"/>
-          </a:fillRef>
-          <a:effectRef idx="2">
-            <a:schemeClr val="accent1"/>
-          </a:effectRef>
-          <a:fontRef idx="minor">
-            <a:schemeClr val="lt1"/>
-          </a:fontRef>
-        </p:style>
-        <p:txBody>
-          <a:bodyPr rtlCol="0" anchor="ctr"/>
-          <a:lstStyle/>
-          <a:p>
-            <a:pPr algn="ctr"/>
-          </a:p>
-        </p:txBody>
-      </p:sp>
-      <p:sp>
-        <p:nvSpPr>
           <p:cNvPr id="6" name="TextBox 5"/>
           <p:cNvSpPr txBox="1"/>
           <p:nvPr/>
@@ -17356,7 +17545,7 @@
             <a:r>
               <a:rPr sz="1050" b="1" i="0">
                 <a:solidFill>
-                  <a:srgbClr val="0070C0"/>
+                  <a:srgbClr val="E0262D"/>
                 </a:solidFill>
                 <a:latin typeface="Aptos"/>
               </a:rPr>
@@ -17365,7 +17554,7 @@
             <a:r>
               <a:rPr sz="1050" b="1" i="0">
                 <a:solidFill>
-                  <a:srgbClr val="0070C0"/>
+                  <a:srgbClr val="E0262D"/>
                 </a:solidFill>
                 <a:latin typeface="Aptos"/>
               </a:rPr>
@@ -17391,11 +17580,11 @@
             </a:avLst>
           </a:prstGeom>
           <a:solidFill>
-            <a:srgbClr val="EAF2FA"/>
+            <a:srgbClr val="F3EDE3"/>
           </a:solidFill>
           <a:ln w="12700">
             <a:solidFill>
-              <a:srgbClr val="0070C0"/>
+              <a:srgbClr val="3A3335"/>
             </a:solidFill>
           </a:ln>
           <a:effectLst/>
@@ -17425,7 +17614,7 @@
             </a:avLst>
           </a:prstGeom>
           <a:solidFill>
-            <a:srgbClr val="0070C0"/>
+            <a:srgbClr val="3A3335"/>
           </a:solidFill>
           <a:ln>
             <a:noFill/>
@@ -17455,7 +17644,7 @@
             <a:avLst/>
           </a:prstGeom>
           <a:solidFill>
-            <a:srgbClr val="0070C0"/>
+            <a:srgbClr val="3A3335"/>
           </a:solidFill>
           <a:ln>
             <a:noFill/>
@@ -17650,11 +17839,11 @@
             </a:avLst>
           </a:prstGeom>
           <a:solidFill>
-            <a:srgbClr val="FFF2CC"/>
+            <a:srgbClr val="FBE9E9"/>
           </a:solidFill>
           <a:ln w="12700">
             <a:solidFill>
-              <a:srgbClr val="C55A11"/>
+              <a:srgbClr val="9B1C24"/>
             </a:solidFill>
           </a:ln>
           <a:effectLst/>
@@ -17684,7 +17873,7 @@
             </a:avLst>
           </a:prstGeom>
           <a:solidFill>
-            <a:srgbClr val="C55A11"/>
+            <a:srgbClr val="9B1C24"/>
           </a:solidFill>
           <a:ln>
             <a:noFill/>
@@ -17714,7 +17903,7 @@
             <a:avLst/>
           </a:prstGeom>
           <a:solidFill>
-            <a:srgbClr val="C55A11"/>
+            <a:srgbClr val="9B1C24"/>
           </a:solidFill>
           <a:ln>
             <a:noFill/>
@@ -17936,11 +18125,11 @@
             </a:avLst>
           </a:prstGeom>
           <a:solidFill>
-            <a:srgbClr val="E8F5E9"/>
+            <a:srgbClr val="F6EFE0"/>
           </a:solidFill>
           <a:ln w="12700">
             <a:solidFill>
-              <a:srgbClr val="2E7D32"/>
+              <a:srgbClr val="B7791F"/>
             </a:solidFill>
           </a:ln>
           <a:effectLst/>
@@ -17970,7 +18159,7 @@
             </a:avLst>
           </a:prstGeom>
           <a:solidFill>
-            <a:srgbClr val="2E7D32"/>
+            <a:srgbClr val="B7791F"/>
           </a:solidFill>
           <a:ln>
             <a:noFill/>
@@ -18000,7 +18189,7 @@
             <a:avLst/>
           </a:prstGeom>
           <a:solidFill>
-            <a:srgbClr val="2E7D32"/>
+            <a:srgbClr val="B7791F"/>
           </a:solidFill>
           <a:ln>
             <a:noFill/>
@@ -18221,7 +18410,7 @@
           </a:prstGeom>
           <a:ln w="25400">
             <a:solidFill>
-              <a:srgbClr val="1F497D"/>
+              <a:srgbClr val="3A3335"/>
             </a:solidFill>
             <a:tailEnd type="triangle" w="med" len="med"/>
           </a:ln>
@@ -18243,7 +18432,7 @@
           </a:prstGeom>
           <a:ln w="25400">
             <a:solidFill>
-              <a:srgbClr val="1F497D"/>
+              <a:srgbClr val="3A3335"/>
             </a:solidFill>
             <a:tailEnd type="triangle" w="med" len="med"/>
           </a:ln>
@@ -18266,11 +18455,11 @@
             </a:avLst>
           </a:prstGeom>
           <a:solidFill>
-            <a:srgbClr val="F4F8FC"/>
+            <a:srgbClr val="F3EDE3"/>
           </a:solidFill>
           <a:ln w="9525">
             <a:solidFill>
-              <a:srgbClr val="BDD7EE"/>
+              <a:srgbClr val="E3DBCF"/>
             </a:solidFill>
           </a:ln>
           <a:effectLst/>
@@ -18298,7 +18487,7 @@
             <a:avLst/>
           </a:prstGeom>
           <a:solidFill>
-            <a:srgbClr val="0070C0"/>
+            <a:srgbClr val="E0262D"/>
           </a:solidFill>
           <a:ln>
             <a:noFill/>
@@ -18374,7 +18563,7 @@
             <a:r>
               <a:rPr sz="950" b="1" i="0">
                 <a:solidFill>
-                  <a:srgbClr val="1E3A8A"/>
+                  <a:srgbClr val="9B1C24"/>
                 </a:solidFill>
                 <a:latin typeface="Aptos"/>
               </a:rPr>
@@ -18387,7 +18576,7 @@
                 </a:solidFill>
                 <a:latin typeface="Aptos"/>
               </a:rPr>
-              <a:t>a Tanglish water-outage complaint mentioning sick children, GPS location, no photo, filed from the Vindex web app by a verified citizen (case 5 of the 61-check end-to-end suite).</a:t>
+              <a:t>a Tanglish water-outage complaint mentioning sick children, GPS location, no photo, filed from the Vindex web app by a verified citizen (case 5 of the 118-check end-to-end suite).</a:t>
             </a:r>
           </a:p>
         </p:txBody>
@@ -18409,11 +18598,11 @@
             </a:avLst>
           </a:prstGeom>
           <a:solidFill>
-            <a:srgbClr val="F3E8FF"/>
+            <a:srgbClr val="F3EDE3"/>
           </a:solidFill>
           <a:ln w="9525">
             <a:solidFill>
-              <a:srgbClr val="D8B4FE"/>
+              <a:srgbClr val="D9CDBB"/>
             </a:solidFill>
           </a:ln>
           <a:effectLst/>
@@ -18441,7 +18630,7 @@
             <a:avLst/>
           </a:prstGeom>
           <a:solidFill>
-            <a:srgbClr val="7E22CE"/>
+            <a:srgbClr val="3A3335"/>
           </a:solidFill>
           <a:ln>
             <a:noFill/>
@@ -18517,7 +18706,7 @@
             <a:r>
               <a:rPr sz="950" b="1" i="0">
                 <a:solidFill>
-                  <a:srgbClr val="6B21A8"/>
+                  <a:srgbClr val="3A3335"/>
                 </a:solidFill>
                 <a:latin typeface="Aptos"/>
               </a:rPr>
@@ -18552,11 +18741,11 @@
             </a:avLst>
           </a:prstGeom>
           <a:solidFill>
-            <a:srgbClr val="F0FDF4"/>
+            <a:srgbClr val="FFF4D6"/>
           </a:solidFill>
           <a:ln w="9525">
             <a:solidFill>
-              <a:srgbClr val="86EFAC"/>
+              <a:srgbClr val="F1D27A"/>
             </a:solidFill>
           </a:ln>
           <a:effectLst/>
@@ -18584,7 +18773,7 @@
             <a:avLst/>
           </a:prstGeom>
           <a:solidFill>
-            <a:srgbClr val="16A34A"/>
+            <a:srgbClr val="B7791F"/>
           </a:solidFill>
           <a:ln>
             <a:noFill/>
@@ -18660,7 +18849,7 @@
             <a:r>
               <a:rPr sz="950" b="1" i="0">
                 <a:solidFill>
-                  <a:srgbClr val="166534"/>
+                  <a:srgbClr val="7A5C2E"/>
                 </a:solidFill>
                 <a:latin typeface="Aptos"/>
               </a:rPr>
@@ -18673,7 +18862,7 @@
                 </a:solidFill>
                 <a:latin typeface="Aptos"/>
               </a:rPr>
-              <a:t>model said health 0.95; rule R5 (thanni) overrode to Water Supply; R10 (children) + Critical forced review; office Coimbatore Water Supply, SLA 6 h; phone masked for the citizen, visible to the officer; 4 Tamil emails in Mailpit; 28 s end to end. Whole suite: 61 of 61 checks pass; gold set with rules: department 100%, Critical recall 100%, language ID 92%.</a:t>
+              <a:t>model said health 0.95; rule R5 (thanni) overrode to Water Supply; R10 (children) + Critical forced review; office Coimbatore Water Supply, SLA 6 h; phone masked for the citizen, visible to the officer; 4 Tamil emails in Mailpit; 28 s end to end. Whole suite: 118 of 118 checks pass; gold set with rules: department 100%, Critical recall 100%, language ID 92%.</a:t>
             </a:r>
           </a:p>
         </p:txBody>
@@ -18704,7 +18893,7 @@
             <a:r>
               <a:rPr sz="950" b="1" i="0">
                 <a:solidFill>
-                  <a:srgbClr val="1F497D"/>
+                  <a:srgbClr val="3A3335"/>
                 </a:solidFill>
                 <a:latin typeface="Aptos"/>
               </a:rPr>
@@ -18730,7 +18919,7 @@
             </a:avLst>
           </a:prstGeom>
           <a:solidFill>
-            <a:srgbClr val="1F497D"/>
+            <a:srgbClr val="3A3335"/>
           </a:solidFill>
           <a:ln>
             <a:noFill/>
@@ -18797,7 +18986,7 @@
             </a:avLst>
           </a:prstGeom>
           <a:solidFill>
-            <a:srgbClr val="0070C0"/>
+            <a:srgbClr val="E0262D"/>
           </a:solidFill>
           <a:ln>
             <a:noFill/>
@@ -18864,7 +19053,7 @@
             </a:avLst>
           </a:prstGeom>
           <a:solidFill>
-            <a:srgbClr val="00796B"/>
+            <a:srgbClr val="7A5C2E"/>
           </a:solidFill>
           <a:ln>
             <a:noFill/>
@@ -18931,7 +19120,7 @@
             </a:avLst>
           </a:prstGeom>
           <a:solidFill>
-            <a:srgbClr val="0F172A"/>
+            <a:srgbClr val="3A3335"/>
           </a:solidFill>
           <a:ln>
             <a:noFill/>
@@ -19039,7 +19228,14 @@
         <p:cNvGrpSpPr/>
         <p:nvPr/>
       </p:nvGrpSpPr>
-      <p:grpSpPr/>
+      <p:grpSpPr>
+        <a:xfrm>
+          <a:off x="0" y="0"/>
+          <a:ext cx="0" cy="0"/>
+          <a:chOff x="0" y="0"/>
+          <a:chExt cx="0" cy="0"/>
+        </a:xfrm>
+      </p:grpSpPr>
       <p:sp>
         <p:nvSpPr>
           <p:cNvPr id="2" name="Rectangle 1"/>
@@ -19082,6 +19278,7 @@
           <a:lstStyle/>
           <a:p>
             <a:pPr algn="ctr"/>
+            <a:endParaRPr/>
           </a:p>
         </p:txBody>
       </p:sp>
@@ -19154,51 +19351,6 @@
             <a:r>
               <a:t>INNOVATION, FEASIBILITY &amp; IMPACT</a:t>
             </a:r>
-          </a:p>
-        </p:txBody>
-      </p:sp>
-      <p:sp>
-        <p:nvSpPr>
-          <p:cNvPr id="5" name="Rectangle 4"/>
-          <p:cNvSpPr/>
-          <p:nvPr/>
-        </p:nvSpPr>
-        <p:spPr>
-          <a:xfrm>
-            <a:off x="411480" y="1170432"/>
-            <a:ext cx="1051560" cy="54864"/>
-          </a:xfrm>
-          <a:prstGeom prst="rect">
-            <a:avLst/>
-          </a:prstGeom>
-          <a:solidFill>
-            <a:srgbClr val="FFBE2D"/>
-          </a:solidFill>
-          <a:ln>
-            <a:solidFill>
-              <a:srgbClr val="FFBE2D"/>
-            </a:solidFill>
-          </a:ln>
-        </p:spPr>
-        <p:style>
-          <a:lnRef idx="1">
-            <a:schemeClr val="accent1"/>
-          </a:lnRef>
-          <a:fillRef idx="3">
-            <a:schemeClr val="accent1"/>
-          </a:fillRef>
-          <a:effectRef idx="2">
-            <a:schemeClr val="accent1"/>
-          </a:effectRef>
-          <a:fontRef idx="minor">
-            <a:schemeClr val="lt1"/>
-          </a:fontRef>
-        </p:style>
-        <p:txBody>
-          <a:bodyPr rtlCol="0" anchor="ctr"/>
-          <a:lstStyle/>
-          <a:p>
-            <a:pPr algn="ctr"/>
           </a:p>
         </p:txBody>
       </p:sp>
@@ -19255,7 +19407,7 @@
             </a:avLst>
           </a:prstGeom>
           <a:solidFill>
-            <a:srgbClr val="1F497D"/>
+            <a:srgbClr val="3A3335"/>
           </a:solidFill>
           <a:ln>
             <a:noFill/>
@@ -19358,7 +19510,7 @@
             </a:avLst>
           </a:prstGeom>
           <a:solidFill>
-            <a:srgbClr val="0070C0"/>
+            <a:srgbClr val="E0262D"/>
           </a:solidFill>
           <a:ln>
             <a:noFill/>
@@ -19405,7 +19557,7 @@
       </p:sp>
       <p:pic>
         <p:nvPicPr>
-          <p:cNvPr id="12" name="Picture 11" descr="image4.png"/>
+          <p:cNvPr id="12" name="Picture 11" descr="image4_E0262D.png"/>
           <p:cNvPicPr>
             <a:picLocks noChangeAspect="1"/>
           </p:cNvPicPr>
@@ -19514,7 +19666,7 @@
             </a:avLst>
           </a:prstGeom>
           <a:solidFill>
-            <a:srgbClr val="00796B"/>
+            <a:srgbClr val="7A5C2E"/>
           </a:solidFill>
           <a:ln>
             <a:noFill/>
@@ -19561,7 +19713,7 @@
       </p:sp>
       <p:pic>
         <p:nvPicPr>
-          <p:cNvPr id="17" name="Picture 16" descr="image5.png"/>
+          <p:cNvPr id="17" name="Picture 16" descr="image5_7A5C2E.png"/>
           <p:cNvPicPr>
             <a:picLocks noChangeAspect="1"/>
           </p:cNvPicPr>
@@ -19670,7 +19822,7 @@
             </a:avLst>
           </a:prstGeom>
           <a:solidFill>
-            <a:srgbClr val="2E7D32"/>
+            <a:srgbClr val="B7791F"/>
           </a:solidFill>
           <a:ln>
             <a:noFill/>
@@ -19717,7 +19869,7 @@
       </p:sp>
       <p:pic>
         <p:nvPicPr>
-          <p:cNvPr id="22" name="Picture 21" descr="image6.png"/>
+          <p:cNvPr id="22" name="Picture 21" descr="image6_B7791F.png"/>
           <p:cNvPicPr>
             <a:picLocks noChangeAspect="1"/>
           </p:cNvPicPr>
@@ -19826,7 +19978,7 @@
             </a:avLst>
           </a:prstGeom>
           <a:solidFill>
-            <a:srgbClr val="C55A11"/>
+            <a:srgbClr val="9B1C24"/>
           </a:solidFill>
           <a:ln>
             <a:noFill/>
@@ -19873,7 +20025,7 @@
       </p:sp>
       <p:pic>
         <p:nvPicPr>
-          <p:cNvPr id="27" name="Picture 26" descr="image7.png"/>
+          <p:cNvPr id="27" name="Picture 26" descr="image7_9B1C24.png"/>
           <p:cNvPicPr>
             <a:picLocks noChangeAspect="1"/>
           </p:cNvPicPr>
@@ -19982,7 +20134,7 @@
             </a:avLst>
           </a:prstGeom>
           <a:solidFill>
-            <a:srgbClr val="6B4C9A"/>
+            <a:srgbClr val="5A5555"/>
           </a:solidFill>
           <a:ln>
             <a:noFill/>
@@ -20029,7 +20181,7 @@
       </p:sp>
       <p:pic>
         <p:nvPicPr>
-          <p:cNvPr id="32" name="Picture 31" descr="image8.png"/>
+          <p:cNvPr id="32" name="Picture 31" descr="image8_5A5555.png"/>
           <p:cNvPicPr>
             <a:picLocks noChangeAspect="1"/>
           </p:cNvPicPr>
@@ -20138,7 +20290,7 @@
             </a:avLst>
           </a:prstGeom>
           <a:solidFill>
-            <a:srgbClr val="1E3A8A"/>
+            <a:srgbClr val="9B1C24"/>
           </a:solidFill>
           <a:ln>
             <a:noFill/>
@@ -20209,7 +20361,7 @@
           </a:solidFill>
           <a:ln w="9525">
             <a:solidFill>
-              <a:srgbClr val="E2E8F0"/>
+              <a:srgbClr val="E3DBCF"/>
             </a:solidFill>
           </a:ln>
           <a:effectLst/>
@@ -20239,7 +20391,7 @@
             </a:avLst>
           </a:prstGeom>
           <a:solidFill>
-            <a:srgbClr val="0284C7"/>
+            <a:srgbClr val="B7791F"/>
           </a:solidFill>
           <a:ln>
             <a:noFill/>
@@ -20304,7 +20456,7 @@
             <a:r>
               <a:rPr sz="900" b="1" i="0">
                 <a:solidFill>
-                  <a:srgbClr val="1E3A8A"/>
+                  <a:srgbClr val="9B1C24"/>
                 </a:solidFill>
                 <a:latin typeface="Aptos"/>
               </a:rPr>
@@ -20316,7 +20468,7 @@
             <a:r>
               <a:rPr sz="800" b="0" i="0">
                 <a:solidFill>
-                  <a:srgbClr val="475569"/>
+                  <a:srgbClr val="5A5555"/>
                 </a:solidFill>
                 <a:latin typeface="Aptos"/>
               </a:rPr>
@@ -20346,7 +20498,7 @@
           </a:solidFill>
           <a:ln w="9525">
             <a:solidFill>
-              <a:srgbClr val="E2E8F0"/>
+              <a:srgbClr val="E3DBCF"/>
             </a:solidFill>
           </a:ln>
           <a:effectLst/>
@@ -20376,7 +20528,7 @@
             </a:avLst>
           </a:prstGeom>
           <a:solidFill>
-            <a:srgbClr val="0284C7"/>
+            <a:srgbClr val="B7791F"/>
           </a:solidFill>
           <a:ln>
             <a:noFill/>
@@ -20441,7 +20593,7 @@
             <a:r>
               <a:rPr sz="900" b="1" i="0">
                 <a:solidFill>
-                  <a:srgbClr val="1E3A8A"/>
+                  <a:srgbClr val="9B1C24"/>
                 </a:solidFill>
                 <a:latin typeface="Aptos"/>
               </a:rPr>
@@ -20453,7 +20605,7 @@
             <a:r>
               <a:rPr sz="800" b="0" i="0">
                 <a:solidFill>
-                  <a:srgbClr val="475569"/>
+                  <a:srgbClr val="5A5555"/>
                 </a:solidFill>
                 <a:latin typeface="Aptos"/>
               </a:rPr>
@@ -20483,7 +20635,7 @@
           </a:solidFill>
           <a:ln w="9525">
             <a:solidFill>
-              <a:srgbClr val="E2E8F0"/>
+              <a:srgbClr val="E3DBCF"/>
             </a:solidFill>
           </a:ln>
           <a:effectLst/>
@@ -20513,7 +20665,7 @@
             </a:avLst>
           </a:prstGeom>
           <a:solidFill>
-            <a:srgbClr val="0284C7"/>
+            <a:srgbClr val="B7791F"/>
           </a:solidFill>
           <a:ln>
             <a:noFill/>
@@ -20530,7 +20682,7 @@
       </p:sp>
       <p:pic>
         <p:nvPicPr>
-          <p:cNvPr id="47" name="Picture 46" descr="image12.png"/>
+          <p:cNvPr id="47" name="Picture 46" descr="image12_3A3335.png"/>
           <p:cNvPicPr>
             <a:picLocks noChangeAspect="1"/>
           </p:cNvPicPr>
@@ -20578,7 +20730,7 @@
             <a:r>
               <a:rPr sz="900" b="1" i="0">
                 <a:solidFill>
-                  <a:srgbClr val="1E3A8A"/>
+                  <a:srgbClr val="9B1C24"/>
                 </a:solidFill>
                 <a:latin typeface="Aptos"/>
               </a:rPr>
@@ -20590,7 +20742,7 @@
             <a:r>
               <a:rPr sz="800" b="0" i="0">
                 <a:solidFill>
-                  <a:srgbClr val="475569"/>
+                  <a:srgbClr val="5A5555"/>
                 </a:solidFill>
                 <a:latin typeface="Aptos"/>
               </a:rPr>
@@ -20620,7 +20772,7 @@
           </a:solidFill>
           <a:ln w="9525">
             <a:solidFill>
-              <a:srgbClr val="E2E8F0"/>
+              <a:srgbClr val="E3DBCF"/>
             </a:solidFill>
           </a:ln>
           <a:effectLst/>
@@ -20650,7 +20802,7 @@
             </a:avLst>
           </a:prstGeom>
           <a:solidFill>
-            <a:srgbClr val="0284C7"/>
+            <a:srgbClr val="B7791F"/>
           </a:solidFill>
           <a:ln>
             <a:noFill/>
@@ -20715,7 +20867,7 @@
             <a:r>
               <a:rPr sz="900" b="1" i="0">
                 <a:solidFill>
-                  <a:srgbClr val="1E3A8A"/>
+                  <a:srgbClr val="9B1C24"/>
                 </a:solidFill>
                 <a:latin typeface="Aptos"/>
               </a:rPr>
@@ -20727,7 +20879,7 @@
             <a:r>
               <a:rPr sz="800" b="0" i="0">
                 <a:solidFill>
-                  <a:srgbClr val="475569"/>
+                  <a:srgbClr val="5A5555"/>
                 </a:solidFill>
                 <a:latin typeface="Aptos"/>
               </a:rPr>
@@ -20753,7 +20905,7 @@
             </a:avLst>
           </a:prstGeom>
           <a:solidFill>
-            <a:srgbClr val="0284C7"/>
+            <a:srgbClr val="B7791F"/>
           </a:solidFill>
           <a:ln>
             <a:noFill/>
@@ -20818,7 +20970,7 @@
             <a:avLst/>
           </a:prstGeom>
           <a:solidFill>
-            <a:srgbClr val="1E3A8A"/>
+            <a:srgbClr val="9B1C24"/>
           </a:solidFill>
           <a:ln>
             <a:noFill/>
@@ -20848,7 +21000,7 @@
             <a:avLst/>
           </a:prstGeom>
           <a:solidFill>
-            <a:srgbClr val="FEF2F2"/>
+            <a:srgbClr val="FBE9E9"/>
           </a:solidFill>
           <a:ln>
             <a:noFill/>
@@ -20878,7 +21030,7 @@
             <a:avLst/>
           </a:prstGeom>
           <a:solidFill>
-            <a:srgbClr val="F0FDF4"/>
+            <a:srgbClr val="FFF4D6"/>
           </a:solidFill>
           <a:ln>
             <a:noFill/>
@@ -21094,7 +21246,7 @@
             <a:r>
               <a:rPr sz="850" b="1" i="0">
                 <a:solidFill>
-                  <a:srgbClr val="DC2626"/>
+                  <a:srgbClr val="E0262D"/>
                 </a:solidFill>
                 <a:latin typeface="Aptos"/>
               </a:rPr>
@@ -21129,7 +21281,7 @@
             <a:r>
               <a:rPr sz="850" b="1" i="1">
                 <a:solidFill>
-                  <a:srgbClr val="991B1B"/>
+                  <a:srgbClr val="9B1C24"/>
                 </a:solidFill>
                 <a:latin typeface="Aptos"/>
               </a:rPr>
@@ -21164,7 +21316,7 @@
             <a:r>
               <a:rPr sz="850" b="1" i="1">
                 <a:solidFill>
-                  <a:srgbClr val="991B1B"/>
+                  <a:srgbClr val="9B1C24"/>
                 </a:solidFill>
                 <a:latin typeface="Aptos"/>
               </a:rPr>
@@ -21199,7 +21351,7 @@
             <a:r>
               <a:rPr sz="850" b="1" i="1">
                 <a:solidFill>
-                  <a:srgbClr val="991B1B"/>
+                  <a:srgbClr val="9B1C24"/>
                 </a:solidFill>
                 <a:latin typeface="Aptos"/>
               </a:rPr>
@@ -21234,7 +21386,7 @@
             <a:r>
               <a:rPr sz="850" b="1" i="1">
                 <a:solidFill>
-                  <a:srgbClr val="991B1B"/>
+                  <a:srgbClr val="9B1C24"/>
                 </a:solidFill>
                 <a:latin typeface="Aptos"/>
               </a:rPr>
@@ -21269,7 +21421,7 @@
             <a:r>
               <a:rPr sz="850" b="1" i="0">
                 <a:solidFill>
-                  <a:srgbClr val="149C21"/>
+                  <a:srgbClr val="9B1C24"/>
                 </a:solidFill>
                 <a:latin typeface="Aptos"/>
               </a:rPr>
@@ -21304,7 +21456,7 @@
             <a:r>
               <a:rPr sz="850" b="1" i="0">
                 <a:solidFill>
-                  <a:srgbClr val="166534"/>
+                  <a:srgbClr val="7A5C2E"/>
                 </a:solidFill>
                 <a:latin typeface="Aptos"/>
               </a:rPr>
@@ -21339,7 +21491,7 @@
             <a:r>
               <a:rPr sz="850" b="1" i="0">
                 <a:solidFill>
-                  <a:srgbClr val="166534"/>
+                  <a:srgbClr val="7A5C2E"/>
                 </a:solidFill>
                 <a:latin typeface="Aptos"/>
               </a:rPr>
@@ -21374,7 +21526,7 @@
             <a:r>
               <a:rPr sz="850" b="1" i="0">
                 <a:solidFill>
-                  <a:srgbClr val="166534"/>
+                  <a:srgbClr val="7A5C2E"/>
                 </a:solidFill>
                 <a:latin typeface="Aptos"/>
               </a:rPr>
@@ -21409,7 +21561,7 @@
             <a:r>
               <a:rPr sz="850" b="1" i="0">
                 <a:solidFill>
-                  <a:srgbClr val="166534"/>
+                  <a:srgbClr val="7A5C2E"/>
                 </a:solidFill>
                 <a:latin typeface="Aptos"/>
               </a:rPr>
@@ -21435,11 +21587,11 @@
             </a:avLst>
           </a:prstGeom>
           <a:solidFill>
-            <a:srgbClr val="EFF6FF"/>
+            <a:srgbClr val="FBE9E9"/>
           </a:solidFill>
           <a:ln w="12700">
             <a:solidFill>
-              <a:srgbClr val="2563EB"/>
+              <a:srgbClr val="9B1C24"/>
             </a:solidFill>
           </a:ln>
           <a:effectLst/>
@@ -21469,7 +21621,7 @@
             </a:avLst>
           </a:prstGeom>
           <a:solidFill>
-            <a:srgbClr val="2563EB"/>
+            <a:srgbClr val="9B1C24"/>
           </a:solidFill>
           <a:ln>
             <a:noFill/>
@@ -21499,7 +21651,7 @@
             <a:avLst/>
           </a:prstGeom>
           <a:solidFill>
-            <a:srgbClr val="2563EB"/>
+            <a:srgbClr val="9B1C24"/>
           </a:solidFill>
           <a:ln>
             <a:noFill/>
@@ -21581,7 +21733,7 @@
             <a:r>
               <a:rPr sz="950" b="1" i="0">
                 <a:solidFill>
-                  <a:srgbClr val="2563EB"/>
+                  <a:srgbClr val="9B1C24"/>
                 </a:solidFill>
                 <a:latin typeface="Aptos"/>
               </a:rPr>
@@ -21608,7 +21760,7 @@
             <a:r>
               <a:rPr sz="950" b="1" i="0">
                 <a:solidFill>
-                  <a:srgbClr val="2563EB"/>
+                  <a:srgbClr val="9B1C24"/>
                 </a:solidFill>
                 <a:latin typeface="Aptos"/>
               </a:rPr>
@@ -21635,7 +21787,7 @@
             <a:r>
               <a:rPr sz="950" b="1" i="0">
                 <a:solidFill>
-                  <a:srgbClr val="2563EB"/>
+                  <a:srgbClr val="9B1C24"/>
                 </a:solidFill>
                 <a:latin typeface="Aptos"/>
               </a:rPr>
@@ -21648,7 +21800,7 @@
                 </a:solidFill>
                 <a:latin typeface="Aptos"/>
               </a:rPr>
-              <a:t>114 API checks: 5 languages, photos, duplicates, roles, replies, ratings, me-too, escalation, mails</a:t>
+              <a:t>118 API checks: 5 languages, photos, duplicates, roles, replies, ratings, me-too, escalation, mails</a:t>
             </a:r>
           </a:p>
           <a:p>
@@ -21662,7 +21814,7 @@
             <a:r>
               <a:rPr sz="950" b="1" i="0">
                 <a:solidFill>
-                  <a:srgbClr val="2563EB"/>
+                  <a:srgbClr val="9B1C24"/>
                 </a:solidFill>
                 <a:latin typeface="Aptos"/>
               </a:rPr>
@@ -21697,11 +21849,11 @@
             </a:avLst>
           </a:prstGeom>
           <a:solidFill>
-            <a:srgbClr val="F3E8FF"/>
+            <a:srgbClr val="F3EDE3"/>
           </a:solidFill>
           <a:ln w="12700">
             <a:solidFill>
-              <a:srgbClr val="7E22CE"/>
+              <a:srgbClr val="3A3335"/>
             </a:solidFill>
           </a:ln>
           <a:effectLst/>
@@ -21731,7 +21883,7 @@
             </a:avLst>
           </a:prstGeom>
           <a:solidFill>
-            <a:srgbClr val="7E22CE"/>
+            <a:srgbClr val="3A3335"/>
           </a:solidFill>
           <a:ln>
             <a:noFill/>
@@ -21761,7 +21913,7 @@
             <a:avLst/>
           </a:prstGeom>
           <a:solidFill>
-            <a:srgbClr val="7E22CE"/>
+            <a:srgbClr val="3A3335"/>
           </a:solidFill>
           <a:ln>
             <a:noFill/>
@@ -21843,7 +21995,7 @@
             <a:r>
               <a:rPr sz="950" b="1" i="0">
                 <a:solidFill>
-                  <a:srgbClr val="7E22CE"/>
+                  <a:srgbClr val="3A3335"/>
                 </a:solidFill>
                 <a:latin typeface="Aptos"/>
               </a:rPr>
@@ -21870,7 +22022,7 @@
             <a:r>
               <a:rPr sz="950" b="1" i="0">
                 <a:solidFill>
-                  <a:srgbClr val="7E22CE"/>
+                  <a:srgbClr val="3A3335"/>
                 </a:solidFill>
                 <a:latin typeface="Aptos"/>
               </a:rPr>
@@ -21897,7 +22049,7 @@
             <a:r>
               <a:rPr sz="950" b="1" i="0">
                 <a:solidFill>
-                  <a:srgbClr val="7E22CE"/>
+                  <a:srgbClr val="3A3335"/>
                 </a:solidFill>
                 <a:latin typeface="Aptos"/>
               </a:rPr>
@@ -21924,7 +22076,7 @@
             <a:r>
               <a:rPr sz="950" b="1" i="0">
                 <a:solidFill>
-                  <a:srgbClr val="7E22CE"/>
+                  <a:srgbClr val="3A3335"/>
                 </a:solidFill>
                 <a:latin typeface="Aptos"/>
               </a:rPr>
@@ -21959,11 +22111,11 @@
             </a:avLst>
           </a:prstGeom>
           <a:solidFill>
-            <a:srgbClr val="ECFDF5"/>
+            <a:srgbClr val="FFF4D6"/>
           </a:solidFill>
           <a:ln w="12700">
             <a:solidFill>
-              <a:srgbClr val="0D9488"/>
+              <a:srgbClr val="B7791F"/>
             </a:solidFill>
           </a:ln>
           <a:effectLst/>
@@ -21993,7 +22145,7 @@
             </a:avLst>
           </a:prstGeom>
           <a:solidFill>
-            <a:srgbClr val="0D9488"/>
+            <a:srgbClr val="B7791F"/>
           </a:solidFill>
           <a:ln>
             <a:noFill/>
@@ -22023,7 +22175,7 @@
             <a:avLst/>
           </a:prstGeom>
           <a:solidFill>
-            <a:srgbClr val="0D9488"/>
+            <a:srgbClr val="B7791F"/>
           </a:solidFill>
           <a:ln>
             <a:noFill/>
@@ -22105,7 +22257,7 @@
             <a:r>
               <a:rPr sz="950" b="1" i="0">
                 <a:solidFill>
-                  <a:srgbClr val="0D9488"/>
+                  <a:srgbClr val="B7791F"/>
                 </a:solidFill>
                 <a:latin typeface="Aptos"/>
               </a:rPr>
@@ -22132,7 +22284,7 @@
             <a:r>
               <a:rPr sz="950" b="1" i="0">
                 <a:solidFill>
-                  <a:srgbClr val="0D9488"/>
+                  <a:srgbClr val="B7791F"/>
                 </a:solidFill>
                 <a:latin typeface="Aptos"/>
               </a:rPr>
@@ -22159,7 +22311,7 @@
             <a:r>
               <a:rPr sz="950" b="1" i="0">
                 <a:solidFill>
-                  <a:srgbClr val="0D9488"/>
+                  <a:srgbClr val="B7791F"/>
                 </a:solidFill>
                 <a:latin typeface="Aptos"/>
               </a:rPr>
@@ -22186,7 +22338,7 @@
             <a:r>
               <a:rPr sz="950" b="1" i="0">
                 <a:solidFill>
-                  <a:srgbClr val="0D9488"/>
+                  <a:srgbClr val="B7791F"/>
                 </a:solidFill>
                 <a:latin typeface="Aptos"/>
               </a:rPr>
@@ -22528,6 +22680,302 @@
       </a:style>
     </a:lnDef>
   </a:objectDefaults>
+  <a:extraClrSchemeLst/>
+  <a:extLst>
+    <a:ext uri="{05A4C25C-085E-4340-85A3-A5531E510DB2}">
+      <thm15:themeFamily xmlns:thm15="http://schemas.microsoft.com/office/thememl/2012/main" name="Office Theme" id="{62F939B6-93AF-4DB8-9C6B-D6C7DFDC589F}" vid="{4A3C46E8-61CC-4603-A589-7422A47A8E4A}"/>
+    </a:ext>
+  </a:extLst>
+</a:theme>
+</file>
+
+<file path=ppt/theme/theme2.xml><?xml version="1.0" encoding="utf-8"?>
+<a:theme xmlns:a="http://schemas.openxmlformats.org/drawingml/2006/main" name="Office Theme">
+  <a:themeElements>
+    <a:clrScheme name="Office">
+      <a:dk1>
+        <a:sysClr val="windowText" lastClr="000000"/>
+      </a:dk1>
+      <a:lt1>
+        <a:sysClr val="window" lastClr="FFFFFF"/>
+      </a:lt1>
+      <a:dk2>
+        <a:srgbClr val="44546A"/>
+      </a:dk2>
+      <a:lt2>
+        <a:srgbClr val="E7E6E6"/>
+      </a:lt2>
+      <a:accent1>
+        <a:srgbClr val="4472C4"/>
+      </a:accent1>
+      <a:accent2>
+        <a:srgbClr val="ED7D31"/>
+      </a:accent2>
+      <a:accent3>
+        <a:srgbClr val="A5A5A5"/>
+      </a:accent3>
+      <a:accent4>
+        <a:srgbClr val="FFC000"/>
+      </a:accent4>
+      <a:accent5>
+        <a:srgbClr val="5B9BD5"/>
+      </a:accent5>
+      <a:accent6>
+        <a:srgbClr val="70AD47"/>
+      </a:accent6>
+      <a:hlink>
+        <a:srgbClr val="0563C1"/>
+      </a:hlink>
+      <a:folHlink>
+        <a:srgbClr val="954F72"/>
+      </a:folHlink>
+    </a:clrScheme>
+    <a:fontScheme name="Office">
+      <a:majorFont>
+        <a:latin typeface="Calibri Light" panose="020F0302020204030204"/>
+        <a:ea typeface=""/>
+        <a:cs typeface=""/>
+        <a:font script="Jpan" typeface="游ゴシック Light"/>
+        <a:font script="Hang" typeface="맑은 고딕"/>
+        <a:font script="Hans" typeface="等线 Light"/>
+        <a:font script="Hant" typeface="新細明體"/>
+        <a:font script="Arab" typeface="Times New Roman"/>
+        <a:font script="Hebr" typeface="Times New Roman"/>
+        <a:font script="Thai" typeface="Angsana New"/>
+        <a:font script="Ethi" typeface="Nyala"/>
+        <a:font script="Beng" typeface="Vrinda"/>
+        <a:font script="Gujr" typeface="Shruti"/>
+        <a:font script="Khmr" typeface="MoolBoran"/>
+        <a:font script="Knda" typeface="Tunga"/>
+        <a:font script="Guru" typeface="Raavi"/>
+        <a:font script="Cans" typeface="Euphemia"/>
+        <a:font script="Cher" typeface="Plantagenet Cherokee"/>
+        <a:font script="Yiii" typeface="Microsoft Yi Baiti"/>
+        <a:font script="Tibt" typeface="Microsoft Himalaya"/>
+        <a:font script="Thaa" typeface="MV Boli"/>
+        <a:font script="Deva" typeface="Mangal"/>
+        <a:font script="Telu" typeface="Gautami"/>
+        <a:font script="Taml" typeface="Latha"/>
+        <a:font script="Syrc" typeface="Estrangelo Edessa"/>
+        <a:font script="Orya" typeface="Kalinga"/>
+        <a:font script="Mlym" typeface="Kartika"/>
+        <a:font script="Laoo" typeface="DokChampa"/>
+        <a:font script="Sinh" typeface="Iskoola Pota"/>
+        <a:font script="Mong" typeface="Mongolian Baiti"/>
+        <a:font script="Viet" typeface="Times New Roman"/>
+        <a:font script="Uigh" typeface="Microsoft Uighur"/>
+        <a:font script="Geor" typeface="Sylfaen"/>
+        <a:font script="Armn" typeface="Arial"/>
+        <a:font script="Bugi" typeface="Leelawadee UI"/>
+        <a:font script="Bopo" typeface="Microsoft JhengHei"/>
+        <a:font script="Java" typeface="Javanese Text"/>
+        <a:font script="Lisu" typeface="Segoe UI"/>
+        <a:font script="Mymr" typeface="Myanmar Text"/>
+        <a:font script="Nkoo" typeface="Ebrima"/>
+        <a:font script="Olck" typeface="Nirmala UI"/>
+        <a:font script="Osma" typeface="Ebrima"/>
+        <a:font script="Phag" typeface="Phagspa"/>
+        <a:font script="Syrn" typeface="Estrangelo Edessa"/>
+        <a:font script="Syrj" typeface="Estrangelo Edessa"/>
+        <a:font script="Syre" typeface="Estrangelo Edessa"/>
+        <a:font script="Sora" typeface="Nirmala UI"/>
+        <a:font script="Tale" typeface="Microsoft Tai Le"/>
+        <a:font script="Talu" typeface="Microsoft New Tai Lue"/>
+        <a:font script="Tfng" typeface="Ebrima"/>
+      </a:majorFont>
+      <a:minorFont>
+        <a:latin typeface="Calibri" panose="020F0502020204030204"/>
+        <a:ea typeface=""/>
+        <a:cs typeface=""/>
+        <a:font script="Jpan" typeface="游ゴシック"/>
+        <a:font script="Hang" typeface="맑은 고딕"/>
+        <a:font script="Hans" typeface="等线"/>
+        <a:font script="Hant" typeface="新細明體"/>
+        <a:font script="Arab" typeface="Arial"/>
+        <a:font script="Hebr" typeface="Arial"/>
+        <a:font script="Thai" typeface="Cordia New"/>
+        <a:font script="Ethi" typeface="Nyala"/>
+        <a:font script="Beng" typeface="Vrinda"/>
+        <a:font script="Gujr" typeface="Shruti"/>
+        <a:font script="Khmr" typeface="DaunPenh"/>
+        <a:font script="Knda" typeface="Tunga"/>
+        <a:font script="Guru" typeface="Raavi"/>
+        <a:font script="Cans" typeface="Euphemia"/>
+        <a:font script="Cher" typeface="Plantagenet Cherokee"/>
+        <a:font script="Yiii" typeface="Microsoft Yi Baiti"/>
+        <a:font script="Tibt" typeface="Microsoft Himalaya"/>
+        <a:font script="Thaa" typeface="MV Boli"/>
+        <a:font script="Deva" typeface="Mangal"/>
+        <a:font script="Telu" typeface="Gautami"/>
+        <a:font script="Taml" typeface="Latha"/>
+        <a:font script="Syrc" typeface="Estrangelo Edessa"/>
+        <a:font script="Orya" typeface="Kalinga"/>
+        <a:font script="Mlym" typeface="Kartika"/>
+        <a:font script="Laoo" typeface="DokChampa"/>
+        <a:font script="Sinh" typeface="Iskoola Pota"/>
+        <a:font script="Mong" typeface="Mongolian Baiti"/>
+        <a:font script="Viet" typeface="Arial"/>
+        <a:font script="Uigh" typeface="Microsoft Uighur"/>
+        <a:font script="Geor" typeface="Sylfaen"/>
+        <a:font script="Armn" typeface="Arial"/>
+        <a:font script="Bugi" typeface="Leelawadee UI"/>
+        <a:font script="Bopo" typeface="Microsoft JhengHei"/>
+        <a:font script="Java" typeface="Javanese Text"/>
+        <a:font script="Lisu" typeface="Segoe UI"/>
+        <a:font script="Mymr" typeface="Myanmar Text"/>
+        <a:font script="Nkoo" typeface="Ebrima"/>
+        <a:font script="Olck" typeface="Nirmala UI"/>
+        <a:font script="Osma" typeface="Ebrima"/>
+        <a:font script="Phag" typeface="Phagspa"/>
+        <a:font script="Syrn" typeface="Estrangelo Edessa"/>
+        <a:font script="Syrj" typeface="Estrangelo Edessa"/>
+        <a:font script="Syre" typeface="Estrangelo Edessa"/>
+        <a:font script="Sora" typeface="Nirmala UI"/>
+        <a:font script="Tale" typeface="Microsoft Tai Le"/>
+        <a:font script="Talu" typeface="Microsoft New Tai Lue"/>
+        <a:font script="Tfng" typeface="Ebrima"/>
+      </a:minorFont>
+    </a:fontScheme>
+    <a:fmtScheme name="Office">
+      <a:fillStyleLst>
+        <a:solidFill>
+          <a:schemeClr val="phClr"/>
+        </a:solidFill>
+        <a:gradFill rotWithShape="1">
+          <a:gsLst>
+            <a:gs pos="0">
+              <a:schemeClr val="phClr">
+                <a:lumMod val="110000"/>
+                <a:satMod val="105000"/>
+                <a:tint val="67000"/>
+              </a:schemeClr>
+            </a:gs>
+            <a:gs pos="50000">
+              <a:schemeClr val="phClr">
+                <a:lumMod val="105000"/>
+                <a:satMod val="103000"/>
+                <a:tint val="73000"/>
+              </a:schemeClr>
+            </a:gs>
+            <a:gs pos="100000">
+              <a:schemeClr val="phClr">
+                <a:lumMod val="105000"/>
+                <a:satMod val="109000"/>
+                <a:tint val="81000"/>
+              </a:schemeClr>
+            </a:gs>
+          </a:gsLst>
+          <a:lin ang="5400000" scaled="0"/>
+        </a:gradFill>
+        <a:gradFill rotWithShape="1">
+          <a:gsLst>
+            <a:gs pos="0">
+              <a:schemeClr val="phClr">
+                <a:satMod val="103000"/>
+                <a:lumMod val="102000"/>
+                <a:tint val="94000"/>
+              </a:schemeClr>
+            </a:gs>
+            <a:gs pos="50000">
+              <a:schemeClr val="phClr">
+                <a:satMod val="110000"/>
+                <a:lumMod val="100000"/>
+                <a:shade val="100000"/>
+              </a:schemeClr>
+            </a:gs>
+            <a:gs pos="100000">
+              <a:schemeClr val="phClr">
+                <a:lumMod val="99000"/>
+                <a:satMod val="120000"/>
+                <a:shade val="78000"/>
+              </a:schemeClr>
+            </a:gs>
+          </a:gsLst>
+          <a:lin ang="5400000" scaled="0"/>
+        </a:gradFill>
+      </a:fillStyleLst>
+      <a:lnStyleLst>
+        <a:ln w="6350" cap="flat" cmpd="sng" algn="ctr">
+          <a:solidFill>
+            <a:schemeClr val="phClr"/>
+          </a:solidFill>
+          <a:prstDash val="solid"/>
+          <a:miter lim="800000"/>
+        </a:ln>
+        <a:ln w="12700" cap="flat" cmpd="sng" algn="ctr">
+          <a:solidFill>
+            <a:schemeClr val="phClr"/>
+          </a:solidFill>
+          <a:prstDash val="solid"/>
+          <a:miter lim="800000"/>
+        </a:ln>
+        <a:ln w="19050" cap="flat" cmpd="sng" algn="ctr">
+          <a:solidFill>
+            <a:schemeClr val="phClr"/>
+          </a:solidFill>
+          <a:prstDash val="solid"/>
+          <a:miter lim="800000"/>
+        </a:ln>
+      </a:lnStyleLst>
+      <a:effectStyleLst>
+        <a:effectStyle>
+          <a:effectLst/>
+        </a:effectStyle>
+        <a:effectStyle>
+          <a:effectLst/>
+        </a:effectStyle>
+        <a:effectStyle>
+          <a:effectLst>
+            <a:outerShdw blurRad="57150" dist="19050" dir="5400000" algn="ctr" rotWithShape="0">
+              <a:srgbClr val="000000">
+                <a:alpha val="63000"/>
+              </a:srgbClr>
+            </a:outerShdw>
+          </a:effectLst>
+        </a:effectStyle>
+      </a:effectStyleLst>
+      <a:bgFillStyleLst>
+        <a:solidFill>
+          <a:schemeClr val="phClr"/>
+        </a:solidFill>
+        <a:solidFill>
+          <a:schemeClr val="phClr">
+            <a:tint val="95000"/>
+            <a:satMod val="170000"/>
+          </a:schemeClr>
+        </a:solidFill>
+        <a:gradFill rotWithShape="1">
+          <a:gsLst>
+            <a:gs pos="0">
+              <a:schemeClr val="phClr">
+                <a:tint val="93000"/>
+                <a:satMod val="150000"/>
+                <a:shade val="98000"/>
+                <a:lumMod val="102000"/>
+              </a:schemeClr>
+            </a:gs>
+            <a:gs pos="50000">
+              <a:schemeClr val="phClr">
+                <a:tint val="98000"/>
+                <a:satMod val="130000"/>
+                <a:shade val="90000"/>
+                <a:lumMod val="103000"/>
+              </a:schemeClr>
+            </a:gs>
+            <a:gs pos="100000">
+              <a:schemeClr val="phClr">
+                <a:shade val="63000"/>
+                <a:satMod val="120000"/>
+              </a:schemeClr>
+            </a:gs>
+          </a:gsLst>
+          <a:lin ang="5400000" scaled="0"/>
+        </a:gradFill>
+      </a:bgFillStyleLst>
+    </a:fmtScheme>
+  </a:themeElements>
+  <a:objectDefaults/>
+  <a:extraClrSchemeLst/>
   <a:extLst>
     <a:ext uri="{05A4C25C-085E-4340-85A3-A5531E510DB2}">
       <thm15:themeFamily xmlns:thm15="http://schemas.microsoft.com/office/thememl/2012/main" name="Office Theme" id="{62F939B6-93AF-4DB8-9C6B-D6C7DFDC589F}" vid="{4A3C46E8-61CC-4603-A589-7422A47A8E4A}"/>

--- a/docs/sample.pptx
+++ b/docs/sample.pptx
@@ -746,7 +746,7 @@
           <a:p>
             <a:fld id="{5BCAD085-E8A6-8845-BD4E-CB4CCA059FC4}" type="datetimeFigureOut">
               <a:rPr lang="en-US" smtClean="0"/>
-              <a:t>2026-10-16</a:t>
+              <a:t>10/16/2026</a:t>
             </a:fld>
             <a:endParaRPr lang="en-US"/>
           </a:p>
@@ -909,7 +909,7 @@
           <a:p>
             <a:fld id="{5BCAD085-E8A6-8845-BD4E-CB4CCA059FC4}" type="datetimeFigureOut">
               <a:rPr lang="en-US" smtClean="0"/>
-              <a:t>2026-10-16</a:t>
+              <a:t>10/16/2026</a:t>
             </a:fld>
             <a:endParaRPr lang="en-US"/>
           </a:p>
@@ -1082,7 +1082,7 @@
           <a:p>
             <a:fld id="{5BCAD085-E8A6-8845-BD4E-CB4CCA059FC4}" type="datetimeFigureOut">
               <a:rPr lang="en-US" smtClean="0"/>
-              <a:t>2026-10-16</a:t>
+              <a:t>10/16/2026</a:t>
             </a:fld>
             <a:endParaRPr lang="en-US"/>
           </a:p>
@@ -1245,7 +1245,7 @@
           <a:p>
             <a:fld id="{5BCAD085-E8A6-8845-BD4E-CB4CCA059FC4}" type="datetimeFigureOut">
               <a:rPr lang="en-US" smtClean="0"/>
-              <a:t>2026-10-16</a:t>
+              <a:t>10/16/2026</a:t>
             </a:fld>
             <a:endParaRPr lang="en-US"/>
           </a:p>
@@ -1485,7 +1485,7 @@
           <a:p>
             <a:fld id="{5BCAD085-E8A6-8845-BD4E-CB4CCA059FC4}" type="datetimeFigureOut">
               <a:rPr lang="en-US" smtClean="0"/>
-              <a:t>2026-10-16</a:t>
+              <a:t>10/16/2026</a:t>
             </a:fld>
             <a:endParaRPr lang="en-US"/>
           </a:p>
@@ -1765,7 +1765,7 @@
           <a:p>
             <a:fld id="{5BCAD085-E8A6-8845-BD4E-CB4CCA059FC4}" type="datetimeFigureOut">
               <a:rPr lang="en-US" smtClean="0"/>
-              <a:t>2026-10-16</a:t>
+              <a:t>10/16/2026</a:t>
             </a:fld>
             <a:endParaRPr lang="en-US"/>
           </a:p>
@@ -2179,7 +2179,7 @@
           <a:p>
             <a:fld id="{5BCAD085-E8A6-8845-BD4E-CB4CCA059FC4}" type="datetimeFigureOut">
               <a:rPr lang="en-US" smtClean="0"/>
-              <a:t>2026-10-16</a:t>
+              <a:t>10/16/2026</a:t>
             </a:fld>
             <a:endParaRPr lang="en-US"/>
           </a:p>
@@ -2291,7 +2291,7 @@
           <a:p>
             <a:fld id="{5BCAD085-E8A6-8845-BD4E-CB4CCA059FC4}" type="datetimeFigureOut">
               <a:rPr lang="en-US" smtClean="0"/>
-              <a:t>2026-10-16</a:t>
+              <a:t>10/16/2026</a:t>
             </a:fld>
             <a:endParaRPr lang="en-US"/>
           </a:p>
@@ -2381,7 +2381,7 @@
           <a:p>
             <a:fld id="{5BCAD085-E8A6-8845-BD4E-CB4CCA059FC4}" type="datetimeFigureOut">
               <a:rPr lang="en-US" smtClean="0"/>
-              <a:t>2026-10-16</a:t>
+              <a:t>10/16/2026</a:t>
             </a:fld>
             <a:endParaRPr lang="en-US"/>
           </a:p>
@@ -2651,7 +2651,7 @@
           <a:p>
             <a:fld id="{5BCAD085-E8A6-8845-BD4E-CB4CCA059FC4}" type="datetimeFigureOut">
               <a:rPr lang="en-US" smtClean="0"/>
-              <a:t>2026-10-16</a:t>
+              <a:t>10/16/2026</a:t>
             </a:fld>
             <a:endParaRPr lang="en-US"/>
           </a:p>
@@ -2898,7 +2898,7 @@
           <a:p>
             <a:fld id="{5BCAD085-E8A6-8845-BD4E-CB4CCA059FC4}" type="datetimeFigureOut">
               <a:rPr lang="en-US" smtClean="0"/>
-              <a:t>2026-10-16</a:t>
+              <a:t>10/16/2026</a:t>
             </a:fld>
             <a:endParaRPr lang="en-US"/>
           </a:p>
@@ -3104,7 +3104,7 @@
           <a:p>
             <a:fld id="{5BCAD085-E8A6-8845-BD4E-CB4CCA059FC4}" type="datetimeFigureOut">
               <a:rPr lang="en-US" smtClean="0"/>
-              <a:t>2026-10-16</a:t>
+              <a:t>10/16/2026</a:t>
             </a:fld>
             <a:endParaRPr lang="en-US"/>
           </a:p>
@@ -4018,6 +4018,7 @@
           <a:lstStyle/>
           <a:p>
             <a:pPr algn="ctr"/>
+            <a:endParaRPr/>
           </a:p>
         </p:txBody>
       </p:sp>
@@ -4111,6 +4112,7 @@
           <a:lstStyle/>
           <a:p>
             <a:pPr algn="ctr"/>
+            <a:endParaRPr/>
           </a:p>
         </p:txBody>
       </p:sp>
@@ -4143,6 +4145,7 @@
           <a:lstStyle/>
           <a:p>
             <a:pPr algn="ctr"/>
+            <a:endParaRPr/>
           </a:p>
         </p:txBody>
       </p:sp>
@@ -4219,6 +4222,7 @@
           <a:lstStyle/>
           <a:p>
             <a:pPr algn="ctr"/>
+            <a:endParaRPr/>
           </a:p>
         </p:txBody>
       </p:sp>
@@ -4395,6 +4399,7 @@
           <a:lstStyle/>
           <a:p>
             <a:pPr algn="ctr"/>
+            <a:endParaRPr/>
           </a:p>
         </p:txBody>
       </p:sp>
@@ -4488,6 +4493,7 @@
           <a:lstStyle/>
           <a:p>
             <a:pPr algn="ctr"/>
+            <a:endParaRPr/>
           </a:p>
         </p:txBody>
       </p:sp>
@@ -4520,6 +4526,7 @@
           <a:lstStyle/>
           <a:p>
             <a:pPr algn="ctr"/>
+            <a:endParaRPr/>
           </a:p>
         </p:txBody>
       </p:sp>
@@ -4625,6 +4632,7 @@
           <a:lstStyle/>
           <a:p>
             <a:pPr algn="ctr"/>
+            <a:endParaRPr/>
           </a:p>
         </p:txBody>
       </p:sp>
@@ -4657,6 +4665,7 @@
           <a:lstStyle/>
           <a:p>
             <a:pPr algn="ctr"/>
+            <a:endParaRPr/>
           </a:p>
         </p:txBody>
       </p:sp>
@@ -4762,6 +4771,7 @@
           <a:lstStyle/>
           <a:p>
             <a:pPr algn="ctr"/>
+            <a:endParaRPr/>
           </a:p>
         </p:txBody>
       </p:sp>
@@ -4794,6 +4804,7 @@
           <a:lstStyle/>
           <a:p>
             <a:pPr algn="ctr"/>
+            <a:endParaRPr/>
           </a:p>
         </p:txBody>
       </p:sp>
@@ -4899,6 +4910,7 @@
           <a:lstStyle/>
           <a:p>
             <a:pPr algn="ctr"/>
+            <a:endParaRPr/>
           </a:p>
         </p:txBody>
       </p:sp>
@@ -4929,6 +4941,7 @@
           <a:lstStyle/>
           <a:p>
             <a:pPr algn="ctr"/>
+            <a:endParaRPr/>
           </a:p>
         </p:txBody>
       </p:sp>
@@ -5042,6 +5055,7 @@
           <a:lstStyle/>
           <a:p>
             <a:pPr algn="ctr"/>
+            <a:endParaRPr/>
           </a:p>
         </p:txBody>
       </p:sp>
@@ -5072,6 +5086,7 @@
           <a:lstStyle/>
           <a:p>
             <a:pPr algn="ctr"/>
+            <a:endParaRPr/>
           </a:p>
         </p:txBody>
       </p:sp>
@@ -5185,6 +5200,7 @@
           <a:lstStyle/>
           <a:p>
             <a:pPr algn="ctr"/>
+            <a:endParaRPr/>
           </a:p>
         </p:txBody>
       </p:sp>
@@ -5215,6 +5231,7 @@
           <a:lstStyle/>
           <a:p>
             <a:pPr algn="ctr"/>
+            <a:endParaRPr/>
           </a:p>
         </p:txBody>
       </p:sp>
@@ -5328,6 +5345,7 @@
           <a:lstStyle/>
           <a:p>
             <a:pPr algn="ctr"/>
+            <a:endParaRPr/>
           </a:p>
         </p:txBody>
       </p:sp>
@@ -5358,6 +5376,7 @@
           <a:lstStyle/>
           <a:p>
             <a:pPr algn="ctr"/>
+            <a:endParaRPr/>
           </a:p>
         </p:txBody>
       </p:sp>
@@ -5471,6 +5490,7 @@
           <a:lstStyle/>
           <a:p>
             <a:pPr algn="ctr"/>
+            <a:endParaRPr/>
           </a:p>
         </p:txBody>
       </p:sp>
@@ -5501,6 +5521,7 @@
           <a:lstStyle/>
           <a:p>
             <a:pPr algn="ctr"/>
+            <a:endParaRPr/>
           </a:p>
         </p:txBody>
       </p:sp>
@@ -5612,6 +5633,7 @@
           <a:lstStyle/>
           <a:p>
             <a:pPr algn="ctr"/>
+            <a:endParaRPr/>
           </a:p>
         </p:txBody>
       </p:sp>
@@ -5705,6 +5727,7 @@
           <a:lstStyle/>
           <a:p>
             <a:pPr algn="ctr"/>
+            <a:endParaRPr/>
           </a:p>
         </p:txBody>
       </p:sp>
@@ -5735,6 +5758,7 @@
           <a:lstStyle/>
           <a:p>
             <a:pPr algn="ctr"/>
+            <a:endParaRPr/>
           </a:p>
         </p:txBody>
       </p:sp>
@@ -5839,6 +5863,7 @@
           <a:lstStyle/>
           <a:p>
             <a:pPr algn="ctr"/>
+            <a:endParaRPr/>
           </a:p>
         </p:txBody>
       </p:sp>
@@ -5869,6 +5894,7 @@
           <a:lstStyle/>
           <a:p>
             <a:pPr algn="ctr"/>
+            <a:endParaRPr/>
           </a:p>
         </p:txBody>
       </p:sp>
@@ -5973,6 +5999,7 @@
           <a:lstStyle/>
           <a:p>
             <a:pPr algn="ctr"/>
+            <a:endParaRPr/>
           </a:p>
         </p:txBody>
       </p:sp>
@@ -6003,6 +6030,7 @@
           <a:lstStyle/>
           <a:p>
             <a:pPr algn="ctr"/>
+            <a:endParaRPr/>
           </a:p>
         </p:txBody>
       </p:sp>
@@ -6107,6 +6135,7 @@
           <a:lstStyle/>
           <a:p>
             <a:pPr algn="ctr"/>
+            <a:endParaRPr/>
           </a:p>
         </p:txBody>
       </p:sp>
@@ -6137,6 +6166,7 @@
           <a:lstStyle/>
           <a:p>
             <a:pPr algn="ctr"/>
+            <a:endParaRPr/>
           </a:p>
         </p:txBody>
       </p:sp>
@@ -6164,13 +6194,22 @@
           <a:p>
             <a:pPr algn="ctr"/>
             <a:r>
-              <a:rPr sz="2000" b="1" i="0">
+              <a:rPr lang="en-US" sz="2000" b="1" dirty="0">
                 <a:solidFill>
                   <a:srgbClr val="B7791F"/>
                 </a:solidFill>
                 <a:latin typeface="Aptos"/>
               </a:rPr>
-              <a:t>100%</a:t>
+              <a:t>99</a:t>
+            </a:r>
+            <a:r>
+              <a:rPr sz="2000" b="1" i="0" dirty="0">
+                <a:solidFill>
+                  <a:srgbClr val="B7791F"/>
+                </a:solidFill>
+                <a:latin typeface="Aptos"/>
+              </a:rPr>
+              <a:t>%</a:t>
             </a:r>
           </a:p>
         </p:txBody>
@@ -6241,6 +6280,7 @@
           <a:lstStyle/>
           <a:p>
             <a:pPr algn="ctr"/>
+            <a:endParaRPr/>
           </a:p>
         </p:txBody>
       </p:sp>
@@ -6271,6 +6311,7 @@
           <a:lstStyle/>
           <a:p>
             <a:pPr algn="ctr"/>
+            <a:endParaRPr/>
           </a:p>
         </p:txBody>
       </p:sp>
@@ -6375,6 +6416,7 @@
           <a:lstStyle/>
           <a:p>
             <a:pPr algn="ctr"/>
+            <a:endParaRPr/>
           </a:p>
         </p:txBody>
       </p:sp>
@@ -6405,6 +6447,7 @@
           <a:lstStyle/>
           <a:p>
             <a:pPr algn="ctr"/>
+            <a:endParaRPr/>
           </a:p>
         </p:txBody>
       </p:sp>
@@ -6696,6 +6739,7 @@
           <a:lstStyle/>
           <a:p>
             <a:pPr algn="ctr"/>
+            <a:endParaRPr/>
           </a:p>
         </p:txBody>
       </p:sp>
@@ -6728,6 +6772,7 @@
           <a:lstStyle/>
           <a:p>
             <a:pPr algn="ctr"/>
+            <a:endParaRPr/>
           </a:p>
         </p:txBody>
       </p:sp>
@@ -6758,6 +6803,7 @@
           <a:lstStyle/>
           <a:p>
             <a:pPr algn="ctr"/>
+            <a:endParaRPr/>
           </a:p>
         </p:txBody>
       </p:sp>
@@ -6862,18 +6908,36 @@
         <a:graphic>
           <a:graphicData uri="http://schemas.openxmlformats.org/drawingml/2006/table">
             <a:tbl>
-              <a:tblPr firstRow="0" bandRow="0">
+              <a:tblPr>
                 <a:tableStyleId>{5C22544A-7EE6-4342-B048-85BDC9FD1C3A}</a:tableStyleId>
               </a:tblPr>
               <a:tblGrid>
-                <a:gridCol w="1554480"/>
-                <a:gridCol w="3611880"/>
-                <a:gridCol w="2331720"/>
+                <a:gridCol w="1554480">
+                  <a:extLst>
+                    <a:ext uri="{9D8B030D-6E8A-4147-A177-3AD203B41FA5}">
+                      <a16:colId xmlns:a16="http://schemas.microsoft.com/office/drawing/2014/main" val="20000"/>
+                    </a:ext>
+                  </a:extLst>
+                </a:gridCol>
+                <a:gridCol w="3611880">
+                  <a:extLst>
+                    <a:ext uri="{9D8B030D-6E8A-4147-A177-3AD203B41FA5}">
+                      <a16:colId xmlns:a16="http://schemas.microsoft.com/office/drawing/2014/main" val="20001"/>
+                    </a:ext>
+                  </a:extLst>
+                </a:gridCol>
+                <a:gridCol w="2331720">
+                  <a:extLst>
+                    <a:ext uri="{9D8B030D-6E8A-4147-A177-3AD203B41FA5}">
+                      <a16:colId xmlns:a16="http://schemas.microsoft.com/office/drawing/2014/main" val="20002"/>
+                    </a:ext>
+                  </a:extLst>
+                </a:gridCol>
               </a:tblGrid>
               <a:tr h="347472">
                 <a:tc>
                   <a:txBody>
-                    <a:bodyPr wrap="square"/>
+                    <a:bodyPr/>
                     <a:lstStyle/>
                     <a:p>
                       <a:pPr algn="l"/>
@@ -6916,7 +6980,7 @@
                 </a:tc>
                 <a:tc>
                   <a:txBody>
-                    <a:bodyPr wrap="square"/>
+                    <a:bodyPr/>
                     <a:lstStyle/>
                     <a:p>
                       <a:pPr algn="l"/>
@@ -6959,7 +7023,7 @@
                 </a:tc>
                 <a:tc>
                   <a:txBody>
-                    <a:bodyPr wrap="square"/>
+                    <a:bodyPr/>
                     <a:lstStyle/>
                     <a:p>
                       <a:pPr algn="l"/>
@@ -7000,11 +7064,16 @@
                     </a:solidFill>
                   </a:tcPr>
                 </a:tc>
+                <a:extLst>
+                  <a:ext uri="{0D108BD9-81ED-4DB2-BD59-A6C34878D82A}">
+                    <a16:rowId xmlns:a16="http://schemas.microsoft.com/office/drawing/2014/main" val="10000"/>
+                  </a:ext>
+                </a:extLst>
               </a:tr>
               <a:tr h="457200">
                 <a:tc>
                   <a:txBody>
-                    <a:bodyPr wrap="square"/>
+                    <a:bodyPr/>
                     <a:lstStyle/>
                     <a:p>
                       <a:pPr algn="l"/>
@@ -7047,7 +7116,7 @@
                 </a:tc>
                 <a:tc>
                   <a:txBody>
-                    <a:bodyPr wrap="square"/>
+                    <a:bodyPr/>
                     <a:lstStyle/>
                     <a:p>
                       <a:pPr algn="l"/>
@@ -7090,7 +7159,7 @@
                 </a:tc>
                 <a:tc>
                   <a:txBody>
-                    <a:bodyPr wrap="square"/>
+                    <a:bodyPr/>
                     <a:lstStyle/>
                     <a:p>
                       <a:pPr algn="l"/>
@@ -7131,11 +7200,16 @@
                     </a:solidFill>
                   </a:tcPr>
                 </a:tc>
+                <a:extLst>
+                  <a:ext uri="{0D108BD9-81ED-4DB2-BD59-A6C34878D82A}">
+                    <a16:rowId xmlns:a16="http://schemas.microsoft.com/office/drawing/2014/main" val="10001"/>
+                  </a:ext>
+                </a:extLst>
               </a:tr>
               <a:tr h="457200">
                 <a:tc>
                   <a:txBody>
-                    <a:bodyPr wrap="square"/>
+                    <a:bodyPr/>
                     <a:lstStyle/>
                     <a:p>
                       <a:pPr algn="l"/>
@@ -7178,7 +7252,7 @@
                 </a:tc>
                 <a:tc>
                   <a:txBody>
-                    <a:bodyPr wrap="square"/>
+                    <a:bodyPr/>
                     <a:lstStyle/>
                     <a:p>
                       <a:pPr algn="l"/>
@@ -7221,7 +7295,7 @@
                 </a:tc>
                 <a:tc>
                   <a:txBody>
-                    <a:bodyPr wrap="square"/>
+                    <a:bodyPr/>
                     <a:lstStyle/>
                     <a:p>
                       <a:pPr algn="l"/>
@@ -7262,11 +7336,16 @@
                     </a:solidFill>
                   </a:tcPr>
                 </a:tc>
+                <a:extLst>
+                  <a:ext uri="{0D108BD9-81ED-4DB2-BD59-A6C34878D82A}">
+                    <a16:rowId xmlns:a16="http://schemas.microsoft.com/office/drawing/2014/main" val="10002"/>
+                  </a:ext>
+                </a:extLst>
               </a:tr>
               <a:tr h="457200">
                 <a:tc>
                   <a:txBody>
-                    <a:bodyPr wrap="square"/>
+                    <a:bodyPr/>
                     <a:lstStyle/>
                     <a:p>
                       <a:pPr algn="l"/>
@@ -7309,7 +7388,7 @@
                 </a:tc>
                 <a:tc>
                   <a:txBody>
-                    <a:bodyPr wrap="square"/>
+                    <a:bodyPr/>
                     <a:lstStyle/>
                     <a:p>
                       <a:pPr algn="l"/>
@@ -7352,7 +7431,7 @@
                 </a:tc>
                 <a:tc>
                   <a:txBody>
-                    <a:bodyPr wrap="square"/>
+                    <a:bodyPr/>
                     <a:lstStyle/>
                     <a:p>
                       <a:pPr algn="l"/>
@@ -7393,11 +7472,16 @@
                     </a:solidFill>
                   </a:tcPr>
                 </a:tc>
+                <a:extLst>
+                  <a:ext uri="{0D108BD9-81ED-4DB2-BD59-A6C34878D82A}">
+                    <a16:rowId xmlns:a16="http://schemas.microsoft.com/office/drawing/2014/main" val="10003"/>
+                  </a:ext>
+                </a:extLst>
               </a:tr>
               <a:tr h="457200">
                 <a:tc>
                   <a:txBody>
-                    <a:bodyPr wrap="square"/>
+                    <a:bodyPr/>
                     <a:lstStyle/>
                     <a:p>
                       <a:pPr algn="l"/>
@@ -7440,7 +7524,7 @@
                 </a:tc>
                 <a:tc>
                   <a:txBody>
-                    <a:bodyPr wrap="square"/>
+                    <a:bodyPr/>
                     <a:lstStyle/>
                     <a:p>
                       <a:pPr algn="l"/>
@@ -7483,7 +7567,7 @@
                 </a:tc>
                 <a:tc>
                   <a:txBody>
-                    <a:bodyPr wrap="square"/>
+                    <a:bodyPr/>
                     <a:lstStyle/>
                     <a:p>
                       <a:pPr algn="l"/>
@@ -7524,11 +7608,16 @@
                     </a:solidFill>
                   </a:tcPr>
                 </a:tc>
+                <a:extLst>
+                  <a:ext uri="{0D108BD9-81ED-4DB2-BD59-A6C34878D82A}">
+                    <a16:rowId xmlns:a16="http://schemas.microsoft.com/office/drawing/2014/main" val="10004"/>
+                  </a:ext>
+                </a:extLst>
               </a:tr>
               <a:tr h="457200">
                 <a:tc>
                   <a:txBody>
-                    <a:bodyPr wrap="square"/>
+                    <a:bodyPr/>
                     <a:lstStyle/>
                     <a:p>
                       <a:pPr algn="l"/>
@@ -7571,7 +7660,7 @@
                 </a:tc>
                 <a:tc>
                   <a:txBody>
-                    <a:bodyPr wrap="square"/>
+                    <a:bodyPr/>
                     <a:lstStyle/>
                     <a:p>
                       <a:pPr algn="l"/>
@@ -7614,7 +7703,7 @@
                 </a:tc>
                 <a:tc>
                   <a:txBody>
-                    <a:bodyPr wrap="square"/>
+                    <a:bodyPr/>
                     <a:lstStyle/>
                     <a:p>
                       <a:pPr algn="l"/>
@@ -7655,11 +7744,16 @@
                     </a:solidFill>
                   </a:tcPr>
                 </a:tc>
+                <a:extLst>
+                  <a:ext uri="{0D108BD9-81ED-4DB2-BD59-A6C34878D82A}">
+                    <a16:rowId xmlns:a16="http://schemas.microsoft.com/office/drawing/2014/main" val="10005"/>
+                  </a:ext>
+                </a:extLst>
               </a:tr>
               <a:tr h="457200">
                 <a:tc>
                   <a:txBody>
-                    <a:bodyPr wrap="square"/>
+                    <a:bodyPr/>
                     <a:lstStyle/>
                     <a:p>
                       <a:pPr algn="l"/>
@@ -7702,7 +7796,7 @@
                 </a:tc>
                 <a:tc>
                   <a:txBody>
-                    <a:bodyPr wrap="square"/>
+                    <a:bodyPr/>
                     <a:lstStyle/>
                     <a:p>
                       <a:pPr algn="l"/>
@@ -7745,7 +7839,7 @@
                 </a:tc>
                 <a:tc>
                   <a:txBody>
-                    <a:bodyPr wrap="square"/>
+                    <a:bodyPr/>
                     <a:lstStyle/>
                     <a:p>
                       <a:pPr algn="l"/>
@@ -7786,6 +7880,11 @@
                     </a:solidFill>
                   </a:tcPr>
                 </a:tc>
+                <a:extLst>
+                  <a:ext uri="{0D108BD9-81ED-4DB2-BD59-A6C34878D82A}">
+                    <a16:rowId xmlns:a16="http://schemas.microsoft.com/office/drawing/2014/main" val="10006"/>
+                  </a:ext>
+                </a:extLst>
               </a:tr>
             </a:tbl>
           </a:graphicData>
@@ -7820,6 +7919,7 @@
           <a:lstStyle/>
           <a:p>
             <a:pPr algn="ctr"/>
+            <a:endParaRPr/>
           </a:p>
         </p:txBody>
       </p:sp>
@@ -7889,6 +7989,7 @@
           <a:lstStyle/>
           <a:p>
             <a:pPr algn="ctr"/>
+            <a:endParaRPr/>
           </a:p>
         </p:txBody>
       </p:sp>
@@ -8261,6 +8362,7 @@
           <a:lstStyle/>
           <a:p>
             <a:pPr algn="ctr"/>
+            <a:endParaRPr/>
           </a:p>
         </p:txBody>
       </p:sp>
@@ -8330,6 +8432,7 @@
           <a:lstStyle/>
           <a:p>
             <a:pPr algn="ctr"/>
+            <a:endParaRPr/>
           </a:p>
         </p:txBody>
       </p:sp>
@@ -8553,8 +8656,8 @@
         </p:nvSpPr>
         <p:spPr>
           <a:xfrm>
-            <a:off x="411480" y="5303520"/>
-            <a:ext cx="11338560" cy="1051560"/>
+            <a:off x="411480" y="5303519"/>
+            <a:ext cx="11539530" cy="1136609"/>
           </a:xfrm>
           <a:prstGeom prst="roundRect">
             <a:avLst>
@@ -8576,6 +8679,7 @@
           <a:lstStyle/>
           <a:p>
             <a:pPr algn="ctr"/>
+            <a:endParaRPr/>
           </a:p>
         </p:txBody>
       </p:sp>
@@ -8643,6 +8747,7 @@
           <a:lstStyle/>
           <a:p>
             <a:pPr algn="ctr"/>
+            <a:endParaRPr/>
           </a:p>
         </p:txBody>
       </p:sp>
@@ -8710,6 +8815,7 @@
           <a:lstStyle/>
           <a:p>
             <a:pPr algn="ctr"/>
+            <a:endParaRPr/>
           </a:p>
         </p:txBody>
       </p:sp>
@@ -8777,6 +8883,7 @@
           <a:lstStyle/>
           <a:p>
             <a:pPr algn="ctr"/>
+            <a:endParaRPr/>
           </a:p>
         </p:txBody>
       </p:sp>
@@ -8844,6 +8951,7 @@
           <a:lstStyle/>
           <a:p>
             <a:pPr algn="ctr"/>
+            <a:endParaRPr/>
           </a:p>
         </p:txBody>
       </p:sp>
@@ -8911,6 +9019,7 @@
           <a:lstStyle/>
           <a:p>
             <a:pPr algn="ctr"/>
+            <a:endParaRPr/>
           </a:p>
         </p:txBody>
       </p:sp>
@@ -9013,6 +9122,7 @@
           <a:lstStyle/>
           <a:p>
             <a:pPr algn="ctr"/>
+            <a:endParaRPr/>
           </a:p>
         </p:txBody>
       </p:sp>
@@ -9080,6 +9190,7 @@
           <a:lstStyle/>
           <a:p>
             <a:pPr algn="ctr"/>
+            <a:endParaRPr/>
           </a:p>
         </p:txBody>
       </p:sp>
@@ -9147,6 +9258,7 @@
           <a:lstStyle/>
           <a:p>
             <a:pPr algn="ctr"/>
+            <a:endParaRPr/>
           </a:p>
         </p:txBody>
       </p:sp>
@@ -9214,6 +9326,7 @@
           <a:lstStyle/>
           <a:p>
             <a:pPr algn="ctr"/>
+            <a:endParaRPr/>
           </a:p>
         </p:txBody>
       </p:sp>
@@ -9281,6 +9394,7 @@
           <a:lstStyle/>
           <a:p>
             <a:pPr algn="ctr"/>
+            <a:endParaRPr/>
           </a:p>
         </p:txBody>
       </p:sp>
@@ -9383,6 +9497,7 @@
           <a:lstStyle/>
           <a:p>
             <a:pPr algn="ctr"/>
+            <a:endParaRPr/>
           </a:p>
         </p:txBody>
       </p:sp>
@@ -9450,6 +9565,7 @@
           <a:lstStyle/>
           <a:p>
             <a:pPr algn="ctr"/>
+            <a:endParaRPr/>
           </a:p>
         </p:txBody>
       </p:sp>
@@ -9517,6 +9633,7 @@
           <a:lstStyle/>
           <a:p>
             <a:pPr algn="ctr"/>
+            <a:endParaRPr/>
           </a:p>
         </p:txBody>
       </p:sp>
@@ -9584,6 +9701,7 @@
           <a:lstStyle/>
           <a:p>
             <a:pPr algn="ctr"/>
+            <a:endParaRPr/>
           </a:p>
         </p:txBody>
       </p:sp>
@@ -9651,6 +9769,7 @@
           <a:lstStyle/>
           <a:p>
             <a:pPr algn="ctr"/>
+            <a:endParaRPr/>
           </a:p>
         </p:txBody>
       </p:sp>
@@ -9753,6 +9872,7 @@
           <a:lstStyle/>
           <a:p>
             <a:pPr algn="ctr"/>
+            <a:endParaRPr/>
           </a:p>
         </p:txBody>
       </p:sp>
@@ -9820,6 +9940,7 @@
           <a:lstStyle/>
           <a:p>
             <a:pPr algn="ctr"/>
+            <a:endParaRPr/>
           </a:p>
         </p:txBody>
       </p:sp>
@@ -9887,6 +10008,7 @@
           <a:lstStyle/>
           <a:p>
             <a:pPr algn="ctr"/>
+            <a:endParaRPr/>
           </a:p>
         </p:txBody>
       </p:sp>
@@ -9954,6 +10076,7 @@
           <a:lstStyle/>
           <a:p>
             <a:pPr algn="ctr"/>
+            <a:endParaRPr/>
           </a:p>
         </p:txBody>
       </p:sp>
@@ -10021,6 +10144,7 @@
           <a:lstStyle/>
           <a:p>
             <a:pPr algn="ctr"/>
+            <a:endParaRPr/>
           </a:p>
         </p:txBody>
       </p:sp>
@@ -10276,16 +10400,7 @@
                 </a:solidFill>
                 <a:latin typeface="Aptos"/>
               </a:rPr>
-              <a:t>END-TO-END WORKFLOW  ·  </a:t>
-            </a:r>
-            <a:r>
-              <a:rPr sz="1050" b="1" i="0">
-                <a:solidFill>
-                  <a:srgbClr val="E0262D"/>
-                </a:solidFill>
-                <a:latin typeface="Aptos"/>
-              </a:rPr>
-              <a:t>text, photo and GPS in; a local model, rules and a second opinion decide; the right office or a human reviewer out; the citizen is emailed at every step</a:t>
+              <a:t>END-TO-END WORKFLOW  ·  text, photo and GPS in; a local model, rules and a second opinion decide; the right office or a human reviewer out; the citizen is emailed at every step</a:t>
             </a:r>
           </a:p>
         </p:txBody>
@@ -10321,6 +10436,7 @@
           <a:lstStyle/>
           <a:p>
             <a:pPr algn="ctr"/>
+            <a:endParaRPr/>
           </a:p>
         </p:txBody>
       </p:sp>
@@ -10355,6 +10471,7 @@
           <a:lstStyle/>
           <a:p>
             <a:pPr algn="ctr"/>
+            <a:endParaRPr/>
           </a:p>
         </p:txBody>
       </p:sp>
@@ -10424,6 +10541,7 @@
           <a:lstStyle/>
           <a:p>
             <a:pPr algn="ctr"/>
+            <a:endParaRPr/>
           </a:p>
         </p:txBody>
       </p:sp>
@@ -10493,6 +10611,7 @@
           <a:lstStyle/>
           <a:p>
             <a:pPr algn="ctr"/>
+            <a:endParaRPr/>
           </a:p>
         </p:txBody>
       </p:sp>
@@ -10562,6 +10681,7 @@
           <a:lstStyle/>
           <a:p>
             <a:pPr algn="ctr"/>
+            <a:endParaRPr/>
           </a:p>
         </p:txBody>
       </p:sp>
@@ -10719,6 +10839,7 @@
           <a:lstStyle/>
           <a:p>
             <a:pPr algn="ctr"/>
+            <a:endParaRPr/>
           </a:p>
         </p:txBody>
       </p:sp>
@@ -10788,6 +10909,7 @@
           <a:lstStyle/>
           <a:p>
             <a:pPr algn="ctr"/>
+            <a:endParaRPr/>
           </a:p>
         </p:txBody>
       </p:sp>
@@ -10877,6 +10999,7 @@
           <a:lstStyle/>
           <a:p>
             <a:pPr algn="ctr"/>
+            <a:endParaRPr/>
           </a:p>
         </p:txBody>
       </p:sp>
@@ -10968,6 +11091,7 @@
           <a:lstStyle/>
           <a:p>
             <a:pPr algn="ctr"/>
+            <a:endParaRPr/>
           </a:p>
         </p:txBody>
       </p:sp>
@@ -11151,6 +11275,7 @@
           <a:lstStyle/>
           <a:p>
             <a:pPr algn="ctr"/>
+            <a:endParaRPr/>
           </a:p>
         </p:txBody>
       </p:sp>
@@ -11220,6 +11345,7 @@
           <a:lstStyle/>
           <a:p>
             <a:pPr algn="ctr"/>
+            <a:endParaRPr/>
           </a:p>
         </p:txBody>
       </p:sp>
@@ -11333,6 +11459,7 @@
           <a:lstStyle/>
           <a:p>
             <a:pPr algn="ctr"/>
+            <a:endParaRPr/>
           </a:p>
         </p:txBody>
       </p:sp>
@@ -11402,6 +11529,7 @@
           <a:lstStyle/>
           <a:p>
             <a:pPr algn="ctr"/>
+            <a:endParaRPr/>
           </a:p>
         </p:txBody>
       </p:sp>
@@ -11471,6 +11599,7 @@
           <a:lstStyle/>
           <a:p>
             <a:pPr algn="ctr"/>
+            <a:endParaRPr/>
           </a:p>
         </p:txBody>
       </p:sp>
@@ -11503,6 +11632,7 @@
           <a:lstStyle/>
           <a:p>
             <a:pPr algn="ctr"/>
+            <a:endParaRPr/>
           </a:p>
         </p:txBody>
       </p:sp>
@@ -11533,6 +11663,7 @@
           <a:lstStyle/>
           <a:p>
             <a:pPr algn="ctr"/>
+            <a:endParaRPr/>
           </a:p>
         </p:txBody>
       </p:sp>
@@ -11617,7 +11748,7 @@
           </a:bodyPr>
           <a:lstStyle/>
           <a:p>
-            <a:pPr algn="l" marL="146304" indent="-146304">
+            <a:pPr marL="146304" indent="-146304" algn="l">
               <a:spcAft>
                 <a:spcPts val="300"/>
               </a:spcAft>
@@ -11644,7 +11775,7 @@
             </a:r>
           </a:p>
           <a:p>
-            <a:pPr algn="l" marL="146304" indent="-146304">
+            <a:pPr marL="146304" indent="-146304" algn="l">
               <a:spcAft>
                 <a:spcPts val="300"/>
               </a:spcAft>
@@ -11671,7 +11802,7 @@
             </a:r>
           </a:p>
           <a:p>
-            <a:pPr algn="l" marL="146304" indent="-146304">
+            <a:pPr marL="146304" indent="-146304" algn="l">
               <a:spcAft>
                 <a:spcPts val="300"/>
               </a:spcAft>
@@ -11698,7 +11829,7 @@
             </a:r>
           </a:p>
           <a:p>
-            <a:pPr algn="l" marL="146304" indent="-146304">
+            <a:pPr marL="146304" indent="-146304" algn="l">
               <a:spcAft>
                 <a:spcPts val="300"/>
               </a:spcAft>
@@ -11757,6 +11888,7 @@
           <a:lstStyle/>
           <a:p>
             <a:pPr algn="ctr"/>
+            <a:endParaRPr/>
           </a:p>
         </p:txBody>
       </p:sp>
@@ -11789,6 +11921,7 @@
           <a:lstStyle/>
           <a:p>
             <a:pPr algn="ctr"/>
+            <a:endParaRPr/>
           </a:p>
         </p:txBody>
       </p:sp>
@@ -11819,6 +11952,7 @@
           <a:lstStyle/>
           <a:p>
             <a:pPr algn="ctr"/>
+            <a:endParaRPr/>
           </a:p>
         </p:txBody>
       </p:sp>
@@ -11903,7 +12037,7 @@
           </a:bodyPr>
           <a:lstStyle/>
           <a:p>
-            <a:pPr algn="l" marL="146304" indent="-146304">
+            <a:pPr marL="146304" indent="-146304" algn="l">
               <a:spcAft>
                 <a:spcPts val="300"/>
               </a:spcAft>
@@ -11930,7 +12064,7 @@
             </a:r>
           </a:p>
           <a:p>
-            <a:pPr algn="l" marL="146304" indent="-146304">
+            <a:pPr marL="146304" indent="-146304" algn="l">
               <a:spcAft>
                 <a:spcPts val="300"/>
               </a:spcAft>
@@ -11957,7 +12091,7 @@
             </a:r>
           </a:p>
           <a:p>
-            <a:pPr algn="l" marL="146304" indent="-146304">
+            <a:pPr marL="146304" indent="-146304" algn="l">
               <a:spcAft>
                 <a:spcPts val="300"/>
               </a:spcAft>
@@ -11984,7 +12118,7 @@
             </a:r>
           </a:p>
           <a:p>
-            <a:pPr algn="l" marL="146304" indent="-146304">
+            <a:pPr marL="146304" indent="-146304" algn="l">
               <a:spcAft>
                 <a:spcPts val="300"/>
               </a:spcAft>
@@ -12229,16 +12363,7 @@
                 </a:solidFill>
                 <a:latin typeface="Aptos"/>
               </a:rPr>
-              <a:t>SYSTEM ARCHITECTURE  ·  </a:t>
-            </a:r>
-            <a:r>
-              <a:rPr sz="1050" b="1" i="0">
-                <a:solidFill>
-                  <a:srgbClr val="E0262D"/>
-                </a:solidFill>
-                <a:latin typeface="Aptos"/>
-              </a:rPr>
-              <a:t>everything runs on one laptop inside the organisation; the only model runtime is Ollama; no cloud AI calls</a:t>
+              <a:t>SYSTEM ARCHITECTURE  ·  everything runs on one laptop inside the organisation; the only model runtime is Ollama; no cloud AI calls</a:t>
             </a:r>
           </a:p>
         </p:txBody>
@@ -12274,6 +12399,7 @@
           <a:lstStyle/>
           <a:p>
             <a:pPr algn="ctr"/>
+            <a:endParaRPr/>
           </a:p>
         </p:txBody>
       </p:sp>
@@ -12379,6 +12505,7 @@
           <a:lstStyle/>
           <a:p>
             <a:pPr algn="ctr"/>
+            <a:endParaRPr/>
           </a:p>
         </p:txBody>
       </p:sp>
@@ -12414,7 +12541,7 @@
         </p:nvSpPr>
         <p:spPr>
           <a:xfrm>
-            <a:off x="2834640" y="1764792"/>
+            <a:off x="2844472" y="1764792"/>
             <a:ext cx="1828799" cy="457200"/>
           </a:xfrm>
           <a:prstGeom prst="rect">
@@ -12430,7 +12557,7 @@
           <a:p>
             <a:pPr algn="l"/>
             <a:r>
-              <a:rPr sz="1050" b="1" i="0">
+              <a:rPr sz="1050" b="1" i="0" dirty="0">
                 <a:solidFill>
                   <a:srgbClr val="140C12"/>
                 </a:solidFill>
@@ -12442,14 +12569,29 @@
           <a:p>
             <a:pPr algn="l"/>
             <a:r>
-              <a:rPr sz="850" b="0" i="0">
+              <a:rPr sz="850" b="0" i="0" dirty="0">
                 <a:solidFill>
                   <a:srgbClr val="5A5555"/>
                 </a:solidFill>
                 <a:latin typeface="Aptos"/>
               </a:rPr>
-              <a:t>React + TS, shadcn/ui</a:t>
-            </a:r>
+              <a:t>React + T</a:t>
+            </a:r>
+            <a:r>
+              <a:rPr lang="en-US" sz="850" b="0" i="0" dirty="0">
+                <a:solidFill>
+                  <a:srgbClr val="5A5555"/>
+                </a:solidFill>
+                <a:latin typeface="Aptos"/>
+              </a:rPr>
+              <a:t>ype Script</a:t>
+            </a:r>
+            <a:endParaRPr sz="850" b="0" i="0" dirty="0">
+              <a:solidFill>
+                <a:srgbClr val="5A5555"/>
+              </a:solidFill>
+              <a:latin typeface="Aptos"/>
+            </a:endParaRPr>
           </a:p>
         </p:txBody>
       </p:sp>
@@ -12484,6 +12626,7 @@
           <a:lstStyle/>
           <a:p>
             <a:pPr algn="ctr"/>
+            <a:endParaRPr/>
           </a:p>
         </p:txBody>
       </p:sp>
@@ -12589,6 +12732,7 @@
           <a:lstStyle/>
           <a:p>
             <a:pPr algn="ctr"/>
+            <a:endParaRPr/>
           </a:p>
         </p:txBody>
       </p:sp>
@@ -12694,6 +12838,7 @@
           <a:lstStyle/>
           <a:p>
             <a:pPr algn="ctr"/>
+            <a:endParaRPr/>
           </a:p>
         </p:txBody>
       </p:sp>
@@ -12799,6 +12944,7 @@
           <a:lstStyle/>
           <a:p>
             <a:pPr algn="ctr"/>
+            <a:endParaRPr/>
           </a:p>
         </p:txBody>
       </p:sp>
@@ -12904,6 +13050,7 @@
           <a:lstStyle/>
           <a:p>
             <a:pPr algn="ctr"/>
+            <a:endParaRPr/>
           </a:p>
         </p:txBody>
       </p:sp>
@@ -13009,6 +13156,7 @@
           <a:lstStyle/>
           <a:p>
             <a:pPr algn="ctr"/>
+            <a:endParaRPr/>
           </a:p>
         </p:txBody>
       </p:sp>
@@ -13078,6 +13226,7 @@
           <a:lstStyle/>
           <a:p>
             <a:pPr algn="ctr"/>
+            <a:endParaRPr/>
           </a:p>
         </p:txBody>
       </p:sp>
@@ -13147,6 +13296,7 @@
           <a:lstStyle/>
           <a:p>
             <a:pPr algn="ctr"/>
+            <a:endParaRPr/>
           </a:p>
         </p:txBody>
       </p:sp>
@@ -13216,6 +13366,7 @@
           <a:lstStyle/>
           <a:p>
             <a:pPr algn="ctr"/>
+            <a:endParaRPr/>
           </a:p>
         </p:txBody>
       </p:sp>
@@ -13285,6 +13436,7 @@
           <a:lstStyle/>
           <a:p>
             <a:pPr algn="ctr"/>
+            <a:endParaRPr/>
           </a:p>
         </p:txBody>
       </p:sp>
@@ -13354,6 +13506,7 @@
           <a:lstStyle/>
           <a:p>
             <a:pPr algn="ctr"/>
+            <a:endParaRPr/>
           </a:p>
         </p:txBody>
       </p:sp>
@@ -13435,6 +13588,7 @@
           <a:lstStyle/>
           <a:p>
             <a:pPr algn="ctr"/>
+            <a:endParaRPr/>
           </a:p>
         </p:txBody>
       </p:sp>
@@ -13516,6 +13670,7 @@
           <a:lstStyle/>
           <a:p>
             <a:pPr algn="ctr"/>
+            <a:endParaRPr/>
           </a:p>
         </p:txBody>
       </p:sp>
@@ -13597,6 +13752,7 @@
           <a:lstStyle/>
           <a:p>
             <a:pPr algn="ctr"/>
+            <a:endParaRPr/>
           </a:p>
         </p:txBody>
       </p:sp>
@@ -13678,6 +13834,7 @@
           <a:lstStyle/>
           <a:p>
             <a:pPr algn="ctr"/>
+            <a:endParaRPr/>
           </a:p>
         </p:txBody>
       </p:sp>
@@ -13759,6 +13916,7 @@
           <a:lstStyle/>
           <a:p>
             <a:pPr algn="ctr"/>
+            <a:endParaRPr/>
           </a:p>
         </p:txBody>
       </p:sp>
@@ -13840,6 +13998,7 @@
           <a:lstStyle/>
           <a:p>
             <a:pPr algn="ctr"/>
+            <a:endParaRPr/>
           </a:p>
         </p:txBody>
       </p:sp>
@@ -13921,6 +14080,7 @@
           <a:lstStyle/>
           <a:p>
             <a:pPr algn="ctr"/>
+            <a:endParaRPr/>
           </a:p>
         </p:txBody>
       </p:sp>
@@ -14002,6 +14162,7 @@
           <a:lstStyle/>
           <a:p>
             <a:pPr algn="ctr"/>
+            <a:endParaRPr/>
           </a:p>
         </p:txBody>
       </p:sp>
@@ -14060,7 +14221,7 @@
         </p:nvCxnSpPr>
         <p:spPr>
           <a:xfrm>
-            <a:off x="2121408" y="2651760"/>
+            <a:off x="2175510" y="2646045"/>
             <a:ext cx="237744" cy="0"/>
           </a:xfrm>
           <a:prstGeom prst="line">
@@ -14083,7 +14244,7 @@
         </p:nvCxnSpPr>
         <p:spPr>
           <a:xfrm>
-            <a:off x="2121408" y="3520440"/>
+            <a:off x="2175510" y="3520440"/>
             <a:ext cx="237744" cy="0"/>
           </a:xfrm>
           <a:prstGeom prst="line">
@@ -14106,7 +14267,7 @@
         </p:nvCxnSpPr>
         <p:spPr>
           <a:xfrm>
-            <a:off x="2121408" y="4389120"/>
+            <a:off x="2175510" y="4389120"/>
             <a:ext cx="237744" cy="0"/>
           </a:xfrm>
           <a:prstGeom prst="line">
@@ -14129,7 +14290,7 @@
         </p:nvCxnSpPr>
         <p:spPr>
           <a:xfrm>
-            <a:off x="4636008" y="2496312"/>
+            <a:off x="4673271" y="2497074"/>
             <a:ext cx="237744" cy="0"/>
           </a:xfrm>
           <a:prstGeom prst="line">
@@ -14152,7 +14313,7 @@
         </p:nvCxnSpPr>
         <p:spPr>
           <a:xfrm>
-            <a:off x="4636008" y="3520440"/>
+            <a:off x="4673271" y="3520440"/>
             <a:ext cx="237744" cy="0"/>
           </a:xfrm>
           <a:prstGeom prst="line">
@@ -14175,7 +14336,7 @@
         </p:nvCxnSpPr>
         <p:spPr>
           <a:xfrm>
-            <a:off x="4636008" y="4544568"/>
+            <a:off x="4691253" y="4544568"/>
             <a:ext cx="237744" cy="0"/>
           </a:xfrm>
           <a:prstGeom prst="line">
@@ -14198,7 +14359,7 @@
         </p:nvCxnSpPr>
         <p:spPr>
           <a:xfrm>
-            <a:off x="8430768" y="2560320"/>
+            <a:off x="8469630" y="2560320"/>
             <a:ext cx="237744" cy="0"/>
           </a:xfrm>
           <a:prstGeom prst="line">
@@ -14221,7 +14382,7 @@
         </p:nvCxnSpPr>
         <p:spPr>
           <a:xfrm>
-            <a:off x="8430768" y="3200400"/>
+            <a:off x="8482203" y="3200400"/>
             <a:ext cx="237744" cy="0"/>
           </a:xfrm>
           <a:prstGeom prst="line">
@@ -14244,7 +14405,7 @@
         </p:nvCxnSpPr>
         <p:spPr>
           <a:xfrm>
-            <a:off x="8430768" y="3840480"/>
+            <a:off x="8469630" y="3840480"/>
             <a:ext cx="237744" cy="0"/>
           </a:xfrm>
           <a:prstGeom prst="line">
@@ -14267,7 +14428,7 @@
         </p:nvCxnSpPr>
         <p:spPr>
           <a:xfrm>
-            <a:off x="8430768" y="4480560"/>
+            <a:off x="8482203" y="4480560"/>
             <a:ext cx="237744" cy="0"/>
           </a:xfrm>
           <a:prstGeom prst="line">
@@ -14313,6 +14474,7 @@
           <a:lstStyle/>
           <a:p>
             <a:pPr algn="ctr"/>
+            <a:endParaRPr/>
           </a:p>
         </p:txBody>
       </p:sp>
@@ -14345,6 +14507,7 @@
           <a:lstStyle/>
           <a:p>
             <a:pPr algn="ctr"/>
+            <a:endParaRPr/>
           </a:p>
         </p:txBody>
       </p:sp>
@@ -14375,6 +14538,7 @@
           <a:lstStyle/>
           <a:p>
             <a:pPr algn="ctr"/>
+            <a:endParaRPr/>
           </a:p>
         </p:txBody>
       </p:sp>
@@ -14562,6 +14726,7 @@
           <a:lstStyle/>
           <a:p>
             <a:pPr algn="ctr"/>
+            <a:endParaRPr/>
           </a:p>
         </p:txBody>
       </p:sp>
@@ -14594,6 +14759,7 @@
           <a:lstStyle/>
           <a:p>
             <a:pPr algn="ctr"/>
+            <a:endParaRPr/>
           </a:p>
         </p:txBody>
       </p:sp>
@@ -14624,6 +14790,7 @@
           <a:lstStyle/>
           <a:p>
             <a:pPr algn="ctr"/>
+            <a:endParaRPr/>
           </a:p>
         </p:txBody>
       </p:sp>
@@ -14708,7 +14875,7 @@
           </a:bodyPr>
           <a:lstStyle/>
           <a:p>
-            <a:pPr algn="l" marL="146304" indent="-146304">
+            <a:pPr marL="146304" indent="-146304" algn="l">
               <a:spcAft>
                 <a:spcPts val="300"/>
               </a:spcAft>
@@ -14735,7 +14902,7 @@
             </a:r>
           </a:p>
           <a:p>
-            <a:pPr algn="l" marL="146304" indent="-146304">
+            <a:pPr marL="146304" indent="-146304" algn="l">
               <a:spcAft>
                 <a:spcPts val="300"/>
               </a:spcAft>
@@ -14762,7 +14929,7 @@
             </a:r>
           </a:p>
           <a:p>
-            <a:pPr algn="l" marL="146304" indent="-146304">
+            <a:pPr marL="146304" indent="-146304" algn="l">
               <a:spcAft>
                 <a:spcPts val="300"/>
               </a:spcAft>
@@ -15008,6 +15175,7 @@
           <a:lstStyle/>
           <a:p>
             <a:pPr algn="ctr"/>
+            <a:endParaRPr/>
           </a:p>
         </p:txBody>
       </p:sp>
@@ -15028,7 +15196,9 @@
             </a:avLst>
           </a:prstGeom>
           <a:solidFill>
-            <a:srgbClr val="9B1C24"/>
+            <a:schemeClr val="accent2">
+              <a:lumMod val="75000"/>
+            </a:schemeClr>
           </a:solidFill>
           <a:ln>
             <a:noFill/>
@@ -15040,6 +15210,7 @@
           <a:lstStyle/>
           <a:p>
             <a:pPr algn="ctr"/>
+            <a:endParaRPr/>
           </a:p>
         </p:txBody>
       </p:sp>
@@ -15058,7 +15229,9 @@
             <a:avLst/>
           </a:prstGeom>
           <a:solidFill>
-            <a:srgbClr val="9B1C24"/>
+            <a:schemeClr val="accent2">
+              <a:lumMod val="75000"/>
+            </a:schemeClr>
           </a:solidFill>
           <a:ln>
             <a:noFill/>
@@ -15070,6 +15243,7 @@
           <a:lstStyle/>
           <a:p>
             <a:pPr algn="ctr"/>
+            <a:endParaRPr/>
           </a:p>
         </p:txBody>
       </p:sp>
@@ -15111,7 +15285,11 @@
           <a:prstGeom prst="rect">
             <a:avLst/>
           </a:prstGeom>
-          <a:noFill/>
+          <a:solidFill>
+            <a:schemeClr val="accent2">
+              <a:lumMod val="75000"/>
+            </a:schemeClr>
+          </a:solidFill>
         </p:spPr>
         <p:txBody>
           <a:bodyPr wrap="square" lIns="18288" tIns="0" rIns="18288" bIns="0" anchor="ctr">
@@ -15154,7 +15332,7 @@
           </a:bodyPr>
           <a:lstStyle/>
           <a:p>
-            <a:pPr algn="l" marL="146304" indent="-146304">
+            <a:pPr marL="146304" indent="-146304" algn="l">
               <a:spcAft>
                 <a:spcPts val="300"/>
               </a:spcAft>
@@ -15181,7 +15359,7 @@
             </a:r>
           </a:p>
           <a:p>
-            <a:pPr algn="l" marL="146304" indent="-146304">
+            <a:pPr marL="146304" indent="-146304" algn="l">
               <a:spcAft>
                 <a:spcPts val="300"/>
               </a:spcAft>
@@ -15208,7 +15386,7 @@
             </a:r>
           </a:p>
           <a:p>
-            <a:pPr algn="l" marL="146304" indent="-146304">
+            <a:pPr marL="146304" indent="-146304" algn="l">
               <a:spcAft>
                 <a:spcPts val="300"/>
               </a:spcAft>
@@ -15267,6 +15445,7 @@
           <a:lstStyle/>
           <a:p>
             <a:pPr algn="ctr"/>
+            <a:endParaRPr/>
           </a:p>
         </p:txBody>
       </p:sp>
@@ -15287,7 +15466,7 @@
             </a:avLst>
           </a:prstGeom>
           <a:solidFill>
-            <a:srgbClr val="3A3335"/>
+            <a:schemeClr val="tx1"/>
           </a:solidFill>
           <a:ln>
             <a:noFill/>
@@ -15299,6 +15478,7 @@
           <a:lstStyle/>
           <a:p>
             <a:pPr algn="ctr"/>
+            <a:endParaRPr/>
           </a:p>
         </p:txBody>
       </p:sp>
@@ -15317,7 +15497,7 @@
             <a:avLst/>
           </a:prstGeom>
           <a:solidFill>
-            <a:srgbClr val="3A3335"/>
+            <a:schemeClr val="tx1"/>
           </a:solidFill>
           <a:ln>
             <a:noFill/>
@@ -15329,6 +15509,7 @@
           <a:lstStyle/>
           <a:p>
             <a:pPr algn="ctr"/>
+            <a:endParaRPr/>
           </a:p>
         </p:txBody>
       </p:sp>
@@ -15370,7 +15551,9 @@
           <a:prstGeom prst="rect">
             <a:avLst/>
           </a:prstGeom>
-          <a:noFill/>
+          <a:solidFill>
+            <a:schemeClr val="tx1"/>
+          </a:solidFill>
         </p:spPr>
         <p:txBody>
           <a:bodyPr wrap="square" lIns="18288" tIns="0" rIns="18288" bIns="0" anchor="ctr">
@@ -15413,7 +15596,7 @@
           </a:bodyPr>
           <a:lstStyle/>
           <a:p>
-            <a:pPr algn="l" marL="146304" indent="-146304">
+            <a:pPr marL="146304" indent="-146304" algn="l">
               <a:spcAft>
                 <a:spcPts val="300"/>
               </a:spcAft>
@@ -15440,7 +15623,7 @@
             </a:r>
           </a:p>
           <a:p>
-            <a:pPr algn="l" marL="146304" indent="-146304">
+            <a:pPr marL="146304" indent="-146304" algn="l">
               <a:spcAft>
                 <a:spcPts val="300"/>
               </a:spcAft>
@@ -15467,7 +15650,7 @@
             </a:r>
           </a:p>
           <a:p>
-            <a:pPr algn="l" marL="146304" indent="-146304">
+            <a:pPr marL="146304" indent="-146304" algn="l">
               <a:spcAft>
                 <a:spcPts val="300"/>
               </a:spcAft>
@@ -15526,6 +15709,7 @@
           <a:lstStyle/>
           <a:p>
             <a:pPr algn="ctr"/>
+            <a:endParaRPr/>
           </a:p>
         </p:txBody>
       </p:sp>
@@ -15546,7 +15730,10 @@
             </a:avLst>
           </a:prstGeom>
           <a:solidFill>
-            <a:srgbClr val="B7791F"/>
+            <a:schemeClr val="accent6">
+              <a:lumMod val="60000"/>
+              <a:lumOff val="40000"/>
+            </a:schemeClr>
           </a:solidFill>
           <a:ln>
             <a:noFill/>
@@ -15558,6 +15745,7 @@
           <a:lstStyle/>
           <a:p>
             <a:pPr algn="ctr"/>
+            <a:endParaRPr/>
           </a:p>
         </p:txBody>
       </p:sp>
@@ -15576,7 +15764,10 @@
             <a:avLst/>
           </a:prstGeom>
           <a:solidFill>
-            <a:srgbClr val="B7791F"/>
+            <a:schemeClr val="accent6">
+              <a:lumMod val="60000"/>
+              <a:lumOff val="40000"/>
+            </a:schemeClr>
           </a:solidFill>
           <a:ln>
             <a:noFill/>
@@ -15588,6 +15779,7 @@
           <a:lstStyle/>
           <a:p>
             <a:pPr algn="ctr"/>
+            <a:endParaRPr/>
           </a:p>
         </p:txBody>
       </p:sp>
@@ -15629,7 +15821,12 @@
           <a:prstGeom prst="rect">
             <a:avLst/>
           </a:prstGeom>
-          <a:noFill/>
+          <a:solidFill>
+            <a:schemeClr val="accent6">
+              <a:lumMod val="60000"/>
+              <a:lumOff val="40000"/>
+            </a:schemeClr>
+          </a:solidFill>
         </p:spPr>
         <p:txBody>
           <a:bodyPr wrap="square" lIns="18288" tIns="0" rIns="18288" bIns="0" anchor="ctr">
@@ -15672,7 +15869,7 @@
           </a:bodyPr>
           <a:lstStyle/>
           <a:p>
-            <a:pPr algn="l" marL="146304" indent="-146304">
+            <a:pPr marL="146304" indent="-146304" algn="l">
               <a:spcAft>
                 <a:spcPts val="300"/>
               </a:spcAft>
@@ -15699,7 +15896,7 @@
             </a:r>
           </a:p>
           <a:p>
-            <a:pPr algn="l" marL="146304" indent="-146304">
+            <a:pPr marL="146304" indent="-146304" algn="l">
               <a:spcAft>
                 <a:spcPts val="300"/>
               </a:spcAft>
@@ -15726,7 +15923,7 @@
             </a:r>
           </a:p>
           <a:p>
-            <a:pPr algn="l" marL="146304" indent="-146304">
+            <a:pPr marL="146304" indent="-146304" algn="l">
               <a:spcAft>
                 <a:spcPts val="300"/>
               </a:spcAft>
@@ -15785,6 +15982,7 @@
           <a:lstStyle/>
           <a:p>
             <a:pPr algn="ctr"/>
+            <a:endParaRPr/>
           </a:p>
         </p:txBody>
       </p:sp>
@@ -15817,6 +16015,7 @@
           <a:lstStyle/>
           <a:p>
             <a:pPr algn="ctr"/>
+            <a:endParaRPr/>
           </a:p>
         </p:txBody>
       </p:sp>
@@ -15847,6 +16046,7 @@
           <a:lstStyle/>
           <a:p>
             <a:pPr algn="ctr"/>
+            <a:endParaRPr/>
           </a:p>
         </p:txBody>
       </p:sp>
@@ -15931,7 +16131,7 @@
           </a:bodyPr>
           <a:lstStyle/>
           <a:p>
-            <a:pPr algn="l" marL="146304" indent="-146304">
+            <a:pPr marL="146304" indent="-146304" algn="l">
               <a:spcAft>
                 <a:spcPts val="300"/>
               </a:spcAft>
@@ -15958,7 +16158,7 @@
             </a:r>
           </a:p>
           <a:p>
-            <a:pPr algn="l" marL="146304" indent="-146304">
+            <a:pPr marL="146304" indent="-146304" algn="l">
               <a:spcAft>
                 <a:spcPts val="300"/>
               </a:spcAft>
@@ -15985,7 +16185,7 @@
             </a:r>
           </a:p>
           <a:p>
-            <a:pPr algn="l" marL="146304" indent="-146304">
+            <a:pPr marL="146304" indent="-146304" algn="l">
               <a:spcAft>
                 <a:spcPts val="300"/>
               </a:spcAft>
@@ -16044,6 +16244,7 @@
           <a:lstStyle/>
           <a:p>
             <a:pPr algn="ctr"/>
+            <a:endParaRPr/>
           </a:p>
         </p:txBody>
       </p:sp>
@@ -16076,6 +16277,7 @@
           <a:lstStyle/>
           <a:p>
             <a:pPr algn="ctr"/>
+            <a:endParaRPr/>
           </a:p>
         </p:txBody>
       </p:sp>
@@ -16106,6 +16308,7 @@
           <a:lstStyle/>
           <a:p>
             <a:pPr algn="ctr"/>
+            <a:endParaRPr/>
           </a:p>
         </p:txBody>
       </p:sp>
@@ -16190,7 +16393,7 @@
           </a:bodyPr>
           <a:lstStyle/>
           <a:p>
-            <a:pPr algn="l" marL="146304" indent="-146304">
+            <a:pPr marL="146304" indent="-146304" algn="l">
               <a:spcAft>
                 <a:spcPts val="300"/>
               </a:spcAft>
@@ -16217,7 +16420,7 @@
             </a:r>
           </a:p>
           <a:p>
-            <a:pPr algn="l" marL="146304" indent="-146304">
+            <a:pPr marL="146304" indent="-146304" algn="l">
               <a:spcAft>
                 <a:spcPts val="300"/>
               </a:spcAft>
@@ -16244,7 +16447,7 @@
             </a:r>
           </a:p>
           <a:p>
-            <a:pPr algn="l" marL="146304" indent="-146304">
+            <a:pPr marL="146304" indent="-146304" algn="l">
               <a:spcAft>
                 <a:spcPts val="300"/>
               </a:spcAft>
@@ -16303,6 +16506,7 @@
           <a:lstStyle/>
           <a:p>
             <a:pPr algn="ctr"/>
+            <a:endParaRPr/>
           </a:p>
         </p:txBody>
       </p:sp>
@@ -16335,6 +16539,7 @@
           <a:lstStyle/>
           <a:p>
             <a:pPr algn="ctr"/>
+            <a:endParaRPr/>
           </a:p>
         </p:txBody>
       </p:sp>
@@ -16365,6 +16570,7 @@
           <a:lstStyle/>
           <a:p>
             <a:pPr algn="ctr"/>
+            <a:endParaRPr/>
           </a:p>
         </p:txBody>
       </p:sp>
@@ -16449,7 +16655,7 @@
           </a:bodyPr>
           <a:lstStyle/>
           <a:p>
-            <a:pPr algn="l" marL="146304" indent="-146304">
+            <a:pPr marL="146304" indent="-146304" algn="l">
               <a:spcAft>
                 <a:spcPts val="300"/>
               </a:spcAft>
@@ -16476,7 +16682,7 @@
             </a:r>
           </a:p>
           <a:p>
-            <a:pPr algn="l" marL="146304" indent="-146304">
+            <a:pPr marL="146304" indent="-146304" algn="l">
               <a:spcAft>
                 <a:spcPts val="300"/>
               </a:spcAft>
@@ -16503,7 +16709,7 @@
             </a:r>
           </a:p>
           <a:p>
-            <a:pPr algn="l" marL="146304" indent="-146304">
+            <a:pPr marL="146304" indent="-146304" algn="l">
               <a:spcAft>
                 <a:spcPts val="300"/>
               </a:spcAft>
@@ -16562,6 +16768,7 @@
           <a:lstStyle/>
           <a:p>
             <a:pPr algn="ctr"/>
+            <a:endParaRPr/>
           </a:p>
         </p:txBody>
       </p:sp>
@@ -16742,9 +16949,76 @@
           </a:p>
         </p:txBody>
       </p:sp>
+      <p:sp>
+        <p:nvSpPr>
+          <p:cNvPr id="51" name="TextBox 50"/>
+          <p:cNvSpPr txBox="1"/>
+          <p:nvPr/>
+        </p:nvSpPr>
+        <p:spPr>
+          <a:xfrm>
+            <a:off x="3535680" y="5971032"/>
+            <a:ext cx="807720" cy="274320"/>
+          </a:xfrm>
+          <a:prstGeom prst="rect">
+            <a:avLst/>
+          </a:prstGeom>
+          <a:noFill/>
+        </p:spPr>
+        <p:txBody>
+          <a:bodyPr wrap="square" lIns="0" tIns="0" rIns="0" bIns="0" anchor="t">
+            <a:noAutofit/>
+          </a:bodyPr>
+          <a:lstStyle/>
+          <a:p>
+            <a:pPr algn="ctr"/>
+            <a:r>
+              <a:rPr sz="800" b="0" i="0">
+                <a:solidFill>
+                  <a:srgbClr val="140C12"/>
+                </a:solidFill>
+                <a:latin typeface="Aptos"/>
+              </a:rPr>
+              <a:t>Tailwind</a:t>
+            </a:r>
+          </a:p>
+        </p:txBody>
+      </p:sp>
+      <p:sp>
+        <p:nvSpPr>
+          <p:cNvPr id="53" name="TextBox 52"/>
+          <p:cNvSpPr txBox="1"/>
+          <p:nvPr/>
+        </p:nvSpPr>
+        <p:spPr>
+          <a:xfrm>
+            <a:off x="4343400" y="5971032"/>
+            <a:ext cx="807720" cy="274320"/>
+          </a:xfrm>
+          <a:prstGeom prst="rect">
+            <a:avLst/>
+          </a:prstGeom>
+          <a:noFill/>
+        </p:spPr>
+        <p:txBody>
+          <a:bodyPr wrap="square" lIns="0" tIns="0" rIns="0" bIns="0" anchor="t">
+            <a:noAutofit/>
+          </a:bodyPr>
+          <a:lstStyle/>
+          <a:p>
+            <a:pPr algn="ctr"/>
+            <a:endParaRPr sz="800" b="0" i="0" dirty="0">
+              <a:solidFill>
+                <a:srgbClr val="140C12"/>
+              </a:solidFill>
+              <a:latin typeface="Aptos"/>
+            </a:endParaRPr>
+          </a:p>
+        </p:txBody>
+      </p:sp>
       <p:pic>
         <p:nvPicPr>
-          <p:cNvPr id="50" name="Picture 49" descr="badge_tw_5A5555.png"/>
+          <p:cNvPr id="54" name="Picture 53" descr="image31.png"/>
           <p:cNvPicPr>
             <a:picLocks noChangeAspect="1"/>
           </p:cNvPicPr>
@@ -16758,7 +17032,7 @@
         </p:blipFill>
         <p:spPr>
           <a:xfrm>
-            <a:off x="3729228" y="5513832"/>
+            <a:off x="4476567" y="5513832"/>
             <a:ext cx="420624" cy="420624"/>
           </a:xfrm>
           <a:prstGeom prst="rect">
@@ -16768,13 +17042,13 @@
       </p:pic>
       <p:sp>
         <p:nvSpPr>
-          <p:cNvPr id="51" name="TextBox 50"/>
+          <p:cNvPr id="55" name="TextBox 54"/>
           <p:cNvSpPr txBox="1"/>
           <p:nvPr/>
         </p:nvSpPr>
         <p:spPr>
           <a:xfrm>
-            <a:off x="3535680" y="5971032"/>
+            <a:off x="4283020" y="5971032"/>
             <a:ext cx="807720" cy="274320"/>
           </a:xfrm>
           <a:prstGeom prst="rect">
@@ -16796,14 +17070,14 @@
                 </a:solidFill>
                 <a:latin typeface="Aptos"/>
               </a:rPr>
-              <a:t>Tailwind</a:t>
+              <a:t>Python</a:t>
             </a:r>
           </a:p>
         </p:txBody>
       </p:sp>
       <p:pic>
         <p:nvPicPr>
-          <p:cNvPr id="52" name="Picture 51" descr="badge_ui_3A3335.png"/>
+          <p:cNvPr id="56" name="Picture 55" descr="image19.png"/>
           <p:cNvPicPr>
             <a:picLocks noChangeAspect="1"/>
           </p:cNvPicPr>
@@ -16817,7 +17091,7 @@
         </p:blipFill>
         <p:spPr>
           <a:xfrm>
-            <a:off x="4536947" y="5513832"/>
+            <a:off x="5284287" y="5513832"/>
             <a:ext cx="420624" cy="420624"/>
           </a:xfrm>
           <a:prstGeom prst="rect">
@@ -16827,13 +17101,13 @@
       </p:pic>
       <p:sp>
         <p:nvSpPr>
-          <p:cNvPr id="53" name="TextBox 52"/>
+          <p:cNvPr id="57" name="TextBox 56"/>
           <p:cNvSpPr txBox="1"/>
           <p:nvPr/>
         </p:nvSpPr>
         <p:spPr>
           <a:xfrm>
-            <a:off x="4343400" y="5971032"/>
+            <a:off x="5090739" y="5971032"/>
             <a:ext cx="807720" cy="274320"/>
           </a:xfrm>
           <a:prstGeom prst="rect">
@@ -16855,14 +17129,14 @@
                 </a:solidFill>
                 <a:latin typeface="Aptos"/>
               </a:rPr>
-              <a:t>shadcn/ui</a:t>
+              <a:t>FastAPI</a:t>
             </a:r>
           </a:p>
         </p:txBody>
       </p:sp>
       <p:pic>
         <p:nvPicPr>
-          <p:cNvPr id="54" name="Picture 53" descr="image31.png"/>
+          <p:cNvPr id="58" name="Picture 57" descr="image32.png"/>
           <p:cNvPicPr>
             <a:picLocks noChangeAspect="1"/>
           </p:cNvPicPr>
@@ -16876,8 +17150,8 @@
         </p:blipFill>
         <p:spPr>
           <a:xfrm>
-            <a:off x="5344667" y="5513832"/>
-            <a:ext cx="420624" cy="420624"/>
+            <a:off x="6098230" y="5513832"/>
+            <a:ext cx="408179" cy="420624"/>
           </a:xfrm>
           <a:prstGeom prst="rect">
             <a:avLst/>
@@ -16886,13 +17160,13 @@
       </p:pic>
       <p:sp>
         <p:nvSpPr>
-          <p:cNvPr id="55" name="TextBox 54"/>
+          <p:cNvPr id="59" name="TextBox 58"/>
           <p:cNvSpPr txBox="1"/>
           <p:nvPr/>
         </p:nvSpPr>
         <p:spPr>
           <a:xfrm>
-            <a:off x="5151120" y="5971032"/>
+            <a:off x="5898460" y="5971032"/>
             <a:ext cx="807720" cy="274320"/>
           </a:xfrm>
           <a:prstGeom prst="rect">
@@ -16914,14 +17188,14 @@
                 </a:solidFill>
                 <a:latin typeface="Aptos"/>
               </a:rPr>
-              <a:t>Python</a:t>
+              <a:t>PostgreSQL</a:t>
             </a:r>
           </a:p>
         </p:txBody>
       </p:sp>
       <p:pic>
         <p:nvPicPr>
-          <p:cNvPr id="56" name="Picture 55" descr="image19.png"/>
+          <p:cNvPr id="60" name="Picture 59" descr="badge_pg_7A5C2E.png"/>
           <p:cNvPicPr>
             <a:picLocks noChangeAspect="1"/>
           </p:cNvPicPr>
@@ -16935,7 +17209,7 @@
         </p:blipFill>
         <p:spPr>
           <a:xfrm>
-            <a:off x="6152387" y="5513832"/>
+            <a:off x="6899727" y="5513832"/>
             <a:ext cx="420624" cy="420624"/>
           </a:xfrm>
           <a:prstGeom prst="rect">
@@ -16945,13 +17219,13 @@
       </p:pic>
       <p:sp>
         <p:nvSpPr>
-          <p:cNvPr id="57" name="TextBox 56"/>
+          <p:cNvPr id="61" name="TextBox 60"/>
           <p:cNvSpPr txBox="1"/>
           <p:nvPr/>
         </p:nvSpPr>
         <p:spPr>
           <a:xfrm>
-            <a:off x="5958839" y="5971032"/>
+            <a:off x="6706180" y="5971032"/>
             <a:ext cx="807720" cy="274320"/>
           </a:xfrm>
           <a:prstGeom prst="rect">
@@ -16973,14 +17247,73 @@
                 </a:solidFill>
                 <a:latin typeface="Aptos"/>
               </a:rPr>
-              <a:t>FastAPI</a:t>
+              <a:t>pgvector</a:t>
             </a:r>
           </a:p>
         </p:txBody>
       </p:sp>
       <p:pic>
         <p:nvPicPr>
-          <p:cNvPr id="58" name="Picture 57" descr="image32.png"/>
+          <p:cNvPr id="62" name="Picture 61" descr="image21.png"/>
+          <p:cNvPicPr>
+            <a:picLocks noChangeAspect="1"/>
+          </p:cNvPicPr>
+          <p:nvPr/>
+        </p:nvPicPr>
+        <p:blipFill>
+          <a:blip r:embed="rId7"/>
+          <a:stretch>
+            <a:fillRect/>
+          </a:stretch>
+        </p:blipFill>
+        <p:spPr>
+          <a:xfrm>
+            <a:off x="7707447" y="5513832"/>
+            <a:ext cx="420624" cy="420624"/>
+          </a:xfrm>
+          <a:prstGeom prst="rect">
+            <a:avLst/>
+          </a:prstGeom>
+        </p:spPr>
+      </p:pic>
+      <p:sp>
+        <p:nvSpPr>
+          <p:cNvPr id="63" name="TextBox 62"/>
+          <p:cNvSpPr txBox="1"/>
+          <p:nvPr/>
+        </p:nvSpPr>
+        <p:spPr>
+          <a:xfrm>
+            <a:off x="7513899" y="5971032"/>
+            <a:ext cx="807720" cy="274320"/>
+          </a:xfrm>
+          <a:prstGeom prst="rect">
+            <a:avLst/>
+          </a:prstGeom>
+          <a:noFill/>
+        </p:spPr>
+        <p:txBody>
+          <a:bodyPr wrap="square" lIns="0" tIns="0" rIns="0" bIns="0" anchor="t">
+            <a:noAutofit/>
+          </a:bodyPr>
+          <a:lstStyle/>
+          <a:p>
+            <a:pPr algn="ctr"/>
+            <a:r>
+              <a:rPr sz="800" b="0" i="0">
+                <a:solidFill>
+                  <a:srgbClr val="140C12"/>
+                </a:solidFill>
+                <a:latin typeface="Aptos"/>
+              </a:rPr>
+              <a:t>Docker</a:t>
+            </a:r>
+          </a:p>
+        </p:txBody>
+      </p:sp>
+      <p:pic>
+        <p:nvPicPr>
+          <p:cNvPr id="64" name="Picture 63" descr="image22.png"/>
           <p:cNvPicPr>
             <a:picLocks noChangeAspect="1"/>
           </p:cNvPicPr>
@@ -16994,8 +17327,8 @@
         </p:blipFill>
         <p:spPr>
           <a:xfrm>
-            <a:off x="6966330" y="5513832"/>
-            <a:ext cx="408179" cy="420624"/>
+            <a:off x="8515167" y="5513832"/>
+            <a:ext cx="420624" cy="420624"/>
           </a:xfrm>
           <a:prstGeom prst="rect">
             <a:avLst/>
@@ -17004,13 +17337,13 @@
       </p:pic>
       <p:sp>
         <p:nvSpPr>
-          <p:cNvPr id="59" name="TextBox 58"/>
+          <p:cNvPr id="65" name="TextBox 64"/>
           <p:cNvSpPr txBox="1"/>
           <p:nvPr/>
         </p:nvSpPr>
         <p:spPr>
           <a:xfrm>
-            <a:off x="6766560" y="5971032"/>
+            <a:off x="8321619" y="5971032"/>
             <a:ext cx="807720" cy="274320"/>
           </a:xfrm>
           <a:prstGeom prst="rect">
@@ -17032,14 +17365,14 @@
                 </a:solidFill>
                 <a:latin typeface="Aptos"/>
               </a:rPr>
-              <a:t>PostgreSQL</a:t>
+              <a:t>Ollama</a:t>
             </a:r>
           </a:p>
         </p:txBody>
       </p:sp>
       <p:pic>
         <p:nvPicPr>
-          <p:cNvPr id="60" name="Picture 59" descr="badge_pg_7A5C2E.png"/>
+          <p:cNvPr id="66" name="Picture 65" descr="badge_G3_9B1C24.png"/>
           <p:cNvPicPr>
             <a:picLocks noChangeAspect="1"/>
           </p:cNvPicPr>
@@ -17053,7 +17386,7 @@
         </p:blipFill>
         <p:spPr>
           <a:xfrm>
-            <a:off x="7767827" y="5513832"/>
+            <a:off x="9322887" y="5513832"/>
             <a:ext cx="420624" cy="420624"/>
           </a:xfrm>
           <a:prstGeom prst="rect">
@@ -17063,13 +17396,13 @@
       </p:pic>
       <p:sp>
         <p:nvSpPr>
-          <p:cNvPr id="61" name="TextBox 60"/>
+          <p:cNvPr id="67" name="TextBox 66"/>
           <p:cNvSpPr txBox="1"/>
           <p:nvPr/>
         </p:nvSpPr>
         <p:spPr>
           <a:xfrm>
-            <a:off x="7574280" y="5971032"/>
+            <a:off x="9129339" y="5971032"/>
             <a:ext cx="807720" cy="274320"/>
           </a:xfrm>
           <a:prstGeom prst="rect">
@@ -17091,73 +17424,14 @@
                 </a:solidFill>
                 <a:latin typeface="Aptos"/>
               </a:rPr>
-              <a:t>pgvector</a:t>
+              <a:t>Gemma 3</a:t>
             </a:r>
           </a:p>
         </p:txBody>
       </p:sp>
       <p:pic>
         <p:nvPicPr>
-          <p:cNvPr id="62" name="Picture 61" descr="image21.png"/>
-          <p:cNvPicPr>
-            <a:picLocks noChangeAspect="1"/>
-          </p:cNvPicPr>
-          <p:nvPr/>
-        </p:nvPicPr>
-        <p:blipFill>
-          <a:blip r:embed="rId7"/>
-          <a:stretch>
-            <a:fillRect/>
-          </a:stretch>
-        </p:blipFill>
-        <p:spPr>
-          <a:xfrm>
-            <a:off x="8575547" y="5513832"/>
-            <a:ext cx="420624" cy="420624"/>
-          </a:xfrm>
-          <a:prstGeom prst="rect">
-            <a:avLst/>
-          </a:prstGeom>
-        </p:spPr>
-      </p:pic>
-      <p:sp>
-        <p:nvSpPr>
-          <p:cNvPr id="63" name="TextBox 62"/>
-          <p:cNvSpPr txBox="1"/>
-          <p:nvPr/>
-        </p:nvSpPr>
-        <p:spPr>
-          <a:xfrm>
-            <a:off x="8381999" y="5971032"/>
-            <a:ext cx="807720" cy="274320"/>
-          </a:xfrm>
-          <a:prstGeom prst="rect">
-            <a:avLst/>
-          </a:prstGeom>
-          <a:noFill/>
-        </p:spPr>
-        <p:txBody>
-          <a:bodyPr wrap="square" lIns="0" tIns="0" rIns="0" bIns="0" anchor="t">
-            <a:noAutofit/>
-          </a:bodyPr>
-          <a:lstStyle/>
-          <a:p>
-            <a:pPr algn="ctr"/>
-            <a:r>
-              <a:rPr sz="800" b="0" i="0">
-                <a:solidFill>
-                  <a:srgbClr val="140C12"/>
-                </a:solidFill>
-                <a:latin typeface="Aptos"/>
-              </a:rPr>
-              <a:t>Docker</a:t>
-            </a:r>
-          </a:p>
-        </p:txBody>
-      </p:sp>
-      <p:pic>
-        <p:nvPicPr>
-          <p:cNvPr id="64" name="Picture 63" descr="image22.png"/>
+          <p:cNvPr id="68" name="Picture 67" descr="badge_bge_B7791F.png"/>
           <p:cNvPicPr>
             <a:picLocks noChangeAspect="1"/>
           </p:cNvPicPr>
@@ -17171,7 +17445,7 @@
         </p:blipFill>
         <p:spPr>
           <a:xfrm>
-            <a:off x="9383267" y="5513832"/>
+            <a:off x="10130608" y="5513832"/>
             <a:ext cx="420624" cy="420624"/>
           </a:xfrm>
           <a:prstGeom prst="rect">
@@ -17181,13 +17455,13 @@
       </p:pic>
       <p:sp>
         <p:nvSpPr>
-          <p:cNvPr id="65" name="TextBox 64"/>
+          <p:cNvPr id="69" name="TextBox 68"/>
           <p:cNvSpPr txBox="1"/>
           <p:nvPr/>
         </p:nvSpPr>
         <p:spPr>
           <a:xfrm>
-            <a:off x="9189719" y="5971032"/>
+            <a:off x="9937060" y="5971032"/>
             <a:ext cx="807720" cy="274320"/>
           </a:xfrm>
           <a:prstGeom prst="rect">
@@ -17209,14 +17483,20 @@
                 </a:solidFill>
                 <a:latin typeface="Aptos"/>
               </a:rPr>
-              <a:t>Ollama</a:t>
+              <a:t>bge-m3</a:t>
             </a:r>
           </a:p>
         </p:txBody>
       </p:sp>
       <p:pic>
         <p:nvPicPr>
-          <p:cNvPr id="66" name="Picture 65" descr="badge_G3_9B1C24.png"/>
+          <p:cNvPr id="70" name="Picture 69">
+            <a:extLst>
+              <a:ext uri="{FF2B5EF4-FFF2-40B4-BE49-F238E27FC236}">
+                <a16:creationId xmlns:a16="http://schemas.microsoft.com/office/drawing/2014/main" id="{ADBC0B36-313D-D70C-5013-735DDB247E1E}"/>
+              </a:ext>
+            </a:extLst>
+          </p:cNvPr>
           <p:cNvPicPr>
             <a:picLocks noChangeAspect="1"/>
           </p:cNvPicPr>
@@ -17230,108 +17510,14 @@
         </p:blipFill>
         <p:spPr>
           <a:xfrm>
-            <a:off x="10190987" y="5513832"/>
-            <a:ext cx="420624" cy="420624"/>
+            <a:off x="3569208" y="5426963"/>
+            <a:ext cx="792480" cy="594360"/>
           </a:xfrm>
           <a:prstGeom prst="rect">
             <a:avLst/>
           </a:prstGeom>
         </p:spPr>
       </p:pic>
-      <p:sp>
-        <p:nvSpPr>
-          <p:cNvPr id="67" name="TextBox 66"/>
-          <p:cNvSpPr txBox="1"/>
-          <p:nvPr/>
-        </p:nvSpPr>
-        <p:spPr>
-          <a:xfrm>
-            <a:off x="9997439" y="5971032"/>
-            <a:ext cx="807720" cy="274320"/>
-          </a:xfrm>
-          <a:prstGeom prst="rect">
-            <a:avLst/>
-          </a:prstGeom>
-          <a:noFill/>
-        </p:spPr>
-        <p:txBody>
-          <a:bodyPr wrap="square" lIns="0" tIns="0" rIns="0" bIns="0" anchor="t">
-            <a:noAutofit/>
-          </a:bodyPr>
-          <a:lstStyle/>
-          <a:p>
-            <a:pPr algn="ctr"/>
-            <a:r>
-              <a:rPr sz="800" b="0" i="0">
-                <a:solidFill>
-                  <a:srgbClr val="140C12"/>
-                </a:solidFill>
-                <a:latin typeface="Aptos"/>
-              </a:rPr>
-              <a:t>Gemma 3</a:t>
-            </a:r>
-          </a:p>
-        </p:txBody>
-      </p:sp>
-      <p:pic>
-        <p:nvPicPr>
-          <p:cNvPr id="68" name="Picture 67" descr="badge_bge_B7791F.png"/>
-          <p:cNvPicPr>
-            <a:picLocks noChangeAspect="1"/>
-          </p:cNvPicPr>
-          <p:nvPr/>
-        </p:nvPicPr>
-        <p:blipFill>
-          <a:blip r:embed="rId20"/>
-          <a:stretch>
-            <a:fillRect/>
-          </a:stretch>
-        </p:blipFill>
-        <p:spPr>
-          <a:xfrm>
-            <a:off x="10998708" y="5513832"/>
-            <a:ext cx="420624" cy="420624"/>
-          </a:xfrm>
-          <a:prstGeom prst="rect">
-            <a:avLst/>
-          </a:prstGeom>
-        </p:spPr>
-      </p:pic>
-      <p:sp>
-        <p:nvSpPr>
-          <p:cNvPr id="69" name="TextBox 68"/>
-          <p:cNvSpPr txBox="1"/>
-          <p:nvPr/>
-        </p:nvSpPr>
-        <p:spPr>
-          <a:xfrm>
-            <a:off x="10805160" y="5971032"/>
-            <a:ext cx="807720" cy="274320"/>
-          </a:xfrm>
-          <a:prstGeom prst="rect">
-            <a:avLst/>
-          </a:prstGeom>
-          <a:noFill/>
-        </p:spPr>
-        <p:txBody>
-          <a:bodyPr wrap="square" lIns="0" tIns="0" rIns="0" bIns="0" anchor="t">
-            <a:noAutofit/>
-          </a:bodyPr>
-          <a:lstStyle/>
-          <a:p>
-            <a:pPr algn="ctr"/>
-            <a:r>
-              <a:rPr sz="800" b="0" i="0">
-                <a:solidFill>
-                  <a:srgbClr val="140C12"/>
-                </a:solidFill>
-                <a:latin typeface="Aptos"/>
-              </a:rPr>
-              <a:t>bge-m3</a:t>
-            </a:r>
-          </a:p>
-        </p:txBody>
-      </p:sp>
     </p:spTree>
   </p:cSld>
   <p:clrMapOvr>
@@ -17549,16 +17735,7 @@
                 </a:solidFill>
                 <a:latin typeface="Aptos"/>
               </a:rPr>
-              <a:t>ONE REAL COMPLAINT FROM THE TEST RUN  ·  </a:t>
-            </a:r>
-            <a:r>
-              <a:rPr sz="1050" b="1" i="0">
-                <a:solidFill>
-                  <a:srgbClr val="E0262D"/>
-                </a:solidFill>
-                <a:latin typeface="Aptos"/>
-              </a:rPr>
-              <a:t>Tanglish text + GPS in; Water Supply, Critical, human review out, with office, due time and Tamil emails</a:t>
+              <a:t>ONE REAL COMPLAINT FROM THE TEST RUN  ·  Tanglish text + GPS in; Water Supply, Critical, human review out, with office, due time and Tamil emails</a:t>
             </a:r>
           </a:p>
         </p:txBody>
@@ -17594,6 +17771,7 @@
           <a:lstStyle/>
           <a:p>
             <a:pPr algn="ctr"/>
+            <a:endParaRPr/>
           </a:p>
         </p:txBody>
       </p:sp>
@@ -17626,6 +17804,7 @@
           <a:lstStyle/>
           <a:p>
             <a:pPr algn="ctr"/>
+            <a:endParaRPr/>
           </a:p>
         </p:txBody>
       </p:sp>
@@ -17656,6 +17835,7 @@
           <a:lstStyle/>
           <a:p>
             <a:pPr algn="ctr"/>
+            <a:endParaRPr/>
           </a:p>
         </p:txBody>
       </p:sp>
@@ -17740,7 +17920,7 @@
           </a:bodyPr>
           <a:lstStyle/>
           <a:p>
-            <a:pPr algn="l" marL="146304" indent="-146304">
+            <a:pPr marL="146304" indent="-146304" algn="l">
               <a:spcAft>
                 <a:spcPts val="300"/>
               </a:spcAft>
@@ -17767,7 +17947,7 @@
             </a:r>
           </a:p>
           <a:p>
-            <a:pPr algn="l" marL="146304" indent="-146304">
+            <a:pPr marL="146304" indent="-146304" algn="l">
               <a:spcAft>
                 <a:spcPts val="300"/>
               </a:spcAft>
@@ -17794,7 +17974,7 @@
             </a:r>
           </a:p>
           <a:p>
-            <a:pPr algn="l" marL="146304" indent="-146304">
+            <a:pPr marL="146304" indent="-146304" algn="l">
               <a:spcAft>
                 <a:spcPts val="300"/>
               </a:spcAft>
@@ -17853,6 +18033,7 @@
           <a:lstStyle/>
           <a:p>
             <a:pPr algn="ctr"/>
+            <a:endParaRPr/>
           </a:p>
         </p:txBody>
       </p:sp>
@@ -17885,6 +18066,7 @@
           <a:lstStyle/>
           <a:p>
             <a:pPr algn="ctr"/>
+            <a:endParaRPr/>
           </a:p>
         </p:txBody>
       </p:sp>
@@ -17915,6 +18097,7 @@
           <a:lstStyle/>
           <a:p>
             <a:pPr algn="ctr"/>
+            <a:endParaRPr/>
           </a:p>
         </p:txBody>
       </p:sp>
@@ -17999,7 +18182,7 @@
           </a:bodyPr>
           <a:lstStyle/>
           <a:p>
-            <a:pPr algn="l" marL="146304" indent="-146304">
+            <a:pPr marL="146304" indent="-146304" algn="l">
               <a:spcAft>
                 <a:spcPts val="300"/>
               </a:spcAft>
@@ -18026,7 +18209,7 @@
             </a:r>
           </a:p>
           <a:p>
-            <a:pPr algn="l" marL="146304" indent="-146304">
+            <a:pPr marL="146304" indent="-146304" algn="l">
               <a:spcAft>
                 <a:spcPts val="300"/>
               </a:spcAft>
@@ -18053,7 +18236,7 @@
             </a:r>
           </a:p>
           <a:p>
-            <a:pPr algn="l" marL="146304" indent="-146304">
+            <a:pPr marL="146304" indent="-146304" algn="l">
               <a:spcAft>
                 <a:spcPts val="300"/>
               </a:spcAft>
@@ -18080,7 +18263,7 @@
             </a:r>
           </a:p>
           <a:p>
-            <a:pPr algn="l" marL="146304" indent="-146304">
+            <a:pPr marL="146304" indent="-146304" algn="l">
               <a:spcAft>
                 <a:spcPts val="300"/>
               </a:spcAft>
@@ -18139,6 +18322,7 @@
           <a:lstStyle/>
           <a:p>
             <a:pPr algn="ctr"/>
+            <a:endParaRPr/>
           </a:p>
         </p:txBody>
       </p:sp>
@@ -18171,6 +18355,7 @@
           <a:lstStyle/>
           <a:p>
             <a:pPr algn="ctr"/>
+            <a:endParaRPr/>
           </a:p>
         </p:txBody>
       </p:sp>
@@ -18201,6 +18386,7 @@
           <a:lstStyle/>
           <a:p>
             <a:pPr algn="ctr"/>
+            <a:endParaRPr/>
           </a:p>
         </p:txBody>
       </p:sp>
@@ -18285,7 +18471,7 @@
           </a:bodyPr>
           <a:lstStyle/>
           <a:p>
-            <a:pPr algn="l" marL="146304" indent="-146304">
+            <a:pPr marL="146304" indent="-146304" algn="l">
               <a:spcAft>
                 <a:spcPts val="300"/>
               </a:spcAft>
@@ -18312,7 +18498,7 @@
             </a:r>
           </a:p>
           <a:p>
-            <a:pPr algn="l" marL="146304" indent="-146304">
+            <a:pPr marL="146304" indent="-146304" algn="l">
               <a:spcAft>
                 <a:spcPts val="300"/>
               </a:spcAft>
@@ -18339,7 +18525,7 @@
             </a:r>
           </a:p>
           <a:p>
-            <a:pPr algn="l" marL="146304" indent="-146304">
+            <a:pPr marL="146304" indent="-146304" algn="l">
               <a:spcAft>
                 <a:spcPts val="300"/>
               </a:spcAft>
@@ -18366,7 +18552,7 @@
             </a:r>
           </a:p>
           <a:p>
-            <a:pPr algn="l" marL="146304" indent="-146304">
+            <a:pPr marL="146304" indent="-146304" algn="l">
               <a:spcAft>
                 <a:spcPts val="300"/>
               </a:spcAft>
@@ -18469,6 +18655,7 @@
           <a:lstStyle/>
           <a:p>
             <a:pPr algn="ctr"/>
+            <a:endParaRPr/>
           </a:p>
         </p:txBody>
       </p:sp>
@@ -18499,6 +18686,7 @@
           <a:lstStyle/>
           <a:p>
             <a:pPr algn="ctr"/>
+            <a:endParaRPr/>
           </a:p>
         </p:txBody>
       </p:sp>
@@ -18612,6 +18800,7 @@
           <a:lstStyle/>
           <a:p>
             <a:pPr algn="ctr"/>
+            <a:endParaRPr/>
           </a:p>
         </p:txBody>
       </p:sp>
@@ -18642,6 +18831,7 @@
           <a:lstStyle/>
           <a:p>
             <a:pPr algn="ctr"/>
+            <a:endParaRPr/>
           </a:p>
         </p:txBody>
       </p:sp>
@@ -18755,6 +18945,7 @@
           <a:lstStyle/>
           <a:p>
             <a:pPr algn="ctr"/>
+            <a:endParaRPr/>
           </a:p>
         </p:txBody>
       </p:sp>
@@ -18785,6 +18976,7 @@
           <a:lstStyle/>
           <a:p>
             <a:pPr algn="ctr"/>
+            <a:endParaRPr/>
           </a:p>
         </p:txBody>
       </p:sp>
@@ -18931,6 +19123,7 @@
           <a:lstStyle/>
           <a:p>
             <a:pPr algn="ctr"/>
+            <a:endParaRPr/>
           </a:p>
         </p:txBody>
       </p:sp>
@@ -18998,6 +19191,7 @@
           <a:lstStyle/>
           <a:p>
             <a:pPr algn="ctr"/>
+            <a:endParaRPr/>
           </a:p>
         </p:txBody>
       </p:sp>
@@ -19065,6 +19259,7 @@
           <a:lstStyle/>
           <a:p>
             <a:pPr algn="ctr"/>
+            <a:endParaRPr/>
           </a:p>
         </p:txBody>
       </p:sp>
@@ -19132,6 +19327,7 @@
           <a:lstStyle/>
           <a:p>
             <a:pPr algn="ctr"/>
+            <a:endParaRPr/>
           </a:p>
         </p:txBody>
       </p:sp>
@@ -19189,16 +19385,7 @@
                 </a:solidFill>
                 <a:latin typeface="Aptos"/>
               </a:rPr>
-              <a:t>GitHub  ·  </a:t>
-            </a:r>
-            <a:r>
-              <a:rPr sz="750" b="1" i="0">
-                <a:solidFill>
-                  <a:srgbClr val="FFFFFF"/>
-                </a:solidFill>
-                <a:latin typeface="Aptos"/>
-              </a:rPr>
-              <a:t>github.com/Balavigneshcse/AI_Grievance_Redressal_Prioritization_System</a:t>
+              <a:t>GitHub  ·  github.com/Balavigneshcse/AI_Grievance_Redressal_Prioritization_System</a:t>
             </a:r>
           </a:p>
         </p:txBody>
@@ -19419,6 +19606,7 @@
           <a:lstStyle/>
           <a:p>
             <a:pPr algn="ctr"/>
+            <a:endParaRPr/>
           </a:p>
         </p:txBody>
       </p:sp>
@@ -19522,6 +19710,7 @@
           <a:lstStyle/>
           <a:p>
             <a:pPr algn="ctr"/>
+            <a:endParaRPr/>
           </a:p>
         </p:txBody>
       </p:sp>
@@ -19552,6 +19741,7 @@
           <a:lstStyle/>
           <a:p>
             <a:pPr algn="ctr"/>
+            <a:endParaRPr/>
           </a:p>
         </p:txBody>
       </p:sp>
@@ -19678,6 +19868,7 @@
           <a:lstStyle/>
           <a:p>
             <a:pPr algn="ctr"/>
+            <a:endParaRPr/>
           </a:p>
         </p:txBody>
       </p:sp>
@@ -19708,6 +19899,7 @@
           <a:lstStyle/>
           <a:p>
             <a:pPr algn="ctr"/>
+            <a:endParaRPr/>
           </a:p>
         </p:txBody>
       </p:sp>
@@ -19834,6 +20026,7 @@
           <a:lstStyle/>
           <a:p>
             <a:pPr algn="ctr"/>
+            <a:endParaRPr/>
           </a:p>
         </p:txBody>
       </p:sp>
@@ -19864,6 +20057,7 @@
           <a:lstStyle/>
           <a:p>
             <a:pPr algn="ctr"/>
+            <a:endParaRPr/>
           </a:p>
         </p:txBody>
       </p:sp>
@@ -19990,6 +20184,7 @@
           <a:lstStyle/>
           <a:p>
             <a:pPr algn="ctr"/>
+            <a:endParaRPr/>
           </a:p>
         </p:txBody>
       </p:sp>
@@ -20020,6 +20215,7 @@
           <a:lstStyle/>
           <a:p>
             <a:pPr algn="ctr"/>
+            <a:endParaRPr/>
           </a:p>
         </p:txBody>
       </p:sp>
@@ -20146,6 +20342,7 @@
           <a:lstStyle/>
           <a:p>
             <a:pPr algn="ctr"/>
+            <a:endParaRPr/>
           </a:p>
         </p:txBody>
       </p:sp>
@@ -20176,6 +20373,7 @@
           <a:lstStyle/>
           <a:p>
             <a:pPr algn="ctr"/>
+            <a:endParaRPr/>
           </a:p>
         </p:txBody>
       </p:sp>
@@ -20302,6 +20500,7 @@
           <a:lstStyle/>
           <a:p>
             <a:pPr algn="ctr"/>
+            <a:endParaRPr/>
           </a:p>
         </p:txBody>
       </p:sp>
@@ -20371,6 +20570,7 @@
           <a:lstStyle/>
           <a:p>
             <a:pPr algn="ctr"/>
+            <a:endParaRPr/>
           </a:p>
         </p:txBody>
       </p:sp>
@@ -20403,6 +20603,7 @@
           <a:lstStyle/>
           <a:p>
             <a:pPr algn="ctr"/>
+            <a:endParaRPr/>
           </a:p>
         </p:txBody>
       </p:sp>
@@ -20508,6 +20709,7 @@
           <a:lstStyle/>
           <a:p>
             <a:pPr algn="ctr"/>
+            <a:endParaRPr/>
           </a:p>
         </p:txBody>
       </p:sp>
@@ -20540,6 +20742,7 @@
           <a:lstStyle/>
           <a:p>
             <a:pPr algn="ctr"/>
+            <a:endParaRPr/>
           </a:p>
         </p:txBody>
       </p:sp>
@@ -20645,6 +20848,7 @@
           <a:lstStyle/>
           <a:p>
             <a:pPr algn="ctr"/>
+            <a:endParaRPr/>
           </a:p>
         </p:txBody>
       </p:sp>
@@ -20677,6 +20881,7 @@
           <a:lstStyle/>
           <a:p>
             <a:pPr algn="ctr"/>
+            <a:endParaRPr/>
           </a:p>
         </p:txBody>
       </p:sp>
@@ -20782,6 +20987,7 @@
           <a:lstStyle/>
           <a:p>
             <a:pPr algn="ctr"/>
+            <a:endParaRPr/>
           </a:p>
         </p:txBody>
       </p:sp>
@@ -20814,6 +21020,7 @@
           <a:lstStyle/>
           <a:p>
             <a:pPr algn="ctr"/>
+            <a:endParaRPr/>
           </a:p>
         </p:txBody>
       </p:sp>
@@ -20917,6 +21124,7 @@
           <a:lstStyle/>
           <a:p>
             <a:pPr algn="ctr"/>
+            <a:endParaRPr/>
           </a:p>
         </p:txBody>
       </p:sp>
@@ -20982,6 +21190,7 @@
           <a:lstStyle/>
           <a:p>
             <a:pPr algn="ctr"/>
+            <a:endParaRPr/>
           </a:p>
         </p:txBody>
       </p:sp>
@@ -21012,6 +21221,7 @@
           <a:lstStyle/>
           <a:p>
             <a:pPr algn="ctr"/>
+            <a:endParaRPr/>
           </a:p>
         </p:txBody>
       </p:sp>
@@ -21042,6 +21252,7 @@
           <a:lstStyle/>
           <a:p>
             <a:pPr algn="ctr"/>
+            <a:endParaRPr/>
           </a:p>
         </p:txBody>
       </p:sp>
@@ -21068,15 +21279,7 @@
           <a:lstStyle/>
           <a:p>
             <a:pPr algn="ctr"/>
-            <a:r>
-              <a:rPr sz="850" b="1" i="0">
-                <a:solidFill>
-                  <a:srgbClr val="FFFFFF"/>
-                </a:solidFill>
-                <a:latin typeface="Aptos"/>
-              </a:rPr>
-              <a:t/>
-            </a:r>
+            <a:endParaRPr/>
           </a:p>
         </p:txBody>
       </p:sp>
@@ -21601,6 +21804,7 @@
           <a:lstStyle/>
           <a:p>
             <a:pPr algn="ctr"/>
+            <a:endParaRPr/>
           </a:p>
         </p:txBody>
       </p:sp>
@@ -21633,6 +21837,7 @@
           <a:lstStyle/>
           <a:p>
             <a:pPr algn="ctr"/>
+            <a:endParaRPr/>
           </a:p>
         </p:txBody>
       </p:sp>
@@ -21663,6 +21868,7 @@
           <a:lstStyle/>
           <a:p>
             <a:pPr algn="ctr"/>
+            <a:endParaRPr/>
           </a:p>
         </p:txBody>
       </p:sp>
@@ -21723,7 +21929,7 @@
           </a:bodyPr>
           <a:lstStyle/>
           <a:p>
-            <a:pPr algn="l" marL="146304" indent="-146304">
+            <a:pPr marL="146304" indent="-146304" algn="l">
               <a:spcAft>
                 <a:spcPts val="300"/>
               </a:spcAft>
@@ -21750,7 +21956,7 @@
             </a:r>
           </a:p>
           <a:p>
-            <a:pPr algn="l" marL="146304" indent="-146304">
+            <a:pPr marL="146304" indent="-146304" algn="l">
               <a:spcAft>
                 <a:spcPts val="300"/>
               </a:spcAft>
@@ -21777,7 +21983,7 @@
             </a:r>
           </a:p>
           <a:p>
-            <a:pPr algn="l" marL="146304" indent="-146304">
+            <a:pPr marL="146304" indent="-146304" algn="l">
               <a:spcAft>
                 <a:spcPts val="300"/>
               </a:spcAft>
@@ -21804,7 +22010,7 @@
             </a:r>
           </a:p>
           <a:p>
-            <a:pPr algn="l" marL="146304" indent="-146304">
+            <a:pPr marL="146304" indent="-146304" algn="l">
               <a:spcAft>
                 <a:spcPts val="300"/>
               </a:spcAft>
@@ -21863,6 +22069,7 @@
           <a:lstStyle/>
           <a:p>
             <a:pPr algn="ctr"/>
+            <a:endParaRPr/>
           </a:p>
         </p:txBody>
       </p:sp>
@@ -21895,6 +22102,7 @@
           <a:lstStyle/>
           <a:p>
             <a:pPr algn="ctr"/>
+            <a:endParaRPr/>
           </a:p>
         </p:txBody>
       </p:sp>
@@ -21925,6 +22133,7 @@
           <a:lstStyle/>
           <a:p>
             <a:pPr algn="ctr"/>
+            <a:endParaRPr/>
           </a:p>
         </p:txBody>
       </p:sp>
@@ -21985,7 +22194,7 @@
           </a:bodyPr>
           <a:lstStyle/>
           <a:p>
-            <a:pPr algn="l" marL="146304" indent="-146304">
+            <a:pPr marL="146304" indent="-146304" algn="l">
               <a:spcAft>
                 <a:spcPts val="300"/>
               </a:spcAft>
@@ -22012,7 +22221,7 @@
             </a:r>
           </a:p>
           <a:p>
-            <a:pPr algn="l" marL="146304" indent="-146304">
+            <a:pPr marL="146304" indent="-146304" algn="l">
               <a:spcAft>
                 <a:spcPts val="300"/>
               </a:spcAft>
@@ -22039,7 +22248,7 @@
             </a:r>
           </a:p>
           <a:p>
-            <a:pPr algn="l" marL="146304" indent="-146304">
+            <a:pPr marL="146304" indent="-146304" algn="l">
               <a:spcAft>
                 <a:spcPts val="300"/>
               </a:spcAft>
@@ -22066,7 +22275,7 @@
             </a:r>
           </a:p>
           <a:p>
-            <a:pPr algn="l" marL="146304" indent="-146304">
+            <a:pPr marL="146304" indent="-146304" algn="l">
               <a:spcAft>
                 <a:spcPts val="300"/>
               </a:spcAft>
@@ -22125,6 +22334,7 @@
           <a:lstStyle/>
           <a:p>
             <a:pPr algn="ctr"/>
+            <a:endParaRPr/>
           </a:p>
         </p:txBody>
       </p:sp>
@@ -22157,6 +22367,7 @@
           <a:lstStyle/>
           <a:p>
             <a:pPr algn="ctr"/>
+            <a:endParaRPr/>
           </a:p>
         </p:txBody>
       </p:sp>
@@ -22187,6 +22398,7 @@
           <a:lstStyle/>
           <a:p>
             <a:pPr algn="ctr"/>
+            <a:endParaRPr/>
           </a:p>
         </p:txBody>
       </p:sp>
@@ -22247,7 +22459,7 @@
           </a:bodyPr>
           <a:lstStyle/>
           <a:p>
-            <a:pPr algn="l" marL="146304" indent="-146304">
+            <a:pPr marL="146304" indent="-146304" algn="l">
               <a:spcAft>
                 <a:spcPts val="300"/>
               </a:spcAft>
@@ -22274,7 +22486,7 @@
             </a:r>
           </a:p>
           <a:p>
-            <a:pPr algn="l" marL="146304" indent="-146304">
+            <a:pPr marL="146304" indent="-146304" algn="l">
               <a:spcAft>
                 <a:spcPts val="300"/>
               </a:spcAft>
@@ -22301,7 +22513,7 @@
             </a:r>
           </a:p>
           <a:p>
-            <a:pPr algn="l" marL="146304" indent="-146304">
+            <a:pPr marL="146304" indent="-146304" algn="l">
               <a:spcAft>
                 <a:spcPts val="300"/>
               </a:spcAft>
@@ -22328,7 +22540,7 @@
             </a:r>
           </a:p>
           <a:p>
-            <a:pPr algn="l" marL="146304" indent="-146304">
+            <a:pPr marL="146304" indent="-146304" algn="l">
               <a:spcAft>
                 <a:spcPts val="300"/>
               </a:spcAft>
